--- a/slides/4_stability.pptx
+++ b/slides/4_stability.pptx
@@ -5,7 +5,7 @@
     <p:sldMasterId id="2147483648" r:id="rId1"/>
   </p:sldMasterIdLst>
   <p:notesMasterIdLst>
-    <p:notesMasterId r:id="rId25"/>
+    <p:notesMasterId r:id="rId26"/>
   </p:notesMasterIdLst>
   <p:sldIdLst>
     <p:sldId id="256" r:id="rId2"/>
@@ -14,23 +14,24 @@
     <p:sldId id="267" r:id="rId5"/>
     <p:sldId id="293" r:id="rId6"/>
     <p:sldId id="295" r:id="rId7"/>
-    <p:sldId id="272" r:id="rId8"/>
-    <p:sldId id="296" r:id="rId9"/>
-    <p:sldId id="294" r:id="rId10"/>
-    <p:sldId id="297" r:id="rId11"/>
-    <p:sldId id="299" r:id="rId12"/>
-    <p:sldId id="298" r:id="rId13"/>
-    <p:sldId id="271" r:id="rId14"/>
-    <p:sldId id="270" r:id="rId15"/>
-    <p:sldId id="300" r:id="rId16"/>
-    <p:sldId id="273" r:id="rId17"/>
-    <p:sldId id="301" r:id="rId18"/>
-    <p:sldId id="274" r:id="rId19"/>
-    <p:sldId id="304" r:id="rId20"/>
-    <p:sldId id="302" r:id="rId21"/>
-    <p:sldId id="275" r:id="rId22"/>
-    <p:sldId id="303" r:id="rId23"/>
-    <p:sldId id="305" r:id="rId24"/>
+    <p:sldId id="306" r:id="rId8"/>
+    <p:sldId id="272" r:id="rId9"/>
+    <p:sldId id="296" r:id="rId10"/>
+    <p:sldId id="294" r:id="rId11"/>
+    <p:sldId id="297" r:id="rId12"/>
+    <p:sldId id="299" r:id="rId13"/>
+    <p:sldId id="298" r:id="rId14"/>
+    <p:sldId id="271" r:id="rId15"/>
+    <p:sldId id="270" r:id="rId16"/>
+    <p:sldId id="300" r:id="rId17"/>
+    <p:sldId id="273" r:id="rId18"/>
+    <p:sldId id="301" r:id="rId19"/>
+    <p:sldId id="274" r:id="rId20"/>
+    <p:sldId id="304" r:id="rId21"/>
+    <p:sldId id="302" r:id="rId22"/>
+    <p:sldId id="275" r:id="rId23"/>
+    <p:sldId id="303" r:id="rId24"/>
+    <p:sldId id="305" r:id="rId25"/>
   </p:sldIdLst>
   <p:sldSz cx="12192000" cy="6858000"/>
   <p:notesSz cx="6858000" cy="9144000"/>
@@ -501,7 +502,7 @@
           <a:p>
             <a:fld id="{506E0FD1-891F-4B1E-916D-E9B585160BB8}" type="datetimeFigureOut">
               <a:rPr lang="en-GB" smtClean="0"/>
-              <a:t>21/02/2026</a:t>
+              <a:t>11/03/2026</a:t>
             </a:fld>
             <a:endParaRPr lang="en-GB"/>
           </a:p>
@@ -918,7 +919,7 @@
           <a:p>
             <a:fld id="{D68C3F22-27B2-44E3-9C5F-D08126455F6F}" type="datetime1">
               <a:rPr lang="en-GB" smtClean="0"/>
-              <a:t>21/02/2026</a:t>
+              <a:t>11/03/2026</a:t>
             </a:fld>
             <a:endParaRPr lang="en-GB"/>
           </a:p>
@@ -1118,7 +1119,7 @@
           <a:p>
             <a:fld id="{1CD03846-7BF6-4FB6-A921-FF3379ADBD4C}" type="datetime1">
               <a:rPr lang="en-GB" smtClean="0"/>
-              <a:t>21/02/2026</a:t>
+              <a:t>11/03/2026</a:t>
             </a:fld>
             <a:endParaRPr lang="en-GB"/>
           </a:p>
@@ -1328,7 +1329,7 @@
           <a:p>
             <a:fld id="{99E1B91A-3FD0-4144-9C84-63E9688ED2FE}" type="datetime1">
               <a:rPr lang="en-GB" smtClean="0"/>
-              <a:t>21/02/2026</a:t>
+              <a:t>11/03/2026</a:t>
             </a:fld>
             <a:endParaRPr lang="en-GB"/>
           </a:p>
@@ -1528,7 +1529,7 @@
           <a:p>
             <a:fld id="{5295ED7B-FEAD-4734-819F-93EF4B0EA908}" type="datetime1">
               <a:rPr lang="en-GB" smtClean="0"/>
-              <a:t>21/02/2026</a:t>
+              <a:t>11/03/2026</a:t>
             </a:fld>
             <a:endParaRPr lang="en-GB"/>
           </a:p>
@@ -1804,7 +1805,7 @@
           <a:p>
             <a:fld id="{D2D5D4B4-C926-4B45-8815-1ED8911179A2}" type="datetime1">
               <a:rPr lang="en-GB" smtClean="0"/>
-              <a:t>21/02/2026</a:t>
+              <a:t>11/03/2026</a:t>
             </a:fld>
             <a:endParaRPr lang="en-GB"/>
           </a:p>
@@ -2072,7 +2073,7 @@
           <a:p>
             <a:fld id="{B4C5210A-0E37-4935-93AF-69F21A5F712F}" type="datetime1">
               <a:rPr lang="en-GB" smtClean="0"/>
-              <a:t>21/02/2026</a:t>
+              <a:t>11/03/2026</a:t>
             </a:fld>
             <a:endParaRPr lang="en-GB"/>
           </a:p>
@@ -2487,7 +2488,7 @@
           <a:p>
             <a:fld id="{3D3A6B2F-436C-4691-80E8-9C890E000E9D}" type="datetime1">
               <a:rPr lang="en-GB" smtClean="0"/>
-              <a:t>21/02/2026</a:t>
+              <a:t>11/03/2026</a:t>
             </a:fld>
             <a:endParaRPr lang="en-GB"/>
           </a:p>
@@ -2629,7 +2630,7 @@
           <a:p>
             <a:fld id="{84385F4C-D74B-496F-8D21-97E3549C783B}" type="datetime1">
               <a:rPr lang="en-GB" smtClean="0"/>
-              <a:t>21/02/2026</a:t>
+              <a:t>11/03/2026</a:t>
             </a:fld>
             <a:endParaRPr lang="en-GB"/>
           </a:p>
@@ -2742,7 +2743,7 @@
           <a:p>
             <a:fld id="{0CBDCB32-C241-4703-A832-4EB47BD54E83}" type="datetime1">
               <a:rPr lang="en-GB" smtClean="0"/>
-              <a:t>21/02/2026</a:t>
+              <a:t>11/03/2026</a:t>
             </a:fld>
             <a:endParaRPr lang="en-GB"/>
           </a:p>
@@ -3055,7 +3056,7 @@
           <a:p>
             <a:fld id="{85C150FF-BE95-4D25-A16A-E368A81CBF24}" type="datetime1">
               <a:rPr lang="en-GB" smtClean="0"/>
-              <a:t>21/02/2026</a:t>
+              <a:t>11/03/2026</a:t>
             </a:fld>
             <a:endParaRPr lang="en-GB"/>
           </a:p>
@@ -3344,7 +3345,7 @@
           <a:p>
             <a:fld id="{F3C5DB4B-B349-43C9-A424-BADA723AD9F1}" type="datetime1">
               <a:rPr lang="en-GB" smtClean="0"/>
-              <a:t>21/02/2026</a:t>
+              <a:t>11/03/2026</a:t>
             </a:fld>
             <a:endParaRPr lang="en-GB"/>
           </a:p>
@@ -3587,7 +3588,7 @@
           <a:p>
             <a:fld id="{12632426-0A0C-405F-A3D0-2D11AA44702A}" type="datetime1">
               <a:rPr lang="en-GB" smtClean="0"/>
-              <a:t>21/02/2026</a:t>
+              <a:t>11/03/2026</a:t>
             </a:fld>
             <a:endParaRPr lang="en-GB"/>
           </a:p>
@@ -4100,6 +4101,1089 @@
       </p:grpSpPr>
       <p:sp>
         <p:nvSpPr>
+          <p:cNvPr id="2" name="Titel 1">
+            <a:extLst>
+              <a:ext uri="{FF2B5EF4-FFF2-40B4-BE49-F238E27FC236}">
+                <a16:creationId xmlns:a16="http://schemas.microsoft.com/office/drawing/2014/main" id="{FA400246-61A5-767F-909C-8A5B4C446DD2}"/>
+              </a:ext>
+            </a:extLst>
+          </p:cNvPr>
+          <p:cNvSpPr>
+            <a:spLocks noGrp="1"/>
+          </p:cNvSpPr>
+          <p:nvPr>
+            <p:ph type="title"/>
+          </p:nvPr>
+        </p:nvSpPr>
+        <p:spPr/>
+        <p:txBody>
+          <a:bodyPr/>
+          <a:lstStyle/>
+          <a:p>
+            <a:r>
+              <a:rPr lang="de-DE" dirty="0"/>
+              <a:t>Interpretation </a:t>
+            </a:r>
+            <a:r>
+              <a:rPr lang="de-DE" dirty="0" err="1"/>
+              <a:t>of</a:t>
+            </a:r>
+            <a:r>
+              <a:rPr lang="de-DE" dirty="0"/>
+              <a:t> Zeros</a:t>
+            </a:r>
+          </a:p>
+        </p:txBody>
+      </p:sp>
+      <mc:AlternateContent xmlns:mc="http://schemas.openxmlformats.org/markup-compatibility/2006" xmlns:a14="http://schemas.microsoft.com/office/drawing/2010/main">
+        <mc:Choice Requires="a14">
+          <p:sp>
+            <p:nvSpPr>
+              <p:cNvPr id="3" name="Inhaltsplatzhalter 2">
+                <a:extLst>
+                  <a:ext uri="{FF2B5EF4-FFF2-40B4-BE49-F238E27FC236}">
+                    <a16:creationId xmlns:a16="http://schemas.microsoft.com/office/drawing/2014/main" id="{FDEECDF6-3FEB-A177-D7A8-7BB02317806C}"/>
+                  </a:ext>
+                </a:extLst>
+              </p:cNvPr>
+              <p:cNvSpPr>
+                <a:spLocks noGrp="1"/>
+              </p:cNvSpPr>
+              <p:nvPr>
+                <p:ph idx="1"/>
+              </p:nvPr>
+            </p:nvSpPr>
+            <p:spPr/>
+            <p:txBody>
+              <a:bodyPr>
+                <a:normAutofit fontScale="85000" lnSpcReduction="20000"/>
+              </a:bodyPr>
+              <a:lstStyle/>
+              <a:p>
+                <a:pPr marL="0" indent="0">
+                  <a:buNone/>
+                </a:pPr>
+                <a:r>
+                  <a:rPr lang="de-DE" dirty="0"/>
+                  <a:t>Zeros </a:t>
+                </a:r>
+                <a:r>
+                  <a:rPr lang="de-DE" dirty="0" err="1"/>
+                  <a:t>correspond</a:t>
+                </a:r>
+                <a:r>
+                  <a:rPr lang="de-DE" dirty="0"/>
+                  <a:t> </a:t>
+                </a:r>
+                <a:r>
+                  <a:rPr lang="de-DE" dirty="0" err="1"/>
+                  <a:t>to</a:t>
+                </a:r>
+                <a:r>
+                  <a:rPr lang="de-DE" dirty="0"/>
+                  <a:t> </a:t>
+                </a:r>
+                <a:r>
+                  <a:rPr lang="de-DE" dirty="0" err="1"/>
+                  <a:t>multiplications</a:t>
+                </a:r>
+                <a:r>
+                  <a:rPr lang="de-DE" dirty="0"/>
+                  <a:t> </a:t>
+                </a:r>
+                <a:r>
+                  <a:rPr lang="de-DE" dirty="0" err="1"/>
+                  <a:t>with</a:t>
+                </a:r>
+                <a:r>
+                  <a:rPr lang="de-DE" dirty="0"/>
+                  <a:t> </a:t>
+                </a:r>
+                <a14:m>
+                  <m:oMath xmlns:m="http://schemas.openxmlformats.org/officeDocument/2006/math">
+                    <m:r>
+                      <a:rPr lang="de-DE" i="1">
+                        <a:latin typeface="Cambria Math" panose="02040503050406030204" pitchFamily="18" charset="0"/>
+                      </a:rPr>
+                      <m:t>𝑠</m:t>
+                    </m:r>
+                  </m:oMath>
+                </a14:m>
+                <a:r>
+                  <a:rPr lang="de-DE" dirty="0">
+                    <a:sym typeface="Wingdings" pitchFamily="2" charset="2"/>
+                  </a:rPr>
+                  <a:t> </a:t>
+                </a:r>
+                <a:r>
+                  <a:rPr lang="de-DE" dirty="0"/>
+                  <a:t> derivatives </a:t>
+                </a:r>
+                <a:r>
+                  <a:rPr lang="de-DE" dirty="0" err="1"/>
+                  <a:t>of</a:t>
+                </a:r>
+                <a:r>
+                  <a:rPr lang="de-DE" dirty="0"/>
+                  <a:t> </a:t>
+                </a:r>
+                <a:r>
+                  <a:rPr lang="de-DE" dirty="0" err="1"/>
+                  <a:t>the</a:t>
+                </a:r>
+                <a:r>
+                  <a:rPr lang="de-DE" dirty="0"/>
+                  <a:t> </a:t>
+                </a:r>
+                <a:r>
+                  <a:rPr lang="de-DE" dirty="0" err="1"/>
+                  <a:t>input</a:t>
+                </a:r>
+                <a:endParaRPr lang="de-DE" dirty="0"/>
+              </a:p>
+              <a:p>
+                <a:r>
+                  <a:rPr lang="de-DE" dirty="0" err="1"/>
+                  <a:t>Describe</a:t>
+                </a:r>
+                <a:r>
+                  <a:rPr lang="de-DE" dirty="0"/>
+                  <a:t> </a:t>
+                </a:r>
+                <a:r>
+                  <a:rPr lang="de-DE" dirty="0" err="1"/>
+                  <a:t>how</a:t>
+                </a:r>
+                <a:r>
+                  <a:rPr lang="de-DE" dirty="0"/>
+                  <a:t> </a:t>
+                </a:r>
+                <a:r>
+                  <a:rPr lang="de-DE" dirty="0" err="1"/>
+                  <a:t>the</a:t>
+                </a:r>
+                <a:r>
+                  <a:rPr lang="de-DE" dirty="0"/>
+                  <a:t> </a:t>
+                </a:r>
+                <a:r>
+                  <a:rPr lang="de-DE" dirty="0" err="1"/>
+                  <a:t>input</a:t>
+                </a:r>
+                <a:r>
+                  <a:rPr lang="de-DE" dirty="0"/>
+                  <a:t> </a:t>
+                </a:r>
+                <a:r>
+                  <a:rPr lang="de-DE" dirty="0" err="1"/>
+                  <a:t>excites</a:t>
+                </a:r>
+                <a:r>
+                  <a:rPr lang="de-DE" dirty="0"/>
+                  <a:t> </a:t>
+                </a:r>
+                <a:r>
+                  <a:rPr lang="de-DE" dirty="0" err="1"/>
+                  <a:t>the</a:t>
+                </a:r>
+                <a:r>
+                  <a:rPr lang="de-DE" dirty="0"/>
+                  <a:t> </a:t>
+                </a:r>
+                <a:r>
+                  <a:rPr lang="de-DE" dirty="0" err="1"/>
+                  <a:t>natural</a:t>
+                </a:r>
+                <a:r>
+                  <a:rPr lang="de-DE" dirty="0"/>
+                  <a:t> </a:t>
+                </a:r>
+                <a:r>
+                  <a:rPr lang="de-DE" dirty="0" err="1"/>
+                  <a:t>modes</a:t>
+                </a:r>
+                <a:r>
+                  <a:rPr lang="de-DE" dirty="0"/>
+                  <a:t> (</a:t>
+                </a:r>
+                <a:r>
+                  <a:rPr lang="de-DE" dirty="0" err="1"/>
+                  <a:t>described</a:t>
+                </a:r>
+                <a:r>
+                  <a:rPr lang="de-DE" dirty="0"/>
+                  <a:t> </a:t>
+                </a:r>
+                <a:r>
+                  <a:rPr lang="de-DE" dirty="0" err="1"/>
+                  <a:t>by</a:t>
+                </a:r>
+                <a:r>
+                  <a:rPr lang="de-DE" dirty="0"/>
+                  <a:t> </a:t>
+                </a:r>
+                <a:r>
+                  <a:rPr lang="de-DE" dirty="0" err="1"/>
+                  <a:t>the</a:t>
+                </a:r>
+                <a:r>
+                  <a:rPr lang="de-DE" dirty="0"/>
+                  <a:t> </a:t>
+                </a:r>
+                <a:r>
+                  <a:rPr lang="de-DE" dirty="0" err="1"/>
+                  <a:t>poles</a:t>
+                </a:r>
+                <a:r>
+                  <a:rPr lang="de-DE" dirty="0"/>
+                  <a:t>)</a:t>
+                </a:r>
+              </a:p>
+              <a:p>
+                <a:r>
+                  <a:rPr lang="de-DE" dirty="0" err="1"/>
+                  <a:t>Creates</a:t>
+                </a:r>
+                <a:r>
+                  <a:rPr lang="de-DE" dirty="0"/>
+                  <a:t> </a:t>
+                </a:r>
+                <a:r>
+                  <a:rPr lang="de-DE" dirty="0" err="1"/>
+                  <a:t>impulse</a:t>
+                </a:r>
+                <a:r>
+                  <a:rPr lang="de-DE" dirty="0"/>
+                  <a:t>-like </a:t>
+                </a:r>
+                <a:r>
+                  <a:rPr lang="de-DE" dirty="0" err="1"/>
+                  <a:t>behavior</a:t>
+                </a:r>
+                <a:r>
+                  <a:rPr lang="de-DE" dirty="0"/>
+                  <a:t> </a:t>
+                </a:r>
+                <a:r>
+                  <a:rPr lang="de-DE" dirty="0" err="1"/>
+                  <a:t>from</a:t>
+                </a:r>
+                <a:r>
+                  <a:rPr lang="de-DE" dirty="0"/>
+                  <a:t> </a:t>
+                </a:r>
+                <a:r>
+                  <a:rPr lang="de-DE" dirty="0" err="1"/>
+                  <a:t>step</a:t>
+                </a:r>
+                <a:r>
+                  <a:rPr lang="de-DE" dirty="0"/>
+                  <a:t> (</a:t>
+                </a:r>
+                <a14:m>
+                  <m:oMath xmlns:m="http://schemas.openxmlformats.org/officeDocument/2006/math">
+                    <m:f>
+                      <m:fPr>
+                        <m:type m:val="lin"/>
+                        <m:ctrlPr>
+                          <a:rPr lang="de-DE" i="1" smtClean="0">
+                            <a:latin typeface="Cambria Math" panose="02040503050406030204" pitchFamily="18" charset="0"/>
+                          </a:rPr>
+                        </m:ctrlPr>
+                      </m:fPr>
+                      <m:num>
+                        <m:r>
+                          <a:rPr lang="de-DE" b="0" i="1" smtClean="0">
+                            <a:latin typeface="Cambria Math" panose="02040503050406030204" pitchFamily="18" charset="0"/>
+                          </a:rPr>
+                          <m:t>1</m:t>
+                        </m:r>
+                      </m:num>
+                      <m:den>
+                        <m:r>
+                          <a:rPr lang="de-DE" b="0" i="1" smtClean="0">
+                            <a:latin typeface="Cambria Math" panose="02040503050406030204" pitchFamily="18" charset="0"/>
+                          </a:rPr>
+                          <m:t>𝑠</m:t>
+                        </m:r>
+                      </m:den>
+                    </m:f>
+                  </m:oMath>
+                </a14:m>
+                <a:r>
+                  <a:rPr lang="de-DE" dirty="0"/>
+                  <a:t>) </a:t>
+                </a:r>
+                <a:r>
+                  <a:rPr lang="de-DE" dirty="0">
+                    <a:sym typeface="Wingdings" pitchFamily="2" charset="2"/>
+                  </a:rPr>
+                  <a:t> </a:t>
+                </a:r>
+                <a:r>
+                  <a:rPr lang="de-DE" dirty="0" err="1">
+                    <a:sym typeface="Wingdings" pitchFamily="2" charset="2"/>
+                  </a:rPr>
+                  <a:t>faster</a:t>
+                </a:r>
+                <a:r>
+                  <a:rPr lang="de-DE" dirty="0">
+                    <a:sym typeface="Wingdings" pitchFamily="2" charset="2"/>
+                  </a:rPr>
+                  <a:t> initial </a:t>
+                </a:r>
+                <a:r>
+                  <a:rPr lang="de-DE" dirty="0" err="1">
+                    <a:sym typeface="Wingdings" pitchFamily="2" charset="2"/>
+                  </a:rPr>
+                  <a:t>rise</a:t>
+                </a:r>
+                <a:endParaRPr lang="de-DE" dirty="0"/>
+              </a:p>
+              <a:p>
+                <a:r>
+                  <a:rPr lang="de-DE" dirty="0" err="1">
+                    <a:sym typeface="Wingdings" pitchFamily="2" charset="2"/>
+                  </a:rPr>
+                  <a:t>One</a:t>
+                </a:r>
+                <a:r>
+                  <a:rPr lang="de-DE" dirty="0">
+                    <a:sym typeface="Wingdings" pitchFamily="2" charset="2"/>
+                  </a:rPr>
+                  <a:t> </a:t>
+                </a:r>
+                <a:r>
+                  <a:rPr lang="de-DE" dirty="0" err="1">
+                    <a:sym typeface="Wingdings" pitchFamily="2" charset="2"/>
+                  </a:rPr>
+                  <a:t>can</a:t>
+                </a:r>
+                <a:r>
+                  <a:rPr lang="de-DE" dirty="0">
+                    <a:sym typeface="Wingdings" pitchFamily="2" charset="2"/>
+                  </a:rPr>
+                  <a:t> </a:t>
+                </a:r>
+                <a:r>
+                  <a:rPr lang="de-DE" dirty="0" err="1">
+                    <a:sym typeface="Wingdings" pitchFamily="2" charset="2"/>
+                  </a:rPr>
+                  <a:t>cancel</a:t>
+                </a:r>
+                <a:r>
+                  <a:rPr lang="de-DE" dirty="0">
+                    <a:sym typeface="Wingdings" pitchFamily="2" charset="2"/>
+                  </a:rPr>
+                  <a:t> a pole </a:t>
+                </a:r>
+                <a:r>
+                  <a:rPr lang="de-DE" dirty="0" err="1">
+                    <a:sym typeface="Wingdings" pitchFamily="2" charset="2"/>
+                  </a:rPr>
+                  <a:t>with</a:t>
+                </a:r>
+                <a:r>
+                  <a:rPr lang="de-DE" dirty="0">
+                    <a:sym typeface="Wingdings" pitchFamily="2" charset="2"/>
+                  </a:rPr>
+                  <a:t> a </a:t>
+                </a:r>
+                <a:r>
+                  <a:rPr lang="de-DE" dirty="0" err="1">
+                    <a:sym typeface="Wingdings" pitchFamily="2" charset="2"/>
+                  </a:rPr>
+                  <a:t>zero</a:t>
+                </a:r>
+                <a:r>
+                  <a:rPr lang="de-DE" dirty="0">
+                    <a:sym typeface="Wingdings" pitchFamily="2" charset="2"/>
+                  </a:rPr>
+                  <a:t>  </a:t>
+                </a:r>
+                <a:r>
+                  <a:rPr lang="de-DE" dirty="0" err="1">
+                    <a:sym typeface="Wingdings" pitchFamily="2" charset="2"/>
+                  </a:rPr>
+                  <a:t>corresponding</a:t>
+                </a:r>
+                <a:r>
+                  <a:rPr lang="de-DE" dirty="0">
+                    <a:sym typeface="Wingdings" pitchFamily="2" charset="2"/>
+                  </a:rPr>
+                  <a:t> </a:t>
+                </a:r>
+                <a:r>
+                  <a:rPr lang="de-DE" dirty="0" err="1"/>
+                  <a:t>exponential</a:t>
+                </a:r>
+                <a:r>
+                  <a:rPr lang="de-DE" dirty="0"/>
+                  <a:t> </a:t>
+                </a:r>
+                <a:r>
+                  <a:rPr lang="de-DE" dirty="0" err="1"/>
+                  <a:t>term</a:t>
+                </a:r>
+                <a:r>
+                  <a:rPr lang="de-DE" dirty="0"/>
+                  <a:t> </a:t>
+                </a:r>
+                <a:r>
+                  <a:rPr lang="de-DE" dirty="0" err="1"/>
+                  <a:t>of</a:t>
+                </a:r>
+                <a:r>
+                  <a:rPr lang="de-DE" dirty="0"/>
+                  <a:t> </a:t>
+                </a:r>
+                <a:r>
+                  <a:rPr lang="de-DE" dirty="0" err="1"/>
+                  <a:t>the</a:t>
+                </a:r>
+                <a:r>
+                  <a:rPr lang="de-DE" dirty="0"/>
+                  <a:t> pole </a:t>
+                </a:r>
+                <a:r>
+                  <a:rPr lang="de-DE" dirty="0" err="1"/>
+                  <a:t>disappears</a:t>
+                </a:r>
+                <a:r>
+                  <a:rPr lang="de-DE" dirty="0"/>
+                  <a:t> </a:t>
+                </a:r>
+                <a:r>
+                  <a:rPr lang="de-DE" dirty="0" err="1"/>
+                  <a:t>from</a:t>
+                </a:r>
+                <a:r>
+                  <a:rPr lang="de-DE" dirty="0"/>
+                  <a:t> </a:t>
+                </a:r>
+                <a:r>
+                  <a:rPr lang="de-DE" dirty="0" err="1"/>
+                  <a:t>the</a:t>
+                </a:r>
+                <a:r>
+                  <a:rPr lang="de-DE" dirty="0"/>
+                  <a:t> </a:t>
+                </a:r>
+                <a:r>
+                  <a:rPr lang="de-DE" dirty="0" err="1"/>
+                  <a:t>forced</a:t>
+                </a:r>
+                <a:r>
+                  <a:rPr lang="de-DE" dirty="0"/>
+                  <a:t> </a:t>
+                </a:r>
+                <a:r>
+                  <a:rPr lang="de-DE" dirty="0" err="1"/>
+                  <a:t>response</a:t>
+                </a:r>
+                <a:endParaRPr lang="de-DE" dirty="0"/>
+              </a:p>
+              <a:p>
+                <a:r>
+                  <a:rPr lang="de-DE" dirty="0" err="1"/>
+                  <a:t>Amplification</a:t>
+                </a:r>
+                <a:r>
+                  <a:rPr lang="de-DE" dirty="0"/>
+                  <a:t> </a:t>
+                </a:r>
+                <a:r>
+                  <a:rPr lang="de-DE" dirty="0" err="1"/>
+                  <a:t>of</a:t>
+                </a:r>
+                <a:r>
+                  <a:rPr lang="de-DE" dirty="0"/>
+                  <a:t> </a:t>
+                </a:r>
+                <a:r>
+                  <a:rPr lang="de-DE" dirty="0" err="1"/>
+                  <a:t>higher</a:t>
+                </a:r>
+                <a:r>
+                  <a:rPr lang="de-DE" dirty="0"/>
+                  <a:t> </a:t>
+                </a:r>
+                <a:r>
+                  <a:rPr lang="de-DE" dirty="0" err="1"/>
+                  <a:t>frequencies</a:t>
+                </a:r>
+                <a:r>
+                  <a:rPr lang="de-DE" dirty="0"/>
+                  <a:t> (</a:t>
+                </a:r>
+                <a14:m>
+                  <m:oMath xmlns:m="http://schemas.openxmlformats.org/officeDocument/2006/math">
+                    <m:f>
+                      <m:fPr>
+                        <m:ctrlPr>
+                          <a:rPr lang="de-DE" i="1" smtClean="0">
+                            <a:latin typeface="Cambria Math" panose="02040503050406030204" pitchFamily="18" charset="0"/>
+                          </a:rPr>
+                        </m:ctrlPr>
+                      </m:fPr>
+                      <m:num>
+                        <m:r>
+                          <a:rPr lang="de-DE" i="1" smtClean="0">
+                            <a:latin typeface="Cambria Math" panose="02040503050406030204" pitchFamily="18" charset="0"/>
+                          </a:rPr>
+                          <m:t>𝑑</m:t>
+                        </m:r>
+                      </m:num>
+                      <m:den>
+                        <m:r>
+                          <a:rPr lang="de-DE" i="1" smtClean="0">
+                            <a:latin typeface="Cambria Math" panose="02040503050406030204" pitchFamily="18" charset="0"/>
+                          </a:rPr>
+                          <m:t>𝑑</m:t>
+                        </m:r>
+                        <m:r>
+                          <a:rPr lang="de-DE" b="0" i="1" smtClean="0">
+                            <a:latin typeface="Cambria Math" panose="02040503050406030204" pitchFamily="18" charset="0"/>
+                          </a:rPr>
+                          <m:t>𝑡</m:t>
+                        </m:r>
+                      </m:den>
+                    </m:f>
+                    <m:func>
+                      <m:funcPr>
+                        <m:ctrlPr>
+                          <a:rPr lang="de-DE" i="1" smtClean="0">
+                            <a:latin typeface="Cambria Math" panose="02040503050406030204" pitchFamily="18" charset="0"/>
+                          </a:rPr>
+                        </m:ctrlPr>
+                      </m:funcPr>
+                      <m:fName>
+                        <m:r>
+                          <m:rPr>
+                            <m:sty m:val="p"/>
+                          </m:rPr>
+                          <a:rPr lang="de-DE" i="0" smtClean="0">
+                            <a:latin typeface="Cambria Math" panose="02040503050406030204" pitchFamily="18" charset="0"/>
+                          </a:rPr>
+                          <m:t>sin</m:t>
+                        </m:r>
+                      </m:fName>
+                      <m:e>
+                        <m:r>
+                          <a:rPr lang="de-DE" i="1" smtClean="0">
+                            <a:latin typeface="Cambria Math" panose="02040503050406030204" pitchFamily="18" charset="0"/>
+                            <a:ea typeface="Cambria Math" panose="02040503050406030204" pitchFamily="18" charset="0"/>
+                          </a:rPr>
+                          <m:t>𝜔</m:t>
+                        </m:r>
+                        <m:r>
+                          <a:rPr lang="de-DE" b="0" i="1" smtClean="0">
+                            <a:latin typeface="Cambria Math" panose="02040503050406030204" pitchFamily="18" charset="0"/>
+                            <a:ea typeface="Cambria Math" panose="02040503050406030204" pitchFamily="18" charset="0"/>
+                          </a:rPr>
+                          <m:t>𝑡</m:t>
+                        </m:r>
+                      </m:e>
+                    </m:func>
+                    <m:r>
+                      <a:rPr lang="de-DE" b="0" i="1" smtClean="0">
+                        <a:latin typeface="Cambria Math" panose="02040503050406030204" pitchFamily="18" charset="0"/>
+                      </a:rPr>
+                      <m:t>=</m:t>
+                    </m:r>
+                    <m:r>
+                      <a:rPr lang="de-DE" b="0" i="1" smtClean="0">
+                        <a:latin typeface="Cambria Math" panose="02040503050406030204" pitchFamily="18" charset="0"/>
+                        <a:ea typeface="Cambria Math" panose="02040503050406030204" pitchFamily="18" charset="0"/>
+                      </a:rPr>
+                      <m:t>𝜔</m:t>
+                    </m:r>
+                    <m:r>
+                      <a:rPr lang="de-DE" b="0" i="1" smtClean="0">
+                        <a:latin typeface="Cambria Math" panose="02040503050406030204" pitchFamily="18" charset="0"/>
+                        <a:ea typeface="Cambria Math" panose="02040503050406030204" pitchFamily="18" charset="0"/>
+                      </a:rPr>
+                      <m:t>∙</m:t>
+                    </m:r>
+                    <m:func>
+                      <m:funcPr>
+                        <m:ctrlPr>
+                          <a:rPr lang="de-DE" b="0" i="1" smtClean="0">
+                            <a:latin typeface="Cambria Math" panose="02040503050406030204" pitchFamily="18" charset="0"/>
+                            <a:ea typeface="Cambria Math" panose="02040503050406030204" pitchFamily="18" charset="0"/>
+                          </a:rPr>
+                        </m:ctrlPr>
+                      </m:funcPr>
+                      <m:fName>
+                        <m:r>
+                          <m:rPr>
+                            <m:sty m:val="p"/>
+                          </m:rPr>
+                          <a:rPr lang="de-DE" b="0" i="0" smtClean="0">
+                            <a:latin typeface="Cambria Math" panose="02040503050406030204" pitchFamily="18" charset="0"/>
+                            <a:ea typeface="Cambria Math" panose="02040503050406030204" pitchFamily="18" charset="0"/>
+                          </a:rPr>
+                          <m:t>cos</m:t>
+                        </m:r>
+                      </m:fName>
+                      <m:e>
+                        <m:r>
+                          <a:rPr lang="de-DE" b="0" i="1" smtClean="0">
+                            <a:latin typeface="Cambria Math" panose="02040503050406030204" pitchFamily="18" charset="0"/>
+                            <a:ea typeface="Cambria Math" panose="02040503050406030204" pitchFamily="18" charset="0"/>
+                          </a:rPr>
+                          <m:t>𝜔</m:t>
+                        </m:r>
+                        <m:r>
+                          <a:rPr lang="de-DE" b="0" i="1" smtClean="0">
+                            <a:latin typeface="Cambria Math" panose="02040503050406030204" pitchFamily="18" charset="0"/>
+                            <a:ea typeface="Cambria Math" panose="02040503050406030204" pitchFamily="18" charset="0"/>
+                          </a:rPr>
+                          <m:t>𝑡</m:t>
+                        </m:r>
+                      </m:e>
+                    </m:func>
+                  </m:oMath>
+                </a14:m>
+                <a:r>
+                  <a:rPr lang="de-DE" dirty="0"/>
+                  <a:t>)</a:t>
+                </a:r>
+              </a:p>
+              <a:p>
+                <a:pPr marL="0" indent="0">
+                  <a:buNone/>
+                </a:pPr>
+                <a:endParaRPr lang="de-DE" dirty="0"/>
+              </a:p>
+              <a:p>
+                <a:pPr marL="0" indent="0">
+                  <a:buNone/>
+                </a:pPr>
+                <a:r>
+                  <a:rPr lang="de-DE" dirty="0" err="1"/>
+                  <a:t>Frequency-selective</a:t>
+                </a:r>
+                <a:r>
+                  <a:rPr lang="de-DE" dirty="0"/>
+                  <a:t> </a:t>
+                </a:r>
+                <a:r>
+                  <a:rPr lang="de-DE" dirty="0" err="1"/>
+                  <a:t>property</a:t>
+                </a:r>
+                <a:r>
+                  <a:rPr lang="de-DE" dirty="0"/>
+                  <a:t>: </a:t>
+                </a:r>
+                <a:r>
+                  <a:rPr lang="de-DE" dirty="0" err="1"/>
+                  <a:t>system</a:t>
+                </a:r>
+                <a:r>
+                  <a:rPr lang="de-DE" dirty="0"/>
+                  <a:t> </a:t>
+                </a:r>
+                <a:r>
+                  <a:rPr lang="de-DE" dirty="0" err="1"/>
+                  <a:t>blocks</a:t>
+                </a:r>
+                <a:r>
+                  <a:rPr lang="de-DE" dirty="0"/>
+                  <a:t> </a:t>
+                </a:r>
+                <a:r>
+                  <a:rPr lang="de-DE" dirty="0" err="1"/>
+                  <a:t>steady-state</a:t>
+                </a:r>
+                <a:r>
+                  <a:rPr lang="de-DE" dirty="0"/>
+                  <a:t> </a:t>
+                </a:r>
+                <a:r>
+                  <a:rPr lang="de-DE" dirty="0" err="1"/>
+                  <a:t>sinusoidal</a:t>
+                </a:r>
+                <a:r>
+                  <a:rPr lang="de-DE" dirty="0"/>
+                  <a:t> </a:t>
+                </a:r>
+                <a:r>
+                  <a:rPr lang="de-DE" dirty="0" err="1"/>
+                  <a:t>response</a:t>
+                </a:r>
+                <a:r>
+                  <a:rPr lang="de-DE" dirty="0"/>
+                  <a:t> </a:t>
+                </a:r>
+                <a:r>
+                  <a:rPr lang="de-DE" dirty="0" err="1"/>
+                  <a:t>of</a:t>
+                </a:r>
+                <a:r>
+                  <a:rPr lang="de-DE" dirty="0"/>
+                  <a:t> </a:t>
+                </a:r>
+                <a:r>
+                  <a:rPr lang="de-DE" dirty="0" err="1"/>
+                  <a:t>complex</a:t>
+                </a:r>
+                <a:r>
+                  <a:rPr lang="de-DE" dirty="0"/>
+                  <a:t> </a:t>
+                </a:r>
+                <a:r>
+                  <a:rPr lang="de-DE" dirty="0" err="1"/>
+                  <a:t>frequency</a:t>
+                </a:r>
+                <a:r>
+                  <a:rPr lang="de-DE" dirty="0"/>
+                  <a:t> </a:t>
+                </a:r>
+                <a:r>
+                  <a:rPr lang="de-DE" dirty="0" err="1"/>
+                  <a:t>of</a:t>
+                </a:r>
+                <a:r>
+                  <a:rPr lang="de-DE" dirty="0"/>
+                  <a:t> a </a:t>
+                </a:r>
+                <a:r>
+                  <a:rPr lang="de-DE" dirty="0" err="1"/>
+                  <a:t>zero</a:t>
+                </a:r>
+                <a:r>
+                  <a:rPr lang="de-DE" dirty="0"/>
+                  <a:t> (</a:t>
+                </a:r>
+                <a:r>
+                  <a:rPr lang="de-DE" dirty="0" err="1"/>
+                  <a:t>despite</a:t>
+                </a:r>
+                <a:r>
+                  <a:rPr lang="de-DE" dirty="0"/>
+                  <a:t> </a:t>
+                </a:r>
+                <a:r>
+                  <a:rPr lang="de-DE" dirty="0" err="1"/>
+                  <a:t>nonzero</a:t>
+                </a:r>
+                <a:r>
+                  <a:rPr lang="de-DE" dirty="0"/>
+                  <a:t> </a:t>
+                </a:r>
+                <a:r>
+                  <a:rPr lang="de-DE" dirty="0" err="1"/>
+                  <a:t>input</a:t>
+                </a:r>
+                <a:r>
+                  <a:rPr lang="de-DE" dirty="0"/>
+                  <a:t>)</a:t>
+                </a:r>
+              </a:p>
+              <a:p>
+                <a:pPr marL="0" indent="0">
+                  <a:buNone/>
+                </a:pPr>
+                <a:endParaRPr lang="de-DE" dirty="0"/>
+              </a:p>
+              <a:p>
+                <a:pPr marL="0" indent="0">
+                  <a:buNone/>
+                </a:pPr>
+                <a:r>
+                  <a:rPr lang="de-DE" dirty="0"/>
+                  <a:t>More </a:t>
+                </a:r>
+                <a:r>
+                  <a:rPr lang="de-DE" dirty="0" err="1"/>
+                  <a:t>zeros</a:t>
+                </a:r>
+                <a:r>
+                  <a:rPr lang="de-DE" dirty="0"/>
+                  <a:t> </a:t>
+                </a:r>
+                <a:r>
+                  <a:rPr lang="de-DE" dirty="0" err="1"/>
+                  <a:t>mean</a:t>
+                </a:r>
+                <a:r>
+                  <a:rPr lang="de-DE" dirty="0"/>
+                  <a:t> a </a:t>
+                </a:r>
+                <a:r>
+                  <a:rPr lang="de-DE" dirty="0" err="1"/>
+                  <a:t>stronger</a:t>
+                </a:r>
+                <a:r>
+                  <a:rPr lang="de-DE" dirty="0"/>
+                  <a:t> </a:t>
+                </a:r>
+                <a:r>
+                  <a:rPr lang="de-DE" dirty="0" err="1"/>
+                  <a:t>shaping</a:t>
+                </a:r>
+                <a:r>
+                  <a:rPr lang="de-DE" dirty="0"/>
+                  <a:t> </a:t>
+                </a:r>
+                <a:r>
+                  <a:rPr lang="de-DE" dirty="0" err="1"/>
+                  <a:t>of</a:t>
+                </a:r>
+                <a:r>
+                  <a:rPr lang="de-DE" dirty="0"/>
+                  <a:t> </a:t>
+                </a:r>
+                <a:r>
+                  <a:rPr lang="de-DE" dirty="0" err="1"/>
+                  <a:t>the</a:t>
+                </a:r>
+                <a:r>
+                  <a:rPr lang="de-DE" dirty="0"/>
+                  <a:t> </a:t>
+                </a:r>
+                <a:r>
+                  <a:rPr lang="de-DE" dirty="0" err="1"/>
+                  <a:t>input</a:t>
+                </a:r>
+                <a:r>
+                  <a:rPr lang="de-DE" dirty="0"/>
+                  <a:t> </a:t>
+                </a:r>
+                <a:r>
+                  <a:rPr lang="de-DE" dirty="0" err="1"/>
+                  <a:t>response</a:t>
+                </a:r>
+                <a:r>
+                  <a:rPr lang="de-DE" dirty="0"/>
+                  <a:t> and an </a:t>
+                </a:r>
+                <a:r>
+                  <a:rPr lang="de-DE" dirty="0" err="1"/>
+                  <a:t>increase</a:t>
+                </a:r>
+                <a:r>
+                  <a:rPr lang="de-DE" dirty="0"/>
+                  <a:t> </a:t>
+                </a:r>
+                <a:r>
+                  <a:rPr lang="de-DE" dirty="0" err="1"/>
+                  <a:t>of</a:t>
+                </a:r>
+                <a:r>
+                  <a:rPr lang="de-DE" dirty="0"/>
+                  <a:t> high-</a:t>
+                </a:r>
+                <a:r>
+                  <a:rPr lang="de-DE" dirty="0" err="1"/>
+                  <a:t>frequency</a:t>
+                </a:r>
+                <a:r>
+                  <a:rPr lang="de-DE" dirty="0"/>
+                  <a:t> </a:t>
+                </a:r>
+                <a:r>
+                  <a:rPr lang="de-DE" dirty="0" err="1"/>
+                  <a:t>gain</a:t>
+                </a:r>
+                <a:r>
+                  <a:rPr lang="de-DE" dirty="0"/>
+                  <a:t>.</a:t>
+                </a:r>
+              </a:p>
+            </p:txBody>
+          </p:sp>
+        </mc:Choice>
+        <mc:Fallback xmlns="">
+          <p:sp>
+            <p:nvSpPr>
+              <p:cNvPr id="3" name="Inhaltsplatzhalter 2">
+                <a:extLst>
+                  <a:ext uri="{FF2B5EF4-FFF2-40B4-BE49-F238E27FC236}">
+                    <a16:creationId xmlns:a16="http://schemas.microsoft.com/office/drawing/2014/main" id="{FDEECDF6-3FEB-A177-D7A8-7BB02317806C}"/>
+                  </a:ext>
+                </a:extLst>
+              </p:cNvPr>
+              <p:cNvSpPr>
+                <a:spLocks noGrp="1" noRot="1" noChangeAspect="1" noMove="1" noResize="1" noEditPoints="1" noAdjustHandles="1" noChangeArrowheads="1" noChangeShapeType="1" noTextEdit="1"/>
+              </p:cNvSpPr>
+              <p:nvPr>
+                <p:ph idx="1"/>
+              </p:nvPr>
+            </p:nvSpPr>
+            <p:spPr>
+              <a:blipFill>
+                <a:blip r:embed="rId2"/>
+                <a:stretch>
+                  <a:fillRect l="-965" t="-3198" r="-121" b="-2326"/>
+                </a:stretch>
+              </a:blipFill>
+            </p:spPr>
+            <p:txBody>
+              <a:bodyPr/>
+              <a:lstStyle/>
+              <a:p>
+                <a:r>
+                  <a:rPr lang="de-DE">
+                    <a:noFill/>
+                  </a:rPr>
+                  <a:t> </a:t>
+                </a:r>
+              </a:p>
+            </p:txBody>
+          </p:sp>
+        </mc:Fallback>
+      </mc:AlternateContent>
+      <p:sp>
+        <p:nvSpPr>
+          <p:cNvPr id="4" name="Foliennummernplatzhalter 3">
+            <a:extLst>
+              <a:ext uri="{FF2B5EF4-FFF2-40B4-BE49-F238E27FC236}">
+                <a16:creationId xmlns:a16="http://schemas.microsoft.com/office/drawing/2014/main" id="{F75A1E12-F588-EDED-8AD9-0CC86AD6B7B4}"/>
+              </a:ext>
+            </a:extLst>
+          </p:cNvPr>
+          <p:cNvSpPr>
+            <a:spLocks noGrp="1"/>
+          </p:cNvSpPr>
+          <p:nvPr>
+            <p:ph type="sldNum" sz="quarter" idx="12"/>
+          </p:nvPr>
+        </p:nvSpPr>
+        <p:spPr/>
+        <p:txBody>
+          <a:bodyPr/>
+          <a:lstStyle/>
+          <a:p>
+            <a:fld id="{08C366F5-AFAD-49CB-854A-9D9E238FCA13}" type="slidenum">
+              <a:rPr lang="en-GB" smtClean="0"/>
+              <a:t>10</a:t>
+            </a:fld>
+            <a:endParaRPr lang="en-GB"/>
+          </a:p>
+        </p:txBody>
+      </p:sp>
+      <p:sp>
+        <p:nvSpPr>
+          <p:cNvPr id="5" name="Textfeld 4">
+            <a:extLst>
+              <a:ext uri="{FF2B5EF4-FFF2-40B4-BE49-F238E27FC236}">
+                <a16:creationId xmlns:a16="http://schemas.microsoft.com/office/drawing/2014/main" id="{7E10F2AA-6871-F9EE-6FE9-AA54AF034574}"/>
+              </a:ext>
+            </a:extLst>
+          </p:cNvPr>
+          <p:cNvSpPr txBox="1"/>
+          <p:nvPr/>
+        </p:nvSpPr>
+        <p:spPr>
+          <a:xfrm>
+            <a:off x="8368748" y="230188"/>
+            <a:ext cx="3516795" cy="646331"/>
+          </a:xfrm>
+          <a:prstGeom prst="rect">
+            <a:avLst/>
+          </a:prstGeom>
+          <a:noFill/>
+          <a:ln>
+            <a:solidFill>
+              <a:schemeClr val="tx1"/>
+            </a:solidFill>
+          </a:ln>
+        </p:spPr>
+        <p:txBody>
+          <a:bodyPr wrap="square" rtlCol="0">
+            <a:spAutoFit/>
+          </a:bodyPr>
+          <a:lstStyle/>
+          <a:p>
+            <a:r>
+              <a:rPr lang="de-DE" dirty="0"/>
+              <a:t>Zeros </a:t>
+            </a:r>
+            <a:r>
+              <a:rPr lang="de-DE" dirty="0" err="1"/>
+              <a:t>alone</a:t>
+            </a:r>
+            <a:r>
+              <a:rPr lang="de-DE" dirty="0"/>
+              <a:t> do not </a:t>
+            </a:r>
+            <a:r>
+              <a:rPr lang="de-DE" dirty="0" err="1"/>
+              <a:t>make</a:t>
+            </a:r>
+            <a:r>
+              <a:rPr lang="de-DE" dirty="0"/>
+              <a:t> a </a:t>
+            </a:r>
+            <a:r>
+              <a:rPr lang="de-DE" dirty="0" err="1"/>
+              <a:t>system</a:t>
+            </a:r>
+            <a:r>
+              <a:rPr lang="de-DE" dirty="0"/>
+              <a:t> </a:t>
+            </a:r>
+            <a:r>
+              <a:rPr lang="de-DE" dirty="0" err="1"/>
+              <a:t>unstable</a:t>
+            </a:r>
+            <a:r>
+              <a:rPr lang="de-DE" dirty="0"/>
+              <a:t>, </a:t>
+            </a:r>
+            <a:r>
+              <a:rPr lang="de-DE" dirty="0" err="1"/>
+              <a:t>only</a:t>
+            </a:r>
+            <a:r>
+              <a:rPr lang="de-DE" dirty="0"/>
+              <a:t> </a:t>
+            </a:r>
+            <a:r>
+              <a:rPr lang="de-DE" dirty="0" err="1"/>
+              <a:t>poles</a:t>
+            </a:r>
+            <a:r>
+              <a:rPr lang="de-DE" dirty="0"/>
+              <a:t> in RHP do.</a:t>
+            </a:r>
+          </a:p>
+        </p:txBody>
+      </p:sp>
+    </p:spTree>
+    <p:extLst>
+      <p:ext uri="{BB962C8B-B14F-4D97-AF65-F5344CB8AC3E}">
+        <p14:creationId xmlns:p14="http://schemas.microsoft.com/office/powerpoint/2010/main" val="77516454"/>
+      </p:ext>
+    </p:extLst>
+  </p:cSld>
+  <p:clrMapOvr>
+    <a:masterClrMapping/>
+  </p:clrMapOvr>
+</p:sld>
+</file>
+
+<file path=ppt/slides/slide11.xml><?xml version="1.0" encoding="utf-8"?>
+<p:sld xmlns:a="http://schemas.openxmlformats.org/drawingml/2006/main" xmlns:r="http://schemas.openxmlformats.org/officeDocument/2006/relationships" xmlns:p="http://schemas.openxmlformats.org/presentationml/2006/main">
+  <p:cSld>
+    <p:spTree>
+      <p:nvGrpSpPr>
+        <p:cNvPr id="1" name=""/>
+        <p:cNvGrpSpPr/>
+        <p:nvPr/>
+      </p:nvGrpSpPr>
+      <p:grpSpPr>
+        <a:xfrm>
+          <a:off x="0" y="0"/>
+          <a:ext cx="0" cy="0"/>
+          <a:chOff x="0" y="0"/>
+          <a:chExt cx="0" cy="0"/>
+        </a:xfrm>
+      </p:grpSpPr>
+      <p:sp>
+        <p:nvSpPr>
           <p:cNvPr id="5" name="Titel 4">
             <a:extLst>
               <a:ext uri="{FF2B5EF4-FFF2-40B4-BE49-F238E27FC236}">
@@ -4161,7 +5245,7 @@
           <a:p>
             <a:fld id="{08C366F5-AFAD-49CB-854A-9D9E238FCA13}" type="slidenum">
               <a:rPr lang="en-GB" smtClean="0"/>
-              <a:t>10</a:t>
+              <a:t>11</a:t>
             </a:fld>
             <a:endParaRPr lang="en-GB"/>
           </a:p>
@@ -4436,7 +5520,7 @@
 </p:sld>
 </file>
 
-<file path=ppt/slides/slide11.xml><?xml version="1.0" encoding="utf-8"?>
+<file path=ppt/slides/slide12.xml><?xml version="1.0" encoding="utf-8"?>
 <p:sld xmlns:a="http://schemas.openxmlformats.org/drawingml/2006/main" xmlns:r="http://schemas.openxmlformats.org/officeDocument/2006/relationships" xmlns:p="http://schemas.openxmlformats.org/presentationml/2006/main">
   <p:cSld>
     <p:spTree>
@@ -4516,7 +5600,7 @@
           <a:p>
             <a:fld id="{08C366F5-AFAD-49CB-854A-9D9E238FCA13}" type="slidenum">
               <a:rPr lang="en-GB" smtClean="0"/>
-              <a:t>11</a:t>
+              <a:t>12</a:t>
             </a:fld>
             <a:endParaRPr lang="en-GB"/>
           </a:p>
@@ -4692,7 +5776,7 @@
 </p:sld>
 </file>
 
-<file path=ppt/slides/slide12.xml><?xml version="1.0" encoding="utf-8"?>
+<file path=ppt/slides/slide13.xml><?xml version="1.0" encoding="utf-8"?>
 <p:sld xmlns:a="http://schemas.openxmlformats.org/drawingml/2006/main" xmlns:r="http://schemas.openxmlformats.org/officeDocument/2006/relationships" xmlns:p="http://schemas.openxmlformats.org/presentationml/2006/main">
   <p:cSld>
     <p:spTree>
@@ -4772,7 +5856,7 @@
           <a:p>
             <a:fld id="{08C366F5-AFAD-49CB-854A-9D9E238FCA13}" type="slidenum">
               <a:rPr lang="en-GB" smtClean="0"/>
-              <a:t>12</a:t>
+              <a:t>13</a:t>
             </a:fld>
             <a:endParaRPr lang="en-GB"/>
           </a:p>
@@ -5236,7 +6320,7 @@
 </p:sld>
 </file>
 
-<file path=ppt/slides/slide13.xml><?xml version="1.0" encoding="utf-8"?>
+<file path=ppt/slides/slide14.xml><?xml version="1.0" encoding="utf-8"?>
 <p:sld xmlns:a="http://schemas.openxmlformats.org/drawingml/2006/main" xmlns:r="http://schemas.openxmlformats.org/officeDocument/2006/relationships" xmlns:p="http://schemas.openxmlformats.org/presentationml/2006/main">
   <p:cSld>
     <p:spTree>
@@ -5395,7 +6479,7 @@
           <a:p>
             <a:fld id="{08C366F5-AFAD-49CB-854A-9D9E238FCA13}" type="slidenum">
               <a:rPr lang="en-GB" smtClean="0"/>
-              <a:t>13</a:t>
+              <a:t>14</a:t>
             </a:fld>
             <a:endParaRPr lang="en-GB"/>
           </a:p>
@@ -5564,7 +6648,7 @@
 </p:sld>
 </file>
 
-<file path=ppt/slides/slide14.xml><?xml version="1.0" encoding="utf-8"?>
+<file path=ppt/slides/slide15.xml><?xml version="1.0" encoding="utf-8"?>
 <p:sld xmlns:a="http://schemas.openxmlformats.org/drawingml/2006/main" xmlns:r="http://schemas.openxmlformats.org/officeDocument/2006/relationships" xmlns:p="http://schemas.openxmlformats.org/presentationml/2006/main">
   <p:cSld>
     <p:spTree>
@@ -6307,7 +7391,7 @@
           <a:p>
             <a:fld id="{08C366F5-AFAD-49CB-854A-9D9E238FCA13}" type="slidenum">
               <a:rPr lang="en-GB" smtClean="0"/>
-              <a:t>14</a:t>
+              <a:t>15</a:t>
             </a:fld>
             <a:endParaRPr lang="en-GB"/>
           </a:p>
@@ -6326,7 +7410,7 @@
 </p:sld>
 </file>
 
-<file path=ppt/slides/slide15.xml><?xml version="1.0" encoding="utf-8"?>
+<file path=ppt/slides/slide16.xml><?xml version="1.0" encoding="utf-8"?>
 <p:sld xmlns:a="http://schemas.openxmlformats.org/drawingml/2006/main" xmlns:r="http://schemas.openxmlformats.org/officeDocument/2006/relationships" xmlns:p="http://schemas.openxmlformats.org/presentationml/2006/main">
   <p:cSld>
     <p:spTree>
@@ -6366,7 +7450,7 @@
           <a:p>
             <a:fld id="{08C366F5-AFAD-49CB-854A-9D9E238FCA13}" type="slidenum">
               <a:rPr lang="en-GB" smtClean="0"/>
-              <a:t>15</a:t>
+              <a:t>16</a:t>
             </a:fld>
             <a:endParaRPr lang="en-GB"/>
           </a:p>
@@ -6475,7 +7559,7 @@
 </p:sld>
 </file>
 
-<file path=ppt/slides/slide16.xml><?xml version="1.0" encoding="utf-8"?>
+<file path=ppt/slides/slide17.xml><?xml version="1.0" encoding="utf-8"?>
 <p:sld xmlns:a="http://schemas.openxmlformats.org/drawingml/2006/main" xmlns:r="http://schemas.openxmlformats.org/officeDocument/2006/relationships" xmlns:p="http://schemas.openxmlformats.org/presentationml/2006/main">
   <p:cSld>
     <p:spTree>
@@ -6993,7 +8077,7 @@
           <a:p>
             <a:fld id="{08C366F5-AFAD-49CB-854A-9D9E238FCA13}" type="slidenum">
               <a:rPr lang="en-GB" smtClean="0"/>
-              <a:t>16</a:t>
+              <a:t>17</a:t>
             </a:fld>
             <a:endParaRPr lang="en-GB"/>
           </a:p>
@@ -7012,7 +8096,7 @@
 </p:sld>
 </file>
 
-<file path=ppt/slides/slide17.xml><?xml version="1.0" encoding="utf-8"?>
+<file path=ppt/slides/slide18.xml><?xml version="1.0" encoding="utf-8"?>
 <p:sld xmlns:a="http://schemas.openxmlformats.org/drawingml/2006/main" xmlns:r="http://schemas.openxmlformats.org/officeDocument/2006/relationships" xmlns:p="http://schemas.openxmlformats.org/presentationml/2006/main">
   <p:cSld>
     <p:spTree>
@@ -7620,7 +8704,7 @@
           <a:p>
             <a:fld id="{08C366F5-AFAD-49CB-854A-9D9E238FCA13}" type="slidenum">
               <a:rPr lang="en-GB" smtClean="0"/>
-              <a:t>17</a:t>
+              <a:t>18</a:t>
             </a:fld>
             <a:endParaRPr lang="en-GB"/>
           </a:p>
@@ -7886,7 +8970,7 @@
 </p:sld>
 </file>
 
-<file path=ppt/slides/slide18.xml><?xml version="1.0" encoding="utf-8"?>
+<file path=ppt/slides/slide19.xml><?xml version="1.0" encoding="utf-8"?>
 <p:sld xmlns:a="http://schemas.openxmlformats.org/drawingml/2006/main" xmlns:r="http://schemas.openxmlformats.org/officeDocument/2006/relationships" xmlns:p="http://schemas.openxmlformats.org/presentationml/2006/main">
   <p:cSld>
     <p:spTree>
@@ -8523,7 +9607,7 @@
           <a:p>
             <a:fld id="{08C366F5-AFAD-49CB-854A-9D9E238FCA13}" type="slidenum">
               <a:rPr lang="en-GB" smtClean="0"/>
-              <a:t>18</a:t>
+              <a:t>19</a:t>
             </a:fld>
             <a:endParaRPr lang="en-GB"/>
           </a:p>
@@ -8544,10 +9628,10 @@
           <p:nvPr/>
         </p:nvPicPr>
         <p:blipFill>
-          <a:blip r:embed="rId3">
+          <a:blip>
             <a:extLst>
               <a:ext uri="{96DAC541-7B7A-43D3-8B79-37D633B846F1}">
-                <asvg:svgBlip xmlns:asvg="http://schemas.microsoft.com/office/drawing/2016/SVG/main" r:embed="rId4"/>
+                <asvg:svgBlip xmlns:asvg="http://schemas.microsoft.com/office/drawing/2016/SVG/main" r:embed="rId3"/>
               </a:ext>
             </a:extLst>
           </a:blip>
@@ -8907,7 +9991,286 @@
 </p:sld>
 </file>
 
-<file path=ppt/slides/slide19.xml><?xml version="1.0" encoding="utf-8"?>
+<file path=ppt/slides/slide2.xml><?xml version="1.0" encoding="utf-8"?>
+<p:sld xmlns:a="http://schemas.openxmlformats.org/drawingml/2006/main" xmlns:r="http://schemas.openxmlformats.org/officeDocument/2006/relationships" xmlns:p="http://schemas.openxmlformats.org/presentationml/2006/main">
+  <p:cSld>
+    <p:spTree>
+      <p:nvGrpSpPr>
+        <p:cNvPr id="1" name=""/>
+        <p:cNvGrpSpPr/>
+        <p:nvPr/>
+      </p:nvGrpSpPr>
+      <p:grpSpPr>
+        <a:xfrm>
+          <a:off x="0" y="0"/>
+          <a:ext cx="0" cy="0"/>
+          <a:chOff x="0" y="0"/>
+          <a:chExt cx="0" cy="0"/>
+        </a:xfrm>
+      </p:grpSpPr>
+      <p:sp>
+        <p:nvSpPr>
+          <p:cNvPr id="4" name="Title 3">
+            <a:extLst>
+              <a:ext uri="{FF2B5EF4-FFF2-40B4-BE49-F238E27FC236}">
+                <a16:creationId xmlns:a16="http://schemas.microsoft.com/office/drawing/2014/main" id="{080AD447-446B-E09E-6F4A-522C1DBB462E}"/>
+              </a:ext>
+            </a:extLst>
+          </p:cNvPr>
+          <p:cNvSpPr>
+            <a:spLocks noGrp="1"/>
+          </p:cNvSpPr>
+          <p:nvPr>
+            <p:ph type="title"/>
+          </p:nvPr>
+        </p:nvSpPr>
+        <p:spPr/>
+        <p:txBody>
+          <a:bodyPr/>
+          <a:lstStyle/>
+          <a:p>
+            <a:r>
+              <a:rPr lang="en-GB" dirty="0"/>
+              <a:t>Course Schedule</a:t>
+            </a:r>
+          </a:p>
+        </p:txBody>
+      </p:sp>
+      <p:sp>
+        <p:nvSpPr>
+          <p:cNvPr id="6" name="Inhaltsplatzhalter 5">
+            <a:extLst>
+              <a:ext uri="{FF2B5EF4-FFF2-40B4-BE49-F238E27FC236}">
+                <a16:creationId xmlns:a16="http://schemas.microsoft.com/office/drawing/2014/main" id="{CF502483-E45D-7D7D-D169-ACA4F8327D26}"/>
+              </a:ext>
+            </a:extLst>
+          </p:cNvPr>
+          <p:cNvSpPr>
+            <a:spLocks noGrp="1"/>
+          </p:cNvSpPr>
+          <p:nvPr>
+            <p:ph sz="half" idx="1"/>
+          </p:nvPr>
+        </p:nvSpPr>
+        <p:spPr/>
+        <p:txBody>
+          <a:bodyPr>
+            <a:normAutofit/>
+          </a:bodyPr>
+          <a:lstStyle/>
+          <a:p>
+            <a:pPr marL="514350" indent="-514350">
+              <a:buFont typeface="+mj-lt"/>
+              <a:buAutoNum type="arabicPeriod"/>
+            </a:pPr>
+            <a:r>
+              <a:rPr lang="de-DE" dirty="0"/>
+              <a:t>Systems</a:t>
+            </a:r>
+          </a:p>
+          <a:p>
+            <a:pPr marL="514350" indent="-514350">
+              <a:buFont typeface="+mj-lt"/>
+              <a:buAutoNum type="arabicPeriod"/>
+            </a:pPr>
+            <a:endParaRPr lang="de-DE" dirty="0"/>
+          </a:p>
+          <a:p>
+            <a:pPr marL="514350" indent="-514350">
+              <a:buFont typeface="+mj-lt"/>
+              <a:buAutoNum type="arabicPeriod"/>
+            </a:pPr>
+            <a:r>
+              <a:rPr lang="de-DE" dirty="0" err="1"/>
+              <a:t>Continuous</a:t>
+            </a:r>
+            <a:r>
+              <a:rPr lang="de-DE" dirty="0"/>
+              <a:t>-time Controllers</a:t>
+            </a:r>
+          </a:p>
+          <a:p>
+            <a:pPr marL="514350" indent="-514350">
+              <a:buFont typeface="+mj-lt"/>
+              <a:buAutoNum type="arabicPeriod"/>
+            </a:pPr>
+            <a:endParaRPr lang="de-DE" dirty="0"/>
+          </a:p>
+          <a:p>
+            <a:pPr marL="514350" indent="-514350">
+              <a:buFont typeface="+mj-lt"/>
+              <a:buAutoNum type="arabicPeriod"/>
+            </a:pPr>
+            <a:r>
+              <a:rPr lang="de-DE" dirty="0"/>
+              <a:t>Laplace Domain</a:t>
+            </a:r>
+          </a:p>
+          <a:p>
+            <a:pPr marL="514350" indent="-514350">
+              <a:buFont typeface="+mj-lt"/>
+              <a:buAutoNum type="arabicPeriod"/>
+            </a:pPr>
+            <a:endParaRPr lang="de-DE" dirty="0"/>
+          </a:p>
+          <a:p>
+            <a:pPr marL="514350" indent="-514350">
+              <a:buFont typeface="+mj-lt"/>
+              <a:buAutoNum type="arabicPeriod"/>
+            </a:pPr>
+            <a:r>
+              <a:rPr lang="de-DE" dirty="0"/>
+              <a:t>Poles/Zeros &amp; </a:t>
+            </a:r>
+            <a:r>
+              <a:rPr lang="de-DE" dirty="0" err="1"/>
+              <a:t>Stability</a:t>
+            </a:r>
+            <a:endParaRPr lang="de-DE" dirty="0"/>
+          </a:p>
+        </p:txBody>
+      </p:sp>
+      <p:sp>
+        <p:nvSpPr>
+          <p:cNvPr id="7" name="Inhaltsplatzhalter 6">
+            <a:extLst>
+              <a:ext uri="{FF2B5EF4-FFF2-40B4-BE49-F238E27FC236}">
+                <a16:creationId xmlns:a16="http://schemas.microsoft.com/office/drawing/2014/main" id="{B671907E-FFFA-73EF-8E7D-4AB4EBDD957B}"/>
+              </a:ext>
+            </a:extLst>
+          </p:cNvPr>
+          <p:cNvSpPr>
+            <a:spLocks noGrp="1"/>
+          </p:cNvSpPr>
+          <p:nvPr>
+            <p:ph sz="half" idx="2"/>
+          </p:nvPr>
+        </p:nvSpPr>
+        <p:spPr/>
+        <p:txBody>
+          <a:bodyPr>
+            <a:normAutofit/>
+          </a:bodyPr>
+          <a:lstStyle/>
+          <a:p>
+            <a:pPr marL="514350" indent="-514350">
+              <a:buFont typeface="+mj-lt"/>
+              <a:buAutoNum type="arabicPeriod" startAt="5"/>
+            </a:pPr>
+            <a:r>
+              <a:rPr lang="de-DE" dirty="0"/>
+              <a:t>Controller Design</a:t>
+            </a:r>
+          </a:p>
+          <a:p>
+            <a:pPr marL="514350" indent="-514350">
+              <a:buFont typeface="+mj-lt"/>
+              <a:buAutoNum type="arabicPeriod" startAt="5"/>
+            </a:pPr>
+            <a:endParaRPr lang="de-DE" dirty="0"/>
+          </a:p>
+          <a:p>
+            <a:pPr marL="514350" indent="-514350">
+              <a:buFont typeface="+mj-lt"/>
+              <a:buAutoNum type="arabicPeriod" startAt="5"/>
+            </a:pPr>
+            <a:r>
+              <a:rPr lang="de-DE" dirty="0" err="1"/>
+              <a:t>Discrete</a:t>
+            </a:r>
+            <a:r>
+              <a:rPr lang="de-DE" dirty="0"/>
+              <a:t>-time Controllers</a:t>
+            </a:r>
+          </a:p>
+          <a:p>
+            <a:pPr marL="514350" indent="-514350">
+              <a:buFont typeface="+mj-lt"/>
+              <a:buAutoNum type="arabicPeriod" startAt="5"/>
+            </a:pPr>
+            <a:endParaRPr lang="de-DE" dirty="0"/>
+          </a:p>
+          <a:p>
+            <a:pPr marL="514350" indent="-514350">
+              <a:buFont typeface="+mj-lt"/>
+              <a:buAutoNum type="arabicPeriod" startAt="5"/>
+            </a:pPr>
+            <a:r>
+              <a:rPr lang="de-DE" dirty="0"/>
+              <a:t>State Space </a:t>
+            </a:r>
+            <a:r>
+              <a:rPr lang="de-DE" dirty="0" err="1"/>
+              <a:t>Representation</a:t>
+            </a:r>
+            <a:endParaRPr lang="de-DE" dirty="0"/>
+          </a:p>
+          <a:p>
+            <a:pPr marL="514350" indent="-514350">
+              <a:buFont typeface="+mj-lt"/>
+              <a:buAutoNum type="arabicPeriod" startAt="5"/>
+            </a:pPr>
+            <a:endParaRPr lang="de-DE" dirty="0"/>
+          </a:p>
+          <a:p>
+            <a:pPr marL="514350" indent="-514350">
+              <a:buFont typeface="+mj-lt"/>
+              <a:buAutoNum type="arabicPeriod" startAt="5"/>
+            </a:pPr>
+            <a:r>
+              <a:rPr lang="de-DE" dirty="0" err="1"/>
+              <a:t>Advanced</a:t>
+            </a:r>
+            <a:r>
+              <a:rPr lang="de-DE" dirty="0"/>
+              <a:t> Control Methods</a:t>
+            </a:r>
+          </a:p>
+        </p:txBody>
+      </p:sp>
+      <p:sp>
+        <p:nvSpPr>
+          <p:cNvPr id="3" name="Slide Number Placeholder 2">
+            <a:extLst>
+              <a:ext uri="{FF2B5EF4-FFF2-40B4-BE49-F238E27FC236}">
+                <a16:creationId xmlns:a16="http://schemas.microsoft.com/office/drawing/2014/main" id="{A0664D44-83AC-6A7A-17E0-C1AE2ED18FF5}"/>
+              </a:ext>
+            </a:extLst>
+          </p:cNvPr>
+          <p:cNvSpPr>
+            <a:spLocks noGrp="1"/>
+          </p:cNvSpPr>
+          <p:nvPr>
+            <p:ph type="sldNum" sz="quarter" idx="12"/>
+          </p:nvPr>
+        </p:nvSpPr>
+        <p:spPr/>
+        <p:txBody>
+          <a:bodyPr/>
+          <a:lstStyle/>
+          <a:p>
+            <a:fld id="{08C366F5-AFAD-49CB-854A-9D9E238FCA13}" type="slidenum">
+              <a:rPr lang="en-GB" smtClean="0"/>
+              <a:t>2</a:t>
+            </a:fld>
+            <a:endParaRPr lang="en-GB" dirty="0"/>
+          </a:p>
+        </p:txBody>
+      </p:sp>
+    </p:spTree>
+    <p:extLst>
+      <p:ext uri="{BB962C8B-B14F-4D97-AF65-F5344CB8AC3E}">
+        <p14:creationId xmlns:p14="http://schemas.microsoft.com/office/powerpoint/2010/main" val="310336692"/>
+      </p:ext>
+    </p:extLst>
+  </p:cSld>
+  <p:clrMapOvr>
+    <a:masterClrMapping/>
+  </p:clrMapOvr>
+</p:sld>
+</file>
+
+<file path=ppt/slides/slide20.xml><?xml version="1.0" encoding="utf-8"?>
 <p:sld xmlns:a="http://schemas.openxmlformats.org/drawingml/2006/main" xmlns:r="http://schemas.openxmlformats.org/officeDocument/2006/relationships" xmlns:p="http://schemas.openxmlformats.org/presentationml/2006/main">
   <p:cSld>
     <p:spTree>
@@ -8947,7 +10310,7 @@
           <a:p>
             <a:fld id="{08C366F5-AFAD-49CB-854A-9D9E238FCA13}" type="slidenum">
               <a:rPr lang="en-GB" smtClean="0"/>
-              <a:t>19</a:t>
+              <a:t>20</a:t>
             </a:fld>
             <a:endParaRPr lang="en-GB"/>
           </a:p>
@@ -9073,286 +10436,7 @@
 </p:sld>
 </file>
 
-<file path=ppt/slides/slide2.xml><?xml version="1.0" encoding="utf-8"?>
-<p:sld xmlns:a="http://schemas.openxmlformats.org/drawingml/2006/main" xmlns:r="http://schemas.openxmlformats.org/officeDocument/2006/relationships" xmlns:p="http://schemas.openxmlformats.org/presentationml/2006/main">
-  <p:cSld>
-    <p:spTree>
-      <p:nvGrpSpPr>
-        <p:cNvPr id="1" name=""/>
-        <p:cNvGrpSpPr/>
-        <p:nvPr/>
-      </p:nvGrpSpPr>
-      <p:grpSpPr>
-        <a:xfrm>
-          <a:off x="0" y="0"/>
-          <a:ext cx="0" cy="0"/>
-          <a:chOff x="0" y="0"/>
-          <a:chExt cx="0" cy="0"/>
-        </a:xfrm>
-      </p:grpSpPr>
-      <p:sp>
-        <p:nvSpPr>
-          <p:cNvPr id="4" name="Title 3">
-            <a:extLst>
-              <a:ext uri="{FF2B5EF4-FFF2-40B4-BE49-F238E27FC236}">
-                <a16:creationId xmlns:a16="http://schemas.microsoft.com/office/drawing/2014/main" id="{080AD447-446B-E09E-6F4A-522C1DBB462E}"/>
-              </a:ext>
-            </a:extLst>
-          </p:cNvPr>
-          <p:cNvSpPr>
-            <a:spLocks noGrp="1"/>
-          </p:cNvSpPr>
-          <p:nvPr>
-            <p:ph type="title"/>
-          </p:nvPr>
-        </p:nvSpPr>
-        <p:spPr/>
-        <p:txBody>
-          <a:bodyPr/>
-          <a:lstStyle/>
-          <a:p>
-            <a:r>
-              <a:rPr lang="en-GB" dirty="0"/>
-              <a:t>Course Schedule</a:t>
-            </a:r>
-          </a:p>
-        </p:txBody>
-      </p:sp>
-      <p:sp>
-        <p:nvSpPr>
-          <p:cNvPr id="6" name="Inhaltsplatzhalter 5">
-            <a:extLst>
-              <a:ext uri="{FF2B5EF4-FFF2-40B4-BE49-F238E27FC236}">
-                <a16:creationId xmlns:a16="http://schemas.microsoft.com/office/drawing/2014/main" id="{CF502483-E45D-7D7D-D169-ACA4F8327D26}"/>
-              </a:ext>
-            </a:extLst>
-          </p:cNvPr>
-          <p:cNvSpPr>
-            <a:spLocks noGrp="1"/>
-          </p:cNvSpPr>
-          <p:nvPr>
-            <p:ph sz="half" idx="1"/>
-          </p:nvPr>
-        </p:nvSpPr>
-        <p:spPr/>
-        <p:txBody>
-          <a:bodyPr>
-            <a:normAutofit/>
-          </a:bodyPr>
-          <a:lstStyle/>
-          <a:p>
-            <a:pPr marL="514350" indent="-514350">
-              <a:buFont typeface="+mj-lt"/>
-              <a:buAutoNum type="arabicPeriod"/>
-            </a:pPr>
-            <a:r>
-              <a:rPr lang="de-DE" dirty="0"/>
-              <a:t>Systems</a:t>
-            </a:r>
-          </a:p>
-          <a:p>
-            <a:pPr marL="514350" indent="-514350">
-              <a:buFont typeface="+mj-lt"/>
-              <a:buAutoNum type="arabicPeriod"/>
-            </a:pPr>
-            <a:endParaRPr lang="de-DE" dirty="0"/>
-          </a:p>
-          <a:p>
-            <a:pPr marL="514350" indent="-514350">
-              <a:buFont typeface="+mj-lt"/>
-              <a:buAutoNum type="arabicPeriod"/>
-            </a:pPr>
-            <a:r>
-              <a:rPr lang="de-DE" dirty="0" err="1"/>
-              <a:t>Continuous</a:t>
-            </a:r>
-            <a:r>
-              <a:rPr lang="de-DE" dirty="0"/>
-              <a:t>-time Controllers</a:t>
-            </a:r>
-          </a:p>
-          <a:p>
-            <a:pPr marL="514350" indent="-514350">
-              <a:buFont typeface="+mj-lt"/>
-              <a:buAutoNum type="arabicPeriod"/>
-            </a:pPr>
-            <a:endParaRPr lang="de-DE" dirty="0"/>
-          </a:p>
-          <a:p>
-            <a:pPr marL="514350" indent="-514350">
-              <a:buFont typeface="+mj-lt"/>
-              <a:buAutoNum type="arabicPeriod"/>
-            </a:pPr>
-            <a:r>
-              <a:rPr lang="de-DE" dirty="0"/>
-              <a:t>Laplace Domain</a:t>
-            </a:r>
-          </a:p>
-          <a:p>
-            <a:pPr marL="514350" indent="-514350">
-              <a:buFont typeface="+mj-lt"/>
-              <a:buAutoNum type="arabicPeriod"/>
-            </a:pPr>
-            <a:endParaRPr lang="de-DE" dirty="0"/>
-          </a:p>
-          <a:p>
-            <a:pPr marL="514350" indent="-514350">
-              <a:buFont typeface="+mj-lt"/>
-              <a:buAutoNum type="arabicPeriod"/>
-            </a:pPr>
-            <a:r>
-              <a:rPr lang="de-DE" dirty="0"/>
-              <a:t>Poles/Zeros &amp; </a:t>
-            </a:r>
-            <a:r>
-              <a:rPr lang="de-DE" dirty="0" err="1"/>
-              <a:t>Stability</a:t>
-            </a:r>
-            <a:endParaRPr lang="de-DE" dirty="0"/>
-          </a:p>
-        </p:txBody>
-      </p:sp>
-      <p:sp>
-        <p:nvSpPr>
-          <p:cNvPr id="7" name="Inhaltsplatzhalter 6">
-            <a:extLst>
-              <a:ext uri="{FF2B5EF4-FFF2-40B4-BE49-F238E27FC236}">
-                <a16:creationId xmlns:a16="http://schemas.microsoft.com/office/drawing/2014/main" id="{B671907E-FFFA-73EF-8E7D-4AB4EBDD957B}"/>
-              </a:ext>
-            </a:extLst>
-          </p:cNvPr>
-          <p:cNvSpPr>
-            <a:spLocks noGrp="1"/>
-          </p:cNvSpPr>
-          <p:nvPr>
-            <p:ph sz="half" idx="2"/>
-          </p:nvPr>
-        </p:nvSpPr>
-        <p:spPr/>
-        <p:txBody>
-          <a:bodyPr>
-            <a:normAutofit/>
-          </a:bodyPr>
-          <a:lstStyle/>
-          <a:p>
-            <a:pPr marL="514350" indent="-514350">
-              <a:buFont typeface="+mj-lt"/>
-              <a:buAutoNum type="arabicPeriod" startAt="5"/>
-            </a:pPr>
-            <a:r>
-              <a:rPr lang="de-DE" dirty="0"/>
-              <a:t>Controller Design</a:t>
-            </a:r>
-          </a:p>
-          <a:p>
-            <a:pPr marL="514350" indent="-514350">
-              <a:buFont typeface="+mj-lt"/>
-              <a:buAutoNum type="arabicPeriod" startAt="5"/>
-            </a:pPr>
-            <a:endParaRPr lang="de-DE" dirty="0"/>
-          </a:p>
-          <a:p>
-            <a:pPr marL="514350" indent="-514350">
-              <a:buFont typeface="+mj-lt"/>
-              <a:buAutoNum type="arabicPeriod" startAt="5"/>
-            </a:pPr>
-            <a:r>
-              <a:rPr lang="de-DE" dirty="0" err="1"/>
-              <a:t>Discrete</a:t>
-            </a:r>
-            <a:r>
-              <a:rPr lang="de-DE" dirty="0"/>
-              <a:t>-time Controllers</a:t>
-            </a:r>
-          </a:p>
-          <a:p>
-            <a:pPr marL="514350" indent="-514350">
-              <a:buFont typeface="+mj-lt"/>
-              <a:buAutoNum type="arabicPeriod" startAt="5"/>
-            </a:pPr>
-            <a:endParaRPr lang="de-DE" dirty="0"/>
-          </a:p>
-          <a:p>
-            <a:pPr marL="514350" indent="-514350">
-              <a:buFont typeface="+mj-lt"/>
-              <a:buAutoNum type="arabicPeriod" startAt="5"/>
-            </a:pPr>
-            <a:r>
-              <a:rPr lang="de-DE" dirty="0"/>
-              <a:t>State Space </a:t>
-            </a:r>
-            <a:r>
-              <a:rPr lang="de-DE" dirty="0" err="1"/>
-              <a:t>Representation</a:t>
-            </a:r>
-            <a:endParaRPr lang="de-DE" dirty="0"/>
-          </a:p>
-          <a:p>
-            <a:pPr marL="514350" indent="-514350">
-              <a:buFont typeface="+mj-lt"/>
-              <a:buAutoNum type="arabicPeriod" startAt="5"/>
-            </a:pPr>
-            <a:endParaRPr lang="de-DE" dirty="0"/>
-          </a:p>
-          <a:p>
-            <a:pPr marL="514350" indent="-514350">
-              <a:buFont typeface="+mj-lt"/>
-              <a:buAutoNum type="arabicPeriod" startAt="5"/>
-            </a:pPr>
-            <a:r>
-              <a:rPr lang="de-DE" dirty="0" err="1"/>
-              <a:t>Advanced</a:t>
-            </a:r>
-            <a:r>
-              <a:rPr lang="de-DE" dirty="0"/>
-              <a:t> Control Methods</a:t>
-            </a:r>
-          </a:p>
-        </p:txBody>
-      </p:sp>
-      <p:sp>
-        <p:nvSpPr>
-          <p:cNvPr id="3" name="Slide Number Placeholder 2">
-            <a:extLst>
-              <a:ext uri="{FF2B5EF4-FFF2-40B4-BE49-F238E27FC236}">
-                <a16:creationId xmlns:a16="http://schemas.microsoft.com/office/drawing/2014/main" id="{A0664D44-83AC-6A7A-17E0-C1AE2ED18FF5}"/>
-              </a:ext>
-            </a:extLst>
-          </p:cNvPr>
-          <p:cNvSpPr>
-            <a:spLocks noGrp="1"/>
-          </p:cNvSpPr>
-          <p:nvPr>
-            <p:ph type="sldNum" sz="quarter" idx="12"/>
-          </p:nvPr>
-        </p:nvSpPr>
-        <p:spPr/>
-        <p:txBody>
-          <a:bodyPr/>
-          <a:lstStyle/>
-          <a:p>
-            <a:fld id="{08C366F5-AFAD-49CB-854A-9D9E238FCA13}" type="slidenum">
-              <a:rPr lang="en-GB" smtClean="0"/>
-              <a:t>2</a:t>
-            </a:fld>
-            <a:endParaRPr lang="en-GB" dirty="0"/>
-          </a:p>
-        </p:txBody>
-      </p:sp>
-    </p:spTree>
-    <p:extLst>
-      <p:ext uri="{BB962C8B-B14F-4D97-AF65-F5344CB8AC3E}">
-        <p14:creationId xmlns:p14="http://schemas.microsoft.com/office/powerpoint/2010/main" val="310336692"/>
-      </p:ext>
-    </p:extLst>
-  </p:cSld>
-  <p:clrMapOvr>
-    <a:masterClrMapping/>
-  </p:clrMapOvr>
-</p:sld>
-</file>
-
-<file path=ppt/slides/slide20.xml><?xml version="1.0" encoding="utf-8"?>
+<file path=ppt/slides/slide21.xml><?xml version="1.0" encoding="utf-8"?>
 <p:sld xmlns:a="http://schemas.openxmlformats.org/drawingml/2006/main" xmlns:r="http://schemas.openxmlformats.org/officeDocument/2006/relationships" xmlns:p="http://schemas.openxmlformats.org/presentationml/2006/main">
   <p:cSld>
     <p:spTree>
@@ -10086,7 +11170,7 @@
           <a:p>
             <a:fld id="{08C366F5-AFAD-49CB-854A-9D9E238FCA13}" type="slidenum">
               <a:rPr lang="en-GB" smtClean="0"/>
-              <a:t>20</a:t>
+              <a:t>21</a:t>
             </a:fld>
             <a:endParaRPr lang="en-GB"/>
           </a:p>
@@ -10105,7 +11189,7 @@
 </p:sld>
 </file>
 
-<file path=ppt/slides/slide21.xml><?xml version="1.0" encoding="utf-8"?>
+<file path=ppt/slides/slide22.xml><?xml version="1.0" encoding="utf-8"?>
 <p:sld xmlns:a="http://schemas.openxmlformats.org/drawingml/2006/main" xmlns:r="http://schemas.openxmlformats.org/officeDocument/2006/relationships" xmlns:p="http://schemas.openxmlformats.org/presentationml/2006/main">
   <p:cSld>
     <p:spTree>
@@ -10159,8 +11243,8 @@
           </a:p>
         </p:txBody>
       </p:sp>
-      <mc:AlternateContent xmlns:mc="http://schemas.openxmlformats.org/markup-compatibility/2006">
-        <mc:Choice xmlns:a14="http://schemas.microsoft.com/office/drawing/2010/main" Requires="a14">
+      <mc:AlternateContent xmlns:mc="http://schemas.openxmlformats.org/markup-compatibility/2006" xmlns:a14="http://schemas.microsoft.com/office/drawing/2010/main">
+        <mc:Choice Requires="a14">
           <p:sp>
             <p:nvSpPr>
               <p:cNvPr id="3" name="Inhaltsplatzhalter 2">
@@ -10880,7 +11964,7 @@
             </p:txBody>
           </p:sp>
         </mc:Choice>
-        <mc:Fallback>
+        <mc:Fallback xmlns="">
           <p:sp>
             <p:nvSpPr>
               <p:cNvPr id="3" name="Inhaltsplatzhalter 2">
@@ -10943,7 +12027,7 @@
           <a:p>
             <a:fld id="{08C366F5-AFAD-49CB-854A-9D9E238FCA13}" type="slidenum">
               <a:rPr lang="en-GB" smtClean="0"/>
-              <a:t>21</a:t>
+              <a:t>22</a:t>
             </a:fld>
             <a:endParaRPr lang="en-GB"/>
           </a:p>
@@ -10962,7 +12046,7 @@
 </p:sld>
 </file>
 
-<file path=ppt/slides/slide22.xml><?xml version="1.0" encoding="utf-8"?>
+<file path=ppt/slides/slide23.xml><?xml version="1.0" encoding="utf-8"?>
 <p:sld xmlns:a="http://schemas.openxmlformats.org/drawingml/2006/main" xmlns:r="http://schemas.openxmlformats.org/officeDocument/2006/relationships" xmlns:p="http://schemas.openxmlformats.org/presentationml/2006/main">
   <p:cSld>
     <p:spTree>
@@ -11672,7 +12756,7 @@
           <a:p>
             <a:fld id="{08C366F5-AFAD-49CB-854A-9D9E238FCA13}" type="slidenum">
               <a:rPr lang="en-GB" smtClean="0"/>
-              <a:t>22</a:t>
+              <a:t>23</a:t>
             </a:fld>
             <a:endParaRPr lang="en-GB"/>
           </a:p>
@@ -11742,7 +12826,7 @@
 </p:sld>
 </file>
 
-<file path=ppt/slides/slide23.xml><?xml version="1.0" encoding="utf-8"?>
+<file path=ppt/slides/slide24.xml><?xml version="1.0" encoding="utf-8"?>
 <p:sld xmlns:a="http://schemas.openxmlformats.org/drawingml/2006/main" xmlns:r="http://schemas.openxmlformats.org/officeDocument/2006/relationships" xmlns:p="http://schemas.openxmlformats.org/presentationml/2006/main">
   <p:cSld>
     <p:spTree>
@@ -11782,7 +12866,7 @@
           <a:p>
             <a:fld id="{08C366F5-AFAD-49CB-854A-9D9E238FCA13}" type="slidenum">
               <a:rPr lang="en-GB" smtClean="0"/>
-              <a:t>23</a:t>
+              <a:t>24</a:t>
             </a:fld>
             <a:endParaRPr lang="en-GB"/>
           </a:p>
@@ -13370,8 +14454,8 @@
           </a:p>
         </p:txBody>
       </p:sp>
-      <mc:AlternateContent xmlns:mc="http://schemas.openxmlformats.org/markup-compatibility/2006" xmlns:a14="http://schemas.microsoft.com/office/drawing/2010/main">
-        <mc:Choice Requires="a14">
+      <mc:AlternateContent xmlns:mc="http://schemas.openxmlformats.org/markup-compatibility/2006">
+        <mc:Choice xmlns:a14="http://schemas.microsoft.com/office/drawing/2010/main" Requires="a14">
           <p:sp>
             <p:nvSpPr>
               <p:cNvPr id="3" name="Inhaltsplatzhalter 2">
@@ -13391,7 +14475,7 @@
             <p:spPr/>
             <p:txBody>
               <a:bodyPr>
-                <a:normAutofit fontScale="92500" lnSpcReduction="10000"/>
+                <a:normAutofit fontScale="85000" lnSpcReduction="10000"/>
               </a:bodyPr>
               <a:lstStyle/>
               <a:p>
@@ -13524,6 +14608,145 @@
                   </a:rPr>
                   <a:t>stable</a:t>
                 </a:r>
+                <a:endParaRPr lang="de-DE" dirty="0">
+                  <a:sym typeface="Wingdings" pitchFamily="2" charset="2"/>
+                </a:endParaRPr>
+              </a:p>
+              <a:p>
+                <a14:m>
+                  <m:oMath xmlns:m="http://schemas.openxmlformats.org/officeDocument/2006/math">
+                    <m:sSub>
+                      <m:sSubPr>
+                        <m:ctrlPr>
+                          <a:rPr lang="de-DE" i="1">
+                            <a:latin typeface="Cambria Math" panose="02040503050406030204" pitchFamily="18" charset="0"/>
+                          </a:rPr>
+                        </m:ctrlPr>
+                      </m:sSubPr>
+                      <m:e>
+                        <m:r>
+                          <m:rPr>
+                            <m:sty m:val="p"/>
+                          </m:rPr>
+                          <a:rPr lang="de-DE">
+                            <a:latin typeface="Cambria Math" panose="02040503050406030204" pitchFamily="18" charset="0"/>
+                          </a:rPr>
+                          <m:t>Re</m:t>
+                        </m:r>
+                        <m:r>
+                          <a:rPr lang="de-DE" i="1">
+                            <a:latin typeface="Cambria Math" panose="02040503050406030204" pitchFamily="18" charset="0"/>
+                          </a:rPr>
+                          <m:t>(</m:t>
+                        </m:r>
+                        <m:r>
+                          <a:rPr lang="de-DE" i="1">
+                            <a:latin typeface="Cambria Math" panose="02040503050406030204" pitchFamily="18" charset="0"/>
+                          </a:rPr>
+                          <m:t>𝑠</m:t>
+                        </m:r>
+                      </m:e>
+                      <m:sub>
+                        <m:r>
+                          <a:rPr lang="de-DE" i="1">
+                            <a:latin typeface="Cambria Math" panose="02040503050406030204" pitchFamily="18" charset="0"/>
+                          </a:rPr>
+                          <m:t>𝑝</m:t>
+                        </m:r>
+                      </m:sub>
+                    </m:sSub>
+                    <m:r>
+                      <a:rPr lang="de-DE" i="1">
+                        <a:latin typeface="Cambria Math" panose="02040503050406030204" pitchFamily="18" charset="0"/>
+                      </a:rPr>
+                      <m:t>)</m:t>
+                    </m:r>
+                    <m:r>
+                      <a:rPr lang="de-DE" b="0" i="1" smtClean="0">
+                        <a:latin typeface="Cambria Math" panose="02040503050406030204" pitchFamily="18" charset="0"/>
+                      </a:rPr>
+                      <m:t>=</m:t>
+                    </m:r>
+                    <m:r>
+                      <a:rPr lang="de-DE" i="1">
+                        <a:latin typeface="Cambria Math" panose="02040503050406030204" pitchFamily="18" charset="0"/>
+                      </a:rPr>
+                      <m:t>0</m:t>
+                    </m:r>
+                  </m:oMath>
+                </a14:m>
+                <a:r>
+                  <a:rPr lang="de-DE" dirty="0">
+                    <a:sym typeface="Wingdings" pitchFamily="2" charset="2"/>
+                  </a:rPr>
+                  <a:t>, i.e., on </a:t>
+                </a:r>
+                <a:r>
+                  <a:rPr lang="de-DE" dirty="0" err="1">
+                    <a:sym typeface="Wingdings" pitchFamily="2" charset="2"/>
+                  </a:rPr>
+                  <a:t>imaginary</a:t>
+                </a:r>
+                <a:r>
+                  <a:rPr lang="de-DE" dirty="0">
+                    <a:sym typeface="Wingdings" pitchFamily="2" charset="2"/>
+                  </a:rPr>
+                  <a:t> </a:t>
+                </a:r>
+                <a:r>
+                  <a:rPr lang="de-DE" dirty="0" err="1">
+                    <a:sym typeface="Wingdings" pitchFamily="2" charset="2"/>
+                  </a:rPr>
+                  <a:t>axis</a:t>
+                </a:r>
+                <a:r>
+                  <a:rPr lang="de-DE" dirty="0">
+                    <a:sym typeface="Wingdings" pitchFamily="2" charset="2"/>
+                  </a:rPr>
+                  <a:t>: </a:t>
+                </a:r>
+                <a:r>
+                  <a:rPr lang="de-DE" dirty="0" err="1">
+                    <a:sym typeface="Wingdings" pitchFamily="2" charset="2"/>
+                  </a:rPr>
+                  <a:t>purely</a:t>
+                </a:r>
+                <a:r>
+                  <a:rPr lang="de-DE" dirty="0">
+                    <a:sym typeface="Wingdings" pitchFamily="2" charset="2"/>
+                  </a:rPr>
+                  <a:t> </a:t>
+                </a:r>
+                <a:r>
+                  <a:rPr lang="de-DE" dirty="0" err="1">
+                    <a:sym typeface="Wingdings" pitchFamily="2" charset="2"/>
+                  </a:rPr>
+                  <a:t>oscillatory</a:t>
+                </a:r>
+                <a:r>
+                  <a:rPr lang="de-DE" dirty="0">
+                    <a:sym typeface="Wingdings" pitchFamily="2" charset="2"/>
+                  </a:rPr>
+                  <a:t>  </a:t>
+                </a:r>
+                <a:r>
+                  <a:rPr lang="de-DE" dirty="0" err="1">
+                    <a:sym typeface="Wingdings" pitchFamily="2" charset="2"/>
+                  </a:rPr>
+                  <a:t>marginally</a:t>
+                </a:r>
+                <a:r>
+                  <a:rPr lang="de-DE" dirty="0">
+                    <a:sym typeface="Wingdings" pitchFamily="2" charset="2"/>
+                  </a:rPr>
+                  <a:t> </a:t>
+                </a:r>
+                <a:r>
+                  <a:rPr lang="de-DE" dirty="0" err="1">
+                    <a:sym typeface="Wingdings" pitchFamily="2" charset="2"/>
+                  </a:rPr>
+                  <a:t>stable</a:t>
+                </a:r>
                 <a:endParaRPr lang="de-DE" i="1" dirty="0">
                   <a:latin typeface="Cambria Math" panose="02040503050406030204" pitchFamily="18" charset="0"/>
                 </a:endParaRPr>
@@ -13823,7 +15046,7 @@
             </p:txBody>
           </p:sp>
         </mc:Choice>
-        <mc:Fallback xmlns="">
+        <mc:Fallback>
           <p:sp>
             <p:nvSpPr>
               <p:cNvPr id="3" name="Inhaltsplatzhalter 2">
@@ -13844,7 +15067,7 @@
               <a:blipFill>
                 <a:blip r:embed="rId2"/>
                 <a:stretch>
-                  <a:fillRect l="-1086" t="-2616"/>
+                  <a:fillRect l="-965" t="-2616" b="-872"/>
                 </a:stretch>
               </a:blipFill>
             </p:spPr>
@@ -13906,6 +15129,273 @@
 </file>
 
 <file path=ppt/slides/slide7.xml><?xml version="1.0" encoding="utf-8"?>
+<p:sld xmlns:a="http://schemas.openxmlformats.org/drawingml/2006/main" xmlns:r="http://schemas.openxmlformats.org/officeDocument/2006/relationships" xmlns:p="http://schemas.openxmlformats.org/presentationml/2006/main">
+  <p:cSld>
+    <p:spTree>
+      <p:nvGrpSpPr>
+        <p:cNvPr id="1" name=""/>
+        <p:cNvGrpSpPr/>
+        <p:nvPr/>
+      </p:nvGrpSpPr>
+      <p:grpSpPr>
+        <a:xfrm>
+          <a:off x="0" y="0"/>
+          <a:ext cx="0" cy="0"/>
+          <a:chOff x="0" y="0"/>
+          <a:chExt cx="0" cy="0"/>
+        </a:xfrm>
+      </p:grpSpPr>
+      <p:sp>
+        <p:nvSpPr>
+          <p:cNvPr id="5" name="Titel 4">
+            <a:extLst>
+              <a:ext uri="{FF2B5EF4-FFF2-40B4-BE49-F238E27FC236}">
+                <a16:creationId xmlns:a16="http://schemas.microsoft.com/office/drawing/2014/main" id="{69A4A0C7-4207-6835-16D3-3E557356C7F5}"/>
+              </a:ext>
+            </a:extLst>
+          </p:cNvPr>
+          <p:cNvSpPr>
+            <a:spLocks noGrp="1"/>
+          </p:cNvSpPr>
+          <p:nvPr>
+            <p:ph type="title"/>
+          </p:nvPr>
+        </p:nvSpPr>
+        <p:spPr/>
+        <p:txBody>
+          <a:bodyPr>
+            <a:normAutofit/>
+          </a:bodyPr>
+          <a:lstStyle/>
+          <a:p>
+            <a:r>
+              <a:rPr lang="de-DE" sz="4200" dirty="0" err="1">
+                <a:solidFill>
+                  <a:srgbClr val="333333"/>
+                </a:solidFill>
+              </a:rPr>
+              <a:t>Bounded</a:t>
+            </a:r>
+            <a:r>
+              <a:rPr lang="de-DE" sz="4200" dirty="0">
+                <a:solidFill>
+                  <a:srgbClr val="333333"/>
+                </a:solidFill>
+              </a:rPr>
+              <a:t> Input </a:t>
+            </a:r>
+            <a:r>
+              <a:rPr lang="de-DE" sz="4200" dirty="0" err="1">
+                <a:solidFill>
+                  <a:srgbClr val="333333"/>
+                </a:solidFill>
+              </a:rPr>
+              <a:t>Bounded</a:t>
+            </a:r>
+            <a:r>
+              <a:rPr lang="de-DE" sz="4200" dirty="0">
+                <a:solidFill>
+                  <a:srgbClr val="333333"/>
+                </a:solidFill>
+              </a:rPr>
+              <a:t> Output (BIBO) </a:t>
+            </a:r>
+            <a:r>
+              <a:rPr lang="de-DE" sz="4200" dirty="0" err="1">
+                <a:solidFill>
+                  <a:srgbClr val="333333"/>
+                </a:solidFill>
+              </a:rPr>
+              <a:t>Stability</a:t>
+            </a:r>
+            <a:endParaRPr lang="de-DE" sz="4200" dirty="0"/>
+          </a:p>
+        </p:txBody>
+      </p:sp>
+      <p:sp>
+        <p:nvSpPr>
+          <p:cNvPr id="4" name="Foliennummernplatzhalter 3">
+            <a:extLst>
+              <a:ext uri="{FF2B5EF4-FFF2-40B4-BE49-F238E27FC236}">
+                <a16:creationId xmlns:a16="http://schemas.microsoft.com/office/drawing/2014/main" id="{0A5B96D3-8C8C-5245-76D0-DDB0ABD96D65}"/>
+              </a:ext>
+            </a:extLst>
+          </p:cNvPr>
+          <p:cNvSpPr>
+            <a:spLocks noGrp="1"/>
+          </p:cNvSpPr>
+          <p:nvPr>
+            <p:ph type="sldNum" sz="quarter" idx="12"/>
+          </p:nvPr>
+        </p:nvSpPr>
+        <p:spPr/>
+        <p:txBody>
+          <a:bodyPr/>
+          <a:lstStyle/>
+          <a:p>
+            <a:fld id="{08C366F5-AFAD-49CB-854A-9D9E238FCA13}" type="slidenum">
+              <a:rPr lang="en-GB" smtClean="0"/>
+              <a:t>7</a:t>
+            </a:fld>
+            <a:endParaRPr lang="en-GB"/>
+          </a:p>
+        </p:txBody>
+      </p:sp>
+      <p:pic>
+        <p:nvPicPr>
+          <p:cNvPr id="1026" name="Picture 2" descr="Lightbox">
+            <a:extLst>
+              <a:ext uri="{FF2B5EF4-FFF2-40B4-BE49-F238E27FC236}">
+                <a16:creationId xmlns:a16="http://schemas.microsoft.com/office/drawing/2014/main" id="{2770E324-4BDC-052F-A525-701F6CD65489}"/>
+              </a:ext>
+            </a:extLst>
+          </p:cNvPr>
+          <p:cNvPicPr>
+            <a:picLocks noChangeAspect="1" noChangeArrowheads="1"/>
+          </p:cNvPicPr>
+          <p:nvPr/>
+        </p:nvPicPr>
+        <p:blipFill>
+          <a:blip r:embed="rId2">
+            <a:extLst>
+              <a:ext uri="{28A0092B-C50C-407E-A947-70E740481C1C}">
+                <a14:useLocalDpi xmlns:a14="http://schemas.microsoft.com/office/drawing/2010/main" val="0"/>
+              </a:ext>
+            </a:extLst>
+          </a:blip>
+          <a:srcRect/>
+          <a:stretch>
+            <a:fillRect/>
+          </a:stretch>
+        </p:blipFill>
+        <p:spPr bwMode="auto">
+          <a:xfrm>
+            <a:off x="6096000" y="2480985"/>
+            <a:ext cx="6096000" cy="3182144"/>
+          </a:xfrm>
+          <a:prstGeom prst="rect">
+            <a:avLst/>
+          </a:prstGeom>
+          <a:noFill/>
+          <a:extLst>
+            <a:ext uri="{909E8E84-426E-40DD-AFC4-6F175D3DCCD1}">
+              <a14:hiddenFill xmlns:a14="http://schemas.microsoft.com/office/drawing/2010/main">
+                <a:solidFill>
+                  <a:srgbClr val="FFFFFF"/>
+                </a:solidFill>
+              </a14:hiddenFill>
+            </a:ext>
+          </a:extLst>
+        </p:spPr>
+      </p:pic>
+      <p:pic>
+        <p:nvPicPr>
+          <p:cNvPr id="1028" name="Picture 4" descr="Lightbox">
+            <a:extLst>
+              <a:ext uri="{FF2B5EF4-FFF2-40B4-BE49-F238E27FC236}">
+                <a16:creationId xmlns:a16="http://schemas.microsoft.com/office/drawing/2014/main" id="{EAAEB25C-9B6A-B6AF-CA8D-558BF2E0D028}"/>
+              </a:ext>
+            </a:extLst>
+          </p:cNvPr>
+          <p:cNvPicPr>
+            <a:picLocks noChangeAspect="1" noChangeArrowheads="1"/>
+          </p:cNvPicPr>
+          <p:nvPr/>
+        </p:nvPicPr>
+        <p:blipFill>
+          <a:blip r:embed="rId3">
+            <a:extLst>
+              <a:ext uri="{28A0092B-C50C-407E-A947-70E740481C1C}">
+                <a14:useLocalDpi xmlns:a14="http://schemas.microsoft.com/office/drawing/2010/main" val="0"/>
+              </a:ext>
+            </a:extLst>
+          </a:blip>
+          <a:srcRect/>
+          <a:stretch>
+            <a:fillRect/>
+          </a:stretch>
+        </p:blipFill>
+        <p:spPr bwMode="auto">
+          <a:xfrm>
+            <a:off x="313082" y="1708656"/>
+            <a:ext cx="4906617" cy="2021424"/>
+          </a:xfrm>
+          <a:prstGeom prst="rect">
+            <a:avLst/>
+          </a:prstGeom>
+          <a:noFill/>
+          <a:extLst>
+            <a:ext uri="{909E8E84-426E-40DD-AFC4-6F175D3DCCD1}">
+              <a14:hiddenFill xmlns:a14="http://schemas.microsoft.com/office/drawing/2010/main">
+                <a:solidFill>
+                  <a:srgbClr val="FFFFFF"/>
+                </a:solidFill>
+              </a14:hiddenFill>
+            </a:ext>
+          </a:extLst>
+        </p:spPr>
+      </p:pic>
+      <p:pic>
+        <p:nvPicPr>
+          <p:cNvPr id="1030" name="Picture 6" descr="Lightbox">
+            <a:extLst>
+              <a:ext uri="{FF2B5EF4-FFF2-40B4-BE49-F238E27FC236}">
+                <a16:creationId xmlns:a16="http://schemas.microsoft.com/office/drawing/2014/main" id="{50175002-C24B-3B55-AA01-344A8BA4AD71}"/>
+              </a:ext>
+            </a:extLst>
+          </p:cNvPr>
+          <p:cNvPicPr>
+            <a:picLocks noChangeAspect="1" noChangeArrowheads="1"/>
+          </p:cNvPicPr>
+          <p:nvPr/>
+        </p:nvPicPr>
+        <p:blipFill>
+          <a:blip r:embed="rId4">
+            <a:extLst>
+              <a:ext uri="{28A0092B-C50C-407E-A947-70E740481C1C}">
+                <a14:useLocalDpi xmlns:a14="http://schemas.microsoft.com/office/drawing/2010/main" val="0"/>
+              </a:ext>
+            </a:extLst>
+          </a:blip>
+          <a:srcRect/>
+          <a:stretch>
+            <a:fillRect/>
+          </a:stretch>
+        </p:blipFill>
+        <p:spPr bwMode="auto">
+          <a:xfrm>
+            <a:off x="313082" y="4471451"/>
+            <a:ext cx="4906617" cy="2021424"/>
+          </a:xfrm>
+          <a:prstGeom prst="rect">
+            <a:avLst/>
+          </a:prstGeom>
+          <a:noFill/>
+          <a:extLst>
+            <a:ext uri="{909E8E84-426E-40DD-AFC4-6F175D3DCCD1}">
+              <a14:hiddenFill xmlns:a14="http://schemas.microsoft.com/office/drawing/2010/main">
+                <a:solidFill>
+                  <a:srgbClr val="FFFFFF"/>
+                </a:solidFill>
+              </a14:hiddenFill>
+            </a:ext>
+          </a:extLst>
+        </p:spPr>
+      </p:pic>
+    </p:spTree>
+    <p:extLst>
+      <p:ext uri="{BB962C8B-B14F-4D97-AF65-F5344CB8AC3E}">
+        <p14:creationId xmlns:p14="http://schemas.microsoft.com/office/powerpoint/2010/main" val="1578071399"/>
+      </p:ext>
+    </p:extLst>
+  </p:cSld>
+  <p:clrMapOvr>
+    <a:masterClrMapping/>
+  </p:clrMapOvr>
+</p:sld>
+</file>
+
+<file path=ppt/slides/slide8.xml><?xml version="1.0" encoding="utf-8"?>
 <p:sld xmlns:a="http://schemas.openxmlformats.org/drawingml/2006/main" xmlns:r="http://schemas.openxmlformats.org/officeDocument/2006/relationships" xmlns:p="http://schemas.openxmlformats.org/presentationml/2006/main">
   <p:cSld>
     <p:spTree>
@@ -14448,7 +15938,7 @@
           <a:p>
             <a:fld id="{08C366F5-AFAD-49CB-854A-9D9E238FCA13}" type="slidenum">
               <a:rPr lang="en-GB" smtClean="0"/>
-              <a:t>7</a:t>
+              <a:t>8</a:t>
             </a:fld>
             <a:endParaRPr lang="en-GB"/>
           </a:p>
@@ -14467,7 +15957,7 @@
 </p:sld>
 </file>
 
-<file path=ppt/slides/slide8.xml><?xml version="1.0" encoding="utf-8"?>
+<file path=ppt/slides/slide9.xml><?xml version="1.0" encoding="utf-8"?>
 <p:sld xmlns:a="http://schemas.openxmlformats.org/drawingml/2006/main" xmlns:r="http://schemas.openxmlformats.org/officeDocument/2006/relationships" xmlns:p="http://schemas.openxmlformats.org/presentationml/2006/main">
   <p:cSld>
     <p:spTree>
@@ -15142,7 +16632,7 @@
           <a:p>
             <a:fld id="{08C366F5-AFAD-49CB-854A-9D9E238FCA13}" type="slidenum">
               <a:rPr lang="en-GB" smtClean="0"/>
-              <a:t>8</a:t>
+              <a:t>9</a:t>
             </a:fld>
             <a:endParaRPr lang="en-GB"/>
           </a:p>
@@ -15152,1089 +16642,6 @@
     <p:extLst>
       <p:ext uri="{BB962C8B-B14F-4D97-AF65-F5344CB8AC3E}">
         <p14:creationId xmlns:p14="http://schemas.microsoft.com/office/powerpoint/2010/main" val="1587296984"/>
-      </p:ext>
-    </p:extLst>
-  </p:cSld>
-  <p:clrMapOvr>
-    <a:masterClrMapping/>
-  </p:clrMapOvr>
-</p:sld>
-</file>
-
-<file path=ppt/slides/slide9.xml><?xml version="1.0" encoding="utf-8"?>
-<p:sld xmlns:a="http://schemas.openxmlformats.org/drawingml/2006/main" xmlns:r="http://schemas.openxmlformats.org/officeDocument/2006/relationships" xmlns:p="http://schemas.openxmlformats.org/presentationml/2006/main">
-  <p:cSld>
-    <p:spTree>
-      <p:nvGrpSpPr>
-        <p:cNvPr id="1" name=""/>
-        <p:cNvGrpSpPr/>
-        <p:nvPr/>
-      </p:nvGrpSpPr>
-      <p:grpSpPr>
-        <a:xfrm>
-          <a:off x="0" y="0"/>
-          <a:ext cx="0" cy="0"/>
-          <a:chOff x="0" y="0"/>
-          <a:chExt cx="0" cy="0"/>
-        </a:xfrm>
-      </p:grpSpPr>
-      <p:sp>
-        <p:nvSpPr>
-          <p:cNvPr id="2" name="Titel 1">
-            <a:extLst>
-              <a:ext uri="{FF2B5EF4-FFF2-40B4-BE49-F238E27FC236}">
-                <a16:creationId xmlns:a16="http://schemas.microsoft.com/office/drawing/2014/main" id="{FA400246-61A5-767F-909C-8A5B4C446DD2}"/>
-              </a:ext>
-            </a:extLst>
-          </p:cNvPr>
-          <p:cNvSpPr>
-            <a:spLocks noGrp="1"/>
-          </p:cNvSpPr>
-          <p:nvPr>
-            <p:ph type="title"/>
-          </p:nvPr>
-        </p:nvSpPr>
-        <p:spPr/>
-        <p:txBody>
-          <a:bodyPr/>
-          <a:lstStyle/>
-          <a:p>
-            <a:r>
-              <a:rPr lang="de-DE" dirty="0"/>
-              <a:t>Interpretation </a:t>
-            </a:r>
-            <a:r>
-              <a:rPr lang="de-DE" dirty="0" err="1"/>
-              <a:t>of</a:t>
-            </a:r>
-            <a:r>
-              <a:rPr lang="de-DE" dirty="0"/>
-              <a:t> Zeros</a:t>
-            </a:r>
-          </a:p>
-        </p:txBody>
-      </p:sp>
-      <mc:AlternateContent xmlns:mc="http://schemas.openxmlformats.org/markup-compatibility/2006" xmlns:a14="http://schemas.microsoft.com/office/drawing/2010/main">
-        <mc:Choice Requires="a14">
-          <p:sp>
-            <p:nvSpPr>
-              <p:cNvPr id="3" name="Inhaltsplatzhalter 2">
-                <a:extLst>
-                  <a:ext uri="{FF2B5EF4-FFF2-40B4-BE49-F238E27FC236}">
-                    <a16:creationId xmlns:a16="http://schemas.microsoft.com/office/drawing/2014/main" id="{FDEECDF6-3FEB-A177-D7A8-7BB02317806C}"/>
-                  </a:ext>
-                </a:extLst>
-              </p:cNvPr>
-              <p:cNvSpPr>
-                <a:spLocks noGrp="1"/>
-              </p:cNvSpPr>
-              <p:nvPr>
-                <p:ph idx="1"/>
-              </p:nvPr>
-            </p:nvSpPr>
-            <p:spPr/>
-            <p:txBody>
-              <a:bodyPr>
-                <a:normAutofit fontScale="85000" lnSpcReduction="20000"/>
-              </a:bodyPr>
-              <a:lstStyle/>
-              <a:p>
-                <a:pPr marL="0" indent="0">
-                  <a:buNone/>
-                </a:pPr>
-                <a:r>
-                  <a:rPr lang="de-DE" dirty="0"/>
-                  <a:t>Zeros </a:t>
-                </a:r>
-                <a:r>
-                  <a:rPr lang="de-DE" dirty="0" err="1"/>
-                  <a:t>correspond</a:t>
-                </a:r>
-                <a:r>
-                  <a:rPr lang="de-DE" dirty="0"/>
-                  <a:t> </a:t>
-                </a:r>
-                <a:r>
-                  <a:rPr lang="de-DE" dirty="0" err="1"/>
-                  <a:t>to</a:t>
-                </a:r>
-                <a:r>
-                  <a:rPr lang="de-DE" dirty="0"/>
-                  <a:t> </a:t>
-                </a:r>
-                <a:r>
-                  <a:rPr lang="de-DE" dirty="0" err="1"/>
-                  <a:t>multiplications</a:t>
-                </a:r>
-                <a:r>
-                  <a:rPr lang="de-DE" dirty="0"/>
-                  <a:t> </a:t>
-                </a:r>
-                <a:r>
-                  <a:rPr lang="de-DE" dirty="0" err="1"/>
-                  <a:t>with</a:t>
-                </a:r>
-                <a:r>
-                  <a:rPr lang="de-DE" dirty="0"/>
-                  <a:t> </a:t>
-                </a:r>
-                <a14:m>
-                  <m:oMath xmlns:m="http://schemas.openxmlformats.org/officeDocument/2006/math">
-                    <m:r>
-                      <a:rPr lang="de-DE" i="1">
-                        <a:latin typeface="Cambria Math" panose="02040503050406030204" pitchFamily="18" charset="0"/>
-                      </a:rPr>
-                      <m:t>𝑠</m:t>
-                    </m:r>
-                  </m:oMath>
-                </a14:m>
-                <a:r>
-                  <a:rPr lang="de-DE" dirty="0">
-                    <a:sym typeface="Wingdings" pitchFamily="2" charset="2"/>
-                  </a:rPr>
-                  <a:t> </a:t>
-                </a:r>
-                <a:r>
-                  <a:rPr lang="de-DE" dirty="0"/>
-                  <a:t> derivatives </a:t>
-                </a:r>
-                <a:r>
-                  <a:rPr lang="de-DE" dirty="0" err="1"/>
-                  <a:t>of</a:t>
-                </a:r>
-                <a:r>
-                  <a:rPr lang="de-DE" dirty="0"/>
-                  <a:t> </a:t>
-                </a:r>
-                <a:r>
-                  <a:rPr lang="de-DE" dirty="0" err="1"/>
-                  <a:t>the</a:t>
-                </a:r>
-                <a:r>
-                  <a:rPr lang="de-DE" dirty="0"/>
-                  <a:t> </a:t>
-                </a:r>
-                <a:r>
-                  <a:rPr lang="de-DE" dirty="0" err="1"/>
-                  <a:t>input</a:t>
-                </a:r>
-                <a:endParaRPr lang="de-DE" dirty="0"/>
-              </a:p>
-              <a:p>
-                <a:r>
-                  <a:rPr lang="de-DE" dirty="0" err="1"/>
-                  <a:t>Describe</a:t>
-                </a:r>
-                <a:r>
-                  <a:rPr lang="de-DE" dirty="0"/>
-                  <a:t> </a:t>
-                </a:r>
-                <a:r>
-                  <a:rPr lang="de-DE" dirty="0" err="1"/>
-                  <a:t>how</a:t>
-                </a:r>
-                <a:r>
-                  <a:rPr lang="de-DE" dirty="0"/>
-                  <a:t> </a:t>
-                </a:r>
-                <a:r>
-                  <a:rPr lang="de-DE" dirty="0" err="1"/>
-                  <a:t>the</a:t>
-                </a:r>
-                <a:r>
-                  <a:rPr lang="de-DE" dirty="0"/>
-                  <a:t> </a:t>
-                </a:r>
-                <a:r>
-                  <a:rPr lang="de-DE" dirty="0" err="1"/>
-                  <a:t>input</a:t>
-                </a:r>
-                <a:r>
-                  <a:rPr lang="de-DE" dirty="0"/>
-                  <a:t> </a:t>
-                </a:r>
-                <a:r>
-                  <a:rPr lang="de-DE" dirty="0" err="1"/>
-                  <a:t>excites</a:t>
-                </a:r>
-                <a:r>
-                  <a:rPr lang="de-DE" dirty="0"/>
-                  <a:t> </a:t>
-                </a:r>
-                <a:r>
-                  <a:rPr lang="de-DE" dirty="0" err="1"/>
-                  <a:t>the</a:t>
-                </a:r>
-                <a:r>
-                  <a:rPr lang="de-DE" dirty="0"/>
-                  <a:t> </a:t>
-                </a:r>
-                <a:r>
-                  <a:rPr lang="de-DE" dirty="0" err="1"/>
-                  <a:t>natural</a:t>
-                </a:r>
-                <a:r>
-                  <a:rPr lang="de-DE" dirty="0"/>
-                  <a:t> </a:t>
-                </a:r>
-                <a:r>
-                  <a:rPr lang="de-DE" dirty="0" err="1"/>
-                  <a:t>modes</a:t>
-                </a:r>
-                <a:r>
-                  <a:rPr lang="de-DE" dirty="0"/>
-                  <a:t> (</a:t>
-                </a:r>
-                <a:r>
-                  <a:rPr lang="de-DE" dirty="0" err="1"/>
-                  <a:t>described</a:t>
-                </a:r>
-                <a:r>
-                  <a:rPr lang="de-DE" dirty="0"/>
-                  <a:t> </a:t>
-                </a:r>
-                <a:r>
-                  <a:rPr lang="de-DE" dirty="0" err="1"/>
-                  <a:t>by</a:t>
-                </a:r>
-                <a:r>
-                  <a:rPr lang="de-DE" dirty="0"/>
-                  <a:t> </a:t>
-                </a:r>
-                <a:r>
-                  <a:rPr lang="de-DE" dirty="0" err="1"/>
-                  <a:t>the</a:t>
-                </a:r>
-                <a:r>
-                  <a:rPr lang="de-DE" dirty="0"/>
-                  <a:t> </a:t>
-                </a:r>
-                <a:r>
-                  <a:rPr lang="de-DE" dirty="0" err="1"/>
-                  <a:t>poles</a:t>
-                </a:r>
-                <a:r>
-                  <a:rPr lang="de-DE" dirty="0"/>
-                  <a:t>)</a:t>
-                </a:r>
-              </a:p>
-              <a:p>
-                <a:r>
-                  <a:rPr lang="de-DE" dirty="0" err="1"/>
-                  <a:t>Creates</a:t>
-                </a:r>
-                <a:r>
-                  <a:rPr lang="de-DE" dirty="0"/>
-                  <a:t> </a:t>
-                </a:r>
-                <a:r>
-                  <a:rPr lang="de-DE" dirty="0" err="1"/>
-                  <a:t>impulse</a:t>
-                </a:r>
-                <a:r>
-                  <a:rPr lang="de-DE" dirty="0"/>
-                  <a:t>-like </a:t>
-                </a:r>
-                <a:r>
-                  <a:rPr lang="de-DE" dirty="0" err="1"/>
-                  <a:t>behavior</a:t>
-                </a:r>
-                <a:r>
-                  <a:rPr lang="de-DE" dirty="0"/>
-                  <a:t> </a:t>
-                </a:r>
-                <a:r>
-                  <a:rPr lang="de-DE" dirty="0" err="1"/>
-                  <a:t>from</a:t>
-                </a:r>
-                <a:r>
-                  <a:rPr lang="de-DE" dirty="0"/>
-                  <a:t> </a:t>
-                </a:r>
-                <a:r>
-                  <a:rPr lang="de-DE" dirty="0" err="1"/>
-                  <a:t>step</a:t>
-                </a:r>
-                <a:r>
-                  <a:rPr lang="de-DE" dirty="0"/>
-                  <a:t> (</a:t>
-                </a:r>
-                <a14:m>
-                  <m:oMath xmlns:m="http://schemas.openxmlformats.org/officeDocument/2006/math">
-                    <m:f>
-                      <m:fPr>
-                        <m:type m:val="lin"/>
-                        <m:ctrlPr>
-                          <a:rPr lang="de-DE" i="1" smtClean="0">
-                            <a:latin typeface="Cambria Math" panose="02040503050406030204" pitchFamily="18" charset="0"/>
-                          </a:rPr>
-                        </m:ctrlPr>
-                      </m:fPr>
-                      <m:num>
-                        <m:r>
-                          <a:rPr lang="de-DE" b="0" i="1" smtClean="0">
-                            <a:latin typeface="Cambria Math" panose="02040503050406030204" pitchFamily="18" charset="0"/>
-                          </a:rPr>
-                          <m:t>1</m:t>
-                        </m:r>
-                      </m:num>
-                      <m:den>
-                        <m:r>
-                          <a:rPr lang="de-DE" b="0" i="1" smtClean="0">
-                            <a:latin typeface="Cambria Math" panose="02040503050406030204" pitchFamily="18" charset="0"/>
-                          </a:rPr>
-                          <m:t>𝑠</m:t>
-                        </m:r>
-                      </m:den>
-                    </m:f>
-                  </m:oMath>
-                </a14:m>
-                <a:r>
-                  <a:rPr lang="de-DE" dirty="0"/>
-                  <a:t>) </a:t>
-                </a:r>
-                <a:r>
-                  <a:rPr lang="de-DE" dirty="0">
-                    <a:sym typeface="Wingdings" pitchFamily="2" charset="2"/>
-                  </a:rPr>
-                  <a:t> </a:t>
-                </a:r>
-                <a:r>
-                  <a:rPr lang="de-DE" dirty="0" err="1">
-                    <a:sym typeface="Wingdings" pitchFamily="2" charset="2"/>
-                  </a:rPr>
-                  <a:t>faster</a:t>
-                </a:r>
-                <a:r>
-                  <a:rPr lang="de-DE" dirty="0">
-                    <a:sym typeface="Wingdings" pitchFamily="2" charset="2"/>
-                  </a:rPr>
-                  <a:t> initial </a:t>
-                </a:r>
-                <a:r>
-                  <a:rPr lang="de-DE" dirty="0" err="1">
-                    <a:sym typeface="Wingdings" pitchFamily="2" charset="2"/>
-                  </a:rPr>
-                  <a:t>rise</a:t>
-                </a:r>
-                <a:endParaRPr lang="de-DE" dirty="0"/>
-              </a:p>
-              <a:p>
-                <a:r>
-                  <a:rPr lang="de-DE" dirty="0" err="1">
-                    <a:sym typeface="Wingdings" pitchFamily="2" charset="2"/>
-                  </a:rPr>
-                  <a:t>One</a:t>
-                </a:r>
-                <a:r>
-                  <a:rPr lang="de-DE" dirty="0">
-                    <a:sym typeface="Wingdings" pitchFamily="2" charset="2"/>
-                  </a:rPr>
-                  <a:t> </a:t>
-                </a:r>
-                <a:r>
-                  <a:rPr lang="de-DE" dirty="0" err="1">
-                    <a:sym typeface="Wingdings" pitchFamily="2" charset="2"/>
-                  </a:rPr>
-                  <a:t>can</a:t>
-                </a:r>
-                <a:r>
-                  <a:rPr lang="de-DE" dirty="0">
-                    <a:sym typeface="Wingdings" pitchFamily="2" charset="2"/>
-                  </a:rPr>
-                  <a:t> </a:t>
-                </a:r>
-                <a:r>
-                  <a:rPr lang="de-DE" dirty="0" err="1">
-                    <a:sym typeface="Wingdings" pitchFamily="2" charset="2"/>
-                  </a:rPr>
-                  <a:t>cancel</a:t>
-                </a:r>
-                <a:r>
-                  <a:rPr lang="de-DE" dirty="0">
-                    <a:sym typeface="Wingdings" pitchFamily="2" charset="2"/>
-                  </a:rPr>
-                  <a:t> a pole </a:t>
-                </a:r>
-                <a:r>
-                  <a:rPr lang="de-DE" dirty="0" err="1">
-                    <a:sym typeface="Wingdings" pitchFamily="2" charset="2"/>
-                  </a:rPr>
-                  <a:t>with</a:t>
-                </a:r>
-                <a:r>
-                  <a:rPr lang="de-DE" dirty="0">
-                    <a:sym typeface="Wingdings" pitchFamily="2" charset="2"/>
-                  </a:rPr>
-                  <a:t> a </a:t>
-                </a:r>
-                <a:r>
-                  <a:rPr lang="de-DE" dirty="0" err="1">
-                    <a:sym typeface="Wingdings" pitchFamily="2" charset="2"/>
-                  </a:rPr>
-                  <a:t>zero</a:t>
-                </a:r>
-                <a:r>
-                  <a:rPr lang="de-DE" dirty="0">
-                    <a:sym typeface="Wingdings" pitchFamily="2" charset="2"/>
-                  </a:rPr>
-                  <a:t>  </a:t>
-                </a:r>
-                <a:r>
-                  <a:rPr lang="de-DE" dirty="0" err="1">
-                    <a:sym typeface="Wingdings" pitchFamily="2" charset="2"/>
-                  </a:rPr>
-                  <a:t>corresponding</a:t>
-                </a:r>
-                <a:r>
-                  <a:rPr lang="de-DE" dirty="0">
-                    <a:sym typeface="Wingdings" pitchFamily="2" charset="2"/>
-                  </a:rPr>
-                  <a:t> </a:t>
-                </a:r>
-                <a:r>
-                  <a:rPr lang="de-DE" dirty="0" err="1"/>
-                  <a:t>exponential</a:t>
-                </a:r>
-                <a:r>
-                  <a:rPr lang="de-DE" dirty="0"/>
-                  <a:t> </a:t>
-                </a:r>
-                <a:r>
-                  <a:rPr lang="de-DE" dirty="0" err="1"/>
-                  <a:t>term</a:t>
-                </a:r>
-                <a:r>
-                  <a:rPr lang="de-DE" dirty="0"/>
-                  <a:t> </a:t>
-                </a:r>
-                <a:r>
-                  <a:rPr lang="de-DE" dirty="0" err="1"/>
-                  <a:t>of</a:t>
-                </a:r>
-                <a:r>
-                  <a:rPr lang="de-DE" dirty="0"/>
-                  <a:t> </a:t>
-                </a:r>
-                <a:r>
-                  <a:rPr lang="de-DE" dirty="0" err="1"/>
-                  <a:t>the</a:t>
-                </a:r>
-                <a:r>
-                  <a:rPr lang="de-DE" dirty="0"/>
-                  <a:t> pole </a:t>
-                </a:r>
-                <a:r>
-                  <a:rPr lang="de-DE" dirty="0" err="1"/>
-                  <a:t>disappears</a:t>
-                </a:r>
-                <a:r>
-                  <a:rPr lang="de-DE" dirty="0"/>
-                  <a:t> </a:t>
-                </a:r>
-                <a:r>
-                  <a:rPr lang="de-DE" dirty="0" err="1"/>
-                  <a:t>from</a:t>
-                </a:r>
-                <a:r>
-                  <a:rPr lang="de-DE" dirty="0"/>
-                  <a:t> </a:t>
-                </a:r>
-                <a:r>
-                  <a:rPr lang="de-DE" dirty="0" err="1"/>
-                  <a:t>the</a:t>
-                </a:r>
-                <a:r>
-                  <a:rPr lang="de-DE" dirty="0"/>
-                  <a:t> </a:t>
-                </a:r>
-                <a:r>
-                  <a:rPr lang="de-DE" dirty="0" err="1"/>
-                  <a:t>forced</a:t>
-                </a:r>
-                <a:r>
-                  <a:rPr lang="de-DE" dirty="0"/>
-                  <a:t> </a:t>
-                </a:r>
-                <a:r>
-                  <a:rPr lang="de-DE" dirty="0" err="1"/>
-                  <a:t>response</a:t>
-                </a:r>
-                <a:endParaRPr lang="de-DE" dirty="0"/>
-              </a:p>
-              <a:p>
-                <a:r>
-                  <a:rPr lang="de-DE" dirty="0" err="1"/>
-                  <a:t>Amplification</a:t>
-                </a:r>
-                <a:r>
-                  <a:rPr lang="de-DE" dirty="0"/>
-                  <a:t> </a:t>
-                </a:r>
-                <a:r>
-                  <a:rPr lang="de-DE" dirty="0" err="1"/>
-                  <a:t>of</a:t>
-                </a:r>
-                <a:r>
-                  <a:rPr lang="de-DE" dirty="0"/>
-                  <a:t> </a:t>
-                </a:r>
-                <a:r>
-                  <a:rPr lang="de-DE" dirty="0" err="1"/>
-                  <a:t>higher</a:t>
-                </a:r>
-                <a:r>
-                  <a:rPr lang="de-DE" dirty="0"/>
-                  <a:t> </a:t>
-                </a:r>
-                <a:r>
-                  <a:rPr lang="de-DE" dirty="0" err="1"/>
-                  <a:t>frequencies</a:t>
-                </a:r>
-                <a:r>
-                  <a:rPr lang="de-DE" dirty="0"/>
-                  <a:t> (</a:t>
-                </a:r>
-                <a14:m>
-                  <m:oMath xmlns:m="http://schemas.openxmlformats.org/officeDocument/2006/math">
-                    <m:f>
-                      <m:fPr>
-                        <m:ctrlPr>
-                          <a:rPr lang="de-DE" i="1" smtClean="0">
-                            <a:latin typeface="Cambria Math" panose="02040503050406030204" pitchFamily="18" charset="0"/>
-                          </a:rPr>
-                        </m:ctrlPr>
-                      </m:fPr>
-                      <m:num>
-                        <m:r>
-                          <a:rPr lang="de-DE" i="1" smtClean="0">
-                            <a:latin typeface="Cambria Math" panose="02040503050406030204" pitchFamily="18" charset="0"/>
-                          </a:rPr>
-                          <m:t>𝑑</m:t>
-                        </m:r>
-                      </m:num>
-                      <m:den>
-                        <m:r>
-                          <a:rPr lang="de-DE" i="1" smtClean="0">
-                            <a:latin typeface="Cambria Math" panose="02040503050406030204" pitchFamily="18" charset="0"/>
-                          </a:rPr>
-                          <m:t>𝑑</m:t>
-                        </m:r>
-                        <m:r>
-                          <a:rPr lang="de-DE" b="0" i="1" smtClean="0">
-                            <a:latin typeface="Cambria Math" panose="02040503050406030204" pitchFamily="18" charset="0"/>
-                          </a:rPr>
-                          <m:t>𝑡</m:t>
-                        </m:r>
-                      </m:den>
-                    </m:f>
-                    <m:func>
-                      <m:funcPr>
-                        <m:ctrlPr>
-                          <a:rPr lang="de-DE" i="1" smtClean="0">
-                            <a:latin typeface="Cambria Math" panose="02040503050406030204" pitchFamily="18" charset="0"/>
-                          </a:rPr>
-                        </m:ctrlPr>
-                      </m:funcPr>
-                      <m:fName>
-                        <m:r>
-                          <m:rPr>
-                            <m:sty m:val="p"/>
-                          </m:rPr>
-                          <a:rPr lang="de-DE" i="0" smtClean="0">
-                            <a:latin typeface="Cambria Math" panose="02040503050406030204" pitchFamily="18" charset="0"/>
-                          </a:rPr>
-                          <m:t>sin</m:t>
-                        </m:r>
-                      </m:fName>
-                      <m:e>
-                        <m:r>
-                          <a:rPr lang="de-DE" i="1" smtClean="0">
-                            <a:latin typeface="Cambria Math" panose="02040503050406030204" pitchFamily="18" charset="0"/>
-                            <a:ea typeface="Cambria Math" panose="02040503050406030204" pitchFamily="18" charset="0"/>
-                          </a:rPr>
-                          <m:t>𝜔</m:t>
-                        </m:r>
-                        <m:r>
-                          <a:rPr lang="de-DE" b="0" i="1" smtClean="0">
-                            <a:latin typeface="Cambria Math" panose="02040503050406030204" pitchFamily="18" charset="0"/>
-                            <a:ea typeface="Cambria Math" panose="02040503050406030204" pitchFamily="18" charset="0"/>
-                          </a:rPr>
-                          <m:t>𝑡</m:t>
-                        </m:r>
-                      </m:e>
-                    </m:func>
-                    <m:r>
-                      <a:rPr lang="de-DE" b="0" i="1" smtClean="0">
-                        <a:latin typeface="Cambria Math" panose="02040503050406030204" pitchFamily="18" charset="0"/>
-                      </a:rPr>
-                      <m:t>=</m:t>
-                    </m:r>
-                    <m:r>
-                      <a:rPr lang="de-DE" b="0" i="1" smtClean="0">
-                        <a:latin typeface="Cambria Math" panose="02040503050406030204" pitchFamily="18" charset="0"/>
-                        <a:ea typeface="Cambria Math" panose="02040503050406030204" pitchFamily="18" charset="0"/>
-                      </a:rPr>
-                      <m:t>𝜔</m:t>
-                    </m:r>
-                    <m:r>
-                      <a:rPr lang="de-DE" b="0" i="1" smtClean="0">
-                        <a:latin typeface="Cambria Math" panose="02040503050406030204" pitchFamily="18" charset="0"/>
-                        <a:ea typeface="Cambria Math" panose="02040503050406030204" pitchFamily="18" charset="0"/>
-                      </a:rPr>
-                      <m:t>∙</m:t>
-                    </m:r>
-                    <m:func>
-                      <m:funcPr>
-                        <m:ctrlPr>
-                          <a:rPr lang="de-DE" b="0" i="1" smtClean="0">
-                            <a:latin typeface="Cambria Math" panose="02040503050406030204" pitchFamily="18" charset="0"/>
-                            <a:ea typeface="Cambria Math" panose="02040503050406030204" pitchFamily="18" charset="0"/>
-                          </a:rPr>
-                        </m:ctrlPr>
-                      </m:funcPr>
-                      <m:fName>
-                        <m:r>
-                          <m:rPr>
-                            <m:sty m:val="p"/>
-                          </m:rPr>
-                          <a:rPr lang="de-DE" b="0" i="0" smtClean="0">
-                            <a:latin typeface="Cambria Math" panose="02040503050406030204" pitchFamily="18" charset="0"/>
-                            <a:ea typeface="Cambria Math" panose="02040503050406030204" pitchFamily="18" charset="0"/>
-                          </a:rPr>
-                          <m:t>cos</m:t>
-                        </m:r>
-                      </m:fName>
-                      <m:e>
-                        <m:r>
-                          <a:rPr lang="de-DE" b="0" i="1" smtClean="0">
-                            <a:latin typeface="Cambria Math" panose="02040503050406030204" pitchFamily="18" charset="0"/>
-                            <a:ea typeface="Cambria Math" panose="02040503050406030204" pitchFamily="18" charset="0"/>
-                          </a:rPr>
-                          <m:t>𝜔</m:t>
-                        </m:r>
-                        <m:r>
-                          <a:rPr lang="de-DE" b="0" i="1" smtClean="0">
-                            <a:latin typeface="Cambria Math" panose="02040503050406030204" pitchFamily="18" charset="0"/>
-                            <a:ea typeface="Cambria Math" panose="02040503050406030204" pitchFamily="18" charset="0"/>
-                          </a:rPr>
-                          <m:t>𝑡</m:t>
-                        </m:r>
-                      </m:e>
-                    </m:func>
-                  </m:oMath>
-                </a14:m>
-                <a:r>
-                  <a:rPr lang="de-DE" dirty="0"/>
-                  <a:t>)</a:t>
-                </a:r>
-              </a:p>
-              <a:p>
-                <a:pPr marL="0" indent="0">
-                  <a:buNone/>
-                </a:pPr>
-                <a:endParaRPr lang="de-DE" dirty="0"/>
-              </a:p>
-              <a:p>
-                <a:pPr marL="0" indent="0">
-                  <a:buNone/>
-                </a:pPr>
-                <a:r>
-                  <a:rPr lang="de-DE" dirty="0" err="1"/>
-                  <a:t>Frequency-selective</a:t>
-                </a:r>
-                <a:r>
-                  <a:rPr lang="de-DE" dirty="0"/>
-                  <a:t> </a:t>
-                </a:r>
-                <a:r>
-                  <a:rPr lang="de-DE" dirty="0" err="1"/>
-                  <a:t>property</a:t>
-                </a:r>
-                <a:r>
-                  <a:rPr lang="de-DE" dirty="0"/>
-                  <a:t>: </a:t>
-                </a:r>
-                <a:r>
-                  <a:rPr lang="de-DE" dirty="0" err="1"/>
-                  <a:t>system</a:t>
-                </a:r>
-                <a:r>
-                  <a:rPr lang="de-DE" dirty="0"/>
-                  <a:t> </a:t>
-                </a:r>
-                <a:r>
-                  <a:rPr lang="de-DE" dirty="0" err="1"/>
-                  <a:t>blocks</a:t>
-                </a:r>
-                <a:r>
-                  <a:rPr lang="de-DE" dirty="0"/>
-                  <a:t> </a:t>
-                </a:r>
-                <a:r>
-                  <a:rPr lang="de-DE" dirty="0" err="1"/>
-                  <a:t>steady-state</a:t>
-                </a:r>
-                <a:r>
-                  <a:rPr lang="de-DE" dirty="0"/>
-                  <a:t> </a:t>
-                </a:r>
-                <a:r>
-                  <a:rPr lang="de-DE" dirty="0" err="1"/>
-                  <a:t>sinusoidal</a:t>
-                </a:r>
-                <a:r>
-                  <a:rPr lang="de-DE" dirty="0"/>
-                  <a:t> </a:t>
-                </a:r>
-                <a:r>
-                  <a:rPr lang="de-DE" dirty="0" err="1"/>
-                  <a:t>response</a:t>
-                </a:r>
-                <a:r>
-                  <a:rPr lang="de-DE" dirty="0"/>
-                  <a:t> </a:t>
-                </a:r>
-                <a:r>
-                  <a:rPr lang="de-DE" dirty="0" err="1"/>
-                  <a:t>of</a:t>
-                </a:r>
-                <a:r>
-                  <a:rPr lang="de-DE" dirty="0"/>
-                  <a:t> </a:t>
-                </a:r>
-                <a:r>
-                  <a:rPr lang="de-DE" dirty="0" err="1"/>
-                  <a:t>complex</a:t>
-                </a:r>
-                <a:r>
-                  <a:rPr lang="de-DE" dirty="0"/>
-                  <a:t> </a:t>
-                </a:r>
-                <a:r>
-                  <a:rPr lang="de-DE" dirty="0" err="1"/>
-                  <a:t>frequency</a:t>
-                </a:r>
-                <a:r>
-                  <a:rPr lang="de-DE" dirty="0"/>
-                  <a:t> </a:t>
-                </a:r>
-                <a:r>
-                  <a:rPr lang="de-DE" dirty="0" err="1"/>
-                  <a:t>of</a:t>
-                </a:r>
-                <a:r>
-                  <a:rPr lang="de-DE" dirty="0"/>
-                  <a:t> a </a:t>
-                </a:r>
-                <a:r>
-                  <a:rPr lang="de-DE" dirty="0" err="1"/>
-                  <a:t>zero</a:t>
-                </a:r>
-                <a:r>
-                  <a:rPr lang="de-DE" dirty="0"/>
-                  <a:t> (</a:t>
-                </a:r>
-                <a:r>
-                  <a:rPr lang="de-DE" dirty="0" err="1"/>
-                  <a:t>despite</a:t>
-                </a:r>
-                <a:r>
-                  <a:rPr lang="de-DE" dirty="0"/>
-                  <a:t> </a:t>
-                </a:r>
-                <a:r>
-                  <a:rPr lang="de-DE" dirty="0" err="1"/>
-                  <a:t>nonzero</a:t>
-                </a:r>
-                <a:r>
-                  <a:rPr lang="de-DE" dirty="0"/>
-                  <a:t> </a:t>
-                </a:r>
-                <a:r>
-                  <a:rPr lang="de-DE" dirty="0" err="1"/>
-                  <a:t>input</a:t>
-                </a:r>
-                <a:r>
-                  <a:rPr lang="de-DE" dirty="0"/>
-                  <a:t>)</a:t>
-                </a:r>
-              </a:p>
-              <a:p>
-                <a:pPr marL="0" indent="0">
-                  <a:buNone/>
-                </a:pPr>
-                <a:endParaRPr lang="de-DE" dirty="0"/>
-              </a:p>
-              <a:p>
-                <a:pPr marL="0" indent="0">
-                  <a:buNone/>
-                </a:pPr>
-                <a:r>
-                  <a:rPr lang="de-DE" dirty="0"/>
-                  <a:t>More </a:t>
-                </a:r>
-                <a:r>
-                  <a:rPr lang="de-DE" dirty="0" err="1"/>
-                  <a:t>zeros</a:t>
-                </a:r>
-                <a:r>
-                  <a:rPr lang="de-DE" dirty="0"/>
-                  <a:t> </a:t>
-                </a:r>
-                <a:r>
-                  <a:rPr lang="de-DE" dirty="0" err="1"/>
-                  <a:t>mean</a:t>
-                </a:r>
-                <a:r>
-                  <a:rPr lang="de-DE" dirty="0"/>
-                  <a:t> a </a:t>
-                </a:r>
-                <a:r>
-                  <a:rPr lang="de-DE" dirty="0" err="1"/>
-                  <a:t>stronger</a:t>
-                </a:r>
-                <a:r>
-                  <a:rPr lang="de-DE" dirty="0"/>
-                  <a:t> </a:t>
-                </a:r>
-                <a:r>
-                  <a:rPr lang="de-DE" dirty="0" err="1"/>
-                  <a:t>shaping</a:t>
-                </a:r>
-                <a:r>
-                  <a:rPr lang="de-DE" dirty="0"/>
-                  <a:t> </a:t>
-                </a:r>
-                <a:r>
-                  <a:rPr lang="de-DE" dirty="0" err="1"/>
-                  <a:t>of</a:t>
-                </a:r>
-                <a:r>
-                  <a:rPr lang="de-DE" dirty="0"/>
-                  <a:t> </a:t>
-                </a:r>
-                <a:r>
-                  <a:rPr lang="de-DE" dirty="0" err="1"/>
-                  <a:t>the</a:t>
-                </a:r>
-                <a:r>
-                  <a:rPr lang="de-DE" dirty="0"/>
-                  <a:t> </a:t>
-                </a:r>
-                <a:r>
-                  <a:rPr lang="de-DE" dirty="0" err="1"/>
-                  <a:t>input</a:t>
-                </a:r>
-                <a:r>
-                  <a:rPr lang="de-DE" dirty="0"/>
-                  <a:t> </a:t>
-                </a:r>
-                <a:r>
-                  <a:rPr lang="de-DE" dirty="0" err="1"/>
-                  <a:t>response</a:t>
-                </a:r>
-                <a:r>
-                  <a:rPr lang="de-DE" dirty="0"/>
-                  <a:t> and an </a:t>
-                </a:r>
-                <a:r>
-                  <a:rPr lang="de-DE" dirty="0" err="1"/>
-                  <a:t>increase</a:t>
-                </a:r>
-                <a:r>
-                  <a:rPr lang="de-DE" dirty="0"/>
-                  <a:t> </a:t>
-                </a:r>
-                <a:r>
-                  <a:rPr lang="de-DE" dirty="0" err="1"/>
-                  <a:t>of</a:t>
-                </a:r>
-                <a:r>
-                  <a:rPr lang="de-DE" dirty="0"/>
-                  <a:t> high-</a:t>
-                </a:r>
-                <a:r>
-                  <a:rPr lang="de-DE" dirty="0" err="1"/>
-                  <a:t>frequency</a:t>
-                </a:r>
-                <a:r>
-                  <a:rPr lang="de-DE" dirty="0"/>
-                  <a:t> </a:t>
-                </a:r>
-                <a:r>
-                  <a:rPr lang="de-DE" dirty="0" err="1"/>
-                  <a:t>gain</a:t>
-                </a:r>
-                <a:r>
-                  <a:rPr lang="de-DE" dirty="0"/>
-                  <a:t>.</a:t>
-                </a:r>
-              </a:p>
-            </p:txBody>
-          </p:sp>
-        </mc:Choice>
-        <mc:Fallback xmlns="">
-          <p:sp>
-            <p:nvSpPr>
-              <p:cNvPr id="3" name="Inhaltsplatzhalter 2">
-                <a:extLst>
-                  <a:ext uri="{FF2B5EF4-FFF2-40B4-BE49-F238E27FC236}">
-                    <a16:creationId xmlns:a16="http://schemas.microsoft.com/office/drawing/2014/main" id="{FDEECDF6-3FEB-A177-D7A8-7BB02317806C}"/>
-                  </a:ext>
-                </a:extLst>
-              </p:cNvPr>
-              <p:cNvSpPr>
-                <a:spLocks noGrp="1" noRot="1" noChangeAspect="1" noMove="1" noResize="1" noEditPoints="1" noAdjustHandles="1" noChangeArrowheads="1" noChangeShapeType="1" noTextEdit="1"/>
-              </p:cNvSpPr>
-              <p:nvPr>
-                <p:ph idx="1"/>
-              </p:nvPr>
-            </p:nvSpPr>
-            <p:spPr>
-              <a:blipFill>
-                <a:blip r:embed="rId2"/>
-                <a:stretch>
-                  <a:fillRect l="-965" t="-3198" r="-121" b="-2326"/>
-                </a:stretch>
-              </a:blipFill>
-            </p:spPr>
-            <p:txBody>
-              <a:bodyPr/>
-              <a:lstStyle/>
-              <a:p>
-                <a:r>
-                  <a:rPr lang="de-DE">
-                    <a:noFill/>
-                  </a:rPr>
-                  <a:t> </a:t>
-                </a:r>
-              </a:p>
-            </p:txBody>
-          </p:sp>
-        </mc:Fallback>
-      </mc:AlternateContent>
-      <p:sp>
-        <p:nvSpPr>
-          <p:cNvPr id="4" name="Foliennummernplatzhalter 3">
-            <a:extLst>
-              <a:ext uri="{FF2B5EF4-FFF2-40B4-BE49-F238E27FC236}">
-                <a16:creationId xmlns:a16="http://schemas.microsoft.com/office/drawing/2014/main" id="{F75A1E12-F588-EDED-8AD9-0CC86AD6B7B4}"/>
-              </a:ext>
-            </a:extLst>
-          </p:cNvPr>
-          <p:cNvSpPr>
-            <a:spLocks noGrp="1"/>
-          </p:cNvSpPr>
-          <p:nvPr>
-            <p:ph type="sldNum" sz="quarter" idx="12"/>
-          </p:nvPr>
-        </p:nvSpPr>
-        <p:spPr/>
-        <p:txBody>
-          <a:bodyPr/>
-          <a:lstStyle/>
-          <a:p>
-            <a:fld id="{08C366F5-AFAD-49CB-854A-9D9E238FCA13}" type="slidenum">
-              <a:rPr lang="en-GB" smtClean="0"/>
-              <a:t>9</a:t>
-            </a:fld>
-            <a:endParaRPr lang="en-GB"/>
-          </a:p>
-        </p:txBody>
-      </p:sp>
-      <p:sp>
-        <p:nvSpPr>
-          <p:cNvPr id="5" name="Textfeld 4">
-            <a:extLst>
-              <a:ext uri="{FF2B5EF4-FFF2-40B4-BE49-F238E27FC236}">
-                <a16:creationId xmlns:a16="http://schemas.microsoft.com/office/drawing/2014/main" id="{7E10F2AA-6871-F9EE-6FE9-AA54AF034574}"/>
-              </a:ext>
-            </a:extLst>
-          </p:cNvPr>
-          <p:cNvSpPr txBox="1"/>
-          <p:nvPr/>
-        </p:nvSpPr>
-        <p:spPr>
-          <a:xfrm>
-            <a:off x="8368748" y="230188"/>
-            <a:ext cx="3516795" cy="646331"/>
-          </a:xfrm>
-          <a:prstGeom prst="rect">
-            <a:avLst/>
-          </a:prstGeom>
-          <a:noFill/>
-          <a:ln>
-            <a:solidFill>
-              <a:schemeClr val="tx1"/>
-            </a:solidFill>
-          </a:ln>
-        </p:spPr>
-        <p:txBody>
-          <a:bodyPr wrap="square" rtlCol="0">
-            <a:spAutoFit/>
-          </a:bodyPr>
-          <a:lstStyle/>
-          <a:p>
-            <a:r>
-              <a:rPr lang="de-DE" dirty="0"/>
-              <a:t>Zeros </a:t>
-            </a:r>
-            <a:r>
-              <a:rPr lang="de-DE" dirty="0" err="1"/>
-              <a:t>alone</a:t>
-            </a:r>
-            <a:r>
-              <a:rPr lang="de-DE" dirty="0"/>
-              <a:t> do not </a:t>
-            </a:r>
-            <a:r>
-              <a:rPr lang="de-DE" dirty="0" err="1"/>
-              <a:t>make</a:t>
-            </a:r>
-            <a:r>
-              <a:rPr lang="de-DE" dirty="0"/>
-              <a:t> a </a:t>
-            </a:r>
-            <a:r>
-              <a:rPr lang="de-DE" dirty="0" err="1"/>
-              <a:t>system</a:t>
-            </a:r>
-            <a:r>
-              <a:rPr lang="de-DE" dirty="0"/>
-              <a:t> </a:t>
-            </a:r>
-            <a:r>
-              <a:rPr lang="de-DE" dirty="0" err="1"/>
-              <a:t>unstable</a:t>
-            </a:r>
-            <a:r>
-              <a:rPr lang="de-DE" dirty="0"/>
-              <a:t>, </a:t>
-            </a:r>
-            <a:r>
-              <a:rPr lang="de-DE" dirty="0" err="1"/>
-              <a:t>only</a:t>
-            </a:r>
-            <a:r>
-              <a:rPr lang="de-DE" dirty="0"/>
-              <a:t> </a:t>
-            </a:r>
-            <a:r>
-              <a:rPr lang="de-DE" dirty="0" err="1"/>
-              <a:t>poles</a:t>
-            </a:r>
-            <a:r>
-              <a:rPr lang="de-DE" dirty="0"/>
-              <a:t> in RHP do.</a:t>
-            </a:r>
-          </a:p>
-        </p:txBody>
-      </p:sp>
-    </p:spTree>
-    <p:extLst>
-      <p:ext uri="{BB962C8B-B14F-4D97-AF65-F5344CB8AC3E}">
-        <p14:creationId xmlns:p14="http://schemas.microsoft.com/office/powerpoint/2010/main" val="77516454"/>
       </p:ext>
     </p:extLst>
   </p:cSld>

--- a/slides/4_stability.pptx
+++ b/slides/4_stability.pptx
@@ -502,7 +502,7 @@
           <a:p>
             <a:fld id="{506E0FD1-891F-4B1E-916D-E9B585160BB8}" type="datetimeFigureOut">
               <a:rPr lang="en-GB" smtClean="0"/>
-              <a:t>11/03/2026</a:t>
+              <a:t>15/03/2026</a:t>
             </a:fld>
             <a:endParaRPr lang="en-GB"/>
           </a:p>
@@ -919,7 +919,7 @@
           <a:p>
             <a:fld id="{D68C3F22-27B2-44E3-9C5F-D08126455F6F}" type="datetime1">
               <a:rPr lang="en-GB" smtClean="0"/>
-              <a:t>11/03/2026</a:t>
+              <a:t>15/03/2026</a:t>
             </a:fld>
             <a:endParaRPr lang="en-GB"/>
           </a:p>
@@ -1119,7 +1119,7 @@
           <a:p>
             <a:fld id="{1CD03846-7BF6-4FB6-A921-FF3379ADBD4C}" type="datetime1">
               <a:rPr lang="en-GB" smtClean="0"/>
-              <a:t>11/03/2026</a:t>
+              <a:t>15/03/2026</a:t>
             </a:fld>
             <a:endParaRPr lang="en-GB"/>
           </a:p>
@@ -1329,7 +1329,7 @@
           <a:p>
             <a:fld id="{99E1B91A-3FD0-4144-9C84-63E9688ED2FE}" type="datetime1">
               <a:rPr lang="en-GB" smtClean="0"/>
-              <a:t>11/03/2026</a:t>
+              <a:t>15/03/2026</a:t>
             </a:fld>
             <a:endParaRPr lang="en-GB"/>
           </a:p>
@@ -1529,7 +1529,7 @@
           <a:p>
             <a:fld id="{5295ED7B-FEAD-4734-819F-93EF4B0EA908}" type="datetime1">
               <a:rPr lang="en-GB" smtClean="0"/>
-              <a:t>11/03/2026</a:t>
+              <a:t>15/03/2026</a:t>
             </a:fld>
             <a:endParaRPr lang="en-GB"/>
           </a:p>
@@ -1805,7 +1805,7 @@
           <a:p>
             <a:fld id="{D2D5D4B4-C926-4B45-8815-1ED8911179A2}" type="datetime1">
               <a:rPr lang="en-GB" smtClean="0"/>
-              <a:t>11/03/2026</a:t>
+              <a:t>15/03/2026</a:t>
             </a:fld>
             <a:endParaRPr lang="en-GB"/>
           </a:p>
@@ -2073,7 +2073,7 @@
           <a:p>
             <a:fld id="{B4C5210A-0E37-4935-93AF-69F21A5F712F}" type="datetime1">
               <a:rPr lang="en-GB" smtClean="0"/>
-              <a:t>11/03/2026</a:t>
+              <a:t>15/03/2026</a:t>
             </a:fld>
             <a:endParaRPr lang="en-GB"/>
           </a:p>
@@ -2488,7 +2488,7 @@
           <a:p>
             <a:fld id="{3D3A6B2F-436C-4691-80E8-9C890E000E9D}" type="datetime1">
               <a:rPr lang="en-GB" smtClean="0"/>
-              <a:t>11/03/2026</a:t>
+              <a:t>15/03/2026</a:t>
             </a:fld>
             <a:endParaRPr lang="en-GB"/>
           </a:p>
@@ -2630,7 +2630,7 @@
           <a:p>
             <a:fld id="{84385F4C-D74B-496F-8D21-97E3549C783B}" type="datetime1">
               <a:rPr lang="en-GB" smtClean="0"/>
-              <a:t>11/03/2026</a:t>
+              <a:t>15/03/2026</a:t>
             </a:fld>
             <a:endParaRPr lang="en-GB"/>
           </a:p>
@@ -2743,7 +2743,7 @@
           <a:p>
             <a:fld id="{0CBDCB32-C241-4703-A832-4EB47BD54E83}" type="datetime1">
               <a:rPr lang="en-GB" smtClean="0"/>
-              <a:t>11/03/2026</a:t>
+              <a:t>15/03/2026</a:t>
             </a:fld>
             <a:endParaRPr lang="en-GB"/>
           </a:p>
@@ -3056,7 +3056,7 @@
           <a:p>
             <a:fld id="{85C150FF-BE95-4D25-A16A-E368A81CBF24}" type="datetime1">
               <a:rPr lang="en-GB" smtClean="0"/>
-              <a:t>11/03/2026</a:t>
+              <a:t>15/03/2026</a:t>
             </a:fld>
             <a:endParaRPr lang="en-GB"/>
           </a:p>
@@ -3345,7 +3345,7 @@
           <a:p>
             <a:fld id="{F3C5DB4B-B349-43C9-A424-BADA723AD9F1}" type="datetime1">
               <a:rPr lang="en-GB" smtClean="0"/>
-              <a:t>11/03/2026</a:t>
+              <a:t>15/03/2026</a:t>
             </a:fld>
             <a:endParaRPr lang="en-GB"/>
           </a:p>
@@ -3588,7 +3588,7 @@
           <a:p>
             <a:fld id="{12632426-0A0C-405F-A3D0-2D11AA44702A}" type="datetime1">
               <a:rPr lang="en-GB" smtClean="0"/>
-              <a:t>11/03/2026</a:t>
+              <a:t>15/03/2026</a:t>
             </a:fld>
             <a:endParaRPr lang="en-GB"/>
           </a:p>
@@ -8150,8 +8150,8 @@
           </a:p>
         </p:txBody>
       </p:sp>
-      <mc:AlternateContent xmlns:mc="http://schemas.openxmlformats.org/markup-compatibility/2006" xmlns:a14="http://schemas.microsoft.com/office/drawing/2010/main">
-        <mc:Choice Requires="a14">
+      <mc:AlternateContent xmlns:mc="http://schemas.openxmlformats.org/markup-compatibility/2006">
+        <mc:Choice xmlns:a14="http://schemas.microsoft.com/office/drawing/2010/main" Requires="a14">
           <p:sp>
             <p:nvSpPr>
               <p:cNvPr id="3" name="Inhaltsplatzhalter 2">
@@ -8171,7 +8171,7 @@
             <p:spPr/>
             <p:txBody>
               <a:bodyPr>
-                <a:normAutofit/>
+                <a:normAutofit fontScale="92500" lnSpcReduction="10000"/>
               </a:bodyPr>
               <a:lstStyle/>
               <a:p>
@@ -8278,7 +8278,7 @@
                 </a:r>
                 <a:r>
                   <a:rPr lang="de-DE" dirty="0"/>
-                  <a:t> </a:t>
+                  <a:t> (</a:t>
                 </a:r>
                 <a:r>
                   <a:rPr lang="de-DE" dirty="0" err="1"/>
@@ -8307,34 +8307,36 @@
                 <a14:m>
                   <m:oMath xmlns:m="http://schemas.openxmlformats.org/officeDocument/2006/math">
                     <m:r>
-                      <a:rPr lang="de-DE" i="1">
+                      <a:rPr lang="de-DE" b="0" i="1" smtClean="0">
                         <a:latin typeface="Cambria Math" panose="02040503050406030204" pitchFamily="18" charset="0"/>
+                        <a:ea typeface="Cambria Math" panose="02040503050406030204" pitchFamily="18" charset="0"/>
                       </a:rPr>
                       <m:t>𝐻</m:t>
                     </m:r>
-                    <m:r>
-                      <a:rPr lang="de-DE" i="1">
-                        <a:latin typeface="Cambria Math" panose="02040503050406030204" pitchFamily="18" charset="0"/>
-                      </a:rPr>
-                      <m:t>(</m:t>
-                    </m:r>
-                    <m:r>
-                      <a:rPr lang="de-DE" i="1">
-                        <a:latin typeface="Cambria Math" panose="02040503050406030204" pitchFamily="18" charset="0"/>
-                      </a:rPr>
-                      <m:t>𝑠</m:t>
-                    </m:r>
-                    <m:r>
-                      <a:rPr lang="de-DE" b="0" i="1" smtClean="0">
-                        <a:latin typeface="Cambria Math" panose="02040503050406030204" pitchFamily="18" charset="0"/>
-                      </a:rPr>
-                      <m:t>)</m:t>
-                    </m:r>
+                    <m:d>
+                      <m:dPr>
+                        <m:ctrlPr>
+                          <a:rPr lang="de-DE" i="1">
+                            <a:latin typeface="Cambria Math" panose="02040503050406030204" pitchFamily="18" charset="0"/>
+                            <a:ea typeface="Cambria Math" panose="02040503050406030204" pitchFamily="18" charset="0"/>
+                          </a:rPr>
+                        </m:ctrlPr>
+                      </m:dPr>
+                      <m:e>
+                        <m:r>
+                          <a:rPr lang="de-DE" i="1">
+                            <a:latin typeface="Cambria Math" panose="02040503050406030204" pitchFamily="18" charset="0"/>
+                            <a:ea typeface="Cambria Math" panose="02040503050406030204" pitchFamily="18" charset="0"/>
+                          </a:rPr>
+                          <m:t>𝑠</m:t>
+                        </m:r>
+                      </m:e>
+                    </m:d>
                   </m:oMath>
                 </a14:m>
                 <a:r>
                   <a:rPr lang="de-DE" dirty="0"/>
-                  <a:t> </a:t>
+                  <a:t>) </a:t>
                 </a:r>
                 <a:r>
                   <a:rPr lang="de-DE" dirty="0" err="1"/>
@@ -8357,133 +8359,212 @@
                 <a:pPr marL="0" indent="0">
                   <a:buNone/>
                 </a:pPr>
+                <a:endParaRPr lang="de-DE" b="0" i="1" dirty="0">
+                  <a:latin typeface="Cambria Math" panose="02040503050406030204" pitchFamily="18" charset="0"/>
+                </a:endParaRPr>
+              </a:p>
+              <a:p>
+                <a:pPr marL="0" indent="0">
+                  <a:buNone/>
+                </a:pPr>
+                <a:r>
+                  <a:rPr lang="de-DE" b="0" dirty="0"/>
+                  <a:t>	</a:t>
+                </a:r>
                 <a14:m>
-                  <m:oMathPara xmlns:m="http://schemas.openxmlformats.org/officeDocument/2006/math">
-                    <m:oMathParaPr>
-                      <m:jc m:val="center"/>
-                    </m:oMathParaPr>
-                    <m:oMath xmlns:m="http://schemas.openxmlformats.org/officeDocument/2006/math">
-                      <m:r>
-                        <a:rPr lang="de-DE" b="0" i="1" smtClean="0">
-                          <a:latin typeface="Cambria Math" panose="02040503050406030204" pitchFamily="18" charset="0"/>
-                        </a:rPr>
-                        <m:t>𝑇</m:t>
-                      </m:r>
-                      <m:d>
-                        <m:dPr>
-                          <m:ctrlPr>
-                            <a:rPr lang="de-DE" b="0" i="1" smtClean="0">
-                              <a:latin typeface="Cambria Math" panose="02040503050406030204" pitchFamily="18" charset="0"/>
-                            </a:rPr>
-                          </m:ctrlPr>
-                        </m:dPr>
-                        <m:e>
-                          <m:r>
-                            <a:rPr lang="de-DE" b="0" i="1" smtClean="0">
-                              <a:latin typeface="Cambria Math" panose="02040503050406030204" pitchFamily="18" charset="0"/>
-                            </a:rPr>
-                            <m:t>𝑠</m:t>
-                          </m:r>
-                        </m:e>
-                      </m:d>
-                      <m:r>
-                        <a:rPr lang="de-DE" b="0" i="1" smtClean="0">
-                          <a:latin typeface="Cambria Math" panose="02040503050406030204" pitchFamily="18" charset="0"/>
-                        </a:rPr>
-                        <m:t>=</m:t>
-                      </m:r>
-                      <m:f>
-                        <m:fPr>
-                          <m:ctrlPr>
-                            <a:rPr lang="de-DE" i="1" smtClean="0">
-                              <a:latin typeface="Cambria Math" panose="02040503050406030204" pitchFamily="18" charset="0"/>
-                            </a:rPr>
-                          </m:ctrlPr>
-                        </m:fPr>
-                        <m:num>
-                          <m:r>
-                            <a:rPr lang="de-DE" b="0" i="1" smtClean="0">
-                              <a:latin typeface="Cambria Math" panose="02040503050406030204" pitchFamily="18" charset="0"/>
-                            </a:rPr>
-                            <m:t>𝐺</m:t>
-                          </m:r>
-                          <m:r>
-                            <a:rPr lang="de-DE" b="0" i="1" smtClean="0">
-                              <a:latin typeface="Cambria Math" panose="02040503050406030204" pitchFamily="18" charset="0"/>
-                            </a:rPr>
-                            <m:t>(</m:t>
-                          </m:r>
-                          <m:r>
-                            <a:rPr lang="de-DE" b="0" i="1" smtClean="0">
-                              <a:latin typeface="Cambria Math" panose="02040503050406030204" pitchFamily="18" charset="0"/>
-                            </a:rPr>
-                            <m:t>𝑠</m:t>
-                          </m:r>
-                          <m:r>
-                            <a:rPr lang="de-DE" b="0" i="1" smtClean="0">
-                              <a:latin typeface="Cambria Math" panose="02040503050406030204" pitchFamily="18" charset="0"/>
-                            </a:rPr>
-                            <m:t>)</m:t>
-                          </m:r>
-                        </m:num>
-                        <m:den>
-                          <m:r>
-                            <a:rPr lang="de-DE" b="0" i="1" smtClean="0">
-                              <a:latin typeface="Cambria Math" panose="02040503050406030204" pitchFamily="18" charset="0"/>
-                            </a:rPr>
-                            <m:t>1+</m:t>
-                          </m:r>
-                          <m:r>
-                            <a:rPr lang="de-DE" b="0" i="1" smtClean="0">
-                              <a:latin typeface="Cambria Math" panose="02040503050406030204" pitchFamily="18" charset="0"/>
-                            </a:rPr>
-                            <m:t>𝐺</m:t>
-                          </m:r>
-                          <m:d>
-                            <m:dPr>
-                              <m:ctrlPr>
-                                <a:rPr lang="de-DE" b="0" i="1" smtClean="0">
-                                  <a:latin typeface="Cambria Math" panose="02040503050406030204" pitchFamily="18" charset="0"/>
-                                </a:rPr>
-                              </m:ctrlPr>
-                            </m:dPr>
-                            <m:e>
-                              <m:r>
-                                <a:rPr lang="de-DE" b="0" i="1" smtClean="0">
-                                  <a:latin typeface="Cambria Math" panose="02040503050406030204" pitchFamily="18" charset="0"/>
-                                </a:rPr>
-                                <m:t>𝑠</m:t>
-                              </m:r>
-                            </m:e>
-                          </m:d>
-                          <m:r>
-                            <a:rPr lang="de-DE" b="0" i="1" smtClean="0">
-                              <a:latin typeface="Cambria Math" panose="02040503050406030204" pitchFamily="18" charset="0"/>
-                            </a:rPr>
-                            <m:t>𝐻</m:t>
-                          </m:r>
-                          <m:r>
-                            <a:rPr lang="de-DE" b="0" i="1" smtClean="0">
-                              <a:latin typeface="Cambria Math" panose="02040503050406030204" pitchFamily="18" charset="0"/>
-                            </a:rPr>
-                            <m:t>(</m:t>
-                          </m:r>
-                          <m:r>
-                            <a:rPr lang="de-DE" b="0" i="1" smtClean="0">
-                              <a:latin typeface="Cambria Math" panose="02040503050406030204" pitchFamily="18" charset="0"/>
-                            </a:rPr>
-                            <m:t>𝑠</m:t>
-                          </m:r>
-                          <m:r>
-                            <a:rPr lang="de-DE" b="0" i="1" smtClean="0">
-                              <a:latin typeface="Cambria Math" panose="02040503050406030204" pitchFamily="18" charset="0"/>
-                            </a:rPr>
-                            <m:t>)</m:t>
-                          </m:r>
-                        </m:den>
-                      </m:f>
-                    </m:oMath>
-                  </m:oMathPara>
+                  <m:oMath xmlns:m="http://schemas.openxmlformats.org/officeDocument/2006/math">
+                    <m:r>
+                      <a:rPr lang="de-DE" b="0" i="1" smtClean="0">
+                        <a:latin typeface="Cambria Math" panose="02040503050406030204" pitchFamily="18" charset="0"/>
+                      </a:rPr>
+                      <m:t>𝑇</m:t>
+                    </m:r>
+                    <m:d>
+                      <m:dPr>
+                        <m:ctrlPr>
+                          <a:rPr lang="de-DE" b="0" i="1" smtClean="0">
+                            <a:latin typeface="Cambria Math" panose="02040503050406030204" pitchFamily="18" charset="0"/>
+                          </a:rPr>
+                        </m:ctrlPr>
+                      </m:dPr>
+                      <m:e>
+                        <m:r>
+                          <a:rPr lang="de-DE" b="0" i="1" smtClean="0">
+                            <a:latin typeface="Cambria Math" panose="02040503050406030204" pitchFamily="18" charset="0"/>
+                          </a:rPr>
+                          <m:t>𝑠</m:t>
+                        </m:r>
+                      </m:e>
+                    </m:d>
+                    <m:r>
+                      <a:rPr lang="de-DE" b="0" i="1" smtClean="0">
+                        <a:latin typeface="Cambria Math" panose="02040503050406030204" pitchFamily="18" charset="0"/>
+                      </a:rPr>
+                      <m:t>=</m:t>
+                    </m:r>
+                    <m:f>
+                      <m:fPr>
+                        <m:ctrlPr>
+                          <a:rPr lang="de-DE" i="1" smtClean="0">
+                            <a:latin typeface="Cambria Math" panose="02040503050406030204" pitchFamily="18" charset="0"/>
+                          </a:rPr>
+                        </m:ctrlPr>
+                      </m:fPr>
+                      <m:num>
+                        <m:r>
+                          <a:rPr lang="de-DE" b="0" i="1" smtClean="0">
+                            <a:latin typeface="Cambria Math" panose="02040503050406030204" pitchFamily="18" charset="0"/>
+                          </a:rPr>
+                          <m:t>𝐺</m:t>
+                        </m:r>
+                        <m:r>
+                          <a:rPr lang="de-DE" b="0" i="1" smtClean="0">
+                            <a:latin typeface="Cambria Math" panose="02040503050406030204" pitchFamily="18" charset="0"/>
+                          </a:rPr>
+                          <m:t>(</m:t>
+                        </m:r>
+                        <m:r>
+                          <a:rPr lang="de-DE" b="0" i="1" smtClean="0">
+                            <a:latin typeface="Cambria Math" panose="02040503050406030204" pitchFamily="18" charset="0"/>
+                          </a:rPr>
+                          <m:t>𝑠</m:t>
+                        </m:r>
+                        <m:r>
+                          <a:rPr lang="de-DE" b="0" i="1" smtClean="0">
+                            <a:latin typeface="Cambria Math" panose="02040503050406030204" pitchFamily="18" charset="0"/>
+                          </a:rPr>
+                          <m:t>)</m:t>
+                        </m:r>
+                      </m:num>
+                      <m:den>
+                        <m:r>
+                          <a:rPr lang="de-DE" b="0" i="1" smtClean="0">
+                            <a:latin typeface="Cambria Math" panose="02040503050406030204" pitchFamily="18" charset="0"/>
+                          </a:rPr>
+                          <m:t>1+</m:t>
+                        </m:r>
+                        <m:r>
+                          <a:rPr lang="de-DE" b="0" i="1" smtClean="0">
+                            <a:latin typeface="Cambria Math" panose="02040503050406030204" pitchFamily="18" charset="0"/>
+                          </a:rPr>
+                          <m:t>𝐺</m:t>
+                        </m:r>
+                        <m:d>
+                          <m:dPr>
+                            <m:ctrlPr>
+                              <a:rPr lang="de-DE" b="0" i="1" smtClean="0">
+                                <a:latin typeface="Cambria Math" panose="02040503050406030204" pitchFamily="18" charset="0"/>
+                              </a:rPr>
+                            </m:ctrlPr>
+                          </m:dPr>
+                          <m:e>
+                            <m:r>
+                              <a:rPr lang="de-DE" b="0" i="1" smtClean="0">
+                                <a:latin typeface="Cambria Math" panose="02040503050406030204" pitchFamily="18" charset="0"/>
+                              </a:rPr>
+                              <m:t>𝑠</m:t>
+                            </m:r>
+                          </m:e>
+                        </m:d>
+                        <m:r>
+                          <a:rPr lang="de-DE" b="0" i="1" smtClean="0">
+                            <a:latin typeface="Cambria Math" panose="02040503050406030204" pitchFamily="18" charset="0"/>
+                          </a:rPr>
+                          <m:t>𝐻</m:t>
+                        </m:r>
+                        <m:r>
+                          <a:rPr lang="de-DE" b="0" i="1" smtClean="0">
+                            <a:latin typeface="Cambria Math" panose="02040503050406030204" pitchFamily="18" charset="0"/>
+                          </a:rPr>
+                          <m:t>(</m:t>
+                        </m:r>
+                        <m:r>
+                          <a:rPr lang="de-DE" b="0" i="1" smtClean="0">
+                            <a:latin typeface="Cambria Math" panose="02040503050406030204" pitchFamily="18" charset="0"/>
+                          </a:rPr>
+                          <m:t>𝑠</m:t>
+                        </m:r>
+                        <m:r>
+                          <a:rPr lang="de-DE" b="0" i="1" smtClean="0">
+                            <a:latin typeface="Cambria Math" panose="02040503050406030204" pitchFamily="18" charset="0"/>
+                          </a:rPr>
+                          <m:t>)</m:t>
+                        </m:r>
+                      </m:den>
+                    </m:f>
+                    <m:r>
+                      <a:rPr lang="de-DE" b="0" i="1" smtClean="0">
+                        <a:latin typeface="Cambria Math" panose="02040503050406030204" pitchFamily="18" charset="0"/>
+                      </a:rPr>
+                      <m:t>=</m:t>
+                    </m:r>
+                    <m:f>
+                      <m:fPr>
+                        <m:ctrlPr>
+                          <a:rPr lang="de-DE" i="1">
+                            <a:latin typeface="Cambria Math" panose="02040503050406030204" pitchFamily="18" charset="0"/>
+                          </a:rPr>
+                        </m:ctrlPr>
+                      </m:fPr>
+                      <m:num>
+                        <m:r>
+                          <a:rPr lang="de-DE" b="0" i="1" smtClean="0">
+                            <a:latin typeface="Cambria Math" panose="02040503050406030204" pitchFamily="18" charset="0"/>
+                          </a:rPr>
+                          <m:t>𝐺</m:t>
+                        </m:r>
+                        <m:r>
+                          <a:rPr lang="de-DE" i="1">
+                            <a:latin typeface="Cambria Math" panose="02040503050406030204" pitchFamily="18" charset="0"/>
+                          </a:rPr>
+                          <m:t>(</m:t>
+                        </m:r>
+                        <m:r>
+                          <a:rPr lang="de-DE" i="1">
+                            <a:latin typeface="Cambria Math" panose="02040503050406030204" pitchFamily="18" charset="0"/>
+                          </a:rPr>
+                          <m:t>𝑠</m:t>
+                        </m:r>
+                        <m:r>
+                          <a:rPr lang="de-DE" i="1">
+                            <a:latin typeface="Cambria Math" panose="02040503050406030204" pitchFamily="18" charset="0"/>
+                          </a:rPr>
+                          <m:t>)</m:t>
+                        </m:r>
+                      </m:num>
+                      <m:den>
+                        <m:r>
+                          <a:rPr lang="de-DE" i="1">
+                            <a:latin typeface="Cambria Math" panose="02040503050406030204" pitchFamily="18" charset="0"/>
+                          </a:rPr>
+                          <m:t>1+</m:t>
+                        </m:r>
+                        <m:r>
+                          <a:rPr lang="de-DE" b="0" i="1" smtClean="0">
+                            <a:latin typeface="Cambria Math" panose="02040503050406030204" pitchFamily="18" charset="0"/>
+                          </a:rPr>
+                          <m:t>𝐿</m:t>
+                        </m:r>
+                        <m:d>
+                          <m:dPr>
+                            <m:ctrlPr>
+                              <a:rPr lang="de-DE" i="1">
+                                <a:latin typeface="Cambria Math" panose="02040503050406030204" pitchFamily="18" charset="0"/>
+                              </a:rPr>
+                            </m:ctrlPr>
+                          </m:dPr>
+                          <m:e>
+                            <m:r>
+                              <a:rPr lang="de-DE" i="1">
+                                <a:latin typeface="Cambria Math" panose="02040503050406030204" pitchFamily="18" charset="0"/>
+                              </a:rPr>
+                              <m:t>𝑠</m:t>
+                            </m:r>
+                          </m:e>
+                        </m:d>
+                      </m:den>
+                    </m:f>
+                  </m:oMath>
                 </a14:m>
                 <a:endParaRPr lang="de-DE" dirty="0"/>
               </a:p>
@@ -8641,7 +8722,7 @@
             </p:txBody>
           </p:sp>
         </mc:Choice>
-        <mc:Fallback xmlns="">
+        <mc:Fallback>
           <p:sp>
             <p:nvSpPr>
               <p:cNvPr id="3" name="Inhaltsplatzhalter 2">
@@ -8662,7 +8743,7 @@
               <a:blipFill>
                 <a:blip r:embed="rId2"/>
                 <a:stretch>
-                  <a:fillRect l="-1206" t="-2326" r="-241" b="-872"/>
+                  <a:fillRect l="-1086" t="-2616"/>
                 </a:stretch>
               </a:blipFill>
             </p:spPr>
@@ -8710,167 +8791,43 @@
           </a:p>
         </p:txBody>
       </p:sp>
-      <mc:AlternateContent xmlns:mc="http://schemas.openxmlformats.org/markup-compatibility/2006" xmlns:a14="http://schemas.microsoft.com/office/drawing/2010/main">
-        <mc:Choice Requires="a14">
-          <p:sp>
-            <p:nvSpPr>
-              <p:cNvPr id="5" name="Textfeld 4">
-                <a:extLst>
-                  <a:ext uri="{FF2B5EF4-FFF2-40B4-BE49-F238E27FC236}">
-                    <a16:creationId xmlns:a16="http://schemas.microsoft.com/office/drawing/2014/main" id="{B9FBA90F-DB98-46B0-3BF8-07E81D37F651}"/>
-                  </a:ext>
-                </a:extLst>
-              </p:cNvPr>
-              <p:cNvSpPr txBox="1"/>
-              <p:nvPr/>
-            </p:nvSpPr>
-            <p:spPr>
-              <a:xfrm>
-                <a:off x="6281532" y="4253949"/>
-                <a:ext cx="2032031" cy="461665"/>
-              </a:xfrm>
-              <a:prstGeom prst="rect">
-                <a:avLst/>
-              </a:prstGeom>
-              <a:noFill/>
-            </p:spPr>
-            <p:txBody>
-              <a:bodyPr wrap="none" rtlCol="0">
-                <a:spAutoFit/>
-              </a:bodyPr>
-              <a:lstStyle/>
-              <a:p>
-                <a:r>
-                  <a:rPr lang="de-DE" sz="2400" dirty="0"/>
-                  <a:t>loop </a:t>
-                </a:r>
-                <a:r>
-                  <a:rPr lang="de-DE" sz="2400" dirty="0" err="1"/>
-                  <a:t>gain</a:t>
-                </a:r>
-                <a:r>
-                  <a:rPr lang="de-DE" sz="2400" dirty="0"/>
-                  <a:t> </a:t>
-                </a:r>
-                <a14:m>
-                  <m:oMath xmlns:m="http://schemas.openxmlformats.org/officeDocument/2006/math">
-                    <m:r>
-                      <a:rPr lang="de-DE" sz="2400" b="0" i="1" smtClean="0">
-                        <a:latin typeface="Cambria Math" panose="02040503050406030204" pitchFamily="18" charset="0"/>
-                      </a:rPr>
-                      <m:t>𝐿</m:t>
-                    </m:r>
-                    <m:r>
-                      <a:rPr lang="de-DE" sz="2400" i="1">
-                        <a:latin typeface="Cambria Math" panose="02040503050406030204" pitchFamily="18" charset="0"/>
-                      </a:rPr>
-                      <m:t>(</m:t>
-                    </m:r>
-                    <m:r>
-                      <a:rPr lang="de-DE" sz="2400" i="1">
-                        <a:latin typeface="Cambria Math" panose="02040503050406030204" pitchFamily="18" charset="0"/>
-                      </a:rPr>
-                      <m:t>𝑠</m:t>
-                    </m:r>
-                    <m:r>
-                      <a:rPr lang="de-DE" sz="2400" b="0" i="1" smtClean="0">
-                        <a:latin typeface="Cambria Math" panose="02040503050406030204" pitchFamily="18" charset="0"/>
-                      </a:rPr>
-                      <m:t>)</m:t>
-                    </m:r>
-                  </m:oMath>
-                </a14:m>
-                <a:endParaRPr lang="de-DE" sz="2400" dirty="0"/>
-              </a:p>
-            </p:txBody>
-          </p:sp>
-        </mc:Choice>
-        <mc:Fallback xmlns="">
-          <p:sp>
-            <p:nvSpPr>
-              <p:cNvPr id="5" name="Textfeld 4">
-                <a:extLst>
-                  <a:ext uri="{FF2B5EF4-FFF2-40B4-BE49-F238E27FC236}">
-                    <a16:creationId xmlns:a16="http://schemas.microsoft.com/office/drawing/2014/main" id="{B9FBA90F-DB98-46B0-3BF8-07E81D37F651}"/>
-                  </a:ext>
-                </a:extLst>
-              </p:cNvPr>
-              <p:cNvSpPr txBox="1">
-                <a:spLocks noRot="1" noChangeAspect="1" noMove="1" noResize="1" noEditPoints="1" noAdjustHandles="1" noChangeArrowheads="1" noChangeShapeType="1" noTextEdit="1"/>
-              </p:cNvSpPr>
-              <p:nvPr/>
-            </p:nvSpPr>
-            <p:spPr>
-              <a:xfrm>
-                <a:off x="6281532" y="4253949"/>
-                <a:ext cx="2032031" cy="461665"/>
-              </a:xfrm>
-              <a:prstGeom prst="rect">
-                <a:avLst/>
-              </a:prstGeom>
-              <a:blipFill>
-                <a:blip r:embed="rId3"/>
-                <a:stretch>
-                  <a:fillRect l="-4348" t="-10811" r="-1863" b="-29730"/>
-                </a:stretch>
-              </a:blipFill>
-            </p:spPr>
-            <p:txBody>
-              <a:bodyPr/>
-              <a:lstStyle/>
-              <a:p>
-                <a:r>
-                  <a:rPr lang="de-DE">
-                    <a:noFill/>
-                  </a:rPr>
-                  <a:t> </a:t>
-                </a:r>
-              </a:p>
-            </p:txBody>
-          </p:sp>
-        </mc:Fallback>
-      </mc:AlternateContent>
       <p:sp>
         <p:nvSpPr>
-          <p:cNvPr id="6" name="Geschweifte Klammer links 5">
+          <p:cNvPr id="5" name="Textfeld 4">
             <a:extLst>
               <a:ext uri="{FF2B5EF4-FFF2-40B4-BE49-F238E27FC236}">
-                <a16:creationId xmlns:a16="http://schemas.microsoft.com/office/drawing/2014/main" id="{04F4D8CD-9653-AD6A-8452-E42BCF2DAC17}"/>
+                <a16:creationId xmlns:a16="http://schemas.microsoft.com/office/drawing/2014/main" id="{B9FBA90F-DB98-46B0-3BF8-07E81D37F651}"/>
               </a:ext>
             </a:extLst>
           </p:cNvPr>
-          <p:cNvSpPr/>
+          <p:cNvSpPr txBox="1"/>
           <p:nvPr/>
         </p:nvSpPr>
         <p:spPr>
-          <a:xfrm rot="16200000">
-            <a:off x="6864378" y="3442503"/>
-            <a:ext cx="228600" cy="1394292"/>
+          <a:xfrm>
+            <a:off x="5567013" y="4339877"/>
+            <a:ext cx="1394292" cy="461665"/>
           </a:xfrm>
-          <a:prstGeom prst="leftBrace">
+          <a:prstGeom prst="rect">
             <a:avLst/>
           </a:prstGeom>
+          <a:noFill/>
         </p:spPr>
-        <p:style>
-          <a:lnRef idx="2">
-            <a:schemeClr val="accent1"/>
-          </a:lnRef>
-          <a:fillRef idx="0">
-            <a:schemeClr val="accent1"/>
-          </a:fillRef>
-          <a:effectRef idx="1">
-            <a:schemeClr val="accent1"/>
-          </a:effectRef>
-          <a:fontRef idx="minor">
-            <a:schemeClr val="tx1"/>
-          </a:fontRef>
-        </p:style>
         <p:txBody>
-          <a:bodyPr rtlCol="0" anchor="ctr"/>
+          <a:bodyPr wrap="none" rtlCol="0">
+            <a:spAutoFit/>
+          </a:bodyPr>
           <a:lstStyle/>
           <a:p>
-            <a:pPr algn="ctr"/>
-            <a:endParaRPr lang="de-DE"/>
+            <a:r>
+              <a:rPr lang="de-DE" sz="2400" dirty="0"/>
+              <a:t>loop </a:t>
+            </a:r>
+            <a:r>
+              <a:rPr lang="de-DE" sz="2400" dirty="0" err="1"/>
+              <a:t>gain</a:t>
+            </a:r>
+            <a:endParaRPr lang="de-DE" sz="2400" dirty="0"/>
           </a:p>
         </p:txBody>
       </p:sp>
@@ -8888,7 +8845,7 @@
         </p:nvSpPr>
         <p:spPr>
           <a:xfrm>
-            <a:off x="8292548" y="2782956"/>
+            <a:off x="5567013" y="2967335"/>
             <a:ext cx="1871859" cy="461665"/>
           </a:xfrm>
           <a:prstGeom prst="rect">
@@ -8927,13 +8884,16 @@
               </a:ext>
             </a:extLst>
           </p:cNvPr>
-          <p:cNvCxnSpPr/>
+          <p:cNvCxnSpPr>
+            <a:cxnSpLocks/>
+            <a:stCxn id="7" idx="1"/>
+          </p:cNvCxnSpPr>
           <p:nvPr/>
         </p:nvCxnSpPr>
         <p:spPr>
           <a:xfrm flipH="1">
-            <a:off x="7056783" y="3001617"/>
-            <a:ext cx="1202634" cy="228600"/>
+            <a:off x="5124313" y="3198168"/>
+            <a:ext cx="442700" cy="230832"/>
           </a:xfrm>
           <a:prstGeom prst="straightConnector1">
             <a:avLst/>
@@ -8957,6 +8917,1506 @@
           </a:fontRef>
         </p:style>
       </p:cxnSp>
+      <p:cxnSp>
+        <p:nvCxnSpPr>
+          <p:cNvPr id="14" name="Gerade Verbindung mit Pfeil 13">
+            <a:extLst>
+              <a:ext uri="{FF2B5EF4-FFF2-40B4-BE49-F238E27FC236}">
+                <a16:creationId xmlns:a16="http://schemas.microsoft.com/office/drawing/2014/main" id="{1E44A2FA-B432-2ADD-4065-E0BB4A27E431}"/>
+              </a:ext>
+            </a:extLst>
+          </p:cNvPr>
+          <p:cNvCxnSpPr>
+            <a:cxnSpLocks/>
+            <a:stCxn id="5" idx="1"/>
+          </p:cNvCxnSpPr>
+          <p:nvPr/>
+        </p:nvCxnSpPr>
+        <p:spPr>
+          <a:xfrm flipH="1" flipV="1">
+            <a:off x="5124313" y="4055165"/>
+            <a:ext cx="442700" cy="515545"/>
+          </a:xfrm>
+          <a:prstGeom prst="straightConnector1">
+            <a:avLst/>
+          </a:prstGeom>
+          <a:ln>
+            <a:tailEnd type="triangle"/>
+          </a:ln>
+        </p:spPr>
+        <p:style>
+          <a:lnRef idx="2">
+            <a:schemeClr val="accent1"/>
+          </a:lnRef>
+          <a:fillRef idx="0">
+            <a:schemeClr val="accent1"/>
+          </a:fillRef>
+          <a:effectRef idx="1">
+            <a:schemeClr val="accent1"/>
+          </a:effectRef>
+          <a:fontRef idx="minor">
+            <a:schemeClr val="tx1"/>
+          </a:fontRef>
+        </p:style>
+      </p:cxnSp>
+      <p:grpSp>
+        <p:nvGrpSpPr>
+          <p:cNvPr id="46" name="Gruppieren 45">
+            <a:extLst>
+              <a:ext uri="{FF2B5EF4-FFF2-40B4-BE49-F238E27FC236}">
+                <a16:creationId xmlns:a16="http://schemas.microsoft.com/office/drawing/2014/main" id="{D442959D-695E-10C5-0209-5E767479F004}"/>
+              </a:ext>
+            </a:extLst>
+          </p:cNvPr>
+          <p:cNvGrpSpPr/>
+          <p:nvPr/>
+        </p:nvGrpSpPr>
+        <p:grpSpPr>
+          <a:xfrm>
+            <a:off x="7584645" y="35542"/>
+            <a:ext cx="4385704" cy="1605924"/>
+            <a:chOff x="5722177" y="251837"/>
+            <a:chExt cx="4385704" cy="1605924"/>
+          </a:xfrm>
+        </p:grpSpPr>
+        <p:sp>
+          <p:nvSpPr>
+            <p:cNvPr id="19" name="Verbindungsstelle 18">
+              <a:extLst>
+                <a:ext uri="{FF2B5EF4-FFF2-40B4-BE49-F238E27FC236}">
+                  <a16:creationId xmlns:a16="http://schemas.microsoft.com/office/drawing/2014/main" id="{B2B72736-C70B-2E99-5A1D-A1BC63843F81}"/>
+                </a:ext>
+              </a:extLst>
+            </p:cNvPr>
+            <p:cNvSpPr>
+              <a:spLocks noChangeAspect="1"/>
+            </p:cNvSpPr>
+            <p:nvPr/>
+          </p:nvSpPr>
+          <p:spPr>
+            <a:xfrm flipV="1">
+              <a:off x="9119501" y="551919"/>
+              <a:ext cx="88772" cy="88772"/>
+            </a:xfrm>
+            <a:prstGeom prst="flowChartConnector">
+              <a:avLst/>
+            </a:prstGeom>
+            <a:solidFill>
+              <a:schemeClr val="tx1"/>
+            </a:solidFill>
+          </p:spPr>
+          <p:style>
+            <a:lnRef idx="2">
+              <a:schemeClr val="accent1">
+                <a:shade val="15000"/>
+              </a:schemeClr>
+            </a:lnRef>
+            <a:fillRef idx="1">
+              <a:schemeClr val="accent1"/>
+            </a:fillRef>
+            <a:effectRef idx="0">
+              <a:schemeClr val="accent1"/>
+            </a:effectRef>
+            <a:fontRef idx="minor">
+              <a:schemeClr val="lt1"/>
+            </a:fontRef>
+          </p:style>
+          <p:txBody>
+            <a:bodyPr rtlCol="0" anchor="ctr"/>
+            <a:lstStyle/>
+            <a:p>
+              <a:pPr algn="ctr"/>
+              <a:endParaRPr lang="de-DE"/>
+            </a:p>
+          </p:txBody>
+        </p:sp>
+        <p:cxnSp>
+          <p:nvCxnSpPr>
+            <p:cNvPr id="20" name="Gerade Verbindung mit Pfeil 19">
+              <a:extLst>
+                <a:ext uri="{FF2B5EF4-FFF2-40B4-BE49-F238E27FC236}">
+                  <a16:creationId xmlns:a16="http://schemas.microsoft.com/office/drawing/2014/main" id="{6764B5CB-4697-CB60-9CDE-D121A283943D}"/>
+                </a:ext>
+              </a:extLst>
+            </p:cNvPr>
+            <p:cNvCxnSpPr>
+              <a:cxnSpLocks/>
+            </p:cNvCxnSpPr>
+            <p:nvPr/>
+          </p:nvCxnSpPr>
+          <p:spPr>
+            <a:xfrm>
+              <a:off x="9163887" y="596305"/>
+              <a:ext cx="828436" cy="1557"/>
+            </a:xfrm>
+            <a:prstGeom prst="straightConnector1">
+              <a:avLst/>
+            </a:prstGeom>
+            <a:ln>
+              <a:solidFill>
+                <a:schemeClr val="tx1"/>
+              </a:solidFill>
+              <a:tailEnd type="triangle"/>
+            </a:ln>
+          </p:spPr>
+          <p:style>
+            <a:lnRef idx="2">
+              <a:schemeClr val="accent1"/>
+            </a:lnRef>
+            <a:fillRef idx="0">
+              <a:schemeClr val="accent1"/>
+            </a:fillRef>
+            <a:effectRef idx="1">
+              <a:schemeClr val="accent1"/>
+            </a:effectRef>
+            <a:fontRef idx="minor">
+              <a:schemeClr val="tx1"/>
+            </a:fontRef>
+          </p:style>
+        </p:cxnSp>
+        <mc:AlternateContent xmlns:mc="http://schemas.openxmlformats.org/markup-compatibility/2006">
+          <mc:Choice xmlns:a14="http://schemas.microsoft.com/office/drawing/2010/main" Requires="a14">
+            <p:sp>
+              <p:nvSpPr>
+                <p:cNvPr id="21" name="Textfeld 20">
+                  <a:extLst>
+                    <a:ext uri="{FF2B5EF4-FFF2-40B4-BE49-F238E27FC236}">
+                      <a16:creationId xmlns:a16="http://schemas.microsoft.com/office/drawing/2014/main" id="{F48BC205-338A-D685-F982-DB8C98905425}"/>
+                    </a:ext>
+                  </a:extLst>
+                </p:cNvPr>
+                <p:cNvSpPr txBox="1"/>
+                <p:nvPr/>
+              </p:nvSpPr>
+              <p:spPr>
+                <a:xfrm>
+                  <a:off x="9611783" y="254949"/>
+                  <a:ext cx="496098" cy="276999"/>
+                </a:xfrm>
+                <a:prstGeom prst="rect">
+                  <a:avLst/>
+                </a:prstGeom>
+                <a:noFill/>
+              </p:spPr>
+              <p:txBody>
+                <a:bodyPr wrap="none" lIns="0" tIns="0" rIns="0" bIns="0" rtlCol="0">
+                  <a:spAutoFit/>
+                </a:bodyPr>
+                <a:lstStyle/>
+                <a:p>
+                  <a:pPr/>
+                  <a14:m>
+                    <m:oMathPara xmlns:m="http://schemas.openxmlformats.org/officeDocument/2006/math">
+                      <m:oMathParaPr>
+                        <m:jc m:val="centerGroup"/>
+                      </m:oMathParaPr>
+                      <m:oMath xmlns:m="http://schemas.openxmlformats.org/officeDocument/2006/math">
+                        <m:r>
+                          <a:rPr lang="de-DE" b="0" i="1" smtClean="0">
+                            <a:latin typeface="Cambria Math" panose="02040503050406030204" pitchFamily="18" charset="0"/>
+                          </a:rPr>
+                          <m:t>𝑌</m:t>
+                        </m:r>
+                        <m:r>
+                          <a:rPr lang="de-DE" b="0" i="1" smtClean="0">
+                            <a:latin typeface="Cambria Math" panose="02040503050406030204" pitchFamily="18" charset="0"/>
+                          </a:rPr>
+                          <m:t>(</m:t>
+                        </m:r>
+                        <m:r>
+                          <a:rPr lang="de-DE" b="0" i="1" smtClean="0">
+                            <a:latin typeface="Cambria Math" panose="02040503050406030204" pitchFamily="18" charset="0"/>
+                          </a:rPr>
+                          <m:t>𝑠</m:t>
+                        </m:r>
+                        <m:r>
+                          <a:rPr lang="de-DE" b="0" i="1" smtClean="0">
+                            <a:latin typeface="Cambria Math" panose="02040503050406030204" pitchFamily="18" charset="0"/>
+                          </a:rPr>
+                          <m:t>)</m:t>
+                        </m:r>
+                      </m:oMath>
+                    </m:oMathPara>
+                  </a14:m>
+                  <a:endParaRPr lang="de-DE" dirty="0"/>
+                </a:p>
+              </p:txBody>
+            </p:sp>
+          </mc:Choice>
+          <mc:Fallback>
+            <p:sp>
+              <p:nvSpPr>
+                <p:cNvPr id="21" name="Textfeld 20">
+                  <a:extLst>
+                    <a:ext uri="{FF2B5EF4-FFF2-40B4-BE49-F238E27FC236}">
+                      <a16:creationId xmlns:a16="http://schemas.microsoft.com/office/drawing/2014/main" id="{F48BC205-338A-D685-F982-DB8C98905425}"/>
+                    </a:ext>
+                  </a:extLst>
+                </p:cNvPr>
+                <p:cNvSpPr txBox="1">
+                  <a:spLocks noRot="1" noChangeAspect="1" noMove="1" noResize="1" noEditPoints="1" noAdjustHandles="1" noChangeArrowheads="1" noChangeShapeType="1" noTextEdit="1"/>
+                </p:cNvSpPr>
+                <p:nvPr/>
+              </p:nvSpPr>
+              <p:spPr>
+                <a:xfrm>
+                  <a:off x="9611783" y="254949"/>
+                  <a:ext cx="496098" cy="276999"/>
+                </a:xfrm>
+                <a:prstGeom prst="rect">
+                  <a:avLst/>
+                </a:prstGeom>
+                <a:blipFill>
+                  <a:blip r:embed="rId3"/>
+                  <a:stretch>
+                    <a:fillRect l="-10000" r="-17500" b="-34783"/>
+                  </a:stretch>
+                </a:blipFill>
+              </p:spPr>
+              <p:txBody>
+                <a:bodyPr/>
+                <a:lstStyle/>
+                <a:p>
+                  <a:r>
+                    <a:rPr lang="de-DE">
+                      <a:noFill/>
+                    </a:rPr>
+                    <a:t> </a:t>
+                  </a:r>
+                </a:p>
+              </p:txBody>
+            </p:sp>
+          </mc:Fallback>
+        </mc:AlternateContent>
+        <p:cxnSp>
+          <p:nvCxnSpPr>
+            <p:cNvPr id="22" name="Gerade Verbindung 21">
+              <a:extLst>
+                <a:ext uri="{FF2B5EF4-FFF2-40B4-BE49-F238E27FC236}">
+                  <a16:creationId xmlns:a16="http://schemas.microsoft.com/office/drawing/2014/main" id="{F67CE540-11BC-4060-69D2-907798BE0236}"/>
+                </a:ext>
+              </a:extLst>
+            </p:cNvPr>
+            <p:cNvCxnSpPr>
+              <a:cxnSpLocks/>
+              <a:stCxn id="19" idx="0"/>
+            </p:cNvCxnSpPr>
+            <p:nvPr/>
+          </p:nvCxnSpPr>
+          <p:spPr>
+            <a:xfrm>
+              <a:off x="9163887" y="640691"/>
+              <a:ext cx="0" cy="918521"/>
+            </a:xfrm>
+            <a:prstGeom prst="line">
+              <a:avLst/>
+            </a:prstGeom>
+            <a:ln>
+              <a:solidFill>
+                <a:schemeClr val="tx1"/>
+              </a:solidFill>
+            </a:ln>
+          </p:spPr>
+          <p:style>
+            <a:lnRef idx="2">
+              <a:schemeClr val="accent1"/>
+            </a:lnRef>
+            <a:fillRef idx="0">
+              <a:schemeClr val="accent1"/>
+            </a:fillRef>
+            <a:effectRef idx="1">
+              <a:schemeClr val="accent1"/>
+            </a:effectRef>
+            <a:fontRef idx="minor">
+              <a:schemeClr val="tx1"/>
+            </a:fontRef>
+          </p:style>
+        </p:cxnSp>
+        <p:sp>
+          <p:nvSpPr>
+            <p:cNvPr id="23" name="Ring 22">
+              <a:extLst>
+                <a:ext uri="{FF2B5EF4-FFF2-40B4-BE49-F238E27FC236}">
+                  <a16:creationId xmlns:a16="http://schemas.microsoft.com/office/drawing/2014/main" id="{2D64C68F-B5F4-A9A8-DA17-711DC0B7BABE}"/>
+                </a:ext>
+              </a:extLst>
+            </p:cNvPr>
+            <p:cNvSpPr>
+              <a:spLocks noChangeAspect="1"/>
+            </p:cNvSpPr>
+            <p:nvPr/>
+          </p:nvSpPr>
+          <p:spPr>
+            <a:xfrm>
+              <a:off x="6713197" y="553476"/>
+              <a:ext cx="90000" cy="90000"/>
+            </a:xfrm>
+            <a:prstGeom prst="donut">
+              <a:avLst>
+                <a:gd name="adj" fmla="val 0"/>
+              </a:avLst>
+            </a:prstGeom>
+            <a:noFill/>
+            <a:ln>
+              <a:solidFill>
+                <a:schemeClr val="tx1"/>
+              </a:solidFill>
+            </a:ln>
+          </p:spPr>
+          <p:style>
+            <a:lnRef idx="2">
+              <a:schemeClr val="accent1">
+                <a:shade val="15000"/>
+              </a:schemeClr>
+            </a:lnRef>
+            <a:fillRef idx="1">
+              <a:schemeClr val="accent1"/>
+            </a:fillRef>
+            <a:effectRef idx="0">
+              <a:schemeClr val="accent1"/>
+            </a:effectRef>
+            <a:fontRef idx="minor">
+              <a:schemeClr val="lt1"/>
+            </a:fontRef>
+          </p:style>
+          <p:txBody>
+            <a:bodyPr rtlCol="0" anchor="ctr"/>
+            <a:lstStyle/>
+            <a:p>
+              <a:pPr algn="ctr"/>
+              <a:endParaRPr lang="de-DE">
+                <a:solidFill>
+                  <a:schemeClr val="tx1"/>
+                </a:solidFill>
+              </a:endParaRPr>
+            </a:p>
+          </p:txBody>
+        </p:sp>
+        <p:cxnSp>
+          <p:nvCxnSpPr>
+            <p:cNvPr id="24" name="Gerade Verbindung mit Pfeil 23">
+              <a:extLst>
+                <a:ext uri="{FF2B5EF4-FFF2-40B4-BE49-F238E27FC236}">
+                  <a16:creationId xmlns:a16="http://schemas.microsoft.com/office/drawing/2014/main" id="{E066199A-32E0-1E0D-0134-14391AEB2E57}"/>
+                </a:ext>
+              </a:extLst>
+            </p:cNvPr>
+            <p:cNvCxnSpPr>
+              <a:cxnSpLocks/>
+              <a:endCxn id="23" idx="4"/>
+            </p:cNvCxnSpPr>
+            <p:nvPr/>
+          </p:nvCxnSpPr>
+          <p:spPr>
+            <a:xfrm flipV="1">
+              <a:off x="6758197" y="643476"/>
+              <a:ext cx="0" cy="907961"/>
+            </a:xfrm>
+            <a:prstGeom prst="straightConnector1">
+              <a:avLst/>
+            </a:prstGeom>
+            <a:ln>
+              <a:solidFill>
+                <a:schemeClr val="tx1"/>
+              </a:solidFill>
+              <a:tailEnd type="triangle"/>
+            </a:ln>
+          </p:spPr>
+          <p:style>
+            <a:lnRef idx="2">
+              <a:schemeClr val="accent1"/>
+            </a:lnRef>
+            <a:fillRef idx="0">
+              <a:schemeClr val="accent1"/>
+            </a:fillRef>
+            <a:effectRef idx="1">
+              <a:schemeClr val="accent1"/>
+            </a:effectRef>
+            <a:fontRef idx="minor">
+              <a:schemeClr val="tx1"/>
+            </a:fontRef>
+          </p:style>
+        </p:cxnSp>
+        <p:cxnSp>
+          <p:nvCxnSpPr>
+            <p:cNvPr id="25" name="Gerade Verbindung mit Pfeil 24">
+              <a:extLst>
+                <a:ext uri="{FF2B5EF4-FFF2-40B4-BE49-F238E27FC236}">
+                  <a16:creationId xmlns:a16="http://schemas.microsoft.com/office/drawing/2014/main" id="{86524401-7460-92C6-5786-BA951679934B}"/>
+                </a:ext>
+              </a:extLst>
+            </p:cNvPr>
+            <p:cNvCxnSpPr>
+              <a:cxnSpLocks/>
+              <a:stCxn id="23" idx="6"/>
+            </p:cNvCxnSpPr>
+            <p:nvPr/>
+          </p:nvCxnSpPr>
+          <p:spPr>
+            <a:xfrm>
+              <a:off x="6803197" y="598476"/>
+              <a:ext cx="698596" cy="1509"/>
+            </a:xfrm>
+            <a:prstGeom prst="straightConnector1">
+              <a:avLst/>
+            </a:prstGeom>
+            <a:ln>
+              <a:solidFill>
+                <a:schemeClr val="tx1"/>
+              </a:solidFill>
+              <a:tailEnd type="triangle"/>
+            </a:ln>
+          </p:spPr>
+          <p:style>
+            <a:lnRef idx="2">
+              <a:schemeClr val="accent1"/>
+            </a:lnRef>
+            <a:fillRef idx="0">
+              <a:schemeClr val="accent1"/>
+            </a:fillRef>
+            <a:effectRef idx="1">
+              <a:schemeClr val="accent1"/>
+            </a:effectRef>
+            <a:fontRef idx="minor">
+              <a:schemeClr val="tx1"/>
+            </a:fontRef>
+          </p:style>
+        </p:cxnSp>
+        <p:cxnSp>
+          <p:nvCxnSpPr>
+            <p:cNvPr id="26" name="Gerade Verbindung mit Pfeil 25">
+              <a:extLst>
+                <a:ext uri="{FF2B5EF4-FFF2-40B4-BE49-F238E27FC236}">
+                  <a16:creationId xmlns:a16="http://schemas.microsoft.com/office/drawing/2014/main" id="{D086C4E1-3C29-3051-C642-559A78486D50}"/>
+                </a:ext>
+              </a:extLst>
+            </p:cNvPr>
+            <p:cNvCxnSpPr>
+              <a:cxnSpLocks/>
+              <a:endCxn id="23" idx="2"/>
+            </p:cNvCxnSpPr>
+            <p:nvPr/>
+          </p:nvCxnSpPr>
+          <p:spPr>
+            <a:xfrm>
+              <a:off x="5874209" y="598476"/>
+              <a:ext cx="838988" cy="0"/>
+            </a:xfrm>
+            <a:prstGeom prst="straightConnector1">
+              <a:avLst/>
+            </a:prstGeom>
+            <a:ln>
+              <a:solidFill>
+                <a:schemeClr val="tx1"/>
+              </a:solidFill>
+              <a:tailEnd type="triangle"/>
+            </a:ln>
+          </p:spPr>
+          <p:style>
+            <a:lnRef idx="2">
+              <a:schemeClr val="accent1"/>
+            </a:lnRef>
+            <a:fillRef idx="0">
+              <a:schemeClr val="accent1"/>
+            </a:fillRef>
+            <a:effectRef idx="1">
+              <a:schemeClr val="accent1"/>
+            </a:effectRef>
+            <a:fontRef idx="minor">
+              <a:schemeClr val="tx1"/>
+            </a:fontRef>
+          </p:style>
+        </p:cxnSp>
+        <mc:AlternateContent xmlns:mc="http://schemas.openxmlformats.org/markup-compatibility/2006">
+          <mc:Choice xmlns:a14="http://schemas.microsoft.com/office/drawing/2010/main" Requires="a14">
+            <p:sp>
+              <p:nvSpPr>
+                <p:cNvPr id="27" name="Textfeld 26">
+                  <a:extLst>
+                    <a:ext uri="{FF2B5EF4-FFF2-40B4-BE49-F238E27FC236}">
+                      <a16:creationId xmlns:a16="http://schemas.microsoft.com/office/drawing/2014/main" id="{9D208964-DF1A-B55A-5A6D-805C216E4714}"/>
+                    </a:ext>
+                  </a:extLst>
+                </p:cNvPr>
+                <p:cNvSpPr txBox="1"/>
+                <p:nvPr/>
+              </p:nvSpPr>
+              <p:spPr>
+                <a:xfrm>
+                  <a:off x="5722177" y="251837"/>
+                  <a:ext cx="505203" cy="276999"/>
+                </a:xfrm>
+                <a:prstGeom prst="rect">
+                  <a:avLst/>
+                </a:prstGeom>
+                <a:noFill/>
+              </p:spPr>
+              <p:txBody>
+                <a:bodyPr wrap="none" lIns="0" tIns="0" rIns="0" bIns="0" rtlCol="0">
+                  <a:spAutoFit/>
+                </a:bodyPr>
+                <a:lstStyle/>
+                <a:p>
+                  <a:pPr/>
+                  <a14:m>
+                    <m:oMathPara xmlns:m="http://schemas.openxmlformats.org/officeDocument/2006/math">
+                      <m:oMathParaPr>
+                        <m:jc m:val="centerGroup"/>
+                      </m:oMathParaPr>
+                      <m:oMath xmlns:m="http://schemas.openxmlformats.org/officeDocument/2006/math">
+                        <m:r>
+                          <a:rPr lang="de-DE" b="0" i="1" smtClean="0">
+                            <a:latin typeface="Cambria Math" panose="02040503050406030204" pitchFamily="18" charset="0"/>
+                          </a:rPr>
+                          <m:t>𝑅</m:t>
+                        </m:r>
+                        <m:r>
+                          <a:rPr lang="de-DE" b="0" i="1" smtClean="0">
+                            <a:latin typeface="Cambria Math" panose="02040503050406030204" pitchFamily="18" charset="0"/>
+                          </a:rPr>
+                          <m:t>(</m:t>
+                        </m:r>
+                        <m:r>
+                          <a:rPr lang="de-DE" b="0" i="1" smtClean="0">
+                            <a:latin typeface="Cambria Math" panose="02040503050406030204" pitchFamily="18" charset="0"/>
+                          </a:rPr>
+                          <m:t>𝑠</m:t>
+                        </m:r>
+                        <m:r>
+                          <a:rPr lang="de-DE" b="0" i="1" smtClean="0">
+                            <a:latin typeface="Cambria Math" panose="02040503050406030204" pitchFamily="18" charset="0"/>
+                          </a:rPr>
+                          <m:t>)</m:t>
+                        </m:r>
+                      </m:oMath>
+                    </m:oMathPara>
+                  </a14:m>
+                  <a:endParaRPr lang="de-DE" dirty="0"/>
+                </a:p>
+              </p:txBody>
+            </p:sp>
+          </mc:Choice>
+          <mc:Fallback>
+            <p:sp>
+              <p:nvSpPr>
+                <p:cNvPr id="27" name="Textfeld 26">
+                  <a:extLst>
+                    <a:ext uri="{FF2B5EF4-FFF2-40B4-BE49-F238E27FC236}">
+                      <a16:creationId xmlns:a16="http://schemas.microsoft.com/office/drawing/2014/main" id="{9D208964-DF1A-B55A-5A6D-805C216E4714}"/>
+                    </a:ext>
+                  </a:extLst>
+                </p:cNvPr>
+                <p:cNvSpPr txBox="1">
+                  <a:spLocks noRot="1" noChangeAspect="1" noMove="1" noResize="1" noEditPoints="1" noAdjustHandles="1" noChangeArrowheads="1" noChangeShapeType="1" noTextEdit="1"/>
+                </p:cNvSpPr>
+                <p:nvPr/>
+              </p:nvSpPr>
+              <p:spPr>
+                <a:xfrm>
+                  <a:off x="5722177" y="251837"/>
+                  <a:ext cx="505203" cy="276999"/>
+                </a:xfrm>
+                <a:prstGeom prst="rect">
+                  <a:avLst/>
+                </a:prstGeom>
+                <a:blipFill>
+                  <a:blip r:embed="rId4"/>
+                  <a:stretch>
+                    <a:fillRect l="-12500" r="-17500" b="-34783"/>
+                  </a:stretch>
+                </a:blipFill>
+              </p:spPr>
+              <p:txBody>
+                <a:bodyPr/>
+                <a:lstStyle/>
+                <a:p>
+                  <a:r>
+                    <a:rPr lang="de-DE">
+                      <a:noFill/>
+                    </a:rPr>
+                    <a:t> </a:t>
+                  </a:r>
+                </a:p>
+              </p:txBody>
+            </p:sp>
+          </mc:Fallback>
+        </mc:AlternateContent>
+        <mc:AlternateContent xmlns:mc="http://schemas.openxmlformats.org/markup-compatibility/2006">
+          <mc:Choice xmlns:a14="http://schemas.microsoft.com/office/drawing/2010/main" Requires="a14">
+            <p:sp>
+              <p:nvSpPr>
+                <p:cNvPr id="28" name="Textfeld 27">
+                  <a:extLst>
+                    <a:ext uri="{FF2B5EF4-FFF2-40B4-BE49-F238E27FC236}">
+                      <a16:creationId xmlns:a16="http://schemas.microsoft.com/office/drawing/2014/main" id="{3227DD23-9ED1-0B2E-F29B-98BEF931EB57}"/>
+                    </a:ext>
+                  </a:extLst>
+                </p:cNvPr>
+                <p:cNvSpPr txBox="1"/>
+                <p:nvPr/>
+              </p:nvSpPr>
+              <p:spPr>
+                <a:xfrm>
+                  <a:off x="6799404" y="707096"/>
+                  <a:ext cx="219612" cy="276999"/>
+                </a:xfrm>
+                <a:prstGeom prst="rect">
+                  <a:avLst/>
+                </a:prstGeom>
+                <a:noFill/>
+              </p:spPr>
+              <p:txBody>
+                <a:bodyPr wrap="none" lIns="0" tIns="0" rIns="0" bIns="0" rtlCol="0">
+                  <a:spAutoFit/>
+                </a:bodyPr>
+                <a:lstStyle/>
+                <a:p>
+                  <a:pPr/>
+                  <a14:m>
+                    <m:oMathPara xmlns:m="http://schemas.openxmlformats.org/officeDocument/2006/math">
+                      <m:oMathParaPr>
+                        <m:jc m:val="centerGroup"/>
+                      </m:oMathParaPr>
+                      <m:oMath xmlns:m="http://schemas.openxmlformats.org/officeDocument/2006/math">
+                        <m:r>
+                          <a:rPr lang="de-DE" b="0" i="1" smtClean="0">
+                            <a:latin typeface="Cambria Math" panose="02040503050406030204" pitchFamily="18" charset="0"/>
+                          </a:rPr>
+                          <m:t>−</m:t>
+                        </m:r>
+                      </m:oMath>
+                    </m:oMathPara>
+                  </a14:m>
+                  <a:endParaRPr lang="de-DE" dirty="0"/>
+                </a:p>
+              </p:txBody>
+            </p:sp>
+          </mc:Choice>
+          <mc:Fallback>
+            <p:sp>
+              <p:nvSpPr>
+                <p:cNvPr id="28" name="Textfeld 27">
+                  <a:extLst>
+                    <a:ext uri="{FF2B5EF4-FFF2-40B4-BE49-F238E27FC236}">
+                      <a16:creationId xmlns:a16="http://schemas.microsoft.com/office/drawing/2014/main" id="{3227DD23-9ED1-0B2E-F29B-98BEF931EB57}"/>
+                    </a:ext>
+                  </a:extLst>
+                </p:cNvPr>
+                <p:cNvSpPr txBox="1">
+                  <a:spLocks noRot="1" noChangeAspect="1" noMove="1" noResize="1" noEditPoints="1" noAdjustHandles="1" noChangeArrowheads="1" noChangeShapeType="1" noTextEdit="1"/>
+                </p:cNvSpPr>
+                <p:nvPr/>
+              </p:nvSpPr>
+              <p:spPr>
+                <a:xfrm>
+                  <a:off x="6799404" y="707096"/>
+                  <a:ext cx="219612" cy="276999"/>
+                </a:xfrm>
+                <a:prstGeom prst="rect">
+                  <a:avLst/>
+                </a:prstGeom>
+                <a:blipFill>
+                  <a:blip r:embed="rId5"/>
+                  <a:stretch>
+                    <a:fillRect l="-11111" r="-5556"/>
+                  </a:stretch>
+                </a:blipFill>
+              </p:spPr>
+              <p:txBody>
+                <a:bodyPr/>
+                <a:lstStyle/>
+                <a:p>
+                  <a:r>
+                    <a:rPr lang="de-DE">
+                      <a:noFill/>
+                    </a:rPr>
+                    <a:t> </a:t>
+                  </a:r>
+                </a:p>
+              </p:txBody>
+            </p:sp>
+          </mc:Fallback>
+        </mc:AlternateContent>
+        <mc:AlternateContent xmlns:mc="http://schemas.openxmlformats.org/markup-compatibility/2006">
+          <mc:Choice xmlns:a14="http://schemas.microsoft.com/office/drawing/2010/main" Requires="a14">
+            <p:sp>
+              <p:nvSpPr>
+                <p:cNvPr id="29" name="Prozess 28">
+                  <a:extLst>
+                    <a:ext uri="{FF2B5EF4-FFF2-40B4-BE49-F238E27FC236}">
+                      <a16:creationId xmlns:a16="http://schemas.microsoft.com/office/drawing/2014/main" id="{5550313D-F431-5BAA-3D57-41C5AD80269E}"/>
+                    </a:ext>
+                  </a:extLst>
+                </p:cNvPr>
+                <p:cNvSpPr/>
+                <p:nvPr/>
+              </p:nvSpPr>
+              <p:spPr>
+                <a:xfrm>
+                  <a:off x="7508453" y="293661"/>
+                  <a:ext cx="914400" cy="612648"/>
+                </a:xfrm>
+                <a:prstGeom prst="flowChartProcess">
+                  <a:avLst/>
+                </a:prstGeom>
+                <a:noFill/>
+                <a:ln>
+                  <a:solidFill>
+                    <a:schemeClr val="tx1"/>
+                  </a:solidFill>
+                </a:ln>
+              </p:spPr>
+              <p:style>
+                <a:lnRef idx="2">
+                  <a:schemeClr val="accent1">
+                    <a:shade val="15000"/>
+                  </a:schemeClr>
+                </a:lnRef>
+                <a:fillRef idx="1">
+                  <a:schemeClr val="accent1"/>
+                </a:fillRef>
+                <a:effectRef idx="0">
+                  <a:schemeClr val="accent1"/>
+                </a:effectRef>
+                <a:fontRef idx="minor">
+                  <a:schemeClr val="lt1"/>
+                </a:fontRef>
+              </p:style>
+              <p:txBody>
+                <a:bodyPr rtlCol="0" anchor="ctr"/>
+                <a:lstStyle/>
+                <a:p>
+                  <a:pPr algn="ctr"/>
+                  <a14:m>
+                    <m:oMathPara xmlns:m="http://schemas.openxmlformats.org/officeDocument/2006/math">
+                      <m:oMathParaPr>
+                        <m:jc m:val="centerGroup"/>
+                      </m:oMathParaPr>
+                      <m:oMath xmlns:m="http://schemas.openxmlformats.org/officeDocument/2006/math">
+                        <m:r>
+                          <a:rPr lang="de-DE" b="0" i="1" smtClean="0">
+                            <a:solidFill>
+                              <a:schemeClr val="tx1"/>
+                            </a:solidFill>
+                            <a:latin typeface="Cambria Math" panose="02040503050406030204" pitchFamily="18" charset="0"/>
+                          </a:rPr>
+                          <m:t>𝐺</m:t>
+                        </m:r>
+                        <m:r>
+                          <a:rPr lang="de-DE" b="0" i="1" smtClean="0">
+                            <a:solidFill>
+                              <a:schemeClr val="tx1"/>
+                            </a:solidFill>
+                            <a:latin typeface="Cambria Math" panose="02040503050406030204" pitchFamily="18" charset="0"/>
+                          </a:rPr>
+                          <m:t>(</m:t>
+                        </m:r>
+                        <m:r>
+                          <a:rPr lang="de-DE" b="0" i="1" smtClean="0">
+                            <a:solidFill>
+                              <a:schemeClr val="tx1"/>
+                            </a:solidFill>
+                            <a:latin typeface="Cambria Math" panose="02040503050406030204" pitchFamily="18" charset="0"/>
+                          </a:rPr>
+                          <m:t>𝑠</m:t>
+                        </m:r>
+                        <m:r>
+                          <a:rPr lang="de-DE" b="0" i="1" smtClean="0">
+                            <a:solidFill>
+                              <a:schemeClr val="tx1"/>
+                            </a:solidFill>
+                            <a:latin typeface="Cambria Math" panose="02040503050406030204" pitchFamily="18" charset="0"/>
+                          </a:rPr>
+                          <m:t>)</m:t>
+                        </m:r>
+                      </m:oMath>
+                    </m:oMathPara>
+                  </a14:m>
+                  <a:endParaRPr lang="de-DE" dirty="0">
+                    <a:solidFill>
+                      <a:schemeClr val="tx1"/>
+                    </a:solidFill>
+                  </a:endParaRPr>
+                </a:p>
+              </p:txBody>
+            </p:sp>
+          </mc:Choice>
+          <mc:Fallback>
+            <p:sp>
+              <p:nvSpPr>
+                <p:cNvPr id="29" name="Prozess 28">
+                  <a:extLst>
+                    <a:ext uri="{FF2B5EF4-FFF2-40B4-BE49-F238E27FC236}">
+                      <a16:creationId xmlns:a16="http://schemas.microsoft.com/office/drawing/2014/main" id="{5550313D-F431-5BAA-3D57-41C5AD80269E}"/>
+                    </a:ext>
+                  </a:extLst>
+                </p:cNvPr>
+                <p:cNvSpPr>
+                  <a:spLocks noRot="1" noChangeAspect="1" noMove="1" noResize="1" noEditPoints="1" noAdjustHandles="1" noChangeArrowheads="1" noChangeShapeType="1" noTextEdit="1"/>
+                </p:cNvSpPr>
+                <p:nvPr/>
+              </p:nvSpPr>
+              <p:spPr>
+                <a:xfrm>
+                  <a:off x="7508453" y="293661"/>
+                  <a:ext cx="914400" cy="612648"/>
+                </a:xfrm>
+                <a:prstGeom prst="flowChartProcess">
+                  <a:avLst/>
+                </a:prstGeom>
+                <a:blipFill>
+                  <a:blip r:embed="rId6"/>
+                  <a:stretch>
+                    <a:fillRect/>
+                  </a:stretch>
+                </a:blipFill>
+                <a:ln>
+                  <a:solidFill>
+                    <a:schemeClr val="tx1"/>
+                  </a:solidFill>
+                </a:ln>
+              </p:spPr>
+              <p:txBody>
+                <a:bodyPr/>
+                <a:lstStyle/>
+                <a:p>
+                  <a:r>
+                    <a:rPr lang="de-DE">
+                      <a:noFill/>
+                    </a:rPr>
+                    <a:t> </a:t>
+                  </a:r>
+                </a:p>
+              </p:txBody>
+            </p:sp>
+          </mc:Fallback>
+        </mc:AlternateContent>
+        <p:cxnSp>
+          <p:nvCxnSpPr>
+            <p:cNvPr id="30" name="Gerade Verbindung 29">
+              <a:extLst>
+                <a:ext uri="{FF2B5EF4-FFF2-40B4-BE49-F238E27FC236}">
+                  <a16:creationId xmlns:a16="http://schemas.microsoft.com/office/drawing/2014/main" id="{23DB8B8C-2DF5-612D-A622-B229E58FC706}"/>
+                </a:ext>
+              </a:extLst>
+            </p:cNvPr>
+            <p:cNvCxnSpPr>
+              <a:cxnSpLocks/>
+            </p:cNvCxnSpPr>
+            <p:nvPr/>
+          </p:nvCxnSpPr>
+          <p:spPr>
+            <a:xfrm>
+              <a:off x="8422853" y="596305"/>
+              <a:ext cx="692459" cy="0"/>
+            </a:xfrm>
+            <a:prstGeom prst="line">
+              <a:avLst/>
+            </a:prstGeom>
+            <a:ln>
+              <a:solidFill>
+                <a:schemeClr val="tx1"/>
+              </a:solidFill>
+            </a:ln>
+          </p:spPr>
+          <p:style>
+            <a:lnRef idx="2">
+              <a:schemeClr val="accent1"/>
+            </a:lnRef>
+            <a:fillRef idx="0">
+              <a:schemeClr val="accent1"/>
+            </a:fillRef>
+            <a:effectRef idx="1">
+              <a:schemeClr val="accent1"/>
+            </a:effectRef>
+            <a:fontRef idx="minor">
+              <a:schemeClr val="tx1"/>
+            </a:fontRef>
+          </p:style>
+        </p:cxnSp>
+        <mc:AlternateContent xmlns:mc="http://schemas.openxmlformats.org/markup-compatibility/2006">
+          <mc:Choice xmlns:a14="http://schemas.microsoft.com/office/drawing/2010/main" Requires="a14">
+            <p:sp>
+              <p:nvSpPr>
+                <p:cNvPr id="32" name="Prozess 31">
+                  <a:extLst>
+                    <a:ext uri="{FF2B5EF4-FFF2-40B4-BE49-F238E27FC236}">
+                      <a16:creationId xmlns:a16="http://schemas.microsoft.com/office/drawing/2014/main" id="{8794284A-54CB-0A28-4ECC-7706C421B314}"/>
+                    </a:ext>
+                  </a:extLst>
+                </p:cNvPr>
+                <p:cNvSpPr/>
+                <p:nvPr/>
+              </p:nvSpPr>
+              <p:spPr>
+                <a:xfrm>
+                  <a:off x="7508453" y="1245113"/>
+                  <a:ext cx="914400" cy="612648"/>
+                </a:xfrm>
+                <a:prstGeom prst="flowChartProcess">
+                  <a:avLst/>
+                </a:prstGeom>
+                <a:noFill/>
+                <a:ln>
+                  <a:solidFill>
+                    <a:schemeClr val="tx1"/>
+                  </a:solidFill>
+                </a:ln>
+              </p:spPr>
+              <p:style>
+                <a:lnRef idx="2">
+                  <a:schemeClr val="accent1">
+                    <a:shade val="15000"/>
+                  </a:schemeClr>
+                </a:lnRef>
+                <a:fillRef idx="1">
+                  <a:schemeClr val="accent1"/>
+                </a:fillRef>
+                <a:effectRef idx="0">
+                  <a:schemeClr val="accent1"/>
+                </a:effectRef>
+                <a:fontRef idx="minor">
+                  <a:schemeClr val="lt1"/>
+                </a:fontRef>
+              </p:style>
+              <p:txBody>
+                <a:bodyPr rtlCol="0" anchor="ctr"/>
+                <a:lstStyle/>
+                <a:p>
+                  <a:pPr algn="ctr"/>
+                  <a14:m>
+                    <m:oMathPara xmlns:m="http://schemas.openxmlformats.org/officeDocument/2006/math">
+                      <m:oMathParaPr>
+                        <m:jc m:val="centerGroup"/>
+                      </m:oMathParaPr>
+                      <m:oMath xmlns:m="http://schemas.openxmlformats.org/officeDocument/2006/math">
+                        <m:r>
+                          <a:rPr lang="de-DE" b="0" i="1" smtClean="0">
+                            <a:solidFill>
+                              <a:schemeClr val="tx1"/>
+                            </a:solidFill>
+                            <a:latin typeface="Cambria Math" panose="02040503050406030204" pitchFamily="18" charset="0"/>
+                          </a:rPr>
+                          <m:t>𝐻</m:t>
+                        </m:r>
+                        <m:r>
+                          <a:rPr lang="de-DE" b="0" i="1" smtClean="0">
+                            <a:solidFill>
+                              <a:schemeClr val="tx1"/>
+                            </a:solidFill>
+                            <a:latin typeface="Cambria Math" panose="02040503050406030204" pitchFamily="18" charset="0"/>
+                          </a:rPr>
+                          <m:t>(</m:t>
+                        </m:r>
+                        <m:r>
+                          <a:rPr lang="de-DE" b="0" i="1" smtClean="0">
+                            <a:solidFill>
+                              <a:schemeClr val="tx1"/>
+                            </a:solidFill>
+                            <a:latin typeface="Cambria Math" panose="02040503050406030204" pitchFamily="18" charset="0"/>
+                          </a:rPr>
+                          <m:t>𝑠</m:t>
+                        </m:r>
+                        <m:r>
+                          <a:rPr lang="de-DE" b="0" i="1" smtClean="0">
+                            <a:solidFill>
+                              <a:schemeClr val="tx1"/>
+                            </a:solidFill>
+                            <a:latin typeface="Cambria Math" panose="02040503050406030204" pitchFamily="18" charset="0"/>
+                          </a:rPr>
+                          <m:t>)</m:t>
+                        </m:r>
+                      </m:oMath>
+                    </m:oMathPara>
+                  </a14:m>
+                  <a:endParaRPr lang="de-DE" dirty="0">
+                    <a:solidFill>
+                      <a:schemeClr val="tx1"/>
+                    </a:solidFill>
+                  </a:endParaRPr>
+                </a:p>
+              </p:txBody>
+            </p:sp>
+          </mc:Choice>
+          <mc:Fallback>
+            <p:sp>
+              <p:nvSpPr>
+                <p:cNvPr id="32" name="Prozess 31">
+                  <a:extLst>
+                    <a:ext uri="{FF2B5EF4-FFF2-40B4-BE49-F238E27FC236}">
+                      <a16:creationId xmlns:a16="http://schemas.microsoft.com/office/drawing/2014/main" id="{8794284A-54CB-0A28-4ECC-7706C421B314}"/>
+                    </a:ext>
+                  </a:extLst>
+                </p:cNvPr>
+                <p:cNvSpPr>
+                  <a:spLocks noRot="1" noChangeAspect="1" noMove="1" noResize="1" noEditPoints="1" noAdjustHandles="1" noChangeArrowheads="1" noChangeShapeType="1" noTextEdit="1"/>
+                </p:cNvSpPr>
+                <p:nvPr/>
+              </p:nvSpPr>
+              <p:spPr>
+                <a:xfrm>
+                  <a:off x="7508453" y="1245113"/>
+                  <a:ext cx="914400" cy="612648"/>
+                </a:xfrm>
+                <a:prstGeom prst="flowChartProcess">
+                  <a:avLst/>
+                </a:prstGeom>
+                <a:blipFill>
+                  <a:blip r:embed="rId7"/>
+                  <a:stretch>
+                    <a:fillRect/>
+                  </a:stretch>
+                </a:blipFill>
+                <a:ln>
+                  <a:solidFill>
+                    <a:schemeClr val="tx1"/>
+                  </a:solidFill>
+                </a:ln>
+              </p:spPr>
+              <p:txBody>
+                <a:bodyPr/>
+                <a:lstStyle/>
+                <a:p>
+                  <a:r>
+                    <a:rPr lang="de-DE">
+                      <a:noFill/>
+                    </a:rPr>
+                    <a:t> </a:t>
+                  </a:r>
+                </a:p>
+              </p:txBody>
+            </p:sp>
+          </mc:Fallback>
+        </mc:AlternateContent>
+        <p:cxnSp>
+          <p:nvCxnSpPr>
+            <p:cNvPr id="33" name="Gerade Verbindung mit Pfeil 32">
+              <a:extLst>
+                <a:ext uri="{FF2B5EF4-FFF2-40B4-BE49-F238E27FC236}">
+                  <a16:creationId xmlns:a16="http://schemas.microsoft.com/office/drawing/2014/main" id="{44DB01D6-EC66-43EC-AEF0-5C60D845F7C5}"/>
+                </a:ext>
+              </a:extLst>
+            </p:cNvPr>
+            <p:cNvCxnSpPr>
+              <a:cxnSpLocks/>
+              <a:endCxn id="32" idx="3"/>
+            </p:cNvCxnSpPr>
+            <p:nvPr/>
+          </p:nvCxnSpPr>
+          <p:spPr>
+            <a:xfrm flipH="1">
+              <a:off x="8422853" y="1551437"/>
+              <a:ext cx="741034" cy="0"/>
+            </a:xfrm>
+            <a:prstGeom prst="straightConnector1">
+              <a:avLst/>
+            </a:prstGeom>
+            <a:ln>
+              <a:solidFill>
+                <a:schemeClr val="tx1"/>
+              </a:solidFill>
+              <a:tailEnd type="triangle"/>
+            </a:ln>
+          </p:spPr>
+          <p:style>
+            <a:lnRef idx="2">
+              <a:schemeClr val="accent1"/>
+            </a:lnRef>
+            <a:fillRef idx="0">
+              <a:schemeClr val="accent1"/>
+            </a:fillRef>
+            <a:effectRef idx="1">
+              <a:schemeClr val="accent1"/>
+            </a:effectRef>
+            <a:fontRef idx="minor">
+              <a:schemeClr val="tx1"/>
+            </a:fontRef>
+          </p:style>
+        </p:cxnSp>
+        <p:cxnSp>
+          <p:nvCxnSpPr>
+            <p:cNvPr id="39" name="Gerade Verbindung 38">
+              <a:extLst>
+                <a:ext uri="{FF2B5EF4-FFF2-40B4-BE49-F238E27FC236}">
+                  <a16:creationId xmlns:a16="http://schemas.microsoft.com/office/drawing/2014/main" id="{2D221A9F-C8F2-2E91-75E9-34E787FC5910}"/>
+                </a:ext>
+              </a:extLst>
+            </p:cNvPr>
+            <p:cNvCxnSpPr>
+              <a:cxnSpLocks/>
+              <a:stCxn id="32" idx="1"/>
+            </p:cNvCxnSpPr>
+            <p:nvPr/>
+          </p:nvCxnSpPr>
+          <p:spPr>
+            <a:xfrm flipH="1">
+              <a:off x="6758197" y="1551437"/>
+              <a:ext cx="750256" cy="0"/>
+            </a:xfrm>
+            <a:prstGeom prst="line">
+              <a:avLst/>
+            </a:prstGeom>
+            <a:ln>
+              <a:solidFill>
+                <a:schemeClr val="tx1"/>
+              </a:solidFill>
+            </a:ln>
+          </p:spPr>
+          <p:style>
+            <a:lnRef idx="2">
+              <a:schemeClr val="accent1"/>
+            </a:lnRef>
+            <a:fillRef idx="0">
+              <a:schemeClr val="accent1"/>
+            </a:fillRef>
+            <a:effectRef idx="1">
+              <a:schemeClr val="accent1"/>
+            </a:effectRef>
+            <a:fontRef idx="minor">
+              <a:schemeClr val="tx1"/>
+            </a:fontRef>
+          </p:style>
+        </p:cxnSp>
+      </p:grpSp>
+      <p:sp>
+        <p:nvSpPr>
+          <p:cNvPr id="42" name="Textfeld 41">
+            <a:extLst>
+              <a:ext uri="{FF2B5EF4-FFF2-40B4-BE49-F238E27FC236}">
+                <a16:creationId xmlns:a16="http://schemas.microsoft.com/office/drawing/2014/main" id="{FC6C9B03-634C-A782-027C-40393ECD3BCA}"/>
+              </a:ext>
+            </a:extLst>
+          </p:cNvPr>
+          <p:cNvSpPr txBox="1"/>
+          <p:nvPr/>
+        </p:nvSpPr>
+        <p:spPr>
+          <a:xfrm>
+            <a:off x="-467139" y="-725557"/>
+            <a:ext cx="184731" cy="369332"/>
+          </a:xfrm>
+          <a:prstGeom prst="rect">
+            <a:avLst/>
+          </a:prstGeom>
+          <a:noFill/>
+          <a:ln>
+            <a:solidFill>
+              <a:schemeClr val="tx1"/>
+            </a:solidFill>
+          </a:ln>
+        </p:spPr>
+        <p:txBody>
+          <a:bodyPr wrap="none" rtlCol="0">
+            <a:spAutoFit/>
+          </a:bodyPr>
+          <a:lstStyle/>
+          <a:p>
+            <a:endParaRPr lang="de-DE" dirty="0"/>
+          </a:p>
+        </p:txBody>
+      </p:sp>
+      <mc:AlternateContent xmlns:mc="http://schemas.openxmlformats.org/markup-compatibility/2006">
+        <mc:Choice xmlns:a14="http://schemas.microsoft.com/office/drawing/2010/main" Requires="a14">
+          <p:sp>
+            <p:nvSpPr>
+              <p:cNvPr id="47" name="Textfeld 46">
+                <a:extLst>
+                  <a:ext uri="{FF2B5EF4-FFF2-40B4-BE49-F238E27FC236}">
+                    <a16:creationId xmlns:a16="http://schemas.microsoft.com/office/drawing/2014/main" id="{CD31E237-ABCE-94BD-45DB-DAD2DE3381FF}"/>
+                  </a:ext>
+                </a:extLst>
+              </p:cNvPr>
+              <p:cNvSpPr txBox="1"/>
+              <p:nvPr/>
+            </p:nvSpPr>
+            <p:spPr>
+              <a:xfrm>
+                <a:off x="8076111" y="3731999"/>
+                <a:ext cx="3720389" cy="923330"/>
+              </a:xfrm>
+              <a:prstGeom prst="rect">
+                <a:avLst/>
+              </a:prstGeom>
+              <a:noFill/>
+              <a:ln>
+                <a:solidFill>
+                  <a:schemeClr val="tx1"/>
+                </a:solidFill>
+              </a:ln>
+            </p:spPr>
+            <p:txBody>
+              <a:bodyPr wrap="square" rtlCol="0">
+                <a:spAutoFit/>
+              </a:bodyPr>
+              <a:lstStyle/>
+              <a:p>
+                <a:r>
+                  <a:rPr lang="de-DE" dirty="0"/>
+                  <a:t>Typically, </a:t>
+                </a:r>
+                <a14:m>
+                  <m:oMath xmlns:m="http://schemas.openxmlformats.org/officeDocument/2006/math">
+                    <m:r>
+                      <a:rPr lang="de-DE" i="1">
+                        <a:latin typeface="Cambria Math" panose="02040503050406030204" pitchFamily="18" charset="0"/>
+                      </a:rPr>
+                      <m:t>𝐻</m:t>
+                    </m:r>
+                    <m:d>
+                      <m:dPr>
+                        <m:ctrlPr>
+                          <a:rPr lang="de-DE" i="1">
+                            <a:latin typeface="Cambria Math" panose="02040503050406030204" pitchFamily="18" charset="0"/>
+                          </a:rPr>
+                        </m:ctrlPr>
+                      </m:dPr>
+                      <m:e>
+                        <m:r>
+                          <a:rPr lang="de-DE" i="1">
+                            <a:latin typeface="Cambria Math" panose="02040503050406030204" pitchFamily="18" charset="0"/>
+                          </a:rPr>
+                          <m:t>𝑠</m:t>
+                        </m:r>
+                      </m:e>
+                    </m:d>
+                    <m:r>
+                      <a:rPr lang="de-DE" b="0" i="1" smtClean="0">
+                        <a:latin typeface="Cambria Math" panose="02040503050406030204" pitchFamily="18" charset="0"/>
+                      </a:rPr>
+                      <m:t>=1</m:t>
+                    </m:r>
+                  </m:oMath>
+                </a14:m>
+                <a:r>
+                  <a:rPr lang="de-DE" dirty="0"/>
+                  <a:t> and a </a:t>
+                </a:r>
+                <a:r>
+                  <a:rPr lang="de-DE" dirty="0" err="1"/>
+                  <a:t>controller</a:t>
+                </a:r>
+                <a:r>
+                  <a:rPr lang="de-DE" dirty="0"/>
+                  <a:t> </a:t>
+                </a:r>
+                <a14:m>
+                  <m:oMath xmlns:m="http://schemas.openxmlformats.org/officeDocument/2006/math">
+                    <m:r>
+                      <a:rPr lang="de-DE" b="0" i="1" smtClean="0">
+                        <a:latin typeface="Cambria Math" panose="02040503050406030204" pitchFamily="18" charset="0"/>
+                      </a:rPr>
+                      <m:t>𝐶</m:t>
+                    </m:r>
+                    <m:r>
+                      <a:rPr lang="de-DE" i="1">
+                        <a:latin typeface="Cambria Math" panose="02040503050406030204" pitchFamily="18" charset="0"/>
+                      </a:rPr>
+                      <m:t>(</m:t>
+                    </m:r>
+                    <m:r>
+                      <a:rPr lang="de-DE" i="1">
+                        <a:latin typeface="Cambria Math" panose="02040503050406030204" pitchFamily="18" charset="0"/>
+                      </a:rPr>
+                      <m:t>𝑠</m:t>
+                    </m:r>
+                    <m:r>
+                      <a:rPr lang="de-DE" i="1">
+                        <a:latin typeface="Cambria Math" panose="02040503050406030204" pitchFamily="18" charset="0"/>
+                      </a:rPr>
+                      <m:t>)</m:t>
+                    </m:r>
+                  </m:oMath>
+                </a14:m>
+                <a:r>
+                  <a:rPr lang="de-DE" dirty="0"/>
+                  <a:t> </a:t>
+                </a:r>
+                <a:r>
+                  <a:rPr lang="de-DE" dirty="0" err="1"/>
+                  <a:t>is</a:t>
+                </a:r>
+                <a:r>
+                  <a:rPr lang="de-DE" dirty="0"/>
+                  <a:t> </a:t>
+                </a:r>
+                <a:r>
+                  <a:rPr lang="de-DE" dirty="0" err="1"/>
+                  <a:t>included</a:t>
+                </a:r>
+                <a:r>
+                  <a:rPr lang="de-DE" dirty="0"/>
+                  <a:t> in </a:t>
+                </a:r>
+                <a:r>
+                  <a:rPr lang="de-DE" dirty="0" err="1"/>
+                  <a:t>the</a:t>
+                </a:r>
+                <a:r>
+                  <a:rPr lang="de-DE" dirty="0"/>
+                  <a:t> </a:t>
+                </a:r>
+                <a:r>
+                  <a:rPr lang="de-DE" dirty="0" err="1"/>
+                  <a:t>forward</a:t>
+                </a:r>
+                <a:r>
+                  <a:rPr lang="de-DE" dirty="0"/>
+                  <a:t> </a:t>
+                </a:r>
+                <a:r>
+                  <a:rPr lang="de-DE" dirty="0" err="1"/>
+                  <a:t>path</a:t>
+                </a:r>
+                <a:r>
+                  <a:rPr lang="de-DE" dirty="0"/>
+                  <a:t>:</a:t>
+                </a:r>
+              </a:p>
+              <a:p>
+                <a:r>
+                  <a:rPr lang="de-DE" dirty="0"/>
+                  <a:t> </a:t>
+                </a:r>
+                <a14:m>
+                  <m:oMath xmlns:m="http://schemas.openxmlformats.org/officeDocument/2006/math">
+                    <m:r>
+                      <a:rPr lang="de-DE" i="1">
+                        <a:latin typeface="Cambria Math" panose="02040503050406030204" pitchFamily="18" charset="0"/>
+                      </a:rPr>
+                      <m:t>𝐿</m:t>
+                    </m:r>
+                    <m:d>
+                      <m:dPr>
+                        <m:ctrlPr>
+                          <a:rPr lang="de-DE" i="1">
+                            <a:latin typeface="Cambria Math" panose="02040503050406030204" pitchFamily="18" charset="0"/>
+                          </a:rPr>
+                        </m:ctrlPr>
+                      </m:dPr>
+                      <m:e>
+                        <m:r>
+                          <a:rPr lang="de-DE" i="1">
+                            <a:latin typeface="Cambria Math" panose="02040503050406030204" pitchFamily="18" charset="0"/>
+                          </a:rPr>
+                          <m:t>𝑠</m:t>
+                        </m:r>
+                      </m:e>
+                    </m:d>
+                    <m:r>
+                      <a:rPr lang="de-DE" b="0" i="1" smtClean="0">
+                        <a:latin typeface="Cambria Math" panose="02040503050406030204" pitchFamily="18" charset="0"/>
+                      </a:rPr>
+                      <m:t>=</m:t>
+                    </m:r>
+                    <m:r>
+                      <a:rPr lang="de-DE" b="0" i="1" smtClean="0">
+                        <a:latin typeface="Cambria Math" panose="02040503050406030204" pitchFamily="18" charset="0"/>
+                      </a:rPr>
+                      <m:t>𝐶</m:t>
+                    </m:r>
+                    <m:r>
+                      <a:rPr lang="de-DE" b="0" i="1" smtClean="0">
+                        <a:latin typeface="Cambria Math" panose="02040503050406030204" pitchFamily="18" charset="0"/>
+                      </a:rPr>
+                      <m:t>(</m:t>
+                    </m:r>
+                    <m:r>
+                      <a:rPr lang="de-DE" b="0" i="1" smtClean="0">
+                        <a:latin typeface="Cambria Math" panose="02040503050406030204" pitchFamily="18" charset="0"/>
+                      </a:rPr>
+                      <m:t>𝑠</m:t>
+                    </m:r>
+                    <m:r>
+                      <a:rPr lang="de-DE" b="0" i="1" smtClean="0">
+                        <a:latin typeface="Cambria Math" panose="02040503050406030204" pitchFamily="18" charset="0"/>
+                      </a:rPr>
+                      <m:t>)∙</m:t>
+                    </m:r>
+                    <m:r>
+                      <a:rPr lang="de-DE" b="0" i="1" smtClean="0">
+                        <a:latin typeface="Cambria Math" panose="02040503050406030204" pitchFamily="18" charset="0"/>
+                        <a:ea typeface="Cambria Math" panose="02040503050406030204" pitchFamily="18" charset="0"/>
+                      </a:rPr>
+                      <m:t>𝐺</m:t>
+                    </m:r>
+                    <m:r>
+                      <a:rPr lang="de-DE" b="0" i="1" smtClean="0">
+                        <a:latin typeface="Cambria Math" panose="02040503050406030204" pitchFamily="18" charset="0"/>
+                        <a:ea typeface="Cambria Math" panose="02040503050406030204" pitchFamily="18" charset="0"/>
+                      </a:rPr>
+                      <m:t>(</m:t>
+                    </m:r>
+                    <m:r>
+                      <a:rPr lang="de-DE" b="0" i="1" smtClean="0">
+                        <a:latin typeface="Cambria Math" panose="02040503050406030204" pitchFamily="18" charset="0"/>
+                        <a:ea typeface="Cambria Math" panose="02040503050406030204" pitchFamily="18" charset="0"/>
+                      </a:rPr>
+                      <m:t>𝑠</m:t>
+                    </m:r>
+                    <m:r>
+                      <a:rPr lang="de-DE" b="0" i="1" smtClean="0">
+                        <a:latin typeface="Cambria Math" panose="02040503050406030204" pitchFamily="18" charset="0"/>
+                        <a:ea typeface="Cambria Math" panose="02040503050406030204" pitchFamily="18" charset="0"/>
+                      </a:rPr>
+                      <m:t>)</m:t>
+                    </m:r>
+                  </m:oMath>
+                </a14:m>
+                <a:endParaRPr lang="de-DE" dirty="0"/>
+              </a:p>
+            </p:txBody>
+          </p:sp>
+        </mc:Choice>
+        <mc:Fallback>
+          <p:sp>
+            <p:nvSpPr>
+              <p:cNvPr id="47" name="Textfeld 46">
+                <a:extLst>
+                  <a:ext uri="{FF2B5EF4-FFF2-40B4-BE49-F238E27FC236}">
+                    <a16:creationId xmlns:a16="http://schemas.microsoft.com/office/drawing/2014/main" id="{CD31E237-ABCE-94BD-45DB-DAD2DE3381FF}"/>
+                  </a:ext>
+                </a:extLst>
+              </p:cNvPr>
+              <p:cNvSpPr txBox="1">
+                <a:spLocks noRot="1" noChangeAspect="1" noMove="1" noResize="1" noEditPoints="1" noAdjustHandles="1" noChangeArrowheads="1" noChangeShapeType="1" noTextEdit="1"/>
+              </p:cNvSpPr>
+              <p:nvPr/>
+            </p:nvSpPr>
+            <p:spPr>
+              <a:xfrm>
+                <a:off x="8076111" y="3731999"/>
+                <a:ext cx="3720389" cy="923330"/>
+              </a:xfrm>
+              <a:prstGeom prst="rect">
+                <a:avLst/>
+              </a:prstGeom>
+              <a:blipFill>
+                <a:blip r:embed="rId8"/>
+                <a:stretch>
+                  <a:fillRect l="-1356" t="-2667" r="-1017" b="-4000"/>
+                </a:stretch>
+              </a:blipFill>
+              <a:ln>
+                <a:solidFill>
+                  <a:schemeClr val="tx1"/>
+                </a:solidFill>
+              </a:ln>
+            </p:spPr>
+            <p:txBody>
+              <a:bodyPr/>
+              <a:lstStyle/>
+              <a:p>
+                <a:r>
+                  <a:rPr lang="de-DE">
+                    <a:noFill/>
+                  </a:rPr>
+                  <a:t> </a:t>
+                </a:r>
+              </a:p>
+            </p:txBody>
+          </p:sp>
+        </mc:Fallback>
+      </mc:AlternateContent>
     </p:spTree>
     <p:extLst>
       <p:ext uri="{BB962C8B-B14F-4D97-AF65-F5344CB8AC3E}">
@@ -14454,8 +15914,8 @@
           </a:p>
         </p:txBody>
       </p:sp>
-      <mc:AlternateContent xmlns:mc="http://schemas.openxmlformats.org/markup-compatibility/2006">
-        <mc:Choice xmlns:a14="http://schemas.microsoft.com/office/drawing/2010/main" Requires="a14">
+      <mc:AlternateContent xmlns:mc="http://schemas.openxmlformats.org/markup-compatibility/2006" xmlns:a14="http://schemas.microsoft.com/office/drawing/2010/main">
+        <mc:Choice Requires="a14">
           <p:sp>
             <p:nvSpPr>
               <p:cNvPr id="3" name="Inhaltsplatzhalter 2">
@@ -15046,7 +16506,7 @@
             </p:txBody>
           </p:sp>
         </mc:Choice>
-        <mc:Fallback>
+        <mc:Fallback xmlns="">
           <p:sp>
             <p:nvSpPr>
               <p:cNvPr id="3" name="Inhaltsplatzhalter 2">

--- a/slides/4_stability.pptx
+++ b/slides/4_stability.pptx
@@ -502,7 +502,7 @@
           <a:p>
             <a:fld id="{506E0FD1-891F-4B1E-916D-E9B585160BB8}" type="datetimeFigureOut">
               <a:rPr lang="en-GB" smtClean="0"/>
-              <a:t>15/03/2026</a:t>
+              <a:t>28/04/2026</a:t>
             </a:fld>
             <a:endParaRPr lang="en-GB"/>
           </a:p>
@@ -919,7 +919,7 @@
           <a:p>
             <a:fld id="{D68C3F22-27B2-44E3-9C5F-D08126455F6F}" type="datetime1">
               <a:rPr lang="en-GB" smtClean="0"/>
-              <a:t>15/03/2026</a:t>
+              <a:t>28/04/2026</a:t>
             </a:fld>
             <a:endParaRPr lang="en-GB"/>
           </a:p>
@@ -1119,7 +1119,7 @@
           <a:p>
             <a:fld id="{1CD03846-7BF6-4FB6-A921-FF3379ADBD4C}" type="datetime1">
               <a:rPr lang="en-GB" smtClean="0"/>
-              <a:t>15/03/2026</a:t>
+              <a:t>28/04/2026</a:t>
             </a:fld>
             <a:endParaRPr lang="en-GB"/>
           </a:p>
@@ -1329,7 +1329,7 @@
           <a:p>
             <a:fld id="{99E1B91A-3FD0-4144-9C84-63E9688ED2FE}" type="datetime1">
               <a:rPr lang="en-GB" smtClean="0"/>
-              <a:t>15/03/2026</a:t>
+              <a:t>28/04/2026</a:t>
             </a:fld>
             <a:endParaRPr lang="en-GB"/>
           </a:p>
@@ -1529,7 +1529,7 @@
           <a:p>
             <a:fld id="{5295ED7B-FEAD-4734-819F-93EF4B0EA908}" type="datetime1">
               <a:rPr lang="en-GB" smtClean="0"/>
-              <a:t>15/03/2026</a:t>
+              <a:t>28/04/2026</a:t>
             </a:fld>
             <a:endParaRPr lang="en-GB"/>
           </a:p>
@@ -1805,7 +1805,7 @@
           <a:p>
             <a:fld id="{D2D5D4B4-C926-4B45-8815-1ED8911179A2}" type="datetime1">
               <a:rPr lang="en-GB" smtClean="0"/>
-              <a:t>15/03/2026</a:t>
+              <a:t>28/04/2026</a:t>
             </a:fld>
             <a:endParaRPr lang="en-GB"/>
           </a:p>
@@ -2073,7 +2073,7 @@
           <a:p>
             <a:fld id="{B4C5210A-0E37-4935-93AF-69F21A5F712F}" type="datetime1">
               <a:rPr lang="en-GB" smtClean="0"/>
-              <a:t>15/03/2026</a:t>
+              <a:t>28/04/2026</a:t>
             </a:fld>
             <a:endParaRPr lang="en-GB"/>
           </a:p>
@@ -2488,7 +2488,7 @@
           <a:p>
             <a:fld id="{3D3A6B2F-436C-4691-80E8-9C890E000E9D}" type="datetime1">
               <a:rPr lang="en-GB" smtClean="0"/>
-              <a:t>15/03/2026</a:t>
+              <a:t>28/04/2026</a:t>
             </a:fld>
             <a:endParaRPr lang="en-GB"/>
           </a:p>
@@ -2630,7 +2630,7 @@
           <a:p>
             <a:fld id="{84385F4C-D74B-496F-8D21-97E3549C783B}" type="datetime1">
               <a:rPr lang="en-GB" smtClean="0"/>
-              <a:t>15/03/2026</a:t>
+              <a:t>28/04/2026</a:t>
             </a:fld>
             <a:endParaRPr lang="en-GB"/>
           </a:p>
@@ -2743,7 +2743,7 @@
           <a:p>
             <a:fld id="{0CBDCB32-C241-4703-A832-4EB47BD54E83}" type="datetime1">
               <a:rPr lang="en-GB" smtClean="0"/>
-              <a:t>15/03/2026</a:t>
+              <a:t>28/04/2026</a:t>
             </a:fld>
             <a:endParaRPr lang="en-GB"/>
           </a:p>
@@ -3056,7 +3056,7 @@
           <a:p>
             <a:fld id="{85C150FF-BE95-4D25-A16A-E368A81CBF24}" type="datetime1">
               <a:rPr lang="en-GB" smtClean="0"/>
-              <a:t>15/03/2026</a:t>
+              <a:t>28/04/2026</a:t>
             </a:fld>
             <a:endParaRPr lang="en-GB"/>
           </a:p>
@@ -3345,7 +3345,7 @@
           <a:p>
             <a:fld id="{F3C5DB4B-B349-43C9-A424-BADA723AD9F1}" type="datetime1">
               <a:rPr lang="en-GB" smtClean="0"/>
-              <a:t>15/03/2026</a:t>
+              <a:t>28/04/2026</a:t>
             </a:fld>
             <a:endParaRPr lang="en-GB"/>
           </a:p>
@@ -3588,7 +3588,7 @@
           <a:p>
             <a:fld id="{12632426-0A0C-405F-A3D0-2D11AA44702A}" type="datetime1">
               <a:rPr lang="en-GB" smtClean="0"/>
-              <a:t>15/03/2026</a:t>
+              <a:t>28/04/2026</a:t>
             </a:fld>
             <a:endParaRPr lang="en-GB"/>
           </a:p>
@@ -6098,7 +6098,7 @@
         <p:spPr>
           <a:xfrm>
             <a:off x="7300704" y="4171705"/>
-            <a:ext cx="4675767" cy="430887"/>
+            <a:ext cx="3432222" cy="430887"/>
           </a:xfrm>
           <a:prstGeom prst="rect">
             <a:avLst/>
@@ -6134,22 +6134,6 @@
             <a:r>
               <a:rPr lang="de-DE" sz="2200" dirty="0" err="1"/>
               <a:t>lead</a:t>
-            </a:r>
-            <a:r>
-              <a:rPr lang="de-DE" sz="2200" dirty="0"/>
-              <a:t>, </a:t>
-            </a:r>
-            <a:r>
-              <a:rPr lang="de-DE" sz="2200" dirty="0" err="1"/>
-              <a:t>from</a:t>
-            </a:r>
-            <a:r>
-              <a:rPr lang="de-DE" sz="2200" dirty="0"/>
-              <a:t> 0° </a:t>
-            </a:r>
-            <a:r>
-              <a:rPr lang="de-DE" sz="2200" dirty="0" err="1"/>
-              <a:t>to</a:t>
             </a:r>
             <a:r>
               <a:rPr lang="de-DE" sz="2200" dirty="0"/>
@@ -6173,7 +6157,7 @@
         <p:spPr>
           <a:xfrm>
             <a:off x="7300703" y="5705645"/>
-            <a:ext cx="4534703" cy="430887"/>
+            <a:ext cx="3236655" cy="430887"/>
           </a:xfrm>
           <a:prstGeom prst="rect">
             <a:avLst/>
@@ -6204,23 +6188,7 @@
             </a:r>
             <a:r>
               <a:rPr lang="de-DE" sz="2200" dirty="0"/>
-              <a:t> lag, </a:t>
-            </a:r>
-            <a:r>
-              <a:rPr lang="de-DE" sz="2200" dirty="0" err="1"/>
-              <a:t>from</a:t>
-            </a:r>
-            <a:r>
-              <a:rPr lang="de-DE" sz="2200" dirty="0"/>
-              <a:t> 0° </a:t>
-            </a:r>
-            <a:r>
-              <a:rPr lang="de-DE" sz="2200" dirty="0" err="1"/>
-              <a:t>to</a:t>
-            </a:r>
-            <a:r>
-              <a:rPr lang="de-DE" sz="2200" dirty="0"/>
-              <a:t> +90°</a:t>
+              <a:t> lag -90°</a:t>
             </a:r>
           </a:p>
         </p:txBody>
@@ -8150,8 +8118,8 @@
           </a:p>
         </p:txBody>
       </p:sp>
-      <mc:AlternateContent xmlns:mc="http://schemas.openxmlformats.org/markup-compatibility/2006">
-        <mc:Choice xmlns:a14="http://schemas.microsoft.com/office/drawing/2010/main" Requires="a14">
+      <mc:AlternateContent xmlns:mc="http://schemas.openxmlformats.org/markup-compatibility/2006" xmlns:a14="http://schemas.microsoft.com/office/drawing/2010/main">
+        <mc:Choice Requires="a14">
           <p:sp>
             <p:nvSpPr>
               <p:cNvPr id="3" name="Inhaltsplatzhalter 2">
@@ -8722,7 +8690,7 @@
             </p:txBody>
           </p:sp>
         </mc:Choice>
-        <mc:Fallback>
+        <mc:Fallback xmlns="">
           <p:sp>
             <p:nvSpPr>
               <p:cNvPr id="3" name="Inhaltsplatzhalter 2">
@@ -9074,8 +9042,8 @@
             </a:fontRef>
           </p:style>
         </p:cxnSp>
-        <mc:AlternateContent xmlns:mc="http://schemas.openxmlformats.org/markup-compatibility/2006">
-          <mc:Choice xmlns:a14="http://schemas.microsoft.com/office/drawing/2010/main" Requires="a14">
+        <mc:AlternateContent xmlns:mc="http://schemas.openxmlformats.org/markup-compatibility/2006" xmlns:a14="http://schemas.microsoft.com/office/drawing/2010/main">
+          <mc:Choice Requires="a14">
             <p:sp>
               <p:nvSpPr>
                 <p:cNvPr id="21" name="Textfeld 20">
@@ -9143,7 +9111,7 @@
               </p:txBody>
             </p:sp>
           </mc:Choice>
-          <mc:Fallback>
+          <mc:Fallback xmlns="">
             <p:sp>
               <p:nvSpPr>
                 <p:cNvPr id="21" name="Textfeld 20">
@@ -9427,8 +9395,8 @@
             </a:fontRef>
           </p:style>
         </p:cxnSp>
-        <mc:AlternateContent xmlns:mc="http://schemas.openxmlformats.org/markup-compatibility/2006">
-          <mc:Choice xmlns:a14="http://schemas.microsoft.com/office/drawing/2010/main" Requires="a14">
+        <mc:AlternateContent xmlns:mc="http://schemas.openxmlformats.org/markup-compatibility/2006" xmlns:a14="http://schemas.microsoft.com/office/drawing/2010/main">
+          <mc:Choice Requires="a14">
             <p:sp>
               <p:nvSpPr>
                 <p:cNvPr id="27" name="Textfeld 26">
@@ -9496,7 +9464,7 @@
               </p:txBody>
             </p:sp>
           </mc:Choice>
-          <mc:Fallback>
+          <mc:Fallback xmlns="">
             <p:sp>
               <p:nvSpPr>
                 <p:cNvPr id="27" name="Textfeld 26">
@@ -9541,8 +9509,8 @@
             </p:sp>
           </mc:Fallback>
         </mc:AlternateContent>
-        <mc:AlternateContent xmlns:mc="http://schemas.openxmlformats.org/markup-compatibility/2006">
-          <mc:Choice xmlns:a14="http://schemas.microsoft.com/office/drawing/2010/main" Requires="a14">
+        <mc:AlternateContent xmlns:mc="http://schemas.openxmlformats.org/markup-compatibility/2006" xmlns:a14="http://schemas.microsoft.com/office/drawing/2010/main">
+          <mc:Choice Requires="a14">
             <p:sp>
               <p:nvSpPr>
                 <p:cNvPr id="28" name="Textfeld 27">
@@ -9592,7 +9560,7 @@
               </p:txBody>
             </p:sp>
           </mc:Choice>
-          <mc:Fallback>
+          <mc:Fallback xmlns="">
             <p:sp>
               <p:nvSpPr>
                 <p:cNvPr id="28" name="Textfeld 27">
@@ -9637,8 +9605,8 @@
             </p:sp>
           </mc:Fallback>
         </mc:AlternateContent>
-        <mc:AlternateContent xmlns:mc="http://schemas.openxmlformats.org/markup-compatibility/2006">
-          <mc:Choice xmlns:a14="http://schemas.microsoft.com/office/drawing/2010/main" Requires="a14">
+        <mc:AlternateContent xmlns:mc="http://schemas.openxmlformats.org/markup-compatibility/2006" xmlns:a14="http://schemas.microsoft.com/office/drawing/2010/main">
+          <mc:Choice Requires="a14">
             <p:sp>
               <p:nvSpPr>
                 <p:cNvPr id="29" name="Prozess 28">
@@ -9741,7 +9709,7 @@
               </p:txBody>
             </p:sp>
           </mc:Choice>
-          <mc:Fallback>
+          <mc:Fallback xmlns="">
             <p:sp>
               <p:nvSpPr>
                 <p:cNvPr id="29" name="Prozess 28">
@@ -9834,8 +9802,8 @@
             </a:fontRef>
           </p:style>
         </p:cxnSp>
-        <mc:AlternateContent xmlns:mc="http://schemas.openxmlformats.org/markup-compatibility/2006">
-          <mc:Choice xmlns:a14="http://schemas.microsoft.com/office/drawing/2010/main" Requires="a14">
+        <mc:AlternateContent xmlns:mc="http://schemas.openxmlformats.org/markup-compatibility/2006" xmlns:a14="http://schemas.microsoft.com/office/drawing/2010/main">
+          <mc:Choice Requires="a14">
             <p:sp>
               <p:nvSpPr>
                 <p:cNvPr id="32" name="Prozess 31">
@@ -9938,7 +9906,7 @@
               </p:txBody>
             </p:sp>
           </mc:Choice>
-          <mc:Fallback>
+          <mc:Fallback xmlns="">
             <p:sp>
               <p:nvSpPr>
                 <p:cNvPr id="32" name="Prozess 31">
@@ -10115,8 +10083,8 @@
           </a:p>
         </p:txBody>
       </p:sp>
-      <mc:AlternateContent xmlns:mc="http://schemas.openxmlformats.org/markup-compatibility/2006">
-        <mc:Choice xmlns:a14="http://schemas.microsoft.com/office/drawing/2010/main" Requires="a14">
+      <mc:AlternateContent xmlns:mc="http://schemas.openxmlformats.org/markup-compatibility/2006" xmlns:a14="http://schemas.microsoft.com/office/drawing/2010/main">
+        <mc:Choice Requires="a14">
           <p:sp>
             <p:nvSpPr>
               <p:cNvPr id="47" name="Textfeld 46">
@@ -10367,7 +10335,7 @@
             </p:txBody>
           </p:sp>
         </mc:Choice>
-        <mc:Fallback>
+        <mc:Fallback xmlns="">
           <p:sp>
             <p:nvSpPr>
               <p:cNvPr id="47" name="Textfeld 46">

--- a/slides/4_stability.pptx
+++ b/slides/4_stability.pptx
@@ -502,7 +502,7 @@
           <a:p>
             <a:fld id="{506E0FD1-891F-4B1E-916D-E9B585160BB8}" type="datetimeFigureOut">
               <a:rPr lang="en-GB" smtClean="0"/>
-              <a:t>28/04/2026</a:t>
+              <a:t>29/04/2026</a:t>
             </a:fld>
             <a:endParaRPr lang="en-GB"/>
           </a:p>
@@ -919,7 +919,7 @@
           <a:p>
             <a:fld id="{D68C3F22-27B2-44E3-9C5F-D08126455F6F}" type="datetime1">
               <a:rPr lang="en-GB" smtClean="0"/>
-              <a:t>28/04/2026</a:t>
+              <a:t>29/04/2026</a:t>
             </a:fld>
             <a:endParaRPr lang="en-GB"/>
           </a:p>
@@ -1119,7 +1119,7 @@
           <a:p>
             <a:fld id="{1CD03846-7BF6-4FB6-A921-FF3379ADBD4C}" type="datetime1">
               <a:rPr lang="en-GB" smtClean="0"/>
-              <a:t>28/04/2026</a:t>
+              <a:t>29/04/2026</a:t>
             </a:fld>
             <a:endParaRPr lang="en-GB"/>
           </a:p>
@@ -1329,7 +1329,7 @@
           <a:p>
             <a:fld id="{99E1B91A-3FD0-4144-9C84-63E9688ED2FE}" type="datetime1">
               <a:rPr lang="en-GB" smtClean="0"/>
-              <a:t>28/04/2026</a:t>
+              <a:t>29/04/2026</a:t>
             </a:fld>
             <a:endParaRPr lang="en-GB"/>
           </a:p>
@@ -1529,7 +1529,7 @@
           <a:p>
             <a:fld id="{5295ED7B-FEAD-4734-819F-93EF4B0EA908}" type="datetime1">
               <a:rPr lang="en-GB" smtClean="0"/>
-              <a:t>28/04/2026</a:t>
+              <a:t>29/04/2026</a:t>
             </a:fld>
             <a:endParaRPr lang="en-GB"/>
           </a:p>
@@ -1805,7 +1805,7 @@
           <a:p>
             <a:fld id="{D2D5D4B4-C926-4B45-8815-1ED8911179A2}" type="datetime1">
               <a:rPr lang="en-GB" smtClean="0"/>
-              <a:t>28/04/2026</a:t>
+              <a:t>29/04/2026</a:t>
             </a:fld>
             <a:endParaRPr lang="en-GB"/>
           </a:p>
@@ -2073,7 +2073,7 @@
           <a:p>
             <a:fld id="{B4C5210A-0E37-4935-93AF-69F21A5F712F}" type="datetime1">
               <a:rPr lang="en-GB" smtClean="0"/>
-              <a:t>28/04/2026</a:t>
+              <a:t>29/04/2026</a:t>
             </a:fld>
             <a:endParaRPr lang="en-GB"/>
           </a:p>
@@ -2488,7 +2488,7 @@
           <a:p>
             <a:fld id="{3D3A6B2F-436C-4691-80E8-9C890E000E9D}" type="datetime1">
               <a:rPr lang="en-GB" smtClean="0"/>
-              <a:t>28/04/2026</a:t>
+              <a:t>29/04/2026</a:t>
             </a:fld>
             <a:endParaRPr lang="en-GB"/>
           </a:p>
@@ -2630,7 +2630,7 @@
           <a:p>
             <a:fld id="{84385F4C-D74B-496F-8D21-97E3549C783B}" type="datetime1">
               <a:rPr lang="en-GB" smtClean="0"/>
-              <a:t>28/04/2026</a:t>
+              <a:t>29/04/2026</a:t>
             </a:fld>
             <a:endParaRPr lang="en-GB"/>
           </a:p>
@@ -2743,7 +2743,7 @@
           <a:p>
             <a:fld id="{0CBDCB32-C241-4703-A832-4EB47BD54E83}" type="datetime1">
               <a:rPr lang="en-GB" smtClean="0"/>
-              <a:t>28/04/2026</a:t>
+              <a:t>29/04/2026</a:t>
             </a:fld>
             <a:endParaRPr lang="en-GB"/>
           </a:p>
@@ -3056,7 +3056,7 @@
           <a:p>
             <a:fld id="{85C150FF-BE95-4D25-A16A-E368A81CBF24}" type="datetime1">
               <a:rPr lang="en-GB" smtClean="0"/>
-              <a:t>28/04/2026</a:t>
+              <a:t>29/04/2026</a:t>
             </a:fld>
             <a:endParaRPr lang="en-GB"/>
           </a:p>
@@ -3345,7 +3345,7 @@
           <a:p>
             <a:fld id="{F3C5DB4B-B349-43C9-A424-BADA723AD9F1}" type="datetime1">
               <a:rPr lang="en-GB" smtClean="0"/>
-              <a:t>28/04/2026</a:t>
+              <a:t>29/04/2026</a:t>
             </a:fld>
             <a:endParaRPr lang="en-GB"/>
           </a:p>
@@ -3588,7 +3588,7 @@
           <a:p>
             <a:fld id="{12632426-0A0C-405F-A3D0-2D11AA44702A}" type="datetime1">
               <a:rPr lang="en-GB" smtClean="0"/>
-              <a:t>28/04/2026</a:t>
+              <a:t>29/04/2026</a:t>
             </a:fld>
             <a:endParaRPr lang="en-GB"/>
           </a:p>
@@ -18066,6 +18066,1003 @@
           </a:p>
         </p:txBody>
       </p:sp>
+      <mc:AlternateContent xmlns:mc="http://schemas.openxmlformats.org/markup-compatibility/2006">
+        <mc:Choice xmlns:a14="http://schemas.microsoft.com/office/drawing/2010/main" Requires="a14">
+          <p:sp>
+            <p:nvSpPr>
+              <p:cNvPr id="5" name="Textfeld 4">
+                <a:extLst>
+                  <a:ext uri="{FF2B5EF4-FFF2-40B4-BE49-F238E27FC236}">
+                    <a16:creationId xmlns:a16="http://schemas.microsoft.com/office/drawing/2014/main" id="{49206D4F-F1A8-A93A-E5A3-DB96E7E19587}"/>
+                  </a:ext>
+                </a:extLst>
+              </p:cNvPr>
+              <p:cNvSpPr txBox="1"/>
+              <p:nvPr/>
+            </p:nvSpPr>
+            <p:spPr>
+              <a:xfrm>
+                <a:off x="7600292" y="260676"/>
+                <a:ext cx="4280082" cy="1918539"/>
+              </a:xfrm>
+              <a:prstGeom prst="rect">
+                <a:avLst/>
+              </a:prstGeom>
+              <a:noFill/>
+              <a:ln>
+                <a:solidFill>
+                  <a:schemeClr val="tx1"/>
+                </a:solidFill>
+              </a:ln>
+            </p:spPr>
+            <p:txBody>
+              <a:bodyPr wrap="none" rtlCol="0">
+                <a:spAutoFit/>
+              </a:bodyPr>
+              <a:lstStyle/>
+              <a:p>
+                <a:r>
+                  <a:rPr lang="de-DE" dirty="0"/>
+                  <a:t>z</a:t>
+                </a:r>
+                <a:r>
+                  <a:rPr lang="de-DE" dirty="0" err="1"/>
+                  <a:t>ero</a:t>
+                </a:r>
+                <a:r>
+                  <a:rPr lang="de-DE" dirty="0"/>
+                  <a:t> at </a:t>
+                </a:r>
+                <a14:m>
+                  <m:oMath xmlns:m="http://schemas.openxmlformats.org/officeDocument/2006/math">
+                    <m:r>
+                      <m:rPr>
+                        <m:sty m:val="p"/>
+                      </m:rPr>
+                      <a:rPr lang="de-DE" b="0" i="0" smtClean="0">
+                        <a:latin typeface="Cambria Math" panose="02040503050406030204" pitchFamily="18" charset="0"/>
+                      </a:rPr>
+                      <m:t>s</m:t>
+                    </m:r>
+                    <m:r>
+                      <a:rPr lang="de-DE" b="0" i="0" smtClean="0">
+                        <a:latin typeface="Cambria Math" panose="02040503050406030204" pitchFamily="18" charset="0"/>
+                      </a:rPr>
+                      <m:t>=</m:t>
+                    </m:r>
+                    <m:r>
+                      <a:rPr lang="de-DE" b="0" i="1" smtClean="0">
+                        <a:latin typeface="Cambria Math" panose="02040503050406030204" pitchFamily="18" charset="0"/>
+                      </a:rPr>
+                      <m:t>−</m:t>
+                    </m:r>
+                    <m:r>
+                      <a:rPr lang="de-DE" b="0" i="1" smtClean="0">
+                        <a:latin typeface="Cambria Math" panose="02040503050406030204" pitchFamily="18" charset="0"/>
+                      </a:rPr>
+                      <m:t>𝑧</m:t>
+                    </m:r>
+                  </m:oMath>
+                </a14:m>
+                <a:r>
+                  <a:rPr lang="de-DE" dirty="0"/>
+                  <a:t>:</a:t>
+                </a:r>
+              </a:p>
+              <a:p>
+                <a:pPr/>
+                <a:r>
+                  <a:rPr lang="de-DE" b="0" dirty="0"/>
+                  <a:t>	</a:t>
+                </a:r>
+                <a14:m>
+                  <m:oMath xmlns:m="http://schemas.openxmlformats.org/officeDocument/2006/math">
+                    <m:r>
+                      <a:rPr lang="de-DE" b="0" i="1" smtClean="0">
+                        <a:latin typeface="Cambria Math" panose="02040503050406030204" pitchFamily="18" charset="0"/>
+                      </a:rPr>
+                      <m:t>𝑌</m:t>
+                    </m:r>
+                    <m:d>
+                      <m:dPr>
+                        <m:ctrlPr>
+                          <a:rPr lang="de-DE" b="0" i="1" smtClean="0">
+                            <a:latin typeface="Cambria Math" panose="02040503050406030204" pitchFamily="18" charset="0"/>
+                          </a:rPr>
+                        </m:ctrlPr>
+                      </m:dPr>
+                      <m:e>
+                        <m:r>
+                          <a:rPr lang="de-DE" b="0" i="1" smtClean="0">
+                            <a:latin typeface="Cambria Math" panose="02040503050406030204" pitchFamily="18" charset="0"/>
+                          </a:rPr>
+                          <m:t>𝑠</m:t>
+                        </m:r>
+                      </m:e>
+                    </m:d>
+                    <m:r>
+                      <a:rPr lang="de-DE" b="0" i="1" smtClean="0">
+                        <a:latin typeface="Cambria Math" panose="02040503050406030204" pitchFamily="18" charset="0"/>
+                      </a:rPr>
+                      <m:t>=</m:t>
+                    </m:r>
+                    <m:d>
+                      <m:dPr>
+                        <m:ctrlPr>
+                          <a:rPr lang="de-DE" b="0" i="1" smtClean="0">
+                            <a:latin typeface="Cambria Math" panose="02040503050406030204" pitchFamily="18" charset="0"/>
+                          </a:rPr>
+                        </m:ctrlPr>
+                      </m:dPr>
+                      <m:e>
+                        <m:r>
+                          <a:rPr lang="de-DE" b="0" i="1" smtClean="0">
+                            <a:latin typeface="Cambria Math" panose="02040503050406030204" pitchFamily="18" charset="0"/>
+                          </a:rPr>
+                          <m:t>𝑠</m:t>
+                        </m:r>
+                        <m:r>
+                          <a:rPr lang="de-DE" b="0" i="1" smtClean="0">
+                            <a:latin typeface="Cambria Math" panose="02040503050406030204" pitchFamily="18" charset="0"/>
+                          </a:rPr>
+                          <m:t>+</m:t>
+                        </m:r>
+                        <m:r>
+                          <a:rPr lang="de-DE" b="0" i="1" smtClean="0">
+                            <a:latin typeface="Cambria Math" panose="02040503050406030204" pitchFamily="18" charset="0"/>
+                          </a:rPr>
+                          <m:t>𝑧</m:t>
+                        </m:r>
+                      </m:e>
+                    </m:d>
+                    <m:f>
+                      <m:fPr>
+                        <m:ctrlPr>
+                          <a:rPr lang="de-DE" b="0" i="1" smtClean="0">
+                            <a:latin typeface="Cambria Math" panose="02040503050406030204" pitchFamily="18" charset="0"/>
+                          </a:rPr>
+                        </m:ctrlPr>
+                      </m:fPr>
+                      <m:num>
+                        <m:sSub>
+                          <m:sSubPr>
+                            <m:ctrlPr>
+                              <a:rPr lang="de-DE" b="0" i="1" smtClean="0">
+                                <a:latin typeface="Cambria Math" panose="02040503050406030204" pitchFamily="18" charset="0"/>
+                              </a:rPr>
+                            </m:ctrlPr>
+                          </m:sSubPr>
+                          <m:e>
+                            <m:r>
+                              <a:rPr lang="de-DE" b="0" i="1" smtClean="0">
+                                <a:latin typeface="Cambria Math" panose="02040503050406030204" pitchFamily="18" charset="0"/>
+                              </a:rPr>
+                              <m:t>𝑁</m:t>
+                            </m:r>
+                          </m:e>
+                          <m:sub>
+                            <m:r>
+                              <m:rPr>
+                                <m:sty m:val="p"/>
+                              </m:rPr>
+                              <a:rPr lang="de-DE" b="0" i="0" smtClean="0">
+                                <a:latin typeface="Cambria Math" panose="02040503050406030204" pitchFamily="18" charset="0"/>
+                              </a:rPr>
+                              <m:t>rest</m:t>
+                            </m:r>
+                          </m:sub>
+                        </m:sSub>
+                        <m:d>
+                          <m:dPr>
+                            <m:ctrlPr>
+                              <a:rPr lang="de-DE" b="0" i="1" smtClean="0">
+                                <a:latin typeface="Cambria Math" panose="02040503050406030204" pitchFamily="18" charset="0"/>
+                              </a:rPr>
+                            </m:ctrlPr>
+                          </m:dPr>
+                          <m:e>
+                            <m:r>
+                              <a:rPr lang="de-DE" b="0" i="1" smtClean="0">
+                                <a:latin typeface="Cambria Math" panose="02040503050406030204" pitchFamily="18" charset="0"/>
+                              </a:rPr>
+                              <m:t>𝑠</m:t>
+                            </m:r>
+                          </m:e>
+                        </m:d>
+                      </m:num>
+                      <m:den>
+                        <m:r>
+                          <a:rPr lang="de-DE" b="0" i="1" smtClean="0">
+                            <a:latin typeface="Cambria Math" panose="02040503050406030204" pitchFamily="18" charset="0"/>
+                          </a:rPr>
+                          <m:t>𝐷</m:t>
+                        </m:r>
+                        <m:d>
+                          <m:dPr>
+                            <m:ctrlPr>
+                              <a:rPr lang="de-DE" b="0" i="1" smtClean="0">
+                                <a:latin typeface="Cambria Math" panose="02040503050406030204" pitchFamily="18" charset="0"/>
+                              </a:rPr>
+                            </m:ctrlPr>
+                          </m:dPr>
+                          <m:e>
+                            <m:r>
+                              <a:rPr lang="de-DE" b="0" i="1" smtClean="0">
+                                <a:latin typeface="Cambria Math" panose="02040503050406030204" pitchFamily="18" charset="0"/>
+                              </a:rPr>
+                              <m:t>𝑠</m:t>
+                            </m:r>
+                          </m:e>
+                        </m:d>
+                      </m:den>
+                    </m:f>
+                    <m:r>
+                      <a:rPr lang="de-DE" b="0" i="1" smtClean="0">
+                        <a:latin typeface="Cambria Math" panose="02040503050406030204" pitchFamily="18" charset="0"/>
+                      </a:rPr>
+                      <m:t>𝑈</m:t>
+                    </m:r>
+                    <m:d>
+                      <m:dPr>
+                        <m:ctrlPr>
+                          <a:rPr lang="de-DE" b="0" i="1" smtClean="0">
+                            <a:latin typeface="Cambria Math" panose="02040503050406030204" pitchFamily="18" charset="0"/>
+                          </a:rPr>
+                        </m:ctrlPr>
+                      </m:dPr>
+                      <m:e>
+                        <m:r>
+                          <a:rPr lang="de-DE" b="0" i="1" smtClean="0">
+                            <a:latin typeface="Cambria Math" panose="02040503050406030204" pitchFamily="18" charset="0"/>
+                          </a:rPr>
+                          <m:t>𝑠</m:t>
+                        </m:r>
+                      </m:e>
+                    </m:d>
+                  </m:oMath>
+                </a14:m>
+                <a:endParaRPr lang="de-DE" b="0" dirty="0"/>
+              </a:p>
+              <a:p>
+                <a:pPr/>
+                <a:r>
+                  <a:rPr lang="de-DE" dirty="0"/>
+                  <a:t>inverse Laplace </a:t>
+                </a:r>
+                <a:r>
+                  <a:rPr lang="de-DE" dirty="0" err="1"/>
+                  <a:t>transform</a:t>
+                </a:r>
+                <a:r>
+                  <a:rPr lang="de-DE" dirty="0"/>
+                  <a:t> </a:t>
+                </a:r>
+                <a:r>
+                  <a:rPr lang="de-DE" dirty="0" err="1"/>
+                  <a:t>of</a:t>
+                </a:r>
+                <a:r>
+                  <a:rPr lang="de-DE" dirty="0"/>
+                  <a:t> </a:t>
+                </a:r>
+                <a14:m>
+                  <m:oMath xmlns:m="http://schemas.openxmlformats.org/officeDocument/2006/math">
+                    <m:d>
+                      <m:dPr>
+                        <m:ctrlPr>
+                          <a:rPr lang="de-DE" i="1">
+                            <a:latin typeface="Cambria Math" panose="02040503050406030204" pitchFamily="18" charset="0"/>
+                          </a:rPr>
+                        </m:ctrlPr>
+                      </m:dPr>
+                      <m:e>
+                        <m:r>
+                          <a:rPr lang="de-DE" i="1">
+                            <a:latin typeface="Cambria Math" panose="02040503050406030204" pitchFamily="18" charset="0"/>
+                          </a:rPr>
+                          <m:t>𝑠</m:t>
+                        </m:r>
+                        <m:r>
+                          <a:rPr lang="de-DE" i="1">
+                            <a:latin typeface="Cambria Math" panose="02040503050406030204" pitchFamily="18" charset="0"/>
+                          </a:rPr>
+                          <m:t>+</m:t>
+                        </m:r>
+                        <m:r>
+                          <a:rPr lang="de-DE" i="1">
+                            <a:latin typeface="Cambria Math" panose="02040503050406030204" pitchFamily="18" charset="0"/>
+                          </a:rPr>
+                          <m:t>𝑧</m:t>
+                        </m:r>
+                      </m:e>
+                    </m:d>
+                    <m:r>
+                      <a:rPr lang="de-DE" b="0" i="1" smtClean="0">
+                        <a:latin typeface="Cambria Math" panose="02040503050406030204" pitchFamily="18" charset="0"/>
+                      </a:rPr>
+                      <m:t>𝑈</m:t>
+                    </m:r>
+                    <m:r>
+                      <a:rPr lang="de-DE" b="0" i="1" smtClean="0">
+                        <a:latin typeface="Cambria Math" panose="02040503050406030204" pitchFamily="18" charset="0"/>
+                      </a:rPr>
+                      <m:t>(</m:t>
+                    </m:r>
+                    <m:r>
+                      <a:rPr lang="de-DE" b="0" i="1" smtClean="0">
+                        <a:latin typeface="Cambria Math" panose="02040503050406030204" pitchFamily="18" charset="0"/>
+                      </a:rPr>
+                      <m:t>𝑠</m:t>
+                    </m:r>
+                    <m:r>
+                      <a:rPr lang="de-DE" b="0" i="1" smtClean="0">
+                        <a:latin typeface="Cambria Math" panose="02040503050406030204" pitchFamily="18" charset="0"/>
+                      </a:rPr>
+                      <m:t>)</m:t>
+                    </m:r>
+                  </m:oMath>
+                </a14:m>
+                <a:r>
+                  <a:rPr lang="de-DE" dirty="0"/>
+                  <a:t>:</a:t>
+                </a:r>
+              </a:p>
+              <a:p>
+                <a:pPr/>
+                <a:r>
+                  <a:rPr lang="de-DE" dirty="0"/>
+                  <a:t>	</a:t>
+                </a:r>
+                <a14:m>
+                  <m:oMath xmlns:m="http://schemas.openxmlformats.org/officeDocument/2006/math">
+                    <m:acc>
+                      <m:accPr>
+                        <m:chr m:val="̇"/>
+                        <m:ctrlPr>
+                          <a:rPr lang="de-DE" i="1" smtClean="0">
+                            <a:latin typeface="Cambria Math" panose="02040503050406030204" pitchFamily="18" charset="0"/>
+                          </a:rPr>
+                        </m:ctrlPr>
+                      </m:accPr>
+                      <m:e>
+                        <m:r>
+                          <a:rPr lang="de-DE" b="0" i="1" smtClean="0">
+                            <a:latin typeface="Cambria Math" panose="02040503050406030204" pitchFamily="18" charset="0"/>
+                          </a:rPr>
+                          <m:t>𝑢</m:t>
+                        </m:r>
+                      </m:e>
+                    </m:acc>
+                    <m:d>
+                      <m:dPr>
+                        <m:ctrlPr>
+                          <a:rPr lang="de-DE" b="0" i="1" smtClean="0">
+                            <a:latin typeface="Cambria Math" panose="02040503050406030204" pitchFamily="18" charset="0"/>
+                          </a:rPr>
+                        </m:ctrlPr>
+                      </m:dPr>
+                      <m:e>
+                        <m:r>
+                          <a:rPr lang="de-DE" b="0" i="1" smtClean="0">
+                            <a:latin typeface="Cambria Math" panose="02040503050406030204" pitchFamily="18" charset="0"/>
+                          </a:rPr>
+                          <m:t>𝑡</m:t>
+                        </m:r>
+                      </m:e>
+                    </m:d>
+                    <m:r>
+                      <a:rPr lang="de-DE" b="0" i="1" smtClean="0">
+                        <a:latin typeface="Cambria Math" panose="02040503050406030204" pitchFamily="18" charset="0"/>
+                      </a:rPr>
+                      <m:t>+</m:t>
+                    </m:r>
+                    <m:r>
+                      <a:rPr lang="de-DE" b="0" i="1" smtClean="0">
+                        <a:latin typeface="Cambria Math" panose="02040503050406030204" pitchFamily="18" charset="0"/>
+                      </a:rPr>
+                      <m:t>𝑧</m:t>
+                    </m:r>
+                    <m:r>
+                      <a:rPr lang="de-DE" b="0" i="1" smtClean="0">
+                        <a:latin typeface="Cambria Math" panose="02040503050406030204" pitchFamily="18" charset="0"/>
+                        <a:ea typeface="Cambria Math" panose="02040503050406030204" pitchFamily="18" charset="0"/>
+                      </a:rPr>
+                      <m:t>∙</m:t>
+                    </m:r>
+                    <m:r>
+                      <a:rPr lang="de-DE" b="0" i="1" smtClean="0">
+                        <a:latin typeface="Cambria Math" panose="02040503050406030204" pitchFamily="18" charset="0"/>
+                      </a:rPr>
+                      <m:t>𝑢</m:t>
+                    </m:r>
+                    <m:r>
+                      <a:rPr lang="de-DE" b="0" i="1" smtClean="0">
+                        <a:latin typeface="Cambria Math" panose="02040503050406030204" pitchFamily="18" charset="0"/>
+                      </a:rPr>
+                      <m:t>(</m:t>
+                    </m:r>
+                    <m:r>
+                      <a:rPr lang="de-DE" b="0" i="1" smtClean="0">
+                        <a:latin typeface="Cambria Math" panose="02040503050406030204" pitchFamily="18" charset="0"/>
+                      </a:rPr>
+                      <m:t>𝑡</m:t>
+                    </m:r>
+                    <m:r>
+                      <a:rPr lang="de-DE" b="0" i="1" smtClean="0">
+                        <a:latin typeface="Cambria Math" panose="02040503050406030204" pitchFamily="18" charset="0"/>
+                      </a:rPr>
+                      <m:t>)</m:t>
+                    </m:r>
+                  </m:oMath>
+                </a14:m>
+                <a:endParaRPr lang="de-DE" dirty="0"/>
+              </a:p>
+              <a:p>
+                <a:pPr/>
+                <a:endParaRPr lang="de-DE" dirty="0"/>
+              </a:p>
+              <a:p>
+                <a:pPr/>
+                <a:r>
+                  <a:rPr lang="de-DE" dirty="0" err="1"/>
+                  <a:t>zero</a:t>
+                </a:r>
+                <a:r>
+                  <a:rPr lang="de-DE" dirty="0"/>
+                  <a:t> at </a:t>
+                </a:r>
+                <a14:m>
+                  <m:oMath xmlns:m="http://schemas.openxmlformats.org/officeDocument/2006/math">
+                    <m:r>
+                      <m:rPr>
+                        <m:sty m:val="p"/>
+                      </m:rPr>
+                      <a:rPr lang="de-DE" b="0" i="0" smtClean="0">
+                        <a:latin typeface="Cambria Math" panose="02040503050406030204" pitchFamily="18" charset="0"/>
+                      </a:rPr>
+                      <m:t>s</m:t>
+                    </m:r>
+                    <m:r>
+                      <a:rPr lang="de-DE" b="0" i="0" smtClean="0">
+                        <a:latin typeface="Cambria Math" panose="02040503050406030204" pitchFamily="18" charset="0"/>
+                      </a:rPr>
+                      <m:t>=+</m:t>
+                    </m:r>
+                    <m:r>
+                      <a:rPr lang="de-DE" i="1">
+                        <a:latin typeface="Cambria Math" panose="02040503050406030204" pitchFamily="18" charset="0"/>
+                      </a:rPr>
+                      <m:t>𝑧</m:t>
+                    </m:r>
+                  </m:oMath>
+                </a14:m>
+                <a:r>
+                  <a:rPr lang="de-DE" dirty="0"/>
+                  <a:t>:	</a:t>
+                </a:r>
+                <a14:m>
+                  <m:oMath xmlns:m="http://schemas.openxmlformats.org/officeDocument/2006/math">
+                    <m:acc>
+                      <m:accPr>
+                        <m:chr m:val="̇"/>
+                        <m:ctrlPr>
+                          <a:rPr lang="de-DE" i="1">
+                            <a:latin typeface="Cambria Math" panose="02040503050406030204" pitchFamily="18" charset="0"/>
+                          </a:rPr>
+                        </m:ctrlPr>
+                      </m:accPr>
+                      <m:e>
+                        <m:r>
+                          <a:rPr lang="de-DE" i="1">
+                            <a:latin typeface="Cambria Math" panose="02040503050406030204" pitchFamily="18" charset="0"/>
+                          </a:rPr>
+                          <m:t>𝑢</m:t>
+                        </m:r>
+                      </m:e>
+                    </m:acc>
+                    <m:d>
+                      <m:dPr>
+                        <m:ctrlPr>
+                          <a:rPr lang="de-DE" i="1">
+                            <a:latin typeface="Cambria Math" panose="02040503050406030204" pitchFamily="18" charset="0"/>
+                          </a:rPr>
+                        </m:ctrlPr>
+                      </m:dPr>
+                      <m:e>
+                        <m:r>
+                          <a:rPr lang="de-DE" i="1">
+                            <a:latin typeface="Cambria Math" panose="02040503050406030204" pitchFamily="18" charset="0"/>
+                          </a:rPr>
+                          <m:t>𝑡</m:t>
+                        </m:r>
+                      </m:e>
+                    </m:d>
+                    <m:r>
+                      <a:rPr lang="de-DE" b="0" i="1" smtClean="0">
+                        <a:latin typeface="Cambria Math" panose="02040503050406030204" pitchFamily="18" charset="0"/>
+                      </a:rPr>
+                      <m:t>−</m:t>
+                    </m:r>
+                    <m:r>
+                      <a:rPr lang="de-DE" i="1">
+                        <a:latin typeface="Cambria Math" panose="02040503050406030204" pitchFamily="18" charset="0"/>
+                      </a:rPr>
+                      <m:t>𝑧</m:t>
+                    </m:r>
+                    <m:r>
+                      <a:rPr lang="de-DE" i="1">
+                        <a:latin typeface="Cambria Math" panose="02040503050406030204" pitchFamily="18" charset="0"/>
+                        <a:ea typeface="Cambria Math" panose="02040503050406030204" pitchFamily="18" charset="0"/>
+                      </a:rPr>
+                      <m:t>∙</m:t>
+                    </m:r>
+                    <m:r>
+                      <a:rPr lang="de-DE" i="1">
+                        <a:latin typeface="Cambria Math" panose="02040503050406030204" pitchFamily="18" charset="0"/>
+                      </a:rPr>
+                      <m:t>𝑢</m:t>
+                    </m:r>
+                    <m:r>
+                      <a:rPr lang="de-DE" i="1">
+                        <a:latin typeface="Cambria Math" panose="02040503050406030204" pitchFamily="18" charset="0"/>
+                      </a:rPr>
+                      <m:t>(</m:t>
+                    </m:r>
+                    <m:r>
+                      <a:rPr lang="de-DE" i="1">
+                        <a:latin typeface="Cambria Math" panose="02040503050406030204" pitchFamily="18" charset="0"/>
+                      </a:rPr>
+                      <m:t>𝑡</m:t>
+                    </m:r>
+                    <m:r>
+                      <a:rPr lang="de-DE" i="1">
+                        <a:latin typeface="Cambria Math" panose="02040503050406030204" pitchFamily="18" charset="0"/>
+                      </a:rPr>
+                      <m:t>)</m:t>
+                    </m:r>
+                  </m:oMath>
+                </a14:m>
+                <a:endParaRPr lang="de-DE" dirty="0"/>
+              </a:p>
+            </p:txBody>
+          </p:sp>
+        </mc:Choice>
+        <mc:Fallback>
+          <p:sp>
+            <p:nvSpPr>
+              <p:cNvPr id="5" name="Textfeld 4">
+                <a:extLst>
+                  <a:ext uri="{FF2B5EF4-FFF2-40B4-BE49-F238E27FC236}">
+                    <a16:creationId xmlns:a16="http://schemas.microsoft.com/office/drawing/2014/main" id="{49206D4F-F1A8-A93A-E5A3-DB96E7E19587}"/>
+                  </a:ext>
+                </a:extLst>
+              </p:cNvPr>
+              <p:cNvSpPr txBox="1">
+                <a:spLocks noRot="1" noChangeAspect="1" noMove="1" noResize="1" noEditPoints="1" noAdjustHandles="1" noChangeArrowheads="1" noChangeShapeType="1" noTextEdit="1"/>
+              </p:cNvSpPr>
+              <p:nvPr/>
+            </p:nvSpPr>
+            <p:spPr>
+              <a:xfrm>
+                <a:off x="7600292" y="260676"/>
+                <a:ext cx="4280082" cy="1918539"/>
+              </a:xfrm>
+              <a:prstGeom prst="rect">
+                <a:avLst/>
+              </a:prstGeom>
+              <a:blipFill>
+                <a:blip r:embed="rId2"/>
+                <a:stretch>
+                  <a:fillRect l="-1180" t="-1316" b="-4605"/>
+                </a:stretch>
+              </a:blipFill>
+              <a:ln>
+                <a:solidFill>
+                  <a:schemeClr val="tx1"/>
+                </a:solidFill>
+              </a:ln>
+            </p:spPr>
+            <p:txBody>
+              <a:bodyPr/>
+              <a:lstStyle/>
+              <a:p>
+                <a:r>
+                  <a:rPr lang="de-DE">
+                    <a:noFill/>
+                  </a:rPr>
+                  <a:t> </a:t>
+                </a:r>
+              </a:p>
+            </p:txBody>
+          </p:sp>
+        </mc:Fallback>
+      </mc:AlternateContent>
+      <mc:AlternateContent xmlns:mc="http://schemas.openxmlformats.org/markup-compatibility/2006">
+        <mc:Choice xmlns:a14="http://schemas.microsoft.com/office/drawing/2010/main" Requires="a14">
+          <p:sp>
+            <p:nvSpPr>
+              <p:cNvPr id="7" name="Textfeld 6">
+                <a:extLst>
+                  <a:ext uri="{FF2B5EF4-FFF2-40B4-BE49-F238E27FC236}">
+                    <a16:creationId xmlns:a16="http://schemas.microsoft.com/office/drawing/2014/main" id="{8F552C05-0443-F3AF-5474-8295522B2D89}"/>
+                  </a:ext>
+                </a:extLst>
+              </p:cNvPr>
+              <p:cNvSpPr txBox="1"/>
+              <p:nvPr/>
+            </p:nvSpPr>
+            <p:spPr>
+              <a:xfrm>
+                <a:off x="7600291" y="3024081"/>
+                <a:ext cx="4280081" cy="809837"/>
+              </a:xfrm>
+              <a:prstGeom prst="rect">
+                <a:avLst/>
+              </a:prstGeom>
+              <a:noFill/>
+              <a:ln>
+                <a:solidFill>
+                  <a:schemeClr val="tx1"/>
+                </a:solidFill>
+              </a:ln>
+            </p:spPr>
+            <p:txBody>
+              <a:bodyPr wrap="square">
+                <a:spAutoFit/>
+              </a:bodyPr>
+              <a:lstStyle/>
+              <a:p>
+                <a:pPr/>
+                <a14:m>
+                  <m:oMath xmlns:m="http://schemas.openxmlformats.org/officeDocument/2006/math">
+                    <m:d>
+                      <m:dPr>
+                        <m:ctrlPr>
+                          <a:rPr lang="de-DE" b="0" i="1" smtClean="0">
+                            <a:latin typeface="Cambria Math" panose="02040503050406030204" pitchFamily="18" charset="0"/>
+                          </a:rPr>
+                        </m:ctrlPr>
+                      </m:dPr>
+                      <m:e>
+                        <m:r>
+                          <a:rPr lang="de-DE" b="0" i="1" smtClean="0">
+                            <a:latin typeface="Cambria Math" panose="02040503050406030204" pitchFamily="18" charset="0"/>
+                          </a:rPr>
+                          <m:t>𝑠</m:t>
+                        </m:r>
+                        <m:r>
+                          <a:rPr lang="de-DE" b="0" i="1" smtClean="0">
+                            <a:latin typeface="Cambria Math" panose="02040503050406030204" pitchFamily="18" charset="0"/>
+                          </a:rPr>
+                          <m:t>+</m:t>
+                        </m:r>
+                        <m:r>
+                          <a:rPr lang="de-DE" b="0" i="1" smtClean="0">
+                            <a:latin typeface="Cambria Math" panose="02040503050406030204" pitchFamily="18" charset="0"/>
+                          </a:rPr>
+                          <m:t>𝑧</m:t>
+                        </m:r>
+                      </m:e>
+                    </m:d>
+                  </m:oMath>
+                </a14:m>
+                <a:r>
+                  <a:rPr lang="de-DE" dirty="0"/>
+                  <a:t> </a:t>
+                </a:r>
+                <a:r>
+                  <a:rPr lang="de-DE" dirty="0">
+                    <a:sym typeface="Wingdings" pitchFamily="2" charset="2"/>
+                  </a:rPr>
+                  <a:t></a:t>
+                </a:r>
+                <a:r>
+                  <a:rPr lang="de-DE" dirty="0"/>
+                  <a:t> </a:t>
+                </a:r>
+                <a14:m>
+                  <m:oMath xmlns:m="http://schemas.openxmlformats.org/officeDocument/2006/math">
+                    <m:r>
+                      <a:rPr lang="de-DE" b="0" i="1" smtClean="0">
+                        <a:latin typeface="Cambria Math" panose="02040503050406030204" pitchFamily="18" charset="0"/>
+                      </a:rPr>
+                      <m:t>𝑗</m:t>
+                    </m:r>
+                    <m:r>
+                      <a:rPr lang="de-DE" b="0" i="1" smtClean="0">
+                        <a:latin typeface="Cambria Math" panose="02040503050406030204" pitchFamily="18" charset="0"/>
+                        <a:ea typeface="Cambria Math" panose="02040503050406030204" pitchFamily="18" charset="0"/>
+                      </a:rPr>
+                      <m:t>𝜔</m:t>
+                    </m:r>
+                    <m:r>
+                      <a:rPr lang="de-DE" b="0" i="1" smtClean="0">
+                        <a:latin typeface="Cambria Math" panose="02040503050406030204" pitchFamily="18" charset="0"/>
+                        <a:ea typeface="Cambria Math" panose="02040503050406030204" pitchFamily="18" charset="0"/>
+                      </a:rPr>
+                      <m:t>+</m:t>
+                    </m:r>
+                    <m:sSub>
+                      <m:sSubPr>
+                        <m:ctrlPr>
+                          <a:rPr lang="de-DE" b="0" i="1" smtClean="0">
+                            <a:latin typeface="Cambria Math" panose="02040503050406030204" pitchFamily="18" charset="0"/>
+                            <a:ea typeface="Cambria Math" panose="02040503050406030204" pitchFamily="18" charset="0"/>
+                          </a:rPr>
+                        </m:ctrlPr>
+                      </m:sSubPr>
+                      <m:e>
+                        <m:r>
+                          <a:rPr lang="de-DE" b="0" i="1" smtClean="0">
+                            <a:latin typeface="Cambria Math" panose="02040503050406030204" pitchFamily="18" charset="0"/>
+                            <a:ea typeface="Cambria Math" panose="02040503050406030204" pitchFamily="18" charset="0"/>
+                          </a:rPr>
+                          <m:t>𝜔</m:t>
+                        </m:r>
+                      </m:e>
+                      <m:sub>
+                        <m:r>
+                          <a:rPr lang="de-DE" b="0" i="1" smtClean="0">
+                            <a:latin typeface="Cambria Math" panose="02040503050406030204" pitchFamily="18" charset="0"/>
+                            <a:ea typeface="Cambria Math" panose="02040503050406030204" pitchFamily="18" charset="0"/>
+                          </a:rPr>
+                          <m:t>𝑧</m:t>
+                        </m:r>
+                      </m:sub>
+                    </m:sSub>
+                  </m:oMath>
+                </a14:m>
+                <a:r>
+                  <a:rPr lang="de-DE" dirty="0"/>
+                  <a:t> </a:t>
+                </a:r>
+                <a:r>
+                  <a:rPr lang="de-DE" dirty="0">
+                    <a:sym typeface="Wingdings" pitchFamily="2" charset="2"/>
+                  </a:rPr>
+                  <a:t> </a:t>
+                </a:r>
+                <a14:m>
+                  <m:oMath xmlns:m="http://schemas.openxmlformats.org/officeDocument/2006/math">
+                    <m:r>
+                      <a:rPr lang="de-DE" i="1">
+                        <a:latin typeface="Cambria Math" panose="02040503050406030204" pitchFamily="18" charset="0"/>
+                        <a:ea typeface="Cambria Math" panose="02040503050406030204" pitchFamily="18" charset="0"/>
+                      </a:rPr>
+                      <m:t>𝜑</m:t>
+                    </m:r>
+                    <m:r>
+                      <a:rPr lang="de-DE" i="1">
+                        <a:latin typeface="Cambria Math" panose="02040503050406030204" pitchFamily="18" charset="0"/>
+                      </a:rPr>
+                      <m:t>=</m:t>
+                    </m:r>
+                    <m:func>
+                      <m:funcPr>
+                        <m:ctrlPr>
+                          <a:rPr lang="de-DE" i="1">
+                            <a:latin typeface="Cambria Math" panose="02040503050406030204" pitchFamily="18" charset="0"/>
+                          </a:rPr>
+                        </m:ctrlPr>
+                      </m:funcPr>
+                      <m:fName>
+                        <m:sSup>
+                          <m:sSupPr>
+                            <m:ctrlPr>
+                              <a:rPr lang="de-DE" i="1">
+                                <a:latin typeface="Cambria Math" panose="02040503050406030204" pitchFamily="18" charset="0"/>
+                              </a:rPr>
+                            </m:ctrlPr>
+                          </m:sSupPr>
+                          <m:e>
+                            <m:r>
+                              <m:rPr>
+                                <m:sty m:val="p"/>
+                              </m:rPr>
+                              <a:rPr lang="de-DE">
+                                <a:latin typeface="Cambria Math" panose="02040503050406030204" pitchFamily="18" charset="0"/>
+                              </a:rPr>
+                              <m:t>tan</m:t>
+                            </m:r>
+                          </m:e>
+                          <m:sup>
+                            <m:r>
+                              <a:rPr lang="de-DE" i="1">
+                                <a:latin typeface="Cambria Math" panose="02040503050406030204" pitchFamily="18" charset="0"/>
+                              </a:rPr>
+                              <m:t>−1</m:t>
+                            </m:r>
+                          </m:sup>
+                        </m:sSup>
+                      </m:fName>
+                      <m:e>
+                        <m:d>
+                          <m:dPr>
+                            <m:ctrlPr>
+                              <a:rPr lang="de-DE" i="1">
+                                <a:latin typeface="Cambria Math" panose="02040503050406030204" pitchFamily="18" charset="0"/>
+                              </a:rPr>
+                            </m:ctrlPr>
+                          </m:dPr>
+                          <m:e>
+                            <m:f>
+                              <m:fPr>
+                                <m:ctrlPr>
+                                  <a:rPr lang="de-DE" i="1">
+                                    <a:latin typeface="Cambria Math" panose="02040503050406030204" pitchFamily="18" charset="0"/>
+                                  </a:rPr>
+                                </m:ctrlPr>
+                              </m:fPr>
+                              <m:num>
+                                <m:r>
+                                  <a:rPr lang="de-DE" i="1">
+                                    <a:latin typeface="Cambria Math" panose="02040503050406030204" pitchFamily="18" charset="0"/>
+                                    <a:ea typeface="Cambria Math" panose="02040503050406030204" pitchFamily="18" charset="0"/>
+                                  </a:rPr>
+                                  <m:t>𝜔</m:t>
+                                </m:r>
+                              </m:num>
+                              <m:den>
+                                <m:sSub>
+                                  <m:sSubPr>
+                                    <m:ctrlPr>
+                                      <a:rPr lang="de-DE" i="1">
+                                        <a:latin typeface="Cambria Math" panose="02040503050406030204" pitchFamily="18" charset="0"/>
+                                        <a:ea typeface="Cambria Math" panose="02040503050406030204" pitchFamily="18" charset="0"/>
+                                      </a:rPr>
+                                    </m:ctrlPr>
+                                  </m:sSubPr>
+                                  <m:e>
+                                    <m:r>
+                                      <a:rPr lang="de-DE" i="1">
+                                        <a:latin typeface="Cambria Math" panose="02040503050406030204" pitchFamily="18" charset="0"/>
+                                        <a:ea typeface="Cambria Math" panose="02040503050406030204" pitchFamily="18" charset="0"/>
+                                      </a:rPr>
+                                      <m:t>𝜔</m:t>
+                                    </m:r>
+                                  </m:e>
+                                  <m:sub>
+                                    <m:r>
+                                      <a:rPr lang="de-DE" i="1">
+                                        <a:latin typeface="Cambria Math" panose="02040503050406030204" pitchFamily="18" charset="0"/>
+                                        <a:ea typeface="Cambria Math" panose="02040503050406030204" pitchFamily="18" charset="0"/>
+                                      </a:rPr>
+                                      <m:t>𝑧</m:t>
+                                    </m:r>
+                                  </m:sub>
+                                </m:sSub>
+                              </m:den>
+                            </m:f>
+                          </m:e>
+                        </m:d>
+                      </m:e>
+                    </m:func>
+                  </m:oMath>
+                </a14:m>
+                <a:endParaRPr lang="de-DE" dirty="0"/>
+              </a:p>
+              <a:p>
+                <a:pPr/>
+                <a14:m>
+                  <m:oMath xmlns:m="http://schemas.openxmlformats.org/officeDocument/2006/math">
+                    <m:r>
+                      <a:rPr lang="de-DE" i="1" smtClean="0">
+                        <a:latin typeface="Cambria Math" panose="02040503050406030204" pitchFamily="18" charset="0"/>
+                        <a:ea typeface="Cambria Math" panose="02040503050406030204" pitchFamily="18" charset="0"/>
+                      </a:rPr>
+                      <m:t>𝜔</m:t>
+                    </m:r>
+                    <m:r>
+                      <a:rPr lang="de-DE" i="1" smtClean="0">
+                        <a:latin typeface="Cambria Math" panose="02040503050406030204" pitchFamily="18" charset="0"/>
+                        <a:ea typeface="Cambria Math" panose="02040503050406030204" pitchFamily="18" charset="0"/>
+                      </a:rPr>
+                      <m:t>→∞</m:t>
+                    </m:r>
+                  </m:oMath>
+                </a14:m>
+                <a:r>
+                  <a:rPr lang="de-DE" dirty="0"/>
+                  <a:t>: </a:t>
+                </a:r>
+                <a14:m>
+                  <m:oMath xmlns:m="http://schemas.openxmlformats.org/officeDocument/2006/math">
+                    <m:r>
+                      <a:rPr lang="de-DE" i="1">
+                        <a:latin typeface="Cambria Math" panose="02040503050406030204" pitchFamily="18" charset="0"/>
+                        <a:ea typeface="Cambria Math" panose="02040503050406030204" pitchFamily="18" charset="0"/>
+                      </a:rPr>
+                      <m:t>𝜑</m:t>
+                    </m:r>
+                    <m:r>
+                      <a:rPr lang="de-DE" b="0" i="1" smtClean="0">
+                        <a:latin typeface="Cambria Math" panose="02040503050406030204" pitchFamily="18" charset="0"/>
+                        <a:ea typeface="Cambria Math" panose="02040503050406030204" pitchFamily="18" charset="0"/>
+                      </a:rPr>
+                      <m:t>=+90°</m:t>
+                    </m:r>
+                  </m:oMath>
+                </a14:m>
+                <a:r>
+                  <a:rPr lang="de-DE" dirty="0"/>
+                  <a:t>	(LHP pole: </a:t>
+                </a:r>
+                <a14:m>
+                  <m:oMath xmlns:m="http://schemas.openxmlformats.org/officeDocument/2006/math">
+                    <m:r>
+                      <a:rPr lang="de-DE" i="1">
+                        <a:latin typeface="Cambria Math" panose="02040503050406030204" pitchFamily="18" charset="0"/>
+                        <a:ea typeface="Cambria Math" panose="02040503050406030204" pitchFamily="18" charset="0"/>
+                      </a:rPr>
+                      <m:t>𝜑</m:t>
+                    </m:r>
+                    <m:r>
+                      <a:rPr lang="de-DE" i="1">
+                        <a:latin typeface="Cambria Math" panose="02040503050406030204" pitchFamily="18" charset="0"/>
+                        <a:ea typeface="Cambria Math" panose="02040503050406030204" pitchFamily="18" charset="0"/>
+                      </a:rPr>
+                      <m:t>=−90°</m:t>
+                    </m:r>
+                  </m:oMath>
+                </a14:m>
+                <a:r>
+                  <a:rPr lang="de-DE" dirty="0"/>
+                  <a:t>)</a:t>
+                </a:r>
+              </a:p>
+            </p:txBody>
+          </p:sp>
+        </mc:Choice>
+        <mc:Fallback>
+          <p:sp>
+            <p:nvSpPr>
+              <p:cNvPr id="7" name="Textfeld 6">
+                <a:extLst>
+                  <a:ext uri="{FF2B5EF4-FFF2-40B4-BE49-F238E27FC236}">
+                    <a16:creationId xmlns:a16="http://schemas.microsoft.com/office/drawing/2014/main" id="{8F552C05-0443-F3AF-5474-8295522B2D89}"/>
+                  </a:ext>
+                </a:extLst>
+              </p:cNvPr>
+              <p:cNvSpPr txBox="1">
+                <a:spLocks noRot="1" noChangeAspect="1" noMove="1" noResize="1" noEditPoints="1" noAdjustHandles="1" noChangeArrowheads="1" noChangeShapeType="1" noTextEdit="1"/>
+              </p:cNvSpPr>
+              <p:nvPr/>
+            </p:nvSpPr>
+            <p:spPr>
+              <a:xfrm>
+                <a:off x="7600291" y="3024081"/>
+                <a:ext cx="4280081" cy="809837"/>
+              </a:xfrm>
+              <a:prstGeom prst="rect">
+                <a:avLst/>
+              </a:prstGeom>
+              <a:blipFill>
+                <a:blip r:embed="rId3"/>
+                <a:stretch>
+                  <a:fillRect b="-10606"/>
+                </a:stretch>
+              </a:blipFill>
+              <a:ln>
+                <a:solidFill>
+                  <a:schemeClr val="tx1"/>
+                </a:solidFill>
+              </a:ln>
+            </p:spPr>
+            <p:txBody>
+              <a:bodyPr/>
+              <a:lstStyle/>
+              <a:p>
+                <a:r>
+                  <a:rPr lang="de-DE">
+                    <a:noFill/>
+                  </a:rPr>
+                  <a:t> </a:t>
+                </a:r>
+              </a:p>
+            </p:txBody>
+          </p:sp>
+        </mc:Fallback>
+      </mc:AlternateContent>
     </p:spTree>
     <p:extLst>
       <p:ext uri="{BB962C8B-B14F-4D97-AF65-F5344CB8AC3E}">

--- a/slides/4_stability.pptx
+++ b/slides/4_stability.pptx
@@ -5,7 +5,7 @@
     <p:sldMasterId id="2147483648" r:id="rId1"/>
   </p:sldMasterIdLst>
   <p:notesMasterIdLst>
-    <p:notesMasterId r:id="rId26"/>
+    <p:notesMasterId r:id="rId33"/>
   </p:notesMasterIdLst>
   <p:sldIdLst>
     <p:sldId id="256" r:id="rId2"/>
@@ -32,6 +32,13 @@
     <p:sldId id="275" r:id="rId23"/>
     <p:sldId id="303" r:id="rId24"/>
     <p:sldId id="305" r:id="rId25"/>
+    <p:sldId id="323" r:id="rId26"/>
+    <p:sldId id="324" r:id="rId27"/>
+    <p:sldId id="325" r:id="rId28"/>
+    <p:sldId id="328" r:id="rId29"/>
+    <p:sldId id="329" r:id="rId30"/>
+    <p:sldId id="326" r:id="rId31"/>
+    <p:sldId id="327" r:id="rId32"/>
   </p:sldIdLst>
   <p:sldSz cx="12192000" cy="6858000"/>
   <p:notesSz cx="6858000" cy="9144000"/>
@@ -14382,6 +14389,2672 @@
 </p:sld>
 </file>
 
+<file path=ppt/slides/slide25.xml><?xml version="1.0" encoding="utf-8"?>
+<p:sld xmlns:a="http://schemas.openxmlformats.org/drawingml/2006/main" xmlns:r="http://schemas.openxmlformats.org/officeDocument/2006/relationships" xmlns:p="http://schemas.openxmlformats.org/presentationml/2006/main">
+  <p:cSld>
+    <p:spTree>
+      <p:nvGrpSpPr>
+        <p:cNvPr id="1" name=""/>
+        <p:cNvGrpSpPr/>
+        <p:nvPr/>
+      </p:nvGrpSpPr>
+      <p:grpSpPr>
+        <a:xfrm>
+          <a:off x="0" y="0"/>
+          <a:ext cx="0" cy="0"/>
+          <a:chOff x="0" y="0"/>
+          <a:chExt cx="0" cy="0"/>
+        </a:xfrm>
+      </p:grpSpPr>
+      <p:sp>
+        <p:nvSpPr>
+          <p:cNvPr id="2" name="Titel 1">
+            <a:extLst>
+              <a:ext uri="{FF2B5EF4-FFF2-40B4-BE49-F238E27FC236}">
+                <a16:creationId xmlns:a16="http://schemas.microsoft.com/office/drawing/2014/main" id="{84A91FBE-99C9-8927-00D6-37A02814FEED}"/>
+              </a:ext>
+            </a:extLst>
+          </p:cNvPr>
+          <p:cNvSpPr>
+            <a:spLocks noGrp="1"/>
+          </p:cNvSpPr>
+          <p:nvPr>
+            <p:ph type="title"/>
+          </p:nvPr>
+        </p:nvSpPr>
+        <p:spPr/>
+        <p:txBody>
+          <a:bodyPr/>
+          <a:lstStyle/>
+          <a:p>
+            <a:r>
+              <a:rPr lang="de-DE" dirty="0" err="1"/>
+              <a:t>Exercise</a:t>
+            </a:r>
+            <a:r>
+              <a:rPr lang="de-DE" dirty="0"/>
+              <a:t> 1</a:t>
+            </a:r>
+          </a:p>
+        </p:txBody>
+      </p:sp>
+      <mc:AlternateContent xmlns:mc="http://schemas.openxmlformats.org/markup-compatibility/2006">
+        <mc:Choice xmlns:a14="http://schemas.microsoft.com/office/drawing/2010/main" Requires="a14">
+          <p:sp>
+            <p:nvSpPr>
+              <p:cNvPr id="3" name="Inhaltsplatzhalter 2">
+                <a:extLst>
+                  <a:ext uri="{FF2B5EF4-FFF2-40B4-BE49-F238E27FC236}">
+                    <a16:creationId xmlns:a16="http://schemas.microsoft.com/office/drawing/2014/main" id="{38216210-F69F-3C6C-AC3B-7B8F37B23DFF}"/>
+                  </a:ext>
+                </a:extLst>
+              </p:cNvPr>
+              <p:cNvSpPr>
+                <a:spLocks noGrp="1"/>
+              </p:cNvSpPr>
+              <p:nvPr>
+                <p:ph idx="1"/>
+              </p:nvPr>
+            </p:nvSpPr>
+            <p:spPr>
+              <a:xfrm>
+                <a:off x="838200" y="1825625"/>
+                <a:ext cx="11209774" cy="4351338"/>
+              </a:xfrm>
+            </p:spPr>
+            <p:txBody>
+              <a:bodyPr>
+                <a:normAutofit/>
+              </a:bodyPr>
+              <a:lstStyle/>
+              <a:p>
+                <a:pPr marL="0" indent="0">
+                  <a:buNone/>
+                </a:pPr>
+                <a:r>
+                  <a:rPr lang="de-DE" dirty="0"/>
+                  <a:t>Consider </a:t>
+                </a:r>
+                <a:r>
+                  <a:rPr lang="de-DE" dirty="0" err="1"/>
+                  <a:t>the</a:t>
+                </a:r>
+                <a:r>
+                  <a:rPr lang="de-DE" dirty="0"/>
+                  <a:t> </a:t>
+                </a:r>
+                <a:r>
+                  <a:rPr lang="de-DE" dirty="0" err="1"/>
+                  <a:t>transfer</a:t>
+                </a:r>
+                <a:r>
+                  <a:rPr lang="de-DE" dirty="0"/>
+                  <a:t> </a:t>
+                </a:r>
+                <a:r>
+                  <a:rPr lang="de-DE" dirty="0" err="1"/>
+                  <a:t>function</a:t>
+                </a:r>
+                <a:r>
+                  <a:rPr lang="de-DE" dirty="0"/>
+                  <a:t>:</a:t>
+                </a:r>
+              </a:p>
+              <a:p>
+                <a:pPr marL="0" indent="0">
+                  <a:buNone/>
+                </a:pPr>
+                <a:r>
+                  <a:rPr lang="de-DE" b="0" dirty="0"/>
+                  <a:t>	</a:t>
+                </a:r>
+                <a14:m>
+                  <m:oMath xmlns:m="http://schemas.openxmlformats.org/officeDocument/2006/math">
+                    <m:r>
+                      <a:rPr lang="de-DE" b="0" i="1" smtClean="0">
+                        <a:latin typeface="Cambria Math" panose="02040503050406030204" pitchFamily="18" charset="0"/>
+                      </a:rPr>
+                      <m:t>𝐺</m:t>
+                    </m:r>
+                    <m:d>
+                      <m:dPr>
+                        <m:ctrlPr>
+                          <a:rPr lang="de-DE" b="0" i="1" smtClean="0">
+                            <a:latin typeface="Cambria Math" panose="02040503050406030204" pitchFamily="18" charset="0"/>
+                          </a:rPr>
+                        </m:ctrlPr>
+                      </m:dPr>
+                      <m:e>
+                        <m:r>
+                          <a:rPr lang="de-DE" b="0" i="1" smtClean="0">
+                            <a:latin typeface="Cambria Math" panose="02040503050406030204" pitchFamily="18" charset="0"/>
+                          </a:rPr>
+                          <m:t>𝑠</m:t>
+                        </m:r>
+                      </m:e>
+                    </m:d>
+                    <m:r>
+                      <a:rPr lang="de-DE" b="0" i="1" smtClean="0">
+                        <a:latin typeface="Cambria Math" panose="02040503050406030204" pitchFamily="18" charset="0"/>
+                      </a:rPr>
+                      <m:t>=</m:t>
+                    </m:r>
+                    <m:f>
+                      <m:fPr>
+                        <m:ctrlPr>
+                          <a:rPr lang="de-DE" b="0" i="1" smtClean="0">
+                            <a:latin typeface="Cambria Math" panose="02040503050406030204" pitchFamily="18" charset="0"/>
+                          </a:rPr>
+                        </m:ctrlPr>
+                      </m:fPr>
+                      <m:num>
+                        <m:r>
+                          <a:rPr lang="de-DE" b="0" i="1" smtClean="0">
+                            <a:latin typeface="Cambria Math" panose="02040503050406030204" pitchFamily="18" charset="0"/>
+                          </a:rPr>
+                          <m:t>1</m:t>
+                        </m:r>
+                      </m:num>
+                      <m:den>
+                        <m:sSup>
+                          <m:sSupPr>
+                            <m:ctrlPr>
+                              <a:rPr lang="de-DE" b="0" i="1" smtClean="0">
+                                <a:latin typeface="Cambria Math" panose="02040503050406030204" pitchFamily="18" charset="0"/>
+                              </a:rPr>
+                            </m:ctrlPr>
+                          </m:sSupPr>
+                          <m:e>
+                            <m:r>
+                              <a:rPr lang="de-DE" b="0" i="1" smtClean="0">
+                                <a:latin typeface="Cambria Math" panose="02040503050406030204" pitchFamily="18" charset="0"/>
+                              </a:rPr>
+                              <m:t>𝑠</m:t>
+                            </m:r>
+                          </m:e>
+                          <m:sup>
+                            <m:r>
+                              <a:rPr lang="de-DE" b="0" i="1" smtClean="0">
+                                <a:latin typeface="Cambria Math" panose="02040503050406030204" pitchFamily="18" charset="0"/>
+                              </a:rPr>
+                              <m:t>2</m:t>
+                            </m:r>
+                          </m:sup>
+                        </m:sSup>
+                        <m:r>
+                          <a:rPr lang="de-DE" b="0" i="1" smtClean="0">
+                            <a:latin typeface="Cambria Math" panose="02040503050406030204" pitchFamily="18" charset="0"/>
+                          </a:rPr>
+                          <m:t>+4</m:t>
+                        </m:r>
+                        <m:r>
+                          <a:rPr lang="de-DE" b="0" i="1" smtClean="0">
+                            <a:latin typeface="Cambria Math" panose="02040503050406030204" pitchFamily="18" charset="0"/>
+                          </a:rPr>
+                          <m:t>𝑠</m:t>
+                        </m:r>
+                        <m:r>
+                          <a:rPr lang="de-DE" b="0" i="1" smtClean="0">
+                            <a:latin typeface="Cambria Math" panose="02040503050406030204" pitchFamily="18" charset="0"/>
+                          </a:rPr>
+                          <m:t>+5</m:t>
+                        </m:r>
+                      </m:den>
+                    </m:f>
+                  </m:oMath>
+                </a14:m>
+                <a:endParaRPr lang="de-DE" dirty="0"/>
+              </a:p>
+              <a:p>
+                <a:pPr marL="0" indent="0">
+                  <a:buNone/>
+                </a:pPr>
+                <a:endParaRPr lang="de-DE" dirty="0"/>
+              </a:p>
+              <a:p>
+                <a:r>
+                  <a:rPr lang="de-DE" dirty="0"/>
+                  <a:t>Find </a:t>
+                </a:r>
+                <a:r>
+                  <a:rPr lang="de-DE" dirty="0" err="1"/>
+                  <a:t>the</a:t>
+                </a:r>
+                <a:r>
+                  <a:rPr lang="de-DE" dirty="0"/>
+                  <a:t> </a:t>
+                </a:r>
+                <a:r>
+                  <a:rPr lang="de-DE" dirty="0" err="1"/>
+                  <a:t>poles</a:t>
+                </a:r>
+                <a:r>
+                  <a:rPr lang="de-DE" dirty="0"/>
+                  <a:t>.</a:t>
+                </a:r>
+              </a:p>
+              <a:p>
+                <a:r>
+                  <a:rPr lang="de-DE" dirty="0" err="1"/>
+                  <a:t>Determine</a:t>
+                </a:r>
+                <a:r>
+                  <a:rPr lang="de-DE" dirty="0"/>
+                  <a:t> </a:t>
+                </a:r>
+                <a:r>
+                  <a:rPr lang="de-DE" dirty="0" err="1"/>
+                  <a:t>if</a:t>
+                </a:r>
+                <a:r>
+                  <a:rPr lang="de-DE" dirty="0"/>
+                  <a:t> </a:t>
+                </a:r>
+                <a:r>
+                  <a:rPr lang="de-DE" dirty="0" err="1"/>
+                  <a:t>the</a:t>
+                </a:r>
+                <a:r>
+                  <a:rPr lang="de-DE" dirty="0"/>
+                  <a:t> </a:t>
+                </a:r>
+                <a:r>
+                  <a:rPr lang="de-DE" dirty="0" err="1"/>
+                  <a:t>system</a:t>
+                </a:r>
+                <a:r>
+                  <a:rPr lang="de-DE" dirty="0"/>
+                  <a:t> </a:t>
+                </a:r>
+                <a:r>
+                  <a:rPr lang="de-DE" dirty="0" err="1"/>
+                  <a:t>is</a:t>
+                </a:r>
+                <a:r>
+                  <a:rPr lang="de-DE" dirty="0"/>
+                  <a:t> </a:t>
+                </a:r>
+                <a:r>
+                  <a:rPr lang="de-DE" dirty="0" err="1"/>
+                  <a:t>stable</a:t>
+                </a:r>
+                <a:r>
+                  <a:rPr lang="de-DE" dirty="0"/>
+                  <a:t>.</a:t>
+                </a:r>
+              </a:p>
+              <a:p>
+                <a:r>
+                  <a:rPr lang="de-DE" dirty="0" err="1"/>
+                  <a:t>Classify</a:t>
+                </a:r>
+                <a:r>
+                  <a:rPr lang="de-DE" dirty="0"/>
+                  <a:t> </a:t>
+                </a:r>
+                <a:r>
+                  <a:rPr lang="de-DE" dirty="0" err="1"/>
+                  <a:t>the</a:t>
+                </a:r>
+                <a:r>
+                  <a:rPr lang="de-DE" dirty="0"/>
+                  <a:t> </a:t>
+                </a:r>
+                <a:r>
+                  <a:rPr lang="de-DE" dirty="0" err="1"/>
+                  <a:t>damping</a:t>
+                </a:r>
+                <a:r>
+                  <a:rPr lang="de-DE" dirty="0"/>
+                  <a:t> (</a:t>
+                </a:r>
+                <a:r>
+                  <a:rPr lang="de-DE" dirty="0" err="1"/>
+                  <a:t>overdamped</a:t>
+                </a:r>
+                <a:r>
+                  <a:rPr lang="de-DE" dirty="0"/>
+                  <a:t>, </a:t>
+                </a:r>
+                <a:r>
+                  <a:rPr lang="de-DE" dirty="0" err="1"/>
+                  <a:t>critically</a:t>
+                </a:r>
+                <a:r>
+                  <a:rPr lang="de-DE" dirty="0"/>
+                  <a:t> </a:t>
+                </a:r>
+                <a:r>
+                  <a:rPr lang="de-DE" dirty="0" err="1"/>
+                  <a:t>damped</a:t>
+                </a:r>
+                <a:r>
+                  <a:rPr lang="de-DE" dirty="0"/>
+                  <a:t>, </a:t>
+                </a:r>
+                <a:r>
+                  <a:rPr lang="de-DE" dirty="0" err="1"/>
+                  <a:t>underdamped</a:t>
+                </a:r>
+                <a:r>
+                  <a:rPr lang="de-DE" dirty="0"/>
+                  <a:t>).</a:t>
+                </a:r>
+              </a:p>
+              <a:p>
+                <a:r>
+                  <a:rPr lang="de-DE" dirty="0" err="1"/>
+                  <a:t>Predict</a:t>
+                </a:r>
+                <a:r>
+                  <a:rPr lang="de-DE" dirty="0"/>
+                  <a:t> </a:t>
+                </a:r>
+                <a:r>
+                  <a:rPr lang="de-DE" dirty="0" err="1"/>
+                  <a:t>qualitatively</a:t>
+                </a:r>
+                <a:r>
+                  <a:rPr lang="de-DE" dirty="0"/>
+                  <a:t> </a:t>
+                </a:r>
+                <a:r>
+                  <a:rPr lang="de-DE" dirty="0" err="1"/>
+                  <a:t>the</a:t>
+                </a:r>
+                <a:r>
+                  <a:rPr lang="de-DE" dirty="0"/>
+                  <a:t> </a:t>
+                </a:r>
+                <a:r>
+                  <a:rPr lang="de-DE" dirty="0" err="1"/>
+                  <a:t>step</a:t>
+                </a:r>
+                <a:r>
+                  <a:rPr lang="de-DE" dirty="0"/>
+                  <a:t> </a:t>
+                </a:r>
+                <a:r>
+                  <a:rPr lang="de-DE" dirty="0" err="1"/>
+                  <a:t>response</a:t>
+                </a:r>
+                <a:r>
+                  <a:rPr lang="de-DE" dirty="0"/>
+                  <a:t>.</a:t>
+                </a:r>
+              </a:p>
+            </p:txBody>
+          </p:sp>
+        </mc:Choice>
+        <mc:Fallback>
+          <p:sp>
+            <p:nvSpPr>
+              <p:cNvPr id="3" name="Inhaltsplatzhalter 2">
+                <a:extLst>
+                  <a:ext uri="{FF2B5EF4-FFF2-40B4-BE49-F238E27FC236}">
+                    <a16:creationId xmlns:a16="http://schemas.microsoft.com/office/drawing/2014/main" id="{38216210-F69F-3C6C-AC3B-7B8F37B23DFF}"/>
+                  </a:ext>
+                </a:extLst>
+              </p:cNvPr>
+              <p:cNvSpPr>
+                <a:spLocks noGrp="1" noRot="1" noChangeAspect="1" noMove="1" noResize="1" noEditPoints="1" noAdjustHandles="1" noChangeArrowheads="1" noChangeShapeType="1" noTextEdit="1"/>
+              </p:cNvSpPr>
+              <p:nvPr>
+                <p:ph idx="1"/>
+              </p:nvPr>
+            </p:nvSpPr>
+            <p:spPr>
+              <a:xfrm>
+                <a:off x="838200" y="1825625"/>
+                <a:ext cx="11209774" cy="4351338"/>
+              </a:xfrm>
+              <a:blipFill>
+                <a:blip r:embed="rId2"/>
+                <a:stretch>
+                  <a:fillRect l="-1133" t="-2326" r="-453"/>
+                </a:stretch>
+              </a:blipFill>
+            </p:spPr>
+            <p:txBody>
+              <a:bodyPr/>
+              <a:lstStyle/>
+              <a:p>
+                <a:r>
+                  <a:rPr lang="de-DE">
+                    <a:noFill/>
+                  </a:rPr>
+                  <a:t> </a:t>
+                </a:r>
+              </a:p>
+            </p:txBody>
+          </p:sp>
+        </mc:Fallback>
+      </mc:AlternateContent>
+      <p:sp>
+        <p:nvSpPr>
+          <p:cNvPr id="4" name="Foliennummernplatzhalter 3">
+            <a:extLst>
+              <a:ext uri="{FF2B5EF4-FFF2-40B4-BE49-F238E27FC236}">
+                <a16:creationId xmlns:a16="http://schemas.microsoft.com/office/drawing/2014/main" id="{A9BE623A-89FC-8C25-F95D-A8CA62EA59EA}"/>
+              </a:ext>
+            </a:extLst>
+          </p:cNvPr>
+          <p:cNvSpPr>
+            <a:spLocks noGrp="1"/>
+          </p:cNvSpPr>
+          <p:nvPr>
+            <p:ph type="sldNum" sz="quarter" idx="12"/>
+          </p:nvPr>
+        </p:nvSpPr>
+        <p:spPr/>
+        <p:txBody>
+          <a:bodyPr/>
+          <a:lstStyle/>
+          <a:p>
+            <a:fld id="{08C366F5-AFAD-49CB-854A-9D9E238FCA13}" type="slidenum">
+              <a:rPr lang="en-GB" smtClean="0"/>
+              <a:t>25</a:t>
+            </a:fld>
+            <a:endParaRPr lang="en-GB"/>
+          </a:p>
+        </p:txBody>
+      </p:sp>
+    </p:spTree>
+    <p:extLst>
+      <p:ext uri="{BB962C8B-B14F-4D97-AF65-F5344CB8AC3E}">
+        <p14:creationId xmlns:p14="http://schemas.microsoft.com/office/powerpoint/2010/main" val="2588928886"/>
+      </p:ext>
+    </p:extLst>
+  </p:cSld>
+  <p:clrMapOvr>
+    <a:masterClrMapping/>
+  </p:clrMapOvr>
+</p:sld>
+</file>
+
+<file path=ppt/slides/slide26.xml><?xml version="1.0" encoding="utf-8"?>
+<p:sld xmlns:a="http://schemas.openxmlformats.org/drawingml/2006/main" xmlns:r="http://schemas.openxmlformats.org/officeDocument/2006/relationships" xmlns:p="http://schemas.openxmlformats.org/presentationml/2006/main">
+  <p:cSld>
+    <p:spTree>
+      <p:nvGrpSpPr>
+        <p:cNvPr id="1" name="">
+          <a:extLst>
+            <a:ext uri="{FF2B5EF4-FFF2-40B4-BE49-F238E27FC236}">
+              <a16:creationId xmlns:a16="http://schemas.microsoft.com/office/drawing/2014/main" id="{66454AC5-9411-F599-5E69-5D44365B20D8}"/>
+            </a:ext>
+          </a:extLst>
+        </p:cNvPr>
+        <p:cNvGrpSpPr/>
+        <p:nvPr/>
+      </p:nvGrpSpPr>
+      <p:grpSpPr>
+        <a:xfrm>
+          <a:off x="0" y="0"/>
+          <a:ext cx="0" cy="0"/>
+          <a:chOff x="0" y="0"/>
+          <a:chExt cx="0" cy="0"/>
+        </a:xfrm>
+      </p:grpSpPr>
+      <p:sp>
+        <p:nvSpPr>
+          <p:cNvPr id="2" name="Titel 1">
+            <a:extLst>
+              <a:ext uri="{FF2B5EF4-FFF2-40B4-BE49-F238E27FC236}">
+                <a16:creationId xmlns:a16="http://schemas.microsoft.com/office/drawing/2014/main" id="{E465A744-EBBA-242F-93A9-93BF146916A5}"/>
+              </a:ext>
+            </a:extLst>
+          </p:cNvPr>
+          <p:cNvSpPr>
+            <a:spLocks noGrp="1"/>
+          </p:cNvSpPr>
+          <p:nvPr>
+            <p:ph type="title"/>
+          </p:nvPr>
+        </p:nvSpPr>
+        <p:spPr/>
+        <p:txBody>
+          <a:bodyPr/>
+          <a:lstStyle/>
+          <a:p>
+            <a:r>
+              <a:rPr lang="de-DE" dirty="0" err="1"/>
+              <a:t>Exercise</a:t>
+            </a:r>
+            <a:r>
+              <a:rPr lang="de-DE" dirty="0"/>
+              <a:t> 2</a:t>
+            </a:r>
+          </a:p>
+        </p:txBody>
+      </p:sp>
+      <mc:AlternateContent xmlns:mc="http://schemas.openxmlformats.org/markup-compatibility/2006">
+        <mc:Choice xmlns:a14="http://schemas.microsoft.com/office/drawing/2010/main" Requires="a14">
+          <p:sp>
+            <p:nvSpPr>
+              <p:cNvPr id="3" name="Inhaltsplatzhalter 2">
+                <a:extLst>
+                  <a:ext uri="{FF2B5EF4-FFF2-40B4-BE49-F238E27FC236}">
+                    <a16:creationId xmlns:a16="http://schemas.microsoft.com/office/drawing/2014/main" id="{F83182DB-EEF2-C6AD-E924-454CA5524A90}"/>
+                  </a:ext>
+                </a:extLst>
+              </p:cNvPr>
+              <p:cNvSpPr>
+                <a:spLocks noGrp="1"/>
+              </p:cNvSpPr>
+              <p:nvPr>
+                <p:ph idx="1"/>
+              </p:nvPr>
+            </p:nvSpPr>
+            <p:spPr/>
+            <p:txBody>
+              <a:bodyPr>
+                <a:normAutofit/>
+              </a:bodyPr>
+              <a:lstStyle/>
+              <a:p>
+                <a:pPr marL="0" indent="0">
+                  <a:buNone/>
+                </a:pPr>
+                <a:r>
+                  <a:rPr lang="de-DE" dirty="0"/>
+                  <a:t>Compare </a:t>
+                </a:r>
+                <a:r>
+                  <a:rPr lang="de-DE" dirty="0" err="1"/>
+                  <a:t>the</a:t>
+                </a:r>
+                <a:r>
+                  <a:rPr lang="de-DE" dirty="0"/>
+                  <a:t> </a:t>
+                </a:r>
+                <a:r>
+                  <a:rPr lang="de-DE" dirty="0" err="1"/>
+                  <a:t>systems</a:t>
+                </a:r>
+                <a:r>
+                  <a:rPr lang="de-DE" dirty="0"/>
+                  <a:t>:</a:t>
+                </a:r>
+              </a:p>
+              <a:p>
+                <a:pPr marL="0" indent="0">
+                  <a:buNone/>
+                </a:pPr>
+                <a:r>
+                  <a:rPr lang="de-DE" b="0" dirty="0"/>
+                  <a:t>	</a:t>
+                </a:r>
+                <a14:m>
+                  <m:oMath xmlns:m="http://schemas.openxmlformats.org/officeDocument/2006/math">
+                    <m:sSub>
+                      <m:sSubPr>
+                        <m:ctrlPr>
+                          <a:rPr lang="de-DE" b="0" i="1" smtClean="0">
+                            <a:latin typeface="Cambria Math" panose="02040503050406030204" pitchFamily="18" charset="0"/>
+                          </a:rPr>
+                        </m:ctrlPr>
+                      </m:sSubPr>
+                      <m:e>
+                        <m:r>
+                          <a:rPr lang="de-DE" b="0" i="1" smtClean="0">
+                            <a:latin typeface="Cambria Math" panose="02040503050406030204" pitchFamily="18" charset="0"/>
+                          </a:rPr>
+                          <m:t>𝐺</m:t>
+                        </m:r>
+                      </m:e>
+                      <m:sub>
+                        <m:r>
+                          <a:rPr lang="de-DE" b="0" i="1" smtClean="0">
+                            <a:latin typeface="Cambria Math" panose="02040503050406030204" pitchFamily="18" charset="0"/>
+                          </a:rPr>
+                          <m:t>1</m:t>
+                        </m:r>
+                      </m:sub>
+                    </m:sSub>
+                    <m:d>
+                      <m:dPr>
+                        <m:ctrlPr>
+                          <a:rPr lang="de-DE" b="0" i="1" smtClean="0">
+                            <a:latin typeface="Cambria Math" panose="02040503050406030204" pitchFamily="18" charset="0"/>
+                          </a:rPr>
+                        </m:ctrlPr>
+                      </m:dPr>
+                      <m:e>
+                        <m:r>
+                          <a:rPr lang="de-DE" b="0" i="1" smtClean="0">
+                            <a:latin typeface="Cambria Math" panose="02040503050406030204" pitchFamily="18" charset="0"/>
+                          </a:rPr>
+                          <m:t>𝑠</m:t>
+                        </m:r>
+                      </m:e>
+                    </m:d>
+                    <m:r>
+                      <a:rPr lang="de-DE" b="0" i="1" smtClean="0">
+                        <a:latin typeface="Cambria Math" panose="02040503050406030204" pitchFamily="18" charset="0"/>
+                      </a:rPr>
+                      <m:t>=</m:t>
+                    </m:r>
+                    <m:f>
+                      <m:fPr>
+                        <m:ctrlPr>
+                          <a:rPr lang="de-DE" b="0" i="1" smtClean="0">
+                            <a:latin typeface="Cambria Math" panose="02040503050406030204" pitchFamily="18" charset="0"/>
+                          </a:rPr>
+                        </m:ctrlPr>
+                      </m:fPr>
+                      <m:num>
+                        <m:r>
+                          <a:rPr lang="de-DE" b="0" i="1" smtClean="0">
+                            <a:latin typeface="Cambria Math" panose="02040503050406030204" pitchFamily="18" charset="0"/>
+                          </a:rPr>
+                          <m:t>1</m:t>
+                        </m:r>
+                      </m:num>
+                      <m:den>
+                        <m:sSup>
+                          <m:sSupPr>
+                            <m:ctrlPr>
+                              <a:rPr lang="de-DE" b="0" i="1" smtClean="0">
+                                <a:latin typeface="Cambria Math" panose="02040503050406030204" pitchFamily="18" charset="0"/>
+                              </a:rPr>
+                            </m:ctrlPr>
+                          </m:sSupPr>
+                          <m:e>
+                            <m:r>
+                              <a:rPr lang="de-DE" b="0" i="1" smtClean="0">
+                                <a:latin typeface="Cambria Math" panose="02040503050406030204" pitchFamily="18" charset="0"/>
+                              </a:rPr>
+                              <m:t>𝑠</m:t>
+                            </m:r>
+                          </m:e>
+                          <m:sup>
+                            <m:r>
+                              <a:rPr lang="de-DE" b="0" i="1" smtClean="0">
+                                <a:latin typeface="Cambria Math" panose="02040503050406030204" pitchFamily="18" charset="0"/>
+                              </a:rPr>
+                              <m:t>2</m:t>
+                            </m:r>
+                          </m:sup>
+                        </m:sSup>
+                        <m:r>
+                          <a:rPr lang="de-DE" b="0" i="1" smtClean="0">
+                            <a:latin typeface="Cambria Math" panose="02040503050406030204" pitchFamily="18" charset="0"/>
+                          </a:rPr>
+                          <m:t>+</m:t>
+                        </m:r>
+                        <m:r>
+                          <a:rPr lang="de-DE" b="0" i="1" smtClean="0">
+                            <a:latin typeface="Cambria Math" panose="02040503050406030204" pitchFamily="18" charset="0"/>
+                          </a:rPr>
+                          <m:t>2</m:t>
+                        </m:r>
+                        <m:r>
+                          <a:rPr lang="de-DE" b="0" i="1" smtClean="0">
+                            <a:latin typeface="Cambria Math" panose="02040503050406030204" pitchFamily="18" charset="0"/>
+                          </a:rPr>
+                          <m:t>𝑠</m:t>
+                        </m:r>
+                        <m:r>
+                          <a:rPr lang="de-DE" b="0" i="1" smtClean="0">
+                            <a:latin typeface="Cambria Math" panose="02040503050406030204" pitchFamily="18" charset="0"/>
+                          </a:rPr>
+                          <m:t>+2</m:t>
+                        </m:r>
+                      </m:den>
+                    </m:f>
+                  </m:oMath>
+                </a14:m>
+                <a:r>
+                  <a:rPr lang="de-DE" dirty="0"/>
+                  <a:t>,	</a:t>
+                </a:r>
+                <a14:m>
+                  <m:oMath xmlns:m="http://schemas.openxmlformats.org/officeDocument/2006/math">
+                    <m:sSub>
+                      <m:sSubPr>
+                        <m:ctrlPr>
+                          <a:rPr lang="de-DE" i="1">
+                            <a:latin typeface="Cambria Math" panose="02040503050406030204" pitchFamily="18" charset="0"/>
+                          </a:rPr>
+                        </m:ctrlPr>
+                      </m:sSubPr>
+                      <m:e>
+                        <m:r>
+                          <a:rPr lang="de-DE" i="1">
+                            <a:latin typeface="Cambria Math" panose="02040503050406030204" pitchFamily="18" charset="0"/>
+                          </a:rPr>
+                          <m:t>𝐺</m:t>
+                        </m:r>
+                      </m:e>
+                      <m:sub>
+                        <m:r>
+                          <a:rPr lang="de-DE" b="0" i="1" smtClean="0">
+                            <a:latin typeface="Cambria Math" panose="02040503050406030204" pitchFamily="18" charset="0"/>
+                          </a:rPr>
+                          <m:t>2</m:t>
+                        </m:r>
+                      </m:sub>
+                    </m:sSub>
+                    <m:d>
+                      <m:dPr>
+                        <m:ctrlPr>
+                          <a:rPr lang="de-DE" i="1">
+                            <a:latin typeface="Cambria Math" panose="02040503050406030204" pitchFamily="18" charset="0"/>
+                          </a:rPr>
+                        </m:ctrlPr>
+                      </m:dPr>
+                      <m:e>
+                        <m:r>
+                          <a:rPr lang="de-DE" i="1">
+                            <a:latin typeface="Cambria Math" panose="02040503050406030204" pitchFamily="18" charset="0"/>
+                          </a:rPr>
+                          <m:t>𝑠</m:t>
+                        </m:r>
+                      </m:e>
+                    </m:d>
+                    <m:r>
+                      <a:rPr lang="de-DE" i="1">
+                        <a:latin typeface="Cambria Math" panose="02040503050406030204" pitchFamily="18" charset="0"/>
+                      </a:rPr>
+                      <m:t>=</m:t>
+                    </m:r>
+                    <m:f>
+                      <m:fPr>
+                        <m:ctrlPr>
+                          <a:rPr lang="de-DE" i="1">
+                            <a:latin typeface="Cambria Math" panose="02040503050406030204" pitchFamily="18" charset="0"/>
+                          </a:rPr>
+                        </m:ctrlPr>
+                      </m:fPr>
+                      <m:num>
+                        <m:r>
+                          <a:rPr lang="de-DE" b="0" i="1" smtClean="0">
+                            <a:latin typeface="Cambria Math" panose="02040503050406030204" pitchFamily="18" charset="0"/>
+                          </a:rPr>
+                          <m:t>𝑠</m:t>
+                        </m:r>
+                        <m:r>
+                          <a:rPr lang="de-DE" b="0" i="1" smtClean="0">
+                            <a:latin typeface="Cambria Math" panose="02040503050406030204" pitchFamily="18" charset="0"/>
+                          </a:rPr>
+                          <m:t>+1</m:t>
+                        </m:r>
+                      </m:num>
+                      <m:den>
+                        <m:sSup>
+                          <m:sSupPr>
+                            <m:ctrlPr>
+                              <a:rPr lang="de-DE" i="1">
+                                <a:latin typeface="Cambria Math" panose="02040503050406030204" pitchFamily="18" charset="0"/>
+                              </a:rPr>
+                            </m:ctrlPr>
+                          </m:sSupPr>
+                          <m:e>
+                            <m:r>
+                              <a:rPr lang="de-DE" i="1">
+                                <a:latin typeface="Cambria Math" panose="02040503050406030204" pitchFamily="18" charset="0"/>
+                              </a:rPr>
+                              <m:t>𝑠</m:t>
+                            </m:r>
+                          </m:e>
+                          <m:sup>
+                            <m:r>
+                              <a:rPr lang="de-DE" i="1">
+                                <a:latin typeface="Cambria Math" panose="02040503050406030204" pitchFamily="18" charset="0"/>
+                              </a:rPr>
+                              <m:t>2</m:t>
+                            </m:r>
+                          </m:sup>
+                        </m:sSup>
+                        <m:r>
+                          <a:rPr lang="de-DE" i="1">
+                            <a:latin typeface="Cambria Math" panose="02040503050406030204" pitchFamily="18" charset="0"/>
+                          </a:rPr>
+                          <m:t>+2</m:t>
+                        </m:r>
+                        <m:r>
+                          <a:rPr lang="de-DE" i="1">
+                            <a:latin typeface="Cambria Math" panose="02040503050406030204" pitchFamily="18" charset="0"/>
+                          </a:rPr>
+                          <m:t>𝑠</m:t>
+                        </m:r>
+                        <m:r>
+                          <a:rPr lang="de-DE" i="1">
+                            <a:latin typeface="Cambria Math" panose="02040503050406030204" pitchFamily="18" charset="0"/>
+                          </a:rPr>
+                          <m:t>+2</m:t>
+                        </m:r>
+                      </m:den>
+                    </m:f>
+                  </m:oMath>
+                </a14:m>
+                <a:endParaRPr lang="de-DE" dirty="0"/>
+              </a:p>
+              <a:p>
+                <a:pPr marL="0" indent="0">
+                  <a:buNone/>
+                </a:pPr>
+                <a:endParaRPr lang="de-DE" dirty="0"/>
+              </a:p>
+              <a:p>
+                <a:r>
+                  <a:rPr lang="de-DE" dirty="0"/>
+                  <a:t>Do </a:t>
+                </a:r>
+                <a:r>
+                  <a:rPr lang="de-DE" dirty="0" err="1"/>
+                  <a:t>both</a:t>
+                </a:r>
+                <a:r>
+                  <a:rPr lang="de-DE" dirty="0"/>
+                  <a:t> </a:t>
+                </a:r>
+                <a:r>
+                  <a:rPr lang="de-DE" dirty="0" err="1"/>
+                  <a:t>systems</a:t>
+                </a:r>
+                <a:r>
+                  <a:rPr lang="de-DE" dirty="0"/>
+                  <a:t> </a:t>
+                </a:r>
+                <a:r>
+                  <a:rPr lang="de-DE" dirty="0" err="1"/>
+                  <a:t>have</a:t>
+                </a:r>
+                <a:r>
+                  <a:rPr lang="de-DE" dirty="0"/>
+                  <a:t> </a:t>
+                </a:r>
+                <a:r>
+                  <a:rPr lang="de-DE" dirty="0" err="1"/>
+                  <a:t>the</a:t>
+                </a:r>
+                <a:r>
+                  <a:rPr lang="de-DE" dirty="0"/>
+                  <a:t> same </a:t>
+                </a:r>
+                <a:r>
+                  <a:rPr lang="de-DE" dirty="0" err="1"/>
+                  <a:t>poles</a:t>
+                </a:r>
+                <a:r>
+                  <a:rPr lang="de-DE" dirty="0"/>
+                  <a:t>?</a:t>
+                </a:r>
+              </a:p>
+              <a:p>
+                <a:r>
+                  <a:rPr lang="de-DE" dirty="0"/>
+                  <a:t>How </a:t>
+                </a:r>
+                <a:r>
+                  <a:rPr lang="de-DE" dirty="0" err="1"/>
+                  <a:t>does</a:t>
+                </a:r>
+                <a:r>
+                  <a:rPr lang="de-DE" dirty="0"/>
+                  <a:t> </a:t>
+                </a:r>
+                <a:r>
+                  <a:rPr lang="de-DE" dirty="0" err="1"/>
+                  <a:t>the</a:t>
+                </a:r>
+                <a:r>
+                  <a:rPr lang="de-DE" dirty="0"/>
+                  <a:t> </a:t>
+                </a:r>
+                <a:r>
+                  <a:rPr lang="de-DE" dirty="0" err="1"/>
+                  <a:t>zero</a:t>
+                </a:r>
+                <a:r>
+                  <a:rPr lang="de-DE" dirty="0"/>
+                  <a:t> </a:t>
+                </a:r>
+                <a:r>
+                  <a:rPr lang="de-DE" dirty="0" err="1"/>
+                  <a:t>affect</a:t>
+                </a:r>
+                <a:r>
+                  <a:rPr lang="de-DE" dirty="0"/>
+                  <a:t> </a:t>
+                </a:r>
+                <a:r>
+                  <a:rPr lang="de-DE" dirty="0" err="1"/>
+                  <a:t>the</a:t>
+                </a:r>
+                <a:r>
+                  <a:rPr lang="de-DE" dirty="0"/>
+                  <a:t> </a:t>
+                </a:r>
+                <a:r>
+                  <a:rPr lang="de-DE" dirty="0" err="1"/>
+                  <a:t>step</a:t>
+                </a:r>
+                <a:r>
+                  <a:rPr lang="de-DE" dirty="0"/>
+                  <a:t> </a:t>
+                </a:r>
+                <a:r>
+                  <a:rPr lang="de-DE" dirty="0" err="1"/>
+                  <a:t>response</a:t>
+                </a:r>
+                <a:r>
+                  <a:rPr lang="de-DE" dirty="0"/>
+                  <a:t>?</a:t>
+                </a:r>
+              </a:p>
+            </p:txBody>
+          </p:sp>
+        </mc:Choice>
+        <mc:Fallback>
+          <p:sp>
+            <p:nvSpPr>
+              <p:cNvPr id="3" name="Inhaltsplatzhalter 2">
+                <a:extLst>
+                  <a:ext uri="{FF2B5EF4-FFF2-40B4-BE49-F238E27FC236}">
+                    <a16:creationId xmlns:a16="http://schemas.microsoft.com/office/drawing/2014/main" id="{F83182DB-EEF2-C6AD-E924-454CA5524A90}"/>
+                  </a:ext>
+                </a:extLst>
+              </p:cNvPr>
+              <p:cNvSpPr>
+                <a:spLocks noGrp="1" noRot="1" noChangeAspect="1" noMove="1" noResize="1" noEditPoints="1" noAdjustHandles="1" noChangeArrowheads="1" noChangeShapeType="1" noTextEdit="1"/>
+              </p:cNvSpPr>
+              <p:nvPr>
+                <p:ph idx="1"/>
+              </p:nvPr>
+            </p:nvSpPr>
+            <p:spPr>
+              <a:blipFill>
+                <a:blip r:embed="rId2"/>
+                <a:stretch>
+                  <a:fillRect l="-1206" t="-2326"/>
+                </a:stretch>
+              </a:blipFill>
+            </p:spPr>
+            <p:txBody>
+              <a:bodyPr/>
+              <a:lstStyle/>
+              <a:p>
+                <a:r>
+                  <a:rPr lang="de-DE">
+                    <a:noFill/>
+                  </a:rPr>
+                  <a:t> </a:t>
+                </a:r>
+              </a:p>
+            </p:txBody>
+          </p:sp>
+        </mc:Fallback>
+      </mc:AlternateContent>
+      <p:sp>
+        <p:nvSpPr>
+          <p:cNvPr id="4" name="Foliennummernplatzhalter 3">
+            <a:extLst>
+              <a:ext uri="{FF2B5EF4-FFF2-40B4-BE49-F238E27FC236}">
+                <a16:creationId xmlns:a16="http://schemas.microsoft.com/office/drawing/2014/main" id="{7B45FC2A-41F2-6A3E-8B5D-CF12263064D0}"/>
+              </a:ext>
+            </a:extLst>
+          </p:cNvPr>
+          <p:cNvSpPr>
+            <a:spLocks noGrp="1"/>
+          </p:cNvSpPr>
+          <p:nvPr>
+            <p:ph type="sldNum" sz="quarter" idx="12"/>
+          </p:nvPr>
+        </p:nvSpPr>
+        <p:spPr/>
+        <p:txBody>
+          <a:bodyPr/>
+          <a:lstStyle/>
+          <a:p>
+            <a:fld id="{08C366F5-AFAD-49CB-854A-9D9E238FCA13}" type="slidenum">
+              <a:rPr lang="en-GB" smtClean="0"/>
+              <a:t>26</a:t>
+            </a:fld>
+            <a:endParaRPr lang="en-GB"/>
+          </a:p>
+        </p:txBody>
+      </p:sp>
+    </p:spTree>
+    <p:extLst>
+      <p:ext uri="{BB962C8B-B14F-4D97-AF65-F5344CB8AC3E}">
+        <p14:creationId xmlns:p14="http://schemas.microsoft.com/office/powerpoint/2010/main" val="3737838411"/>
+      </p:ext>
+    </p:extLst>
+  </p:cSld>
+  <p:clrMapOvr>
+    <a:masterClrMapping/>
+  </p:clrMapOvr>
+</p:sld>
+</file>
+
+<file path=ppt/slides/slide27.xml><?xml version="1.0" encoding="utf-8"?>
+<p:sld xmlns:a="http://schemas.openxmlformats.org/drawingml/2006/main" xmlns:r="http://schemas.openxmlformats.org/officeDocument/2006/relationships" xmlns:p="http://schemas.openxmlformats.org/presentationml/2006/main">
+  <p:cSld>
+    <p:spTree>
+      <p:nvGrpSpPr>
+        <p:cNvPr id="1" name="">
+          <a:extLst>
+            <a:ext uri="{FF2B5EF4-FFF2-40B4-BE49-F238E27FC236}">
+              <a16:creationId xmlns:a16="http://schemas.microsoft.com/office/drawing/2014/main" id="{A228EF13-337D-C5E4-C7D1-39FC82EAC648}"/>
+            </a:ext>
+          </a:extLst>
+        </p:cNvPr>
+        <p:cNvGrpSpPr/>
+        <p:nvPr/>
+      </p:nvGrpSpPr>
+      <p:grpSpPr>
+        <a:xfrm>
+          <a:off x="0" y="0"/>
+          <a:ext cx="0" cy="0"/>
+          <a:chOff x="0" y="0"/>
+          <a:chExt cx="0" cy="0"/>
+        </a:xfrm>
+      </p:grpSpPr>
+      <p:sp>
+        <p:nvSpPr>
+          <p:cNvPr id="2" name="Titel 1">
+            <a:extLst>
+              <a:ext uri="{FF2B5EF4-FFF2-40B4-BE49-F238E27FC236}">
+                <a16:creationId xmlns:a16="http://schemas.microsoft.com/office/drawing/2014/main" id="{B42AD4D8-B8B5-04C3-AFDA-013C50C62101}"/>
+              </a:ext>
+            </a:extLst>
+          </p:cNvPr>
+          <p:cNvSpPr>
+            <a:spLocks noGrp="1"/>
+          </p:cNvSpPr>
+          <p:nvPr>
+            <p:ph type="title"/>
+          </p:nvPr>
+        </p:nvSpPr>
+        <p:spPr/>
+        <p:txBody>
+          <a:bodyPr/>
+          <a:lstStyle/>
+          <a:p>
+            <a:r>
+              <a:rPr lang="de-DE" dirty="0" err="1"/>
+              <a:t>Exercise</a:t>
+            </a:r>
+            <a:r>
+              <a:rPr lang="de-DE" dirty="0"/>
+              <a:t> 3</a:t>
+            </a:r>
+          </a:p>
+        </p:txBody>
+      </p:sp>
+      <mc:AlternateContent xmlns:mc="http://schemas.openxmlformats.org/markup-compatibility/2006">
+        <mc:Choice xmlns:a14="http://schemas.microsoft.com/office/drawing/2010/main" Requires="a14">
+          <p:sp>
+            <p:nvSpPr>
+              <p:cNvPr id="3" name="Inhaltsplatzhalter 2">
+                <a:extLst>
+                  <a:ext uri="{FF2B5EF4-FFF2-40B4-BE49-F238E27FC236}">
+                    <a16:creationId xmlns:a16="http://schemas.microsoft.com/office/drawing/2014/main" id="{EF29C92C-8F14-092A-5D9B-E98B1456E5EC}"/>
+                  </a:ext>
+                </a:extLst>
+              </p:cNvPr>
+              <p:cNvSpPr>
+                <a:spLocks noGrp="1"/>
+              </p:cNvSpPr>
+              <p:nvPr>
+                <p:ph idx="1"/>
+              </p:nvPr>
+            </p:nvSpPr>
+            <p:spPr/>
+            <p:txBody>
+              <a:bodyPr>
+                <a:normAutofit/>
+              </a:bodyPr>
+              <a:lstStyle/>
+              <a:p>
+                <a:pPr marL="0" indent="0">
+                  <a:buNone/>
+                </a:pPr>
+                <a:r>
+                  <a:rPr lang="de-DE" dirty="0"/>
+                  <a:t>For </a:t>
+                </a:r>
+                <a:r>
+                  <a:rPr lang="de-DE" dirty="0" err="1"/>
+                  <a:t>each</a:t>
+                </a:r>
+                <a:r>
+                  <a:rPr lang="de-DE" dirty="0"/>
+                  <a:t> </a:t>
+                </a:r>
+                <a:r>
+                  <a:rPr lang="de-DE" dirty="0" err="1"/>
+                  <a:t>system</a:t>
+                </a:r>
+                <a:r>
+                  <a:rPr lang="de-DE" dirty="0"/>
+                  <a:t>, </a:t>
+                </a:r>
+                <a:r>
+                  <a:rPr lang="de-DE" dirty="0" err="1"/>
+                  <a:t>determine</a:t>
+                </a:r>
+                <a:r>
+                  <a:rPr lang="de-DE" dirty="0"/>
+                  <a:t> </a:t>
+                </a:r>
+                <a:r>
+                  <a:rPr lang="de-DE" dirty="0" err="1"/>
+                  <a:t>stability</a:t>
+                </a:r>
+                <a:r>
+                  <a:rPr lang="de-DE" dirty="0"/>
+                  <a:t>:</a:t>
+                </a:r>
+              </a:p>
+              <a:p>
+                <a:pPr marL="0" indent="0">
+                  <a:buNone/>
+                </a:pPr>
+                <a:endParaRPr lang="de-DE" dirty="0"/>
+              </a:p>
+              <a:p>
+                <a:pPr marL="0" indent="0">
+                  <a:buNone/>
+                </a:pPr>
+                <a:r>
+                  <a:rPr lang="de-DE" b="0" dirty="0"/>
+                  <a:t>	</a:t>
+                </a:r>
+                <a14:m>
+                  <m:oMath xmlns:m="http://schemas.openxmlformats.org/officeDocument/2006/math">
+                    <m:sSub>
+                      <m:sSubPr>
+                        <m:ctrlPr>
+                          <a:rPr lang="de-DE" b="0" i="1" smtClean="0">
+                            <a:latin typeface="Cambria Math" panose="02040503050406030204" pitchFamily="18" charset="0"/>
+                          </a:rPr>
+                        </m:ctrlPr>
+                      </m:sSubPr>
+                      <m:e>
+                        <m:r>
+                          <a:rPr lang="de-DE" b="0" i="1" smtClean="0">
+                            <a:latin typeface="Cambria Math" panose="02040503050406030204" pitchFamily="18" charset="0"/>
+                          </a:rPr>
+                          <m:t>𝐺</m:t>
+                        </m:r>
+                      </m:e>
+                      <m:sub>
+                        <m:r>
+                          <a:rPr lang="de-DE" b="0" i="1" smtClean="0">
+                            <a:latin typeface="Cambria Math" panose="02040503050406030204" pitchFamily="18" charset="0"/>
+                          </a:rPr>
+                          <m:t>1</m:t>
+                        </m:r>
+                      </m:sub>
+                    </m:sSub>
+                    <m:d>
+                      <m:dPr>
+                        <m:ctrlPr>
+                          <a:rPr lang="de-DE" b="0" i="1" smtClean="0">
+                            <a:latin typeface="Cambria Math" panose="02040503050406030204" pitchFamily="18" charset="0"/>
+                          </a:rPr>
+                        </m:ctrlPr>
+                      </m:dPr>
+                      <m:e>
+                        <m:r>
+                          <a:rPr lang="de-DE" b="0" i="1" smtClean="0">
+                            <a:latin typeface="Cambria Math" panose="02040503050406030204" pitchFamily="18" charset="0"/>
+                          </a:rPr>
+                          <m:t>𝑠</m:t>
+                        </m:r>
+                      </m:e>
+                    </m:d>
+                    <m:r>
+                      <a:rPr lang="de-DE" b="0" i="1" smtClean="0">
+                        <a:latin typeface="Cambria Math" panose="02040503050406030204" pitchFamily="18" charset="0"/>
+                      </a:rPr>
+                      <m:t>=</m:t>
+                    </m:r>
+                    <m:f>
+                      <m:fPr>
+                        <m:ctrlPr>
+                          <a:rPr lang="de-DE" b="0" i="1" smtClean="0">
+                            <a:latin typeface="Cambria Math" panose="02040503050406030204" pitchFamily="18" charset="0"/>
+                          </a:rPr>
+                        </m:ctrlPr>
+                      </m:fPr>
+                      <m:num>
+                        <m:r>
+                          <a:rPr lang="de-DE" b="0" i="1" smtClean="0">
+                            <a:latin typeface="Cambria Math" panose="02040503050406030204" pitchFamily="18" charset="0"/>
+                          </a:rPr>
+                          <m:t>𝑠</m:t>
+                        </m:r>
+                        <m:r>
+                          <a:rPr lang="de-DE" b="0" i="1" smtClean="0">
+                            <a:latin typeface="Cambria Math" panose="02040503050406030204" pitchFamily="18" charset="0"/>
+                          </a:rPr>
+                          <m:t>+1</m:t>
+                        </m:r>
+                      </m:num>
+                      <m:den>
+                        <m:r>
+                          <a:rPr lang="de-DE" b="0" i="1" smtClean="0">
+                            <a:latin typeface="Cambria Math" panose="02040503050406030204" pitchFamily="18" charset="0"/>
+                          </a:rPr>
+                          <m:t>(</m:t>
+                        </m:r>
+                        <m:r>
+                          <a:rPr lang="de-DE" b="0" i="1" smtClean="0">
+                            <a:latin typeface="Cambria Math" panose="02040503050406030204" pitchFamily="18" charset="0"/>
+                          </a:rPr>
+                          <m:t>𝑠</m:t>
+                        </m:r>
+                        <m:r>
+                          <a:rPr lang="de-DE" b="0" i="1" smtClean="0">
+                            <a:latin typeface="Cambria Math" panose="02040503050406030204" pitchFamily="18" charset="0"/>
+                          </a:rPr>
+                          <m:t>+2)(</m:t>
+                        </m:r>
+                        <m:r>
+                          <a:rPr lang="de-DE" b="0" i="1" smtClean="0">
+                            <a:latin typeface="Cambria Math" panose="02040503050406030204" pitchFamily="18" charset="0"/>
+                          </a:rPr>
+                          <m:t>𝑠</m:t>
+                        </m:r>
+                        <m:r>
+                          <a:rPr lang="de-DE" b="0" i="1" smtClean="0">
+                            <a:latin typeface="Cambria Math" panose="02040503050406030204" pitchFamily="18" charset="0"/>
+                          </a:rPr>
+                          <m:t>+3)</m:t>
+                        </m:r>
+                      </m:den>
+                    </m:f>
+                  </m:oMath>
+                </a14:m>
+                <a:endParaRPr lang="de-DE" b="0" i="1" dirty="0">
+                  <a:latin typeface="Cambria Math" panose="02040503050406030204" pitchFamily="18" charset="0"/>
+                </a:endParaRPr>
+              </a:p>
+              <a:p>
+                <a:pPr marL="0" indent="0">
+                  <a:buNone/>
+                </a:pPr>
+                <a:endParaRPr lang="de-DE" dirty="0"/>
+              </a:p>
+              <a:p>
+                <a:pPr marL="0" indent="0">
+                  <a:buNone/>
+                </a:pPr>
+                <a:r>
+                  <a:rPr lang="de-DE" dirty="0"/>
+                  <a:t>	</a:t>
+                </a:r>
+                <a14:m>
+                  <m:oMath xmlns:m="http://schemas.openxmlformats.org/officeDocument/2006/math">
+                    <m:sSub>
+                      <m:sSubPr>
+                        <m:ctrlPr>
+                          <a:rPr lang="de-DE" i="1">
+                            <a:latin typeface="Cambria Math" panose="02040503050406030204" pitchFamily="18" charset="0"/>
+                          </a:rPr>
+                        </m:ctrlPr>
+                      </m:sSubPr>
+                      <m:e>
+                        <m:r>
+                          <a:rPr lang="de-DE" i="1">
+                            <a:latin typeface="Cambria Math" panose="02040503050406030204" pitchFamily="18" charset="0"/>
+                          </a:rPr>
+                          <m:t>𝐺</m:t>
+                        </m:r>
+                      </m:e>
+                      <m:sub>
+                        <m:r>
+                          <a:rPr lang="de-DE" b="0" i="1" smtClean="0">
+                            <a:latin typeface="Cambria Math" panose="02040503050406030204" pitchFamily="18" charset="0"/>
+                          </a:rPr>
+                          <m:t>2</m:t>
+                        </m:r>
+                      </m:sub>
+                    </m:sSub>
+                    <m:d>
+                      <m:dPr>
+                        <m:ctrlPr>
+                          <a:rPr lang="de-DE" i="1">
+                            <a:latin typeface="Cambria Math" panose="02040503050406030204" pitchFamily="18" charset="0"/>
+                          </a:rPr>
+                        </m:ctrlPr>
+                      </m:dPr>
+                      <m:e>
+                        <m:r>
+                          <a:rPr lang="de-DE" i="1">
+                            <a:latin typeface="Cambria Math" panose="02040503050406030204" pitchFamily="18" charset="0"/>
+                          </a:rPr>
+                          <m:t>𝑠</m:t>
+                        </m:r>
+                      </m:e>
+                    </m:d>
+                    <m:r>
+                      <a:rPr lang="de-DE" i="1">
+                        <a:latin typeface="Cambria Math" panose="02040503050406030204" pitchFamily="18" charset="0"/>
+                      </a:rPr>
+                      <m:t>=</m:t>
+                    </m:r>
+                    <m:f>
+                      <m:fPr>
+                        <m:ctrlPr>
+                          <a:rPr lang="de-DE" i="1">
+                            <a:latin typeface="Cambria Math" panose="02040503050406030204" pitchFamily="18" charset="0"/>
+                          </a:rPr>
+                        </m:ctrlPr>
+                      </m:fPr>
+                      <m:num>
+                        <m:r>
+                          <a:rPr lang="de-DE" i="1">
+                            <a:latin typeface="Cambria Math" panose="02040503050406030204" pitchFamily="18" charset="0"/>
+                          </a:rPr>
+                          <m:t>1</m:t>
+                        </m:r>
+                      </m:num>
+                      <m:den>
+                        <m:r>
+                          <a:rPr lang="de-DE" i="1">
+                            <a:latin typeface="Cambria Math" panose="02040503050406030204" pitchFamily="18" charset="0"/>
+                          </a:rPr>
+                          <m:t>(</m:t>
+                        </m:r>
+                        <m:r>
+                          <a:rPr lang="de-DE" i="1">
+                            <a:latin typeface="Cambria Math" panose="02040503050406030204" pitchFamily="18" charset="0"/>
+                          </a:rPr>
+                          <m:t>𝑠</m:t>
+                        </m:r>
+                        <m:r>
+                          <a:rPr lang="de-DE" b="0" i="1" smtClean="0">
+                            <a:latin typeface="Cambria Math" panose="02040503050406030204" pitchFamily="18" charset="0"/>
+                          </a:rPr>
+                          <m:t>−1</m:t>
+                        </m:r>
+                        <m:r>
+                          <a:rPr lang="de-DE" i="1">
+                            <a:latin typeface="Cambria Math" panose="02040503050406030204" pitchFamily="18" charset="0"/>
+                          </a:rPr>
+                          <m:t>)(</m:t>
+                        </m:r>
+                        <m:r>
+                          <a:rPr lang="de-DE" i="1">
+                            <a:latin typeface="Cambria Math" panose="02040503050406030204" pitchFamily="18" charset="0"/>
+                          </a:rPr>
+                          <m:t>𝑠</m:t>
+                        </m:r>
+                        <m:r>
+                          <a:rPr lang="de-DE" i="1">
+                            <a:latin typeface="Cambria Math" panose="02040503050406030204" pitchFamily="18" charset="0"/>
+                          </a:rPr>
+                          <m:t>+2)</m:t>
+                        </m:r>
+                      </m:den>
+                    </m:f>
+                  </m:oMath>
+                </a14:m>
+                <a:endParaRPr lang="de-DE" i="1" dirty="0">
+                  <a:latin typeface="Cambria Math" panose="02040503050406030204" pitchFamily="18" charset="0"/>
+                </a:endParaRPr>
+              </a:p>
+              <a:p>
+                <a:pPr marL="0" indent="0">
+                  <a:buNone/>
+                </a:pPr>
+                <a:endParaRPr lang="de-DE" dirty="0"/>
+              </a:p>
+              <a:p>
+                <a:pPr marL="0" indent="0">
+                  <a:buNone/>
+                </a:pPr>
+                <a:r>
+                  <a:rPr lang="de-DE" dirty="0"/>
+                  <a:t>	</a:t>
+                </a:r>
+                <a14:m>
+                  <m:oMath xmlns:m="http://schemas.openxmlformats.org/officeDocument/2006/math">
+                    <m:sSub>
+                      <m:sSubPr>
+                        <m:ctrlPr>
+                          <a:rPr lang="de-DE" i="1">
+                            <a:latin typeface="Cambria Math" panose="02040503050406030204" pitchFamily="18" charset="0"/>
+                          </a:rPr>
+                        </m:ctrlPr>
+                      </m:sSubPr>
+                      <m:e>
+                        <m:r>
+                          <a:rPr lang="de-DE" i="1">
+                            <a:latin typeface="Cambria Math" panose="02040503050406030204" pitchFamily="18" charset="0"/>
+                          </a:rPr>
+                          <m:t>𝐺</m:t>
+                        </m:r>
+                      </m:e>
+                      <m:sub>
+                        <m:r>
+                          <a:rPr lang="de-DE" b="0" i="1" smtClean="0">
+                            <a:latin typeface="Cambria Math" panose="02040503050406030204" pitchFamily="18" charset="0"/>
+                          </a:rPr>
+                          <m:t>3</m:t>
+                        </m:r>
+                      </m:sub>
+                    </m:sSub>
+                    <m:d>
+                      <m:dPr>
+                        <m:ctrlPr>
+                          <a:rPr lang="de-DE" i="1">
+                            <a:latin typeface="Cambria Math" panose="02040503050406030204" pitchFamily="18" charset="0"/>
+                          </a:rPr>
+                        </m:ctrlPr>
+                      </m:dPr>
+                      <m:e>
+                        <m:r>
+                          <a:rPr lang="de-DE" i="1">
+                            <a:latin typeface="Cambria Math" panose="02040503050406030204" pitchFamily="18" charset="0"/>
+                          </a:rPr>
+                          <m:t>𝑠</m:t>
+                        </m:r>
+                      </m:e>
+                    </m:d>
+                    <m:r>
+                      <a:rPr lang="de-DE" i="1">
+                        <a:latin typeface="Cambria Math" panose="02040503050406030204" pitchFamily="18" charset="0"/>
+                      </a:rPr>
+                      <m:t>=</m:t>
+                    </m:r>
+                    <m:f>
+                      <m:fPr>
+                        <m:ctrlPr>
+                          <a:rPr lang="de-DE" i="1">
+                            <a:latin typeface="Cambria Math" panose="02040503050406030204" pitchFamily="18" charset="0"/>
+                          </a:rPr>
+                        </m:ctrlPr>
+                      </m:fPr>
+                      <m:num>
+                        <m:r>
+                          <a:rPr lang="de-DE" i="1">
+                            <a:latin typeface="Cambria Math" panose="02040503050406030204" pitchFamily="18" charset="0"/>
+                          </a:rPr>
+                          <m:t>1</m:t>
+                        </m:r>
+                      </m:num>
+                      <m:den>
+                        <m:sSup>
+                          <m:sSupPr>
+                            <m:ctrlPr>
+                              <a:rPr lang="de-DE" i="1">
+                                <a:latin typeface="Cambria Math" panose="02040503050406030204" pitchFamily="18" charset="0"/>
+                              </a:rPr>
+                            </m:ctrlPr>
+                          </m:sSupPr>
+                          <m:e>
+                            <m:r>
+                              <a:rPr lang="de-DE" i="1">
+                                <a:latin typeface="Cambria Math" panose="02040503050406030204" pitchFamily="18" charset="0"/>
+                              </a:rPr>
+                              <m:t>𝑠</m:t>
+                            </m:r>
+                          </m:e>
+                          <m:sup>
+                            <m:r>
+                              <a:rPr lang="de-DE" i="1">
+                                <a:latin typeface="Cambria Math" panose="02040503050406030204" pitchFamily="18" charset="0"/>
+                              </a:rPr>
+                              <m:t>2</m:t>
+                            </m:r>
+                          </m:sup>
+                        </m:sSup>
+                        <m:r>
+                          <a:rPr lang="de-DE" i="1">
+                            <a:latin typeface="Cambria Math" panose="02040503050406030204" pitchFamily="18" charset="0"/>
+                          </a:rPr>
+                          <m:t>+2</m:t>
+                        </m:r>
+                        <m:r>
+                          <a:rPr lang="de-DE" i="1">
+                            <a:latin typeface="Cambria Math" panose="02040503050406030204" pitchFamily="18" charset="0"/>
+                          </a:rPr>
+                          <m:t>𝑠</m:t>
+                        </m:r>
+                        <m:r>
+                          <a:rPr lang="de-DE" i="1">
+                            <a:latin typeface="Cambria Math" panose="02040503050406030204" pitchFamily="18" charset="0"/>
+                          </a:rPr>
+                          <m:t>+1</m:t>
+                        </m:r>
+                      </m:den>
+                    </m:f>
+                  </m:oMath>
+                </a14:m>
+                <a:endParaRPr lang="de-DE" dirty="0"/>
+              </a:p>
+            </p:txBody>
+          </p:sp>
+        </mc:Choice>
+        <mc:Fallback>
+          <p:sp>
+            <p:nvSpPr>
+              <p:cNvPr id="3" name="Inhaltsplatzhalter 2">
+                <a:extLst>
+                  <a:ext uri="{FF2B5EF4-FFF2-40B4-BE49-F238E27FC236}">
+                    <a16:creationId xmlns:a16="http://schemas.microsoft.com/office/drawing/2014/main" id="{EF29C92C-8F14-092A-5D9B-E98B1456E5EC}"/>
+                  </a:ext>
+                </a:extLst>
+              </p:cNvPr>
+              <p:cNvSpPr>
+                <a:spLocks noGrp="1" noRot="1" noChangeAspect="1" noMove="1" noResize="1" noEditPoints="1" noAdjustHandles="1" noChangeArrowheads="1" noChangeShapeType="1" noTextEdit="1"/>
+              </p:cNvSpPr>
+              <p:nvPr>
+                <p:ph idx="1"/>
+              </p:nvPr>
+            </p:nvSpPr>
+            <p:spPr>
+              <a:blipFill>
+                <a:blip r:embed="rId2"/>
+                <a:stretch>
+                  <a:fillRect l="-1206" t="-2326"/>
+                </a:stretch>
+              </a:blipFill>
+            </p:spPr>
+            <p:txBody>
+              <a:bodyPr/>
+              <a:lstStyle/>
+              <a:p>
+                <a:r>
+                  <a:rPr lang="de-DE">
+                    <a:noFill/>
+                  </a:rPr>
+                  <a:t> </a:t>
+                </a:r>
+              </a:p>
+            </p:txBody>
+          </p:sp>
+        </mc:Fallback>
+      </mc:AlternateContent>
+      <p:sp>
+        <p:nvSpPr>
+          <p:cNvPr id="4" name="Foliennummernplatzhalter 3">
+            <a:extLst>
+              <a:ext uri="{FF2B5EF4-FFF2-40B4-BE49-F238E27FC236}">
+                <a16:creationId xmlns:a16="http://schemas.microsoft.com/office/drawing/2014/main" id="{BBC9A75F-353C-AEA5-B0D7-46A628C9B061}"/>
+              </a:ext>
+            </a:extLst>
+          </p:cNvPr>
+          <p:cNvSpPr>
+            <a:spLocks noGrp="1"/>
+          </p:cNvSpPr>
+          <p:nvPr>
+            <p:ph type="sldNum" sz="quarter" idx="12"/>
+          </p:nvPr>
+        </p:nvSpPr>
+        <p:spPr/>
+        <p:txBody>
+          <a:bodyPr/>
+          <a:lstStyle/>
+          <a:p>
+            <a:fld id="{08C366F5-AFAD-49CB-854A-9D9E238FCA13}" type="slidenum">
+              <a:rPr lang="en-GB" smtClean="0"/>
+              <a:t>27</a:t>
+            </a:fld>
+            <a:endParaRPr lang="en-GB"/>
+          </a:p>
+        </p:txBody>
+      </p:sp>
+    </p:spTree>
+    <p:extLst>
+      <p:ext uri="{BB962C8B-B14F-4D97-AF65-F5344CB8AC3E}">
+        <p14:creationId xmlns:p14="http://schemas.microsoft.com/office/powerpoint/2010/main" val="1147345340"/>
+      </p:ext>
+    </p:extLst>
+  </p:cSld>
+  <p:clrMapOvr>
+    <a:masterClrMapping/>
+  </p:clrMapOvr>
+</p:sld>
+</file>
+
+<file path=ppt/slides/slide28.xml><?xml version="1.0" encoding="utf-8"?>
+<p:sld xmlns:a="http://schemas.openxmlformats.org/drawingml/2006/main" xmlns:r="http://schemas.openxmlformats.org/officeDocument/2006/relationships" xmlns:p="http://schemas.openxmlformats.org/presentationml/2006/main">
+  <p:cSld>
+    <p:spTree>
+      <p:nvGrpSpPr>
+        <p:cNvPr id="1" name="">
+          <a:extLst>
+            <a:ext uri="{FF2B5EF4-FFF2-40B4-BE49-F238E27FC236}">
+              <a16:creationId xmlns:a16="http://schemas.microsoft.com/office/drawing/2014/main" id="{C166E7A3-F07B-4AB0-381B-F17AC680C492}"/>
+            </a:ext>
+          </a:extLst>
+        </p:cNvPr>
+        <p:cNvGrpSpPr/>
+        <p:nvPr/>
+      </p:nvGrpSpPr>
+      <p:grpSpPr>
+        <a:xfrm>
+          <a:off x="0" y="0"/>
+          <a:ext cx="0" cy="0"/>
+          <a:chOff x="0" y="0"/>
+          <a:chExt cx="0" cy="0"/>
+        </a:xfrm>
+      </p:grpSpPr>
+      <p:sp>
+        <p:nvSpPr>
+          <p:cNvPr id="2" name="Titel 1">
+            <a:extLst>
+              <a:ext uri="{FF2B5EF4-FFF2-40B4-BE49-F238E27FC236}">
+                <a16:creationId xmlns:a16="http://schemas.microsoft.com/office/drawing/2014/main" id="{E84F1AF5-97A4-9E59-4CC7-39B5548E7837}"/>
+              </a:ext>
+            </a:extLst>
+          </p:cNvPr>
+          <p:cNvSpPr>
+            <a:spLocks noGrp="1"/>
+          </p:cNvSpPr>
+          <p:nvPr>
+            <p:ph type="title"/>
+          </p:nvPr>
+        </p:nvSpPr>
+        <p:spPr/>
+        <p:txBody>
+          <a:bodyPr/>
+          <a:lstStyle/>
+          <a:p>
+            <a:r>
+              <a:rPr lang="de-DE" dirty="0" err="1"/>
+              <a:t>Exercise</a:t>
+            </a:r>
+            <a:r>
+              <a:rPr lang="de-DE" dirty="0"/>
+              <a:t> 4</a:t>
+            </a:r>
+          </a:p>
+        </p:txBody>
+      </p:sp>
+      <mc:AlternateContent xmlns:mc="http://schemas.openxmlformats.org/markup-compatibility/2006">
+        <mc:Choice xmlns:a14="http://schemas.microsoft.com/office/drawing/2010/main" Requires="a14">
+          <p:sp>
+            <p:nvSpPr>
+              <p:cNvPr id="3" name="Inhaltsplatzhalter 2">
+                <a:extLst>
+                  <a:ext uri="{FF2B5EF4-FFF2-40B4-BE49-F238E27FC236}">
+                    <a16:creationId xmlns:a16="http://schemas.microsoft.com/office/drawing/2014/main" id="{DFB307CD-9F70-F771-2856-6B0112B386C8}"/>
+                  </a:ext>
+                </a:extLst>
+              </p:cNvPr>
+              <p:cNvSpPr>
+                <a:spLocks noGrp="1"/>
+              </p:cNvSpPr>
+              <p:nvPr>
+                <p:ph idx="1"/>
+              </p:nvPr>
+            </p:nvSpPr>
+            <p:spPr>
+              <a:xfrm>
+                <a:off x="838200" y="1825625"/>
+                <a:ext cx="11209774" cy="4351338"/>
+              </a:xfrm>
+            </p:spPr>
+            <p:txBody>
+              <a:bodyPr>
+                <a:normAutofit/>
+              </a:bodyPr>
+              <a:lstStyle/>
+              <a:p>
+                <a:pPr marL="0" indent="0">
+                  <a:buNone/>
+                </a:pPr>
+                <a:r>
+                  <a:rPr lang="de-DE" dirty="0"/>
+                  <a:t>Given </a:t>
+                </a:r>
+                <a:r>
+                  <a:rPr lang="de-DE" dirty="0" err="1"/>
+                  <a:t>poles</a:t>
+                </a:r>
+                <a:r>
+                  <a:rPr lang="de-DE" dirty="0"/>
+                  <a:t>:</a:t>
+                </a:r>
+              </a:p>
+              <a:p>
+                <a14:m>
+                  <m:oMath xmlns:m="http://schemas.openxmlformats.org/officeDocument/2006/math">
+                    <m:r>
+                      <a:rPr lang="de-DE" b="0" i="1" smtClean="0">
+                        <a:latin typeface="Cambria Math" panose="02040503050406030204" pitchFamily="18" charset="0"/>
+                      </a:rPr>
+                      <m:t>𝑠</m:t>
+                    </m:r>
+                    <m:r>
+                      <a:rPr lang="de-DE" b="0" i="1" smtClean="0">
+                        <a:latin typeface="Cambria Math" panose="02040503050406030204" pitchFamily="18" charset="0"/>
+                      </a:rPr>
+                      <m:t>=−1±</m:t>
+                    </m:r>
+                    <m:r>
+                      <a:rPr lang="de-DE" b="0" i="1" smtClean="0">
+                        <a:latin typeface="Cambria Math" panose="02040503050406030204" pitchFamily="18" charset="0"/>
+                        <a:ea typeface="Cambria Math" panose="02040503050406030204" pitchFamily="18" charset="0"/>
+                      </a:rPr>
+                      <m:t>𝑗</m:t>
+                    </m:r>
+                    <m:r>
+                      <a:rPr lang="de-DE" b="0" i="1" smtClean="0">
+                        <a:latin typeface="Cambria Math" panose="02040503050406030204" pitchFamily="18" charset="0"/>
+                        <a:ea typeface="Cambria Math" panose="02040503050406030204" pitchFamily="18" charset="0"/>
+                      </a:rPr>
+                      <m:t>2</m:t>
+                    </m:r>
+                  </m:oMath>
+                </a14:m>
+                <a:endParaRPr lang="de-DE" dirty="0"/>
+              </a:p>
+              <a:p>
+                <a14:m>
+                  <m:oMath xmlns:m="http://schemas.openxmlformats.org/officeDocument/2006/math">
+                    <m:r>
+                      <a:rPr lang="de-DE" b="0" i="1" smtClean="0">
+                        <a:latin typeface="Cambria Math" panose="02040503050406030204" pitchFamily="18" charset="0"/>
+                      </a:rPr>
+                      <m:t>𝑠</m:t>
+                    </m:r>
+                    <m:r>
+                      <a:rPr lang="de-DE" b="0" i="1" smtClean="0">
+                        <a:latin typeface="Cambria Math" panose="02040503050406030204" pitchFamily="18" charset="0"/>
+                      </a:rPr>
+                      <m:t>=−10</m:t>
+                    </m:r>
+                  </m:oMath>
+                </a14:m>
+                <a:endParaRPr lang="de-DE" dirty="0"/>
+              </a:p>
+              <a:p>
+                <a:pPr marL="0" indent="0">
+                  <a:buNone/>
+                </a:pPr>
+                <a:endParaRPr lang="de-DE" dirty="0"/>
+              </a:p>
+              <a:p>
+                <a:r>
+                  <a:rPr lang="de-DE" dirty="0" err="1"/>
+                  <a:t>Which</a:t>
+                </a:r>
+                <a:r>
+                  <a:rPr lang="de-DE" dirty="0"/>
+                  <a:t> </a:t>
+                </a:r>
+                <a:r>
+                  <a:rPr lang="de-DE" dirty="0" err="1"/>
+                  <a:t>poles</a:t>
+                </a:r>
+                <a:r>
+                  <a:rPr lang="de-DE" dirty="0"/>
+                  <a:t> </a:t>
+                </a:r>
+                <a:r>
+                  <a:rPr lang="de-DE" dirty="0" err="1"/>
+                  <a:t>dominate</a:t>
+                </a:r>
+                <a:r>
+                  <a:rPr lang="de-DE" dirty="0"/>
+                  <a:t>?</a:t>
+                </a:r>
+              </a:p>
+              <a:p>
+                <a:r>
+                  <a:rPr lang="de-DE" dirty="0" err="1"/>
+                  <a:t>Describe</a:t>
+                </a:r>
+                <a:r>
+                  <a:rPr lang="de-DE" dirty="0"/>
+                  <a:t> </a:t>
+                </a:r>
+                <a:r>
+                  <a:rPr lang="de-DE" dirty="0" err="1"/>
+                  <a:t>the</a:t>
+                </a:r>
+                <a:r>
+                  <a:rPr lang="de-DE" dirty="0"/>
+                  <a:t> </a:t>
+                </a:r>
+                <a:r>
+                  <a:rPr lang="de-DE" dirty="0" err="1"/>
+                  <a:t>system</a:t>
+                </a:r>
+                <a:r>
+                  <a:rPr lang="de-DE" dirty="0"/>
+                  <a:t> </a:t>
+                </a:r>
+                <a:r>
+                  <a:rPr lang="de-DE" dirty="0" err="1"/>
+                  <a:t>behavior</a:t>
+                </a:r>
+                <a:r>
+                  <a:rPr lang="de-DE" dirty="0"/>
+                  <a:t>.</a:t>
+                </a:r>
+              </a:p>
+            </p:txBody>
+          </p:sp>
+        </mc:Choice>
+        <mc:Fallback>
+          <p:sp>
+            <p:nvSpPr>
+              <p:cNvPr id="3" name="Inhaltsplatzhalter 2">
+                <a:extLst>
+                  <a:ext uri="{FF2B5EF4-FFF2-40B4-BE49-F238E27FC236}">
+                    <a16:creationId xmlns:a16="http://schemas.microsoft.com/office/drawing/2014/main" id="{DFB307CD-9F70-F771-2856-6B0112B386C8}"/>
+                  </a:ext>
+                </a:extLst>
+              </p:cNvPr>
+              <p:cNvSpPr>
+                <a:spLocks noGrp="1" noRot="1" noChangeAspect="1" noMove="1" noResize="1" noEditPoints="1" noAdjustHandles="1" noChangeArrowheads="1" noChangeShapeType="1" noTextEdit="1"/>
+              </p:cNvSpPr>
+              <p:nvPr>
+                <p:ph idx="1"/>
+              </p:nvPr>
+            </p:nvSpPr>
+            <p:spPr>
+              <a:xfrm>
+                <a:off x="838200" y="1825625"/>
+                <a:ext cx="11209774" cy="4351338"/>
+              </a:xfrm>
+              <a:blipFill>
+                <a:blip r:embed="rId2"/>
+                <a:stretch>
+                  <a:fillRect l="-1133" t="-2326"/>
+                </a:stretch>
+              </a:blipFill>
+            </p:spPr>
+            <p:txBody>
+              <a:bodyPr/>
+              <a:lstStyle/>
+              <a:p>
+                <a:r>
+                  <a:rPr lang="de-DE">
+                    <a:noFill/>
+                  </a:rPr>
+                  <a:t> </a:t>
+                </a:r>
+              </a:p>
+            </p:txBody>
+          </p:sp>
+        </mc:Fallback>
+      </mc:AlternateContent>
+      <p:sp>
+        <p:nvSpPr>
+          <p:cNvPr id="4" name="Foliennummernplatzhalter 3">
+            <a:extLst>
+              <a:ext uri="{FF2B5EF4-FFF2-40B4-BE49-F238E27FC236}">
+                <a16:creationId xmlns:a16="http://schemas.microsoft.com/office/drawing/2014/main" id="{4E82B3D9-900F-2860-A55C-9E6D7721ABC7}"/>
+              </a:ext>
+            </a:extLst>
+          </p:cNvPr>
+          <p:cNvSpPr>
+            <a:spLocks noGrp="1"/>
+          </p:cNvSpPr>
+          <p:nvPr>
+            <p:ph type="sldNum" sz="quarter" idx="12"/>
+          </p:nvPr>
+        </p:nvSpPr>
+        <p:spPr/>
+        <p:txBody>
+          <a:bodyPr/>
+          <a:lstStyle/>
+          <a:p>
+            <a:fld id="{08C366F5-AFAD-49CB-854A-9D9E238FCA13}" type="slidenum">
+              <a:rPr lang="en-GB" smtClean="0"/>
+              <a:t>28</a:t>
+            </a:fld>
+            <a:endParaRPr lang="en-GB"/>
+          </a:p>
+        </p:txBody>
+      </p:sp>
+    </p:spTree>
+    <p:extLst>
+      <p:ext uri="{BB962C8B-B14F-4D97-AF65-F5344CB8AC3E}">
+        <p14:creationId xmlns:p14="http://schemas.microsoft.com/office/powerpoint/2010/main" val="1039172537"/>
+      </p:ext>
+    </p:extLst>
+  </p:cSld>
+  <p:clrMapOvr>
+    <a:masterClrMapping/>
+  </p:clrMapOvr>
+</p:sld>
+</file>
+
+<file path=ppt/slides/slide29.xml><?xml version="1.0" encoding="utf-8"?>
+<p:sld xmlns:a="http://schemas.openxmlformats.org/drawingml/2006/main" xmlns:r="http://schemas.openxmlformats.org/officeDocument/2006/relationships" xmlns:p="http://schemas.openxmlformats.org/presentationml/2006/main">
+  <p:cSld>
+    <p:spTree>
+      <p:nvGrpSpPr>
+        <p:cNvPr id="1" name="">
+          <a:extLst>
+            <a:ext uri="{FF2B5EF4-FFF2-40B4-BE49-F238E27FC236}">
+              <a16:creationId xmlns:a16="http://schemas.microsoft.com/office/drawing/2014/main" id="{FCD1BB6D-CCF9-B075-7653-1593C1A547DB}"/>
+            </a:ext>
+          </a:extLst>
+        </p:cNvPr>
+        <p:cNvGrpSpPr/>
+        <p:nvPr/>
+      </p:nvGrpSpPr>
+      <p:grpSpPr>
+        <a:xfrm>
+          <a:off x="0" y="0"/>
+          <a:ext cx="0" cy="0"/>
+          <a:chOff x="0" y="0"/>
+          <a:chExt cx="0" cy="0"/>
+        </a:xfrm>
+      </p:grpSpPr>
+      <p:sp>
+        <p:nvSpPr>
+          <p:cNvPr id="2" name="Titel 1">
+            <a:extLst>
+              <a:ext uri="{FF2B5EF4-FFF2-40B4-BE49-F238E27FC236}">
+                <a16:creationId xmlns:a16="http://schemas.microsoft.com/office/drawing/2014/main" id="{3A33B17E-615C-E354-7367-71553DE3A4D0}"/>
+              </a:ext>
+            </a:extLst>
+          </p:cNvPr>
+          <p:cNvSpPr>
+            <a:spLocks noGrp="1"/>
+          </p:cNvSpPr>
+          <p:nvPr>
+            <p:ph type="title"/>
+          </p:nvPr>
+        </p:nvSpPr>
+        <p:spPr/>
+        <p:txBody>
+          <a:bodyPr/>
+          <a:lstStyle/>
+          <a:p>
+            <a:r>
+              <a:rPr lang="de-DE" dirty="0" err="1"/>
+              <a:t>Exercise</a:t>
+            </a:r>
+            <a:r>
+              <a:rPr lang="de-DE" dirty="0"/>
+              <a:t> 5</a:t>
+            </a:r>
+          </a:p>
+        </p:txBody>
+      </p:sp>
+      <mc:AlternateContent xmlns:mc="http://schemas.openxmlformats.org/markup-compatibility/2006">
+        <mc:Choice xmlns:a14="http://schemas.microsoft.com/office/drawing/2010/main" Requires="a14">
+          <p:sp>
+            <p:nvSpPr>
+              <p:cNvPr id="3" name="Inhaltsplatzhalter 2">
+                <a:extLst>
+                  <a:ext uri="{FF2B5EF4-FFF2-40B4-BE49-F238E27FC236}">
+                    <a16:creationId xmlns:a16="http://schemas.microsoft.com/office/drawing/2014/main" id="{159028D8-E17B-EA19-875B-533D965A3780}"/>
+                  </a:ext>
+                </a:extLst>
+              </p:cNvPr>
+              <p:cNvSpPr>
+                <a:spLocks noGrp="1"/>
+              </p:cNvSpPr>
+              <p:nvPr>
+                <p:ph idx="1"/>
+              </p:nvPr>
+            </p:nvSpPr>
+            <p:spPr/>
+            <p:txBody>
+              <a:bodyPr>
+                <a:normAutofit/>
+              </a:bodyPr>
+              <a:lstStyle/>
+              <a:p>
+                <a:pPr marL="0" indent="0">
+                  <a:buNone/>
+                </a:pPr>
+                <a:r>
+                  <a:rPr lang="de-DE" dirty="0"/>
+                  <a:t>Consider </a:t>
+                </a:r>
+                <a:r>
+                  <a:rPr lang="de-DE" dirty="0" err="1"/>
+                  <a:t>the</a:t>
+                </a:r>
+                <a:r>
+                  <a:rPr lang="de-DE" dirty="0"/>
+                  <a:t> </a:t>
+                </a:r>
+                <a:r>
+                  <a:rPr lang="de-DE" dirty="0" err="1"/>
+                  <a:t>following</a:t>
+                </a:r>
+                <a:r>
+                  <a:rPr lang="de-DE" dirty="0"/>
+                  <a:t> </a:t>
+                </a:r>
+                <a:r>
+                  <a:rPr lang="de-DE" dirty="0" err="1"/>
+                  <a:t>two</a:t>
+                </a:r>
+                <a:r>
+                  <a:rPr lang="de-DE" dirty="0"/>
+                  <a:t> </a:t>
+                </a:r>
+                <a:r>
+                  <a:rPr lang="de-DE" dirty="0" err="1"/>
+                  <a:t>systems</a:t>
+                </a:r>
+                <a:r>
+                  <a:rPr lang="de-DE" dirty="0"/>
+                  <a:t>:</a:t>
+                </a:r>
+              </a:p>
+              <a:p>
+                <a:pPr marL="0" indent="0">
+                  <a:buNone/>
+                </a:pPr>
+                <a:r>
+                  <a:rPr lang="de-DE" b="0" dirty="0"/>
+                  <a:t>	</a:t>
+                </a:r>
+                <a14:m>
+                  <m:oMath xmlns:m="http://schemas.openxmlformats.org/officeDocument/2006/math">
+                    <m:sSub>
+                      <m:sSubPr>
+                        <m:ctrlPr>
+                          <a:rPr lang="de-DE" b="0" i="1" smtClean="0">
+                            <a:latin typeface="Cambria Math" panose="02040503050406030204" pitchFamily="18" charset="0"/>
+                          </a:rPr>
+                        </m:ctrlPr>
+                      </m:sSubPr>
+                      <m:e>
+                        <m:r>
+                          <a:rPr lang="de-DE" b="0" i="1" smtClean="0">
+                            <a:latin typeface="Cambria Math" panose="02040503050406030204" pitchFamily="18" charset="0"/>
+                          </a:rPr>
+                          <m:t>𝐺</m:t>
+                        </m:r>
+                      </m:e>
+                      <m:sub>
+                        <m:r>
+                          <a:rPr lang="de-DE" b="0" i="1" smtClean="0">
+                            <a:latin typeface="Cambria Math" panose="02040503050406030204" pitchFamily="18" charset="0"/>
+                          </a:rPr>
+                          <m:t>1</m:t>
+                        </m:r>
+                      </m:sub>
+                    </m:sSub>
+                    <m:d>
+                      <m:dPr>
+                        <m:ctrlPr>
+                          <a:rPr lang="de-DE" b="0" i="1" smtClean="0">
+                            <a:latin typeface="Cambria Math" panose="02040503050406030204" pitchFamily="18" charset="0"/>
+                          </a:rPr>
+                        </m:ctrlPr>
+                      </m:dPr>
+                      <m:e>
+                        <m:r>
+                          <a:rPr lang="de-DE" b="0" i="1" smtClean="0">
+                            <a:latin typeface="Cambria Math" panose="02040503050406030204" pitchFamily="18" charset="0"/>
+                          </a:rPr>
+                          <m:t>𝑠</m:t>
+                        </m:r>
+                      </m:e>
+                    </m:d>
+                    <m:r>
+                      <a:rPr lang="de-DE" b="0" i="1" smtClean="0">
+                        <a:latin typeface="Cambria Math" panose="02040503050406030204" pitchFamily="18" charset="0"/>
+                      </a:rPr>
+                      <m:t>=</m:t>
+                    </m:r>
+                    <m:f>
+                      <m:fPr>
+                        <m:ctrlPr>
+                          <a:rPr lang="de-DE" b="0" i="1" smtClean="0">
+                            <a:latin typeface="Cambria Math" panose="02040503050406030204" pitchFamily="18" charset="0"/>
+                          </a:rPr>
+                        </m:ctrlPr>
+                      </m:fPr>
+                      <m:num>
+                        <m:r>
+                          <a:rPr lang="de-DE" b="0" i="1" smtClean="0">
+                            <a:latin typeface="Cambria Math" panose="02040503050406030204" pitchFamily="18" charset="0"/>
+                          </a:rPr>
+                          <m:t>1</m:t>
+                        </m:r>
+                      </m:num>
+                      <m:den>
+                        <m:r>
+                          <a:rPr lang="de-DE" i="1">
+                            <a:latin typeface="Cambria Math" panose="02040503050406030204" pitchFamily="18" charset="0"/>
+                          </a:rPr>
+                          <m:t>(</m:t>
+                        </m:r>
+                        <m:r>
+                          <a:rPr lang="de-DE" i="1">
+                            <a:latin typeface="Cambria Math" panose="02040503050406030204" pitchFamily="18" charset="0"/>
+                          </a:rPr>
+                          <m:t>𝑠</m:t>
+                        </m:r>
+                        <m:r>
+                          <a:rPr lang="de-DE" i="1">
+                            <a:latin typeface="Cambria Math" panose="02040503050406030204" pitchFamily="18" charset="0"/>
+                          </a:rPr>
+                          <m:t>+2)(</m:t>
+                        </m:r>
+                        <m:r>
+                          <a:rPr lang="de-DE" i="1">
+                            <a:latin typeface="Cambria Math" panose="02040503050406030204" pitchFamily="18" charset="0"/>
+                          </a:rPr>
+                          <m:t>𝑠</m:t>
+                        </m:r>
+                        <m:r>
+                          <a:rPr lang="de-DE" i="1">
+                            <a:latin typeface="Cambria Math" panose="02040503050406030204" pitchFamily="18" charset="0"/>
+                          </a:rPr>
+                          <m:t>+4)</m:t>
+                        </m:r>
+                      </m:den>
+                    </m:f>
+                  </m:oMath>
+                </a14:m>
+                <a:r>
+                  <a:rPr lang="de-DE" dirty="0"/>
+                  <a:t>,	</a:t>
+                </a:r>
+                <a14:m>
+                  <m:oMath xmlns:m="http://schemas.openxmlformats.org/officeDocument/2006/math">
+                    <m:sSub>
+                      <m:sSubPr>
+                        <m:ctrlPr>
+                          <a:rPr lang="de-DE" i="1">
+                            <a:latin typeface="Cambria Math" panose="02040503050406030204" pitchFamily="18" charset="0"/>
+                          </a:rPr>
+                        </m:ctrlPr>
+                      </m:sSubPr>
+                      <m:e>
+                        <m:r>
+                          <a:rPr lang="de-DE" i="1">
+                            <a:latin typeface="Cambria Math" panose="02040503050406030204" pitchFamily="18" charset="0"/>
+                          </a:rPr>
+                          <m:t>𝐺</m:t>
+                        </m:r>
+                      </m:e>
+                      <m:sub>
+                        <m:r>
+                          <a:rPr lang="de-DE" b="0" i="1" smtClean="0">
+                            <a:latin typeface="Cambria Math" panose="02040503050406030204" pitchFamily="18" charset="0"/>
+                          </a:rPr>
+                          <m:t>2</m:t>
+                        </m:r>
+                      </m:sub>
+                    </m:sSub>
+                    <m:d>
+                      <m:dPr>
+                        <m:ctrlPr>
+                          <a:rPr lang="de-DE" i="1">
+                            <a:latin typeface="Cambria Math" panose="02040503050406030204" pitchFamily="18" charset="0"/>
+                          </a:rPr>
+                        </m:ctrlPr>
+                      </m:dPr>
+                      <m:e>
+                        <m:r>
+                          <a:rPr lang="de-DE" i="1">
+                            <a:latin typeface="Cambria Math" panose="02040503050406030204" pitchFamily="18" charset="0"/>
+                          </a:rPr>
+                          <m:t>𝑠</m:t>
+                        </m:r>
+                      </m:e>
+                    </m:d>
+                    <m:r>
+                      <a:rPr lang="de-DE" i="1">
+                        <a:latin typeface="Cambria Math" panose="02040503050406030204" pitchFamily="18" charset="0"/>
+                      </a:rPr>
+                      <m:t>=</m:t>
+                    </m:r>
+                    <m:f>
+                      <m:fPr>
+                        <m:ctrlPr>
+                          <a:rPr lang="de-DE" i="1">
+                            <a:latin typeface="Cambria Math" panose="02040503050406030204" pitchFamily="18" charset="0"/>
+                          </a:rPr>
+                        </m:ctrlPr>
+                      </m:fPr>
+                      <m:num>
+                        <m:r>
+                          <a:rPr lang="de-DE" b="0" i="1" smtClean="0">
+                            <a:latin typeface="Cambria Math" panose="02040503050406030204" pitchFamily="18" charset="0"/>
+                          </a:rPr>
+                          <m:t>𝑠</m:t>
+                        </m:r>
+                        <m:r>
+                          <a:rPr lang="de-DE" b="0" i="1" smtClean="0">
+                            <a:latin typeface="Cambria Math" panose="02040503050406030204" pitchFamily="18" charset="0"/>
+                          </a:rPr>
+                          <m:t>−1</m:t>
+                        </m:r>
+                      </m:num>
+                      <m:den>
+                        <m:r>
+                          <a:rPr lang="de-DE" i="1">
+                            <a:latin typeface="Cambria Math" panose="02040503050406030204" pitchFamily="18" charset="0"/>
+                          </a:rPr>
+                          <m:t>(</m:t>
+                        </m:r>
+                        <m:r>
+                          <a:rPr lang="de-DE" i="1">
+                            <a:latin typeface="Cambria Math" panose="02040503050406030204" pitchFamily="18" charset="0"/>
+                          </a:rPr>
+                          <m:t>𝑠</m:t>
+                        </m:r>
+                        <m:r>
+                          <a:rPr lang="de-DE" i="1">
+                            <a:latin typeface="Cambria Math" panose="02040503050406030204" pitchFamily="18" charset="0"/>
+                          </a:rPr>
+                          <m:t>+2)(</m:t>
+                        </m:r>
+                        <m:r>
+                          <a:rPr lang="de-DE" i="1">
+                            <a:latin typeface="Cambria Math" panose="02040503050406030204" pitchFamily="18" charset="0"/>
+                          </a:rPr>
+                          <m:t>𝑠</m:t>
+                        </m:r>
+                        <m:r>
+                          <a:rPr lang="de-DE" i="1">
+                            <a:latin typeface="Cambria Math" panose="02040503050406030204" pitchFamily="18" charset="0"/>
+                          </a:rPr>
+                          <m:t>+4)</m:t>
+                        </m:r>
+                      </m:den>
+                    </m:f>
+                  </m:oMath>
+                </a14:m>
+                <a:endParaRPr lang="de-DE" dirty="0"/>
+              </a:p>
+              <a:p>
+                <a:pPr marL="0" indent="0">
+                  <a:buNone/>
+                </a:pPr>
+                <a:endParaRPr lang="de-DE" dirty="0"/>
+              </a:p>
+              <a:p>
+                <a:r>
+                  <a:rPr lang="de-DE" dirty="0" err="1"/>
+                  <a:t>Determine</a:t>
+                </a:r>
+                <a:r>
+                  <a:rPr lang="de-DE" dirty="0"/>
+                  <a:t> </a:t>
+                </a:r>
+                <a:r>
+                  <a:rPr lang="de-DE" dirty="0" err="1"/>
+                  <a:t>the</a:t>
+                </a:r>
+                <a:r>
+                  <a:rPr lang="de-DE" dirty="0"/>
+                  <a:t> </a:t>
+                </a:r>
+                <a:r>
+                  <a:rPr lang="de-DE" dirty="0" err="1"/>
+                  <a:t>poles</a:t>
+                </a:r>
+                <a:r>
+                  <a:rPr lang="de-DE" dirty="0"/>
+                  <a:t> and </a:t>
+                </a:r>
+                <a:r>
+                  <a:rPr lang="de-DE" dirty="0" err="1"/>
+                  <a:t>zeros</a:t>
+                </a:r>
+                <a:r>
+                  <a:rPr lang="de-DE" dirty="0"/>
+                  <a:t> </a:t>
+                </a:r>
+                <a:r>
+                  <a:rPr lang="de-DE" dirty="0" err="1"/>
+                  <a:t>of</a:t>
+                </a:r>
+                <a:r>
+                  <a:rPr lang="de-DE" dirty="0"/>
+                  <a:t> </a:t>
+                </a:r>
+                <a:r>
+                  <a:rPr lang="de-DE" dirty="0" err="1"/>
+                  <a:t>both</a:t>
+                </a:r>
+                <a:r>
+                  <a:rPr lang="de-DE" dirty="0"/>
+                  <a:t> </a:t>
+                </a:r>
+                <a:r>
+                  <a:rPr lang="de-DE" dirty="0" err="1"/>
+                  <a:t>systems</a:t>
+                </a:r>
+                <a:r>
+                  <a:rPr lang="de-DE" dirty="0"/>
+                  <a:t>.</a:t>
+                </a:r>
+              </a:p>
+              <a:p>
+                <a:r>
+                  <a:rPr lang="de-DE" dirty="0" err="1"/>
+                  <a:t>Compare</a:t>
+                </a:r>
+                <a:r>
+                  <a:rPr lang="de-DE" dirty="0"/>
+                  <a:t> </a:t>
+                </a:r>
+                <a:r>
+                  <a:rPr lang="de-DE" dirty="0" err="1"/>
+                  <a:t>stability</a:t>
+                </a:r>
+                <a:r>
+                  <a:rPr lang="de-DE" dirty="0"/>
+                  <a:t>.</a:t>
+                </a:r>
+              </a:p>
+              <a:p>
+                <a:r>
+                  <a:rPr lang="de-DE" dirty="0" err="1"/>
+                  <a:t>Predict</a:t>
+                </a:r>
+                <a:r>
+                  <a:rPr lang="de-DE" dirty="0"/>
+                  <a:t> </a:t>
+                </a:r>
+                <a:r>
+                  <a:rPr lang="de-DE" dirty="0" err="1"/>
+                  <a:t>how</a:t>
+                </a:r>
+                <a:r>
+                  <a:rPr lang="de-DE" dirty="0"/>
+                  <a:t> </a:t>
+                </a:r>
+                <a:r>
+                  <a:rPr lang="de-DE" dirty="0" err="1"/>
+                  <a:t>the</a:t>
+                </a:r>
+                <a:r>
+                  <a:rPr lang="de-DE" dirty="0"/>
+                  <a:t> </a:t>
+                </a:r>
+                <a:r>
+                  <a:rPr lang="de-DE" dirty="0" err="1"/>
+                  <a:t>zero</a:t>
+                </a:r>
+                <a:r>
+                  <a:rPr lang="de-DE" dirty="0"/>
+                  <a:t> in </a:t>
+                </a:r>
+                <a14:m>
+                  <m:oMath xmlns:m="http://schemas.openxmlformats.org/officeDocument/2006/math">
+                    <m:sSub>
+                      <m:sSubPr>
+                        <m:ctrlPr>
+                          <a:rPr lang="de-DE" i="1">
+                            <a:latin typeface="Cambria Math" panose="02040503050406030204" pitchFamily="18" charset="0"/>
+                          </a:rPr>
+                        </m:ctrlPr>
+                      </m:sSubPr>
+                      <m:e>
+                        <m:r>
+                          <a:rPr lang="de-DE" i="1">
+                            <a:latin typeface="Cambria Math" panose="02040503050406030204" pitchFamily="18" charset="0"/>
+                          </a:rPr>
+                          <m:t>𝐺</m:t>
+                        </m:r>
+                      </m:e>
+                      <m:sub>
+                        <m:r>
+                          <a:rPr lang="de-DE" i="1">
+                            <a:latin typeface="Cambria Math" panose="02040503050406030204" pitchFamily="18" charset="0"/>
+                          </a:rPr>
+                          <m:t>2</m:t>
+                        </m:r>
+                      </m:sub>
+                    </m:sSub>
+                    <m:d>
+                      <m:dPr>
+                        <m:ctrlPr>
+                          <a:rPr lang="de-DE" i="1">
+                            <a:latin typeface="Cambria Math" panose="02040503050406030204" pitchFamily="18" charset="0"/>
+                          </a:rPr>
+                        </m:ctrlPr>
+                      </m:dPr>
+                      <m:e>
+                        <m:r>
+                          <a:rPr lang="de-DE" i="1">
+                            <a:latin typeface="Cambria Math" panose="02040503050406030204" pitchFamily="18" charset="0"/>
+                          </a:rPr>
+                          <m:t>𝑠</m:t>
+                        </m:r>
+                      </m:e>
+                    </m:d>
+                  </m:oMath>
+                </a14:m>
+                <a:r>
+                  <a:rPr lang="de-DE" dirty="0"/>
+                  <a:t> </a:t>
+                </a:r>
+                <a:r>
+                  <a:rPr lang="de-DE" dirty="0" err="1"/>
+                  <a:t>affects</a:t>
+                </a:r>
+                <a:r>
+                  <a:rPr lang="de-DE" dirty="0"/>
+                  <a:t> </a:t>
+                </a:r>
+                <a:r>
+                  <a:rPr lang="de-DE" dirty="0" err="1"/>
+                  <a:t>the</a:t>
+                </a:r>
+                <a:r>
+                  <a:rPr lang="de-DE" dirty="0"/>
+                  <a:t> </a:t>
+                </a:r>
+                <a:r>
+                  <a:rPr lang="de-DE" dirty="0" err="1"/>
+                  <a:t>step</a:t>
+                </a:r>
+                <a:r>
+                  <a:rPr lang="de-DE" dirty="0"/>
+                  <a:t> </a:t>
+                </a:r>
+                <a:r>
+                  <a:rPr lang="de-DE" dirty="0" err="1"/>
+                  <a:t>response</a:t>
+                </a:r>
+                <a:r>
+                  <a:rPr lang="de-DE" dirty="0"/>
+                  <a:t>.</a:t>
+                </a:r>
+              </a:p>
+              <a:p>
+                <a:r>
+                  <a:rPr lang="de-DE" dirty="0" err="1"/>
+                  <a:t>What</a:t>
+                </a:r>
+                <a:r>
+                  <a:rPr lang="de-DE" dirty="0"/>
+                  <a:t> </a:t>
+                </a:r>
+                <a:r>
+                  <a:rPr lang="de-DE" dirty="0" err="1"/>
+                  <a:t>is</a:t>
+                </a:r>
+                <a:r>
+                  <a:rPr lang="de-DE" dirty="0"/>
+                  <a:t> </a:t>
+                </a:r>
+                <a:r>
+                  <a:rPr lang="de-DE" dirty="0" err="1"/>
+                  <a:t>special</a:t>
+                </a:r>
+                <a:r>
+                  <a:rPr lang="de-DE" dirty="0"/>
+                  <a:t> </a:t>
+                </a:r>
+                <a:r>
+                  <a:rPr lang="de-DE" dirty="0" err="1"/>
+                  <a:t>about</a:t>
+                </a:r>
+                <a:r>
+                  <a:rPr lang="de-DE" dirty="0"/>
+                  <a:t> </a:t>
+                </a:r>
+                <a:r>
+                  <a:rPr lang="de-DE" dirty="0" err="1"/>
+                  <a:t>the</a:t>
+                </a:r>
+                <a:r>
+                  <a:rPr lang="de-DE" dirty="0"/>
+                  <a:t> </a:t>
+                </a:r>
+                <a:r>
+                  <a:rPr lang="de-DE" dirty="0" err="1"/>
+                  <a:t>zero</a:t>
+                </a:r>
+                <a:r>
+                  <a:rPr lang="de-DE" dirty="0"/>
+                  <a:t> </a:t>
+                </a:r>
+                <a:r>
+                  <a:rPr lang="de-DE" dirty="0" err="1"/>
+                  <a:t>location</a:t>
+                </a:r>
+                <a:r>
+                  <a:rPr lang="de-DE" dirty="0"/>
+                  <a:t> in </a:t>
+                </a:r>
+                <a14:m>
+                  <m:oMath xmlns:m="http://schemas.openxmlformats.org/officeDocument/2006/math">
+                    <m:sSub>
+                      <m:sSubPr>
+                        <m:ctrlPr>
+                          <a:rPr lang="de-DE" i="1">
+                            <a:latin typeface="Cambria Math" panose="02040503050406030204" pitchFamily="18" charset="0"/>
+                          </a:rPr>
+                        </m:ctrlPr>
+                      </m:sSubPr>
+                      <m:e>
+                        <m:r>
+                          <a:rPr lang="de-DE" i="1">
+                            <a:latin typeface="Cambria Math" panose="02040503050406030204" pitchFamily="18" charset="0"/>
+                          </a:rPr>
+                          <m:t>𝐺</m:t>
+                        </m:r>
+                      </m:e>
+                      <m:sub>
+                        <m:r>
+                          <a:rPr lang="de-DE" i="1">
+                            <a:latin typeface="Cambria Math" panose="02040503050406030204" pitchFamily="18" charset="0"/>
+                          </a:rPr>
+                          <m:t>2</m:t>
+                        </m:r>
+                      </m:sub>
+                    </m:sSub>
+                    <m:d>
+                      <m:dPr>
+                        <m:ctrlPr>
+                          <a:rPr lang="de-DE" i="1">
+                            <a:latin typeface="Cambria Math" panose="02040503050406030204" pitchFamily="18" charset="0"/>
+                          </a:rPr>
+                        </m:ctrlPr>
+                      </m:dPr>
+                      <m:e>
+                        <m:r>
+                          <a:rPr lang="de-DE" i="1">
+                            <a:latin typeface="Cambria Math" panose="02040503050406030204" pitchFamily="18" charset="0"/>
+                          </a:rPr>
+                          <m:t>𝑠</m:t>
+                        </m:r>
+                      </m:e>
+                    </m:d>
+                  </m:oMath>
+                </a14:m>
+                <a:r>
+                  <a:rPr lang="de-DE" dirty="0"/>
+                  <a:t>?</a:t>
+                </a:r>
+              </a:p>
+            </p:txBody>
+          </p:sp>
+        </mc:Choice>
+        <mc:Fallback>
+          <p:sp>
+            <p:nvSpPr>
+              <p:cNvPr id="3" name="Inhaltsplatzhalter 2">
+                <a:extLst>
+                  <a:ext uri="{FF2B5EF4-FFF2-40B4-BE49-F238E27FC236}">
+                    <a16:creationId xmlns:a16="http://schemas.microsoft.com/office/drawing/2014/main" id="{159028D8-E17B-EA19-875B-533D965A3780}"/>
+                  </a:ext>
+                </a:extLst>
+              </p:cNvPr>
+              <p:cNvSpPr>
+                <a:spLocks noGrp="1" noRot="1" noChangeAspect="1" noMove="1" noResize="1" noEditPoints="1" noAdjustHandles="1" noChangeArrowheads="1" noChangeShapeType="1" noTextEdit="1"/>
+              </p:cNvSpPr>
+              <p:nvPr>
+                <p:ph idx="1"/>
+              </p:nvPr>
+            </p:nvSpPr>
+            <p:spPr>
+              <a:blipFill>
+                <a:blip r:embed="rId2"/>
+                <a:stretch>
+                  <a:fillRect l="-1206" t="-2326"/>
+                </a:stretch>
+              </a:blipFill>
+            </p:spPr>
+            <p:txBody>
+              <a:bodyPr/>
+              <a:lstStyle/>
+              <a:p>
+                <a:r>
+                  <a:rPr lang="de-DE">
+                    <a:noFill/>
+                  </a:rPr>
+                  <a:t> </a:t>
+                </a:r>
+              </a:p>
+            </p:txBody>
+          </p:sp>
+        </mc:Fallback>
+      </mc:AlternateContent>
+      <p:sp>
+        <p:nvSpPr>
+          <p:cNvPr id="4" name="Foliennummernplatzhalter 3">
+            <a:extLst>
+              <a:ext uri="{FF2B5EF4-FFF2-40B4-BE49-F238E27FC236}">
+                <a16:creationId xmlns:a16="http://schemas.microsoft.com/office/drawing/2014/main" id="{A076B73D-6D6B-823B-853B-95E451F78126}"/>
+              </a:ext>
+            </a:extLst>
+          </p:cNvPr>
+          <p:cNvSpPr>
+            <a:spLocks noGrp="1"/>
+          </p:cNvSpPr>
+          <p:nvPr>
+            <p:ph type="sldNum" sz="quarter" idx="12"/>
+          </p:nvPr>
+        </p:nvSpPr>
+        <p:spPr/>
+        <p:txBody>
+          <a:bodyPr/>
+          <a:lstStyle/>
+          <a:p>
+            <a:fld id="{08C366F5-AFAD-49CB-854A-9D9E238FCA13}" type="slidenum">
+              <a:rPr lang="en-GB" smtClean="0"/>
+              <a:t>29</a:t>
+            </a:fld>
+            <a:endParaRPr lang="en-GB"/>
+          </a:p>
+        </p:txBody>
+      </p:sp>
+    </p:spTree>
+    <p:extLst>
+      <p:ext uri="{BB962C8B-B14F-4D97-AF65-F5344CB8AC3E}">
+        <p14:creationId xmlns:p14="http://schemas.microsoft.com/office/powerpoint/2010/main" val="504549296"/>
+      </p:ext>
+    </p:extLst>
+  </p:cSld>
+  <p:clrMapOvr>
+    <a:masterClrMapping/>
+  </p:clrMapOvr>
+</p:sld>
+</file>
+
 <file path=ppt/slides/slide3.xml><?xml version="1.0" encoding="utf-8"?>
 <p:sld xmlns:a="http://schemas.openxmlformats.org/drawingml/2006/main" xmlns:r="http://schemas.openxmlformats.org/officeDocument/2006/relationships" xmlns:p="http://schemas.openxmlformats.org/presentationml/2006/main">
   <p:cSld>
@@ -14550,6 +17223,947 @@
     <p:extLst>
       <p:ext uri="{BB962C8B-B14F-4D97-AF65-F5344CB8AC3E}">
         <p14:creationId xmlns:p14="http://schemas.microsoft.com/office/powerpoint/2010/main" val="3204133960"/>
+      </p:ext>
+    </p:extLst>
+  </p:cSld>
+  <p:clrMapOvr>
+    <a:masterClrMapping/>
+  </p:clrMapOvr>
+</p:sld>
+</file>
+
+<file path=ppt/slides/slide30.xml><?xml version="1.0" encoding="utf-8"?>
+<p:sld xmlns:a="http://schemas.openxmlformats.org/drawingml/2006/main" xmlns:r="http://schemas.openxmlformats.org/officeDocument/2006/relationships" xmlns:p="http://schemas.openxmlformats.org/presentationml/2006/main">
+  <p:cSld>
+    <p:spTree>
+      <p:nvGrpSpPr>
+        <p:cNvPr id="1" name="">
+          <a:extLst>
+            <a:ext uri="{FF2B5EF4-FFF2-40B4-BE49-F238E27FC236}">
+              <a16:creationId xmlns:a16="http://schemas.microsoft.com/office/drawing/2014/main" id="{31784F68-E9E5-066D-B446-BDAACF91983E}"/>
+            </a:ext>
+          </a:extLst>
+        </p:cNvPr>
+        <p:cNvGrpSpPr/>
+        <p:nvPr/>
+      </p:nvGrpSpPr>
+      <p:grpSpPr>
+        <a:xfrm>
+          <a:off x="0" y="0"/>
+          <a:ext cx="0" cy="0"/>
+          <a:chOff x="0" y="0"/>
+          <a:chExt cx="0" cy="0"/>
+        </a:xfrm>
+      </p:grpSpPr>
+      <p:sp>
+        <p:nvSpPr>
+          <p:cNvPr id="2" name="Titel 1">
+            <a:extLst>
+              <a:ext uri="{FF2B5EF4-FFF2-40B4-BE49-F238E27FC236}">
+                <a16:creationId xmlns:a16="http://schemas.microsoft.com/office/drawing/2014/main" id="{2B5532FB-43FC-1E15-DFC5-FF6F09006205}"/>
+              </a:ext>
+            </a:extLst>
+          </p:cNvPr>
+          <p:cNvSpPr>
+            <a:spLocks noGrp="1"/>
+          </p:cNvSpPr>
+          <p:nvPr>
+            <p:ph type="title"/>
+          </p:nvPr>
+        </p:nvSpPr>
+        <p:spPr/>
+        <p:txBody>
+          <a:bodyPr/>
+          <a:lstStyle/>
+          <a:p>
+            <a:r>
+              <a:rPr lang="de-DE" dirty="0" err="1"/>
+              <a:t>Exercise</a:t>
+            </a:r>
+            <a:r>
+              <a:rPr lang="de-DE" dirty="0"/>
+              <a:t> 6</a:t>
+            </a:r>
+          </a:p>
+        </p:txBody>
+      </p:sp>
+      <mc:AlternateContent xmlns:mc="http://schemas.openxmlformats.org/markup-compatibility/2006">
+        <mc:Choice xmlns:a14="http://schemas.microsoft.com/office/drawing/2010/main" Requires="a14">
+          <p:sp>
+            <p:nvSpPr>
+              <p:cNvPr id="3" name="Inhaltsplatzhalter 2">
+                <a:extLst>
+                  <a:ext uri="{FF2B5EF4-FFF2-40B4-BE49-F238E27FC236}">
+                    <a16:creationId xmlns:a16="http://schemas.microsoft.com/office/drawing/2014/main" id="{A59DB56D-8391-A08C-AD27-E40A00BE9CD4}"/>
+                  </a:ext>
+                </a:extLst>
+              </p:cNvPr>
+              <p:cNvSpPr>
+                <a:spLocks noGrp="1"/>
+              </p:cNvSpPr>
+              <p:nvPr>
+                <p:ph idx="1"/>
+              </p:nvPr>
+            </p:nvSpPr>
+            <p:spPr>
+              <a:xfrm>
+                <a:off x="838200" y="1825625"/>
+                <a:ext cx="11209774" cy="4351338"/>
+              </a:xfrm>
+            </p:spPr>
+            <p:txBody>
+              <a:bodyPr>
+                <a:normAutofit/>
+              </a:bodyPr>
+              <a:lstStyle/>
+              <a:p>
+                <a:pPr marL="0" indent="0">
+                  <a:buNone/>
+                </a:pPr>
+                <a:r>
+                  <a:rPr lang="de-DE" dirty="0"/>
+                  <a:t>Given:</a:t>
+                </a:r>
+              </a:p>
+              <a:p>
+                <a:pPr marL="0" indent="0">
+                  <a:buNone/>
+                </a:pPr>
+                <a:r>
+                  <a:rPr lang="de-DE" b="0" dirty="0"/>
+                  <a:t>	</a:t>
+                </a:r>
+                <a14:m>
+                  <m:oMath xmlns:m="http://schemas.openxmlformats.org/officeDocument/2006/math">
+                    <m:r>
+                      <a:rPr lang="de-DE" b="0" i="1" smtClean="0">
+                        <a:latin typeface="Cambria Math" panose="02040503050406030204" pitchFamily="18" charset="0"/>
+                      </a:rPr>
+                      <m:t>𝐺</m:t>
+                    </m:r>
+                    <m:d>
+                      <m:dPr>
+                        <m:ctrlPr>
+                          <a:rPr lang="de-DE" b="0" i="1" smtClean="0">
+                            <a:latin typeface="Cambria Math" panose="02040503050406030204" pitchFamily="18" charset="0"/>
+                          </a:rPr>
+                        </m:ctrlPr>
+                      </m:dPr>
+                      <m:e>
+                        <m:r>
+                          <a:rPr lang="de-DE" b="0" i="1" smtClean="0">
+                            <a:latin typeface="Cambria Math" panose="02040503050406030204" pitchFamily="18" charset="0"/>
+                          </a:rPr>
+                          <m:t>𝑠</m:t>
+                        </m:r>
+                      </m:e>
+                    </m:d>
+                    <m:r>
+                      <a:rPr lang="de-DE" b="0" i="1" smtClean="0">
+                        <a:latin typeface="Cambria Math" panose="02040503050406030204" pitchFamily="18" charset="0"/>
+                      </a:rPr>
+                      <m:t>=</m:t>
+                    </m:r>
+                    <m:f>
+                      <m:fPr>
+                        <m:ctrlPr>
+                          <a:rPr lang="de-DE" b="0" i="1" smtClean="0">
+                            <a:latin typeface="Cambria Math" panose="02040503050406030204" pitchFamily="18" charset="0"/>
+                          </a:rPr>
+                        </m:ctrlPr>
+                      </m:fPr>
+                      <m:num>
+                        <m:sSubSup>
+                          <m:sSubSupPr>
+                            <m:ctrlPr>
+                              <a:rPr lang="de-DE" b="0" i="1" smtClean="0">
+                                <a:latin typeface="Cambria Math" panose="02040503050406030204" pitchFamily="18" charset="0"/>
+                              </a:rPr>
+                            </m:ctrlPr>
+                          </m:sSubSupPr>
+                          <m:e>
+                            <m:r>
+                              <a:rPr lang="de-DE" i="1">
+                                <a:latin typeface="Cambria Math" panose="02040503050406030204" pitchFamily="18" charset="0"/>
+                                <a:ea typeface="Cambria Math" panose="02040503050406030204" pitchFamily="18" charset="0"/>
+                              </a:rPr>
+                              <m:t>𝜔</m:t>
+                            </m:r>
+                          </m:e>
+                          <m:sub>
+                            <m:r>
+                              <a:rPr lang="de-DE" b="0" i="1" smtClean="0">
+                                <a:latin typeface="Cambria Math" panose="02040503050406030204" pitchFamily="18" charset="0"/>
+                              </a:rPr>
+                              <m:t>𝑛</m:t>
+                            </m:r>
+                          </m:sub>
+                          <m:sup>
+                            <m:r>
+                              <a:rPr lang="de-DE" b="0" i="1" smtClean="0">
+                                <a:latin typeface="Cambria Math" panose="02040503050406030204" pitchFamily="18" charset="0"/>
+                              </a:rPr>
+                              <m:t>2</m:t>
+                            </m:r>
+                          </m:sup>
+                        </m:sSubSup>
+                      </m:num>
+                      <m:den>
+                        <m:sSup>
+                          <m:sSupPr>
+                            <m:ctrlPr>
+                              <a:rPr lang="de-DE" b="0" i="1" smtClean="0">
+                                <a:latin typeface="Cambria Math" panose="02040503050406030204" pitchFamily="18" charset="0"/>
+                              </a:rPr>
+                            </m:ctrlPr>
+                          </m:sSupPr>
+                          <m:e>
+                            <m:r>
+                              <a:rPr lang="de-DE" b="0" i="1" smtClean="0">
+                                <a:latin typeface="Cambria Math" panose="02040503050406030204" pitchFamily="18" charset="0"/>
+                              </a:rPr>
+                              <m:t>𝑠</m:t>
+                            </m:r>
+                          </m:e>
+                          <m:sup>
+                            <m:r>
+                              <a:rPr lang="de-DE" b="0" i="1" smtClean="0">
+                                <a:latin typeface="Cambria Math" panose="02040503050406030204" pitchFamily="18" charset="0"/>
+                              </a:rPr>
+                              <m:t>2</m:t>
+                            </m:r>
+                          </m:sup>
+                        </m:sSup>
+                        <m:r>
+                          <a:rPr lang="de-DE" b="0" i="1" smtClean="0">
+                            <a:latin typeface="Cambria Math" panose="02040503050406030204" pitchFamily="18" charset="0"/>
+                          </a:rPr>
+                          <m:t>+</m:t>
+                        </m:r>
+                        <m:r>
+                          <a:rPr lang="de-DE" b="0" i="1" smtClean="0">
+                            <a:latin typeface="Cambria Math" panose="02040503050406030204" pitchFamily="18" charset="0"/>
+                          </a:rPr>
+                          <m:t>2</m:t>
+                        </m:r>
+                        <m:r>
+                          <a:rPr lang="de-DE" b="0" i="1" smtClean="0">
+                            <a:latin typeface="Cambria Math" panose="02040503050406030204" pitchFamily="18" charset="0"/>
+                            <a:ea typeface="Cambria Math" panose="02040503050406030204" pitchFamily="18" charset="0"/>
+                          </a:rPr>
+                          <m:t>𝜁</m:t>
+                        </m:r>
+                        <m:sSub>
+                          <m:sSubPr>
+                            <m:ctrlPr>
+                              <a:rPr lang="de-DE" b="0" i="1" smtClean="0">
+                                <a:latin typeface="Cambria Math" panose="02040503050406030204" pitchFamily="18" charset="0"/>
+                              </a:rPr>
+                            </m:ctrlPr>
+                          </m:sSubPr>
+                          <m:e>
+                            <m:r>
+                              <a:rPr lang="de-DE" i="1">
+                                <a:latin typeface="Cambria Math" panose="02040503050406030204" pitchFamily="18" charset="0"/>
+                                <a:ea typeface="Cambria Math" panose="02040503050406030204" pitchFamily="18" charset="0"/>
+                              </a:rPr>
+                              <m:t>𝜔</m:t>
+                            </m:r>
+                          </m:e>
+                          <m:sub>
+                            <m:r>
+                              <a:rPr lang="de-DE" b="0" i="1" smtClean="0">
+                                <a:latin typeface="Cambria Math" panose="02040503050406030204" pitchFamily="18" charset="0"/>
+                              </a:rPr>
+                              <m:t>𝑛</m:t>
+                            </m:r>
+                          </m:sub>
+                        </m:sSub>
+                        <m:r>
+                          <a:rPr lang="de-DE" b="0" i="1" smtClean="0">
+                            <a:latin typeface="Cambria Math" panose="02040503050406030204" pitchFamily="18" charset="0"/>
+                          </a:rPr>
+                          <m:t>𝑠</m:t>
+                        </m:r>
+                        <m:r>
+                          <a:rPr lang="de-DE" b="0" i="1" smtClean="0">
+                            <a:latin typeface="Cambria Math" panose="02040503050406030204" pitchFamily="18" charset="0"/>
+                          </a:rPr>
+                          <m:t>+</m:t>
+                        </m:r>
+                        <m:sSubSup>
+                          <m:sSubSupPr>
+                            <m:ctrlPr>
+                              <a:rPr lang="de-DE" i="1">
+                                <a:latin typeface="Cambria Math" panose="02040503050406030204" pitchFamily="18" charset="0"/>
+                              </a:rPr>
+                            </m:ctrlPr>
+                          </m:sSubSupPr>
+                          <m:e>
+                            <m:r>
+                              <a:rPr lang="de-DE" i="1">
+                                <a:latin typeface="Cambria Math" panose="02040503050406030204" pitchFamily="18" charset="0"/>
+                                <a:ea typeface="Cambria Math" panose="02040503050406030204" pitchFamily="18" charset="0"/>
+                              </a:rPr>
+                              <m:t>𝜔</m:t>
+                            </m:r>
+                          </m:e>
+                          <m:sub>
+                            <m:r>
+                              <a:rPr lang="de-DE" i="1">
+                                <a:latin typeface="Cambria Math" panose="02040503050406030204" pitchFamily="18" charset="0"/>
+                              </a:rPr>
+                              <m:t>𝑛</m:t>
+                            </m:r>
+                          </m:sub>
+                          <m:sup>
+                            <m:r>
+                              <a:rPr lang="de-DE" i="1">
+                                <a:latin typeface="Cambria Math" panose="02040503050406030204" pitchFamily="18" charset="0"/>
+                              </a:rPr>
+                              <m:t>2</m:t>
+                            </m:r>
+                          </m:sup>
+                        </m:sSubSup>
+                      </m:den>
+                    </m:f>
+                  </m:oMath>
+                </a14:m>
+                <a:endParaRPr lang="de-DE" dirty="0"/>
+              </a:p>
+              <a:p>
+                <a:pPr marL="0" indent="0">
+                  <a:buNone/>
+                </a:pPr>
+                <a:endParaRPr lang="de-DE" dirty="0"/>
+              </a:p>
+              <a:p>
+                <a:pPr marL="0" indent="0">
+                  <a:buNone/>
+                </a:pPr>
+                <a:r>
+                  <a:rPr lang="de-DE" dirty="0" err="1"/>
+                  <a:t>Let</a:t>
+                </a:r>
+                <a:r>
+                  <a:rPr lang="de-DE" dirty="0"/>
+                  <a:t> </a:t>
+                </a:r>
+                <a14:m>
+                  <m:oMath xmlns:m="http://schemas.openxmlformats.org/officeDocument/2006/math">
+                    <m:sSub>
+                      <m:sSubPr>
+                        <m:ctrlPr>
+                          <a:rPr lang="de-DE" i="1">
+                            <a:latin typeface="Cambria Math" panose="02040503050406030204" pitchFamily="18" charset="0"/>
+                          </a:rPr>
+                        </m:ctrlPr>
+                      </m:sSubPr>
+                      <m:e>
+                        <m:r>
+                          <a:rPr lang="de-DE" i="1">
+                            <a:latin typeface="Cambria Math" panose="02040503050406030204" pitchFamily="18" charset="0"/>
+                            <a:ea typeface="Cambria Math" panose="02040503050406030204" pitchFamily="18" charset="0"/>
+                          </a:rPr>
+                          <m:t>𝜔</m:t>
+                        </m:r>
+                      </m:e>
+                      <m:sub>
+                        <m:r>
+                          <a:rPr lang="de-DE" i="1">
+                            <a:latin typeface="Cambria Math" panose="02040503050406030204" pitchFamily="18" charset="0"/>
+                          </a:rPr>
+                          <m:t>𝑛</m:t>
+                        </m:r>
+                      </m:sub>
+                    </m:sSub>
+                    <m:r>
+                      <a:rPr lang="de-DE" b="0" i="1" smtClean="0">
+                        <a:latin typeface="Cambria Math" panose="02040503050406030204" pitchFamily="18" charset="0"/>
+                      </a:rPr>
+                      <m:t>=10</m:t>
+                    </m:r>
+                  </m:oMath>
+                </a14:m>
+                <a:r>
+                  <a:rPr lang="de-DE" dirty="0"/>
+                  <a:t>, </a:t>
+                </a:r>
+                <a14:m>
+                  <m:oMath xmlns:m="http://schemas.openxmlformats.org/officeDocument/2006/math">
+                    <m:r>
+                      <a:rPr lang="de-DE" i="1">
+                        <a:latin typeface="Cambria Math" panose="02040503050406030204" pitchFamily="18" charset="0"/>
+                        <a:ea typeface="Cambria Math" panose="02040503050406030204" pitchFamily="18" charset="0"/>
+                      </a:rPr>
+                      <m:t>𝜁</m:t>
+                    </m:r>
+                    <m:r>
+                      <a:rPr lang="de-DE" b="0" i="1" smtClean="0">
+                        <a:latin typeface="Cambria Math" panose="02040503050406030204" pitchFamily="18" charset="0"/>
+                        <a:ea typeface="Cambria Math" panose="02040503050406030204" pitchFamily="18" charset="0"/>
+                      </a:rPr>
+                      <m:t>=0.2</m:t>
+                    </m:r>
+                  </m:oMath>
+                </a14:m>
+                <a:endParaRPr lang="de-DE" dirty="0"/>
+              </a:p>
+              <a:p>
+                <a:pPr marL="0" indent="0">
+                  <a:buNone/>
+                </a:pPr>
+                <a:endParaRPr lang="de-DE" dirty="0"/>
+              </a:p>
+              <a:p>
+                <a:r>
+                  <a:rPr lang="de-DE" dirty="0" err="1"/>
+                  <a:t>Is</a:t>
+                </a:r>
+                <a:r>
+                  <a:rPr lang="de-DE" dirty="0"/>
+                  <a:t> </a:t>
+                </a:r>
+                <a:r>
+                  <a:rPr lang="de-DE" dirty="0" err="1"/>
+                  <a:t>resonance</a:t>
+                </a:r>
+                <a:r>
+                  <a:rPr lang="de-DE" dirty="0"/>
+                  <a:t> </a:t>
+                </a:r>
+                <a:r>
+                  <a:rPr lang="de-DE" dirty="0" err="1"/>
+                  <a:t>expected</a:t>
+                </a:r>
+                <a:r>
+                  <a:rPr lang="de-DE" dirty="0"/>
+                  <a:t>?</a:t>
+                </a:r>
+              </a:p>
+              <a:p>
+                <a:r>
+                  <a:rPr lang="de-DE" dirty="0" err="1"/>
+                  <a:t>Estimate</a:t>
+                </a:r>
+                <a:r>
+                  <a:rPr lang="de-DE" dirty="0"/>
+                  <a:t> </a:t>
+                </a:r>
+                <a:r>
+                  <a:rPr lang="de-DE" dirty="0" err="1"/>
+                  <a:t>if</a:t>
+                </a:r>
+                <a:r>
+                  <a:rPr lang="de-DE" dirty="0"/>
+                  <a:t> </a:t>
+                </a:r>
+                <a:r>
+                  <a:rPr lang="de-DE" dirty="0" err="1"/>
+                  <a:t>the</a:t>
+                </a:r>
+                <a:r>
+                  <a:rPr lang="de-DE" dirty="0"/>
+                  <a:t> </a:t>
+                </a:r>
+                <a:r>
+                  <a:rPr lang="de-DE" dirty="0" err="1"/>
+                  <a:t>peak</a:t>
+                </a:r>
+                <a:r>
+                  <a:rPr lang="de-DE" dirty="0"/>
+                  <a:t> </a:t>
+                </a:r>
+                <a:r>
+                  <a:rPr lang="de-DE" dirty="0" err="1"/>
+                  <a:t>is</a:t>
+                </a:r>
+                <a:r>
+                  <a:rPr lang="de-DE" dirty="0"/>
+                  <a:t> strong </a:t>
+                </a:r>
+                <a:r>
+                  <a:rPr lang="de-DE" dirty="0" err="1"/>
+                  <a:t>or</a:t>
+                </a:r>
+                <a:r>
+                  <a:rPr lang="de-DE" dirty="0"/>
+                  <a:t> </a:t>
+                </a:r>
+                <a:r>
+                  <a:rPr lang="de-DE" dirty="0" err="1"/>
+                  <a:t>weak</a:t>
+                </a:r>
+                <a:r>
+                  <a:rPr lang="de-DE" dirty="0"/>
+                  <a:t>.</a:t>
+                </a:r>
+              </a:p>
+            </p:txBody>
+          </p:sp>
+        </mc:Choice>
+        <mc:Fallback>
+          <p:sp>
+            <p:nvSpPr>
+              <p:cNvPr id="3" name="Inhaltsplatzhalter 2">
+                <a:extLst>
+                  <a:ext uri="{FF2B5EF4-FFF2-40B4-BE49-F238E27FC236}">
+                    <a16:creationId xmlns:a16="http://schemas.microsoft.com/office/drawing/2014/main" id="{A59DB56D-8391-A08C-AD27-E40A00BE9CD4}"/>
+                  </a:ext>
+                </a:extLst>
+              </p:cNvPr>
+              <p:cNvSpPr>
+                <a:spLocks noGrp="1" noRot="1" noChangeAspect="1" noMove="1" noResize="1" noEditPoints="1" noAdjustHandles="1" noChangeArrowheads="1" noChangeShapeType="1" noTextEdit="1"/>
+              </p:cNvSpPr>
+              <p:nvPr>
+                <p:ph idx="1"/>
+              </p:nvPr>
+            </p:nvSpPr>
+            <p:spPr>
+              <a:xfrm>
+                <a:off x="838200" y="1825625"/>
+                <a:ext cx="11209774" cy="4351338"/>
+              </a:xfrm>
+              <a:blipFill>
+                <a:blip r:embed="rId2"/>
+                <a:stretch>
+                  <a:fillRect l="-1133" t="-2326"/>
+                </a:stretch>
+              </a:blipFill>
+            </p:spPr>
+            <p:txBody>
+              <a:bodyPr/>
+              <a:lstStyle/>
+              <a:p>
+                <a:r>
+                  <a:rPr lang="de-DE">
+                    <a:noFill/>
+                  </a:rPr>
+                  <a:t> </a:t>
+                </a:r>
+              </a:p>
+            </p:txBody>
+          </p:sp>
+        </mc:Fallback>
+      </mc:AlternateContent>
+      <p:sp>
+        <p:nvSpPr>
+          <p:cNvPr id="4" name="Foliennummernplatzhalter 3">
+            <a:extLst>
+              <a:ext uri="{FF2B5EF4-FFF2-40B4-BE49-F238E27FC236}">
+                <a16:creationId xmlns:a16="http://schemas.microsoft.com/office/drawing/2014/main" id="{3DBD76F8-465D-6764-8497-69FA3AC96096}"/>
+              </a:ext>
+            </a:extLst>
+          </p:cNvPr>
+          <p:cNvSpPr>
+            <a:spLocks noGrp="1"/>
+          </p:cNvSpPr>
+          <p:nvPr>
+            <p:ph type="sldNum" sz="quarter" idx="12"/>
+          </p:nvPr>
+        </p:nvSpPr>
+        <p:spPr/>
+        <p:txBody>
+          <a:bodyPr/>
+          <a:lstStyle/>
+          <a:p>
+            <a:fld id="{08C366F5-AFAD-49CB-854A-9D9E238FCA13}" type="slidenum">
+              <a:rPr lang="en-GB" smtClean="0"/>
+              <a:t>30</a:t>
+            </a:fld>
+            <a:endParaRPr lang="en-GB"/>
+          </a:p>
+        </p:txBody>
+      </p:sp>
+    </p:spTree>
+    <p:extLst>
+      <p:ext uri="{BB962C8B-B14F-4D97-AF65-F5344CB8AC3E}">
+        <p14:creationId xmlns:p14="http://schemas.microsoft.com/office/powerpoint/2010/main" val="3937797292"/>
+      </p:ext>
+    </p:extLst>
+  </p:cSld>
+  <p:clrMapOvr>
+    <a:masterClrMapping/>
+  </p:clrMapOvr>
+</p:sld>
+</file>
+
+<file path=ppt/slides/slide31.xml><?xml version="1.0" encoding="utf-8"?>
+<p:sld xmlns:a="http://schemas.openxmlformats.org/drawingml/2006/main" xmlns:r="http://schemas.openxmlformats.org/officeDocument/2006/relationships" xmlns:p="http://schemas.openxmlformats.org/presentationml/2006/main">
+  <p:cSld>
+    <p:spTree>
+      <p:nvGrpSpPr>
+        <p:cNvPr id="1" name="">
+          <a:extLst>
+            <a:ext uri="{FF2B5EF4-FFF2-40B4-BE49-F238E27FC236}">
+              <a16:creationId xmlns:a16="http://schemas.microsoft.com/office/drawing/2014/main" id="{B2398005-5C48-E765-4EE6-DE15615356DF}"/>
+            </a:ext>
+          </a:extLst>
+        </p:cNvPr>
+        <p:cNvGrpSpPr/>
+        <p:nvPr/>
+      </p:nvGrpSpPr>
+      <p:grpSpPr>
+        <a:xfrm>
+          <a:off x="0" y="0"/>
+          <a:ext cx="0" cy="0"/>
+          <a:chOff x="0" y="0"/>
+          <a:chExt cx="0" cy="0"/>
+        </a:xfrm>
+      </p:grpSpPr>
+      <p:sp>
+        <p:nvSpPr>
+          <p:cNvPr id="2" name="Titel 1">
+            <a:extLst>
+              <a:ext uri="{FF2B5EF4-FFF2-40B4-BE49-F238E27FC236}">
+                <a16:creationId xmlns:a16="http://schemas.microsoft.com/office/drawing/2014/main" id="{7CD9EDFF-FE54-079A-CD99-7D2B04B66933}"/>
+              </a:ext>
+            </a:extLst>
+          </p:cNvPr>
+          <p:cNvSpPr>
+            <a:spLocks noGrp="1"/>
+          </p:cNvSpPr>
+          <p:nvPr>
+            <p:ph type="title"/>
+          </p:nvPr>
+        </p:nvSpPr>
+        <p:spPr/>
+        <p:txBody>
+          <a:bodyPr/>
+          <a:lstStyle/>
+          <a:p>
+            <a:r>
+              <a:rPr lang="de-DE" dirty="0" err="1"/>
+              <a:t>Exercise</a:t>
+            </a:r>
+            <a:r>
+              <a:rPr lang="de-DE" dirty="0"/>
+              <a:t> 7</a:t>
+            </a:r>
+          </a:p>
+        </p:txBody>
+      </p:sp>
+      <mc:AlternateContent xmlns:mc="http://schemas.openxmlformats.org/markup-compatibility/2006">
+        <mc:Choice xmlns:a14="http://schemas.microsoft.com/office/drawing/2010/main" Requires="a14">
+          <p:sp>
+            <p:nvSpPr>
+              <p:cNvPr id="3" name="Inhaltsplatzhalter 2">
+                <a:extLst>
+                  <a:ext uri="{FF2B5EF4-FFF2-40B4-BE49-F238E27FC236}">
+                    <a16:creationId xmlns:a16="http://schemas.microsoft.com/office/drawing/2014/main" id="{207496F6-12CD-AB21-93E7-4D7C3DBA56F4}"/>
+                  </a:ext>
+                </a:extLst>
+              </p:cNvPr>
+              <p:cNvSpPr>
+                <a:spLocks noGrp="1"/>
+              </p:cNvSpPr>
+              <p:nvPr>
+                <p:ph idx="1"/>
+              </p:nvPr>
+            </p:nvSpPr>
+            <p:spPr>
+              <a:xfrm>
+                <a:off x="838200" y="1825625"/>
+                <a:ext cx="11209774" cy="4351338"/>
+              </a:xfrm>
+            </p:spPr>
+            <p:txBody>
+              <a:bodyPr>
+                <a:normAutofit/>
+              </a:bodyPr>
+              <a:lstStyle/>
+              <a:p>
+                <a:pPr marL="0" indent="0">
+                  <a:buNone/>
+                </a:pPr>
+                <a:r>
+                  <a:rPr lang="de-DE" dirty="0"/>
+                  <a:t>You </a:t>
+                </a:r>
+                <a:r>
+                  <a:rPr lang="de-DE" dirty="0" err="1"/>
+                  <a:t>are</a:t>
+                </a:r>
+                <a:r>
+                  <a:rPr lang="de-DE" dirty="0"/>
+                  <a:t> </a:t>
+                </a:r>
+                <a:r>
+                  <a:rPr lang="de-DE" dirty="0" err="1"/>
+                  <a:t>given</a:t>
+                </a:r>
+                <a:r>
+                  <a:rPr lang="de-DE" dirty="0"/>
+                  <a:t>:</a:t>
+                </a:r>
+              </a:p>
+              <a:p>
+                <a:r>
+                  <a:rPr lang="de-DE" dirty="0"/>
+                  <a:t>Gain </a:t>
+                </a:r>
+                <a:r>
+                  <a:rPr lang="de-DE" dirty="0" err="1"/>
+                  <a:t>crossover</a:t>
+                </a:r>
+                <a:r>
+                  <a:rPr lang="de-DE" dirty="0"/>
+                  <a:t> </a:t>
+                </a:r>
+                <a:r>
+                  <a:rPr lang="de-DE" dirty="0" err="1"/>
+                  <a:t>frequency</a:t>
+                </a:r>
+                <a:r>
+                  <a:rPr lang="de-DE" dirty="0"/>
+                  <a:t>: </a:t>
+                </a:r>
+                <a14:m>
+                  <m:oMath xmlns:m="http://schemas.openxmlformats.org/officeDocument/2006/math">
+                    <m:sSub>
+                      <m:sSubPr>
+                        <m:ctrlPr>
+                          <a:rPr lang="de-DE" i="1">
+                            <a:latin typeface="Cambria Math" panose="02040503050406030204" pitchFamily="18" charset="0"/>
+                            <a:ea typeface="Cambria Math" panose="02040503050406030204" pitchFamily="18" charset="0"/>
+                          </a:rPr>
+                        </m:ctrlPr>
+                      </m:sSubPr>
+                      <m:e>
+                        <m:r>
+                          <a:rPr lang="de-DE" i="1">
+                            <a:latin typeface="Cambria Math" panose="02040503050406030204" pitchFamily="18" charset="0"/>
+                            <a:ea typeface="Cambria Math" panose="02040503050406030204" pitchFamily="18" charset="0"/>
+                          </a:rPr>
+                          <m:t>𝜔</m:t>
+                        </m:r>
+                      </m:e>
+                      <m:sub>
+                        <m:r>
+                          <a:rPr lang="de-DE" i="1">
+                            <a:latin typeface="Cambria Math" panose="02040503050406030204" pitchFamily="18" charset="0"/>
+                            <a:ea typeface="Cambria Math" panose="02040503050406030204" pitchFamily="18" charset="0"/>
+                          </a:rPr>
+                          <m:t>𝑔𝑐</m:t>
+                        </m:r>
+                      </m:sub>
+                    </m:sSub>
+                    <m:r>
+                      <a:rPr lang="de-DE" b="0" i="1" smtClean="0">
+                        <a:latin typeface="Cambria Math" panose="02040503050406030204" pitchFamily="18" charset="0"/>
+                        <a:ea typeface="Cambria Math" panose="02040503050406030204" pitchFamily="18" charset="0"/>
+                      </a:rPr>
+                      <m:t>=5</m:t>
+                    </m:r>
+                    <m:f>
+                      <m:fPr>
+                        <m:type m:val="lin"/>
+                        <m:ctrlPr>
+                          <a:rPr lang="de-DE" b="0" i="1" smtClean="0">
+                            <a:latin typeface="Cambria Math" panose="02040503050406030204" pitchFamily="18" charset="0"/>
+                            <a:ea typeface="Cambria Math" panose="02040503050406030204" pitchFamily="18" charset="0"/>
+                          </a:rPr>
+                        </m:ctrlPr>
+                      </m:fPr>
+                      <m:num>
+                        <m:r>
+                          <m:rPr>
+                            <m:sty m:val="p"/>
+                          </m:rPr>
+                          <a:rPr lang="de-DE" b="0" i="0" smtClean="0">
+                            <a:latin typeface="Cambria Math" panose="02040503050406030204" pitchFamily="18" charset="0"/>
+                            <a:ea typeface="Cambria Math" panose="02040503050406030204" pitchFamily="18" charset="0"/>
+                          </a:rPr>
+                          <m:t>rad</m:t>
+                        </m:r>
+                      </m:num>
+                      <m:den>
+                        <m:r>
+                          <m:rPr>
+                            <m:sty m:val="p"/>
+                          </m:rPr>
+                          <a:rPr lang="de-DE" b="0" i="0" smtClean="0">
+                            <a:latin typeface="Cambria Math" panose="02040503050406030204" pitchFamily="18" charset="0"/>
+                            <a:ea typeface="Cambria Math" panose="02040503050406030204" pitchFamily="18" charset="0"/>
+                          </a:rPr>
+                          <m:t>s</m:t>
+                        </m:r>
+                      </m:den>
+                    </m:f>
+                  </m:oMath>
+                </a14:m>
+                <a:endParaRPr lang="de-DE" dirty="0"/>
+              </a:p>
+              <a:p>
+                <a:r>
+                  <a:rPr lang="de-DE" dirty="0"/>
+                  <a:t>Phase at </a:t>
+                </a:r>
+                <a:r>
+                  <a:rPr lang="de-DE" dirty="0" err="1"/>
+                  <a:t>crossover</a:t>
+                </a:r>
+                <a:r>
+                  <a:rPr lang="de-DE" dirty="0"/>
+                  <a:t>: </a:t>
+                </a:r>
+                <a14:m>
+                  <m:oMath xmlns:m="http://schemas.openxmlformats.org/officeDocument/2006/math">
+                    <m:r>
+                      <a:rPr lang="de-DE" b="0" i="1" smtClean="0">
+                        <a:latin typeface="Cambria Math" panose="02040503050406030204" pitchFamily="18" charset="0"/>
+                      </a:rPr>
+                      <m:t>−150</m:t>
+                    </m:r>
+                    <m:r>
+                      <a:rPr lang="de-DE" b="0" i="1" smtClean="0">
+                        <a:latin typeface="Cambria Math" panose="02040503050406030204" pitchFamily="18" charset="0"/>
+                        <a:ea typeface="Cambria Math" panose="02040503050406030204" pitchFamily="18" charset="0"/>
+                      </a:rPr>
+                      <m:t>°</m:t>
+                    </m:r>
+                  </m:oMath>
+                </a14:m>
+                <a:endParaRPr lang="de-DE" dirty="0"/>
+              </a:p>
+              <a:p>
+                <a:pPr marL="0" indent="0">
+                  <a:buNone/>
+                </a:pPr>
+                <a:endParaRPr lang="de-DE" b="1" dirty="0"/>
+              </a:p>
+              <a:p>
+                <a:r>
+                  <a:rPr lang="de-DE" dirty="0" err="1"/>
+                  <a:t>Compute</a:t>
+                </a:r>
+                <a:r>
+                  <a:rPr lang="de-DE" dirty="0"/>
+                  <a:t> </a:t>
+                </a:r>
+                <a:r>
+                  <a:rPr lang="de-DE" dirty="0" err="1"/>
+                  <a:t>the</a:t>
+                </a:r>
+                <a:r>
+                  <a:rPr lang="de-DE" dirty="0"/>
+                  <a:t> </a:t>
+                </a:r>
+                <a:r>
+                  <a:rPr lang="de-DE" dirty="0" err="1"/>
+                  <a:t>phase</a:t>
+                </a:r>
+                <a:r>
+                  <a:rPr lang="de-DE" dirty="0"/>
+                  <a:t> </a:t>
+                </a:r>
+                <a:r>
+                  <a:rPr lang="de-DE" dirty="0" err="1"/>
+                  <a:t>margin</a:t>
+                </a:r>
+                <a:r>
+                  <a:rPr lang="de-DE" dirty="0"/>
+                  <a:t>.</a:t>
+                </a:r>
+              </a:p>
+              <a:p>
+                <a:r>
+                  <a:rPr lang="de-DE" dirty="0" err="1"/>
+                  <a:t>Determine</a:t>
+                </a:r>
+                <a:r>
+                  <a:rPr lang="de-DE" dirty="0"/>
+                  <a:t> </a:t>
+                </a:r>
+                <a:r>
+                  <a:rPr lang="de-DE" dirty="0" err="1"/>
+                  <a:t>stability</a:t>
+                </a:r>
+                <a:r>
+                  <a:rPr lang="de-DE" dirty="0"/>
+                  <a:t>.</a:t>
+                </a:r>
+              </a:p>
+            </p:txBody>
+          </p:sp>
+        </mc:Choice>
+        <mc:Fallback>
+          <p:sp>
+            <p:nvSpPr>
+              <p:cNvPr id="3" name="Inhaltsplatzhalter 2">
+                <a:extLst>
+                  <a:ext uri="{FF2B5EF4-FFF2-40B4-BE49-F238E27FC236}">
+                    <a16:creationId xmlns:a16="http://schemas.microsoft.com/office/drawing/2014/main" id="{207496F6-12CD-AB21-93E7-4D7C3DBA56F4}"/>
+                  </a:ext>
+                </a:extLst>
+              </p:cNvPr>
+              <p:cNvSpPr>
+                <a:spLocks noGrp="1" noRot="1" noChangeAspect="1" noMove="1" noResize="1" noEditPoints="1" noAdjustHandles="1" noChangeArrowheads="1" noChangeShapeType="1" noTextEdit="1"/>
+              </p:cNvSpPr>
+              <p:nvPr>
+                <p:ph idx="1"/>
+              </p:nvPr>
+            </p:nvSpPr>
+            <p:spPr>
+              <a:xfrm>
+                <a:off x="838200" y="1825625"/>
+                <a:ext cx="11209774" cy="4351338"/>
+              </a:xfrm>
+              <a:blipFill>
+                <a:blip r:embed="rId2"/>
+                <a:stretch>
+                  <a:fillRect l="-1133" t="-4360"/>
+                </a:stretch>
+              </a:blipFill>
+            </p:spPr>
+            <p:txBody>
+              <a:bodyPr/>
+              <a:lstStyle/>
+              <a:p>
+                <a:r>
+                  <a:rPr lang="de-DE">
+                    <a:noFill/>
+                  </a:rPr>
+                  <a:t> </a:t>
+                </a:r>
+              </a:p>
+            </p:txBody>
+          </p:sp>
+        </mc:Fallback>
+      </mc:AlternateContent>
+      <p:sp>
+        <p:nvSpPr>
+          <p:cNvPr id="4" name="Foliennummernplatzhalter 3">
+            <a:extLst>
+              <a:ext uri="{FF2B5EF4-FFF2-40B4-BE49-F238E27FC236}">
+                <a16:creationId xmlns:a16="http://schemas.microsoft.com/office/drawing/2014/main" id="{3F8A0A15-A4B4-69CE-DF4C-7468541C0BCA}"/>
+              </a:ext>
+            </a:extLst>
+          </p:cNvPr>
+          <p:cNvSpPr>
+            <a:spLocks noGrp="1"/>
+          </p:cNvSpPr>
+          <p:nvPr>
+            <p:ph type="sldNum" sz="quarter" idx="12"/>
+          </p:nvPr>
+        </p:nvSpPr>
+        <p:spPr/>
+        <p:txBody>
+          <a:bodyPr/>
+          <a:lstStyle/>
+          <a:p>
+            <a:fld id="{08C366F5-AFAD-49CB-854A-9D9E238FCA13}" type="slidenum">
+              <a:rPr lang="en-GB" smtClean="0"/>
+              <a:t>31</a:t>
+            </a:fld>
+            <a:endParaRPr lang="en-GB"/>
+          </a:p>
+        </p:txBody>
+      </p:sp>
+    </p:spTree>
+    <p:extLst>
+      <p:ext uri="{BB962C8B-B14F-4D97-AF65-F5344CB8AC3E}">
+        <p14:creationId xmlns:p14="http://schemas.microsoft.com/office/powerpoint/2010/main" val="1577610752"/>
       </p:ext>
     </p:extLst>
   </p:cSld>
@@ -18066,8 +21680,8 @@
           </a:p>
         </p:txBody>
       </p:sp>
-      <mc:AlternateContent xmlns:mc="http://schemas.openxmlformats.org/markup-compatibility/2006">
-        <mc:Choice xmlns:a14="http://schemas.microsoft.com/office/drawing/2010/main" Requires="a14">
+      <mc:AlternateContent xmlns:mc="http://schemas.openxmlformats.org/markup-compatibility/2006" xmlns:a14="http://schemas.microsoft.com/office/drawing/2010/main">
+        <mc:Choice Requires="a14">
           <p:sp>
             <p:nvSpPr>
               <p:cNvPr id="5" name="Textfeld 4">
@@ -18150,7 +21764,6 @@
                 </a:r>
               </a:p>
               <a:p>
-                <a:pPr/>
                 <a:r>
                   <a:rPr lang="de-DE" b="0" dirty="0"/>
                   <a:t>	</a:t>
@@ -18324,7 +21937,6 @@
                 <a:endParaRPr lang="de-DE" b="0" dirty="0"/>
               </a:p>
               <a:p>
-                <a:pPr/>
                 <a:r>
                   <a:rPr lang="de-DE" dirty="0"/>
                   <a:t>inverse Laplace </a:t>
@@ -18408,7 +22020,6 @@
                 </a:r>
               </a:p>
               <a:p>
-                <a:pPr/>
                 <a:r>
                   <a:rPr lang="de-DE" dirty="0"/>
                   <a:t>	</a:t>
@@ -18498,11 +22109,9 @@
                 <a:endParaRPr lang="de-DE" dirty="0"/>
               </a:p>
               <a:p>
-                <a:pPr/>
                 <a:endParaRPr lang="de-DE" dirty="0"/>
               </a:p>
               <a:p>
-                <a:pPr/>
                 <a:r>
                   <a:rPr lang="de-DE" dirty="0" err="1"/>
                   <a:t>zero</a:t>
@@ -18627,7 +22236,7 @@
             </p:txBody>
           </p:sp>
         </mc:Choice>
-        <mc:Fallback>
+        <mc:Fallback xmlns="">
           <p:sp>
             <p:nvSpPr>
               <p:cNvPr id="5" name="Textfeld 4">
@@ -18677,8 +22286,8 @@
           </p:sp>
         </mc:Fallback>
       </mc:AlternateContent>
-      <mc:AlternateContent xmlns:mc="http://schemas.openxmlformats.org/markup-compatibility/2006">
-        <mc:Choice xmlns:a14="http://schemas.microsoft.com/office/drawing/2010/main" Requires="a14">
+      <mc:AlternateContent xmlns:mc="http://schemas.openxmlformats.org/markup-compatibility/2006" xmlns:a14="http://schemas.microsoft.com/office/drawing/2010/main">
+        <mc:Choice Requires="a14">
           <p:sp>
             <p:nvSpPr>
               <p:cNvPr id="7" name="Textfeld 6">
@@ -18712,7 +22321,6 @@
               </a:bodyPr>
               <a:lstStyle/>
               <a:p>
-                <a:pPr/>
                 <a14:m>
                   <m:oMath xmlns:m="http://schemas.openxmlformats.org/officeDocument/2006/math">
                     <m:d>
@@ -18942,7 +22550,6 @@
                 <a:endParaRPr lang="de-DE" dirty="0"/>
               </a:p>
               <a:p>
-                <a:pPr/>
                 <a14:m>
                   <m:oMath xmlns:m="http://schemas.openxmlformats.org/officeDocument/2006/math">
                     <m:r>
@@ -19013,7 +22620,7 @@
             </p:txBody>
           </p:sp>
         </mc:Choice>
-        <mc:Fallback>
+        <mc:Fallback xmlns="">
           <p:sp>
             <p:nvSpPr>
               <p:cNvPr id="7" name="Textfeld 6">
